--- a/docs/documentation-application.pptx
+++ b/docs/documentation-application.pptx
@@ -44,9 +44,12 @@
     <p:sldId id="292" r:id="rId38"/>
     <p:sldId id="293" r:id="rId39"/>
     <p:sldId id="294" r:id="rId40"/>
+    <p:sldId id="295" r:id="rId41"/>
+    <p:sldId id="296" r:id="rId42"/>
+    <p:sldId id="297" r:id="rId43"/>
   </p:sldIdLst>
   <p:notesMasterIdLst>
-    <p:notesMasterId r:id="rId41"/>
+    <p:notesMasterId r:id="rId44"/>
   </p:notesMasterIdLst>
   <p:sldSz cx="12192000" cy="6858000"/>
   <p:notesSz cx="6858000" cy="12192000"/>
@@ -3468,6 +3471,270 @@
             <a:fld id="{F7021451-1387-4CA6-816F-3879F97B5CBC}" type="slidenum">
               <a:rPr lang="en-US"/>
               <a:t>4</a:t>
+            </a:fld>
+            <a:endParaRPr lang="en-US"/>
+          </a:p>
+        </p:txBody>
+      </p:sp>
+    </p:spTree>
+    <p:extLst>
+      <p:ext uri="{BB962C8B-B14F-4D97-AF65-F5344CB8AC3E}">
+        <p14:creationId xmlns:p14="http://schemas.microsoft.com/office/powerpoint/2010/main" val="1024086991"/>
+      </p:ext>
+    </p:extLst>
+  </p:cSld>
+  <p:clrMapOvr>
+    <a:masterClrMapping/>
+  </p:clrMapOvr>
+</p:notes>
+</file>
+
+<file path=ppt/notesSlides/notesSlide40.xml><?xml version="1.0" encoding="utf-8"?>
+<p:notes xmlns:a="http://schemas.openxmlformats.org/drawingml/2006/main" xmlns:r="http://schemas.openxmlformats.org/officeDocument/2006/relationships" xmlns:p="http://schemas.openxmlformats.org/presentationml/2006/main">
+  <p:cSld>
+    <p:spTree>
+      <p:nvGrpSpPr>
+        <p:cNvPr id="1" name=""/>
+        <p:cNvGrpSpPr/>
+        <p:nvPr/>
+      </p:nvGrpSpPr>
+      <p:grpSpPr>
+        <a:xfrm>
+          <a:off x="0" y="0"/>
+          <a:ext cx="0" cy="0"/>
+          <a:chOff x="0" y="0"/>
+          <a:chExt cx="0" cy="0"/>
+        </a:xfrm>
+      </p:grpSpPr>
+      <p:sp>
+        <p:nvSpPr>
+          <p:cNvPr id="2" name="Slide Image Placeholder 1"/>
+          <p:cNvSpPr>
+            <a:spLocks noGrp="1" noRot="1" noChangeAspect="1"/>
+          </p:cNvSpPr>
+          <p:nvPr>
+            <p:ph type="sldImg"/>
+          </p:nvPr>
+        </p:nvSpPr>
+        <p:spPr/>
+      </p:sp>
+      <p:sp>
+        <p:nvSpPr>
+          <p:cNvPr id="3" name="Notes Placeholder 2"/>
+          <p:cNvSpPr>
+            <a:spLocks noGrp="1"/>
+          </p:cNvSpPr>
+          <p:nvPr>
+            <p:ph type="body" idx="1"/>
+          </p:nvPr>
+        </p:nvSpPr>
+        <p:spPr/>
+        <p:txBody>
+          <a:bodyPr/>
+          <a:lstStyle/>
+          <a:p>
+            <a:r>
+              <a:rPr lang="en-US" dirty="0"/>
+              <a:t/>
+            </a:r>
+            <a:endParaRPr lang="en-US" dirty="0"/>
+          </a:p>
+        </p:txBody>
+      </p:sp>
+      <p:sp>
+        <p:nvSpPr>
+          <p:cNvPr id="4" name="Slide Number Placeholder 3"/>
+          <p:cNvSpPr>
+            <a:spLocks noGrp="1"/>
+          </p:cNvSpPr>
+          <p:nvPr>
+            <p:ph type="sldNum" sz="quarter" idx="10"/>
+          </p:nvPr>
+        </p:nvSpPr>
+        <p:spPr/>
+        <p:txBody>
+          <a:bodyPr/>
+          <a:lstStyle/>
+          <a:p>
+            <a:fld id="{F7021451-1387-4CA6-816F-3879F97B5CBC}" type="slidenum">
+              <a:rPr lang="en-US"/>
+              <a:t>40</a:t>
+            </a:fld>
+            <a:endParaRPr lang="en-US"/>
+          </a:p>
+        </p:txBody>
+      </p:sp>
+    </p:spTree>
+    <p:extLst>
+      <p:ext uri="{BB962C8B-B14F-4D97-AF65-F5344CB8AC3E}">
+        <p14:creationId xmlns:p14="http://schemas.microsoft.com/office/powerpoint/2010/main" val="1024086991"/>
+      </p:ext>
+    </p:extLst>
+  </p:cSld>
+  <p:clrMapOvr>
+    <a:masterClrMapping/>
+  </p:clrMapOvr>
+</p:notes>
+</file>
+
+<file path=ppt/notesSlides/notesSlide41.xml><?xml version="1.0" encoding="utf-8"?>
+<p:notes xmlns:a="http://schemas.openxmlformats.org/drawingml/2006/main" xmlns:r="http://schemas.openxmlformats.org/officeDocument/2006/relationships" xmlns:p="http://schemas.openxmlformats.org/presentationml/2006/main">
+  <p:cSld>
+    <p:spTree>
+      <p:nvGrpSpPr>
+        <p:cNvPr id="1" name=""/>
+        <p:cNvGrpSpPr/>
+        <p:nvPr/>
+      </p:nvGrpSpPr>
+      <p:grpSpPr>
+        <a:xfrm>
+          <a:off x="0" y="0"/>
+          <a:ext cx="0" cy="0"/>
+          <a:chOff x="0" y="0"/>
+          <a:chExt cx="0" cy="0"/>
+        </a:xfrm>
+      </p:grpSpPr>
+      <p:sp>
+        <p:nvSpPr>
+          <p:cNvPr id="2" name="Slide Image Placeholder 1"/>
+          <p:cNvSpPr>
+            <a:spLocks noGrp="1" noRot="1" noChangeAspect="1"/>
+          </p:cNvSpPr>
+          <p:nvPr>
+            <p:ph type="sldImg"/>
+          </p:nvPr>
+        </p:nvSpPr>
+        <p:spPr/>
+      </p:sp>
+      <p:sp>
+        <p:nvSpPr>
+          <p:cNvPr id="3" name="Notes Placeholder 2"/>
+          <p:cNvSpPr>
+            <a:spLocks noGrp="1"/>
+          </p:cNvSpPr>
+          <p:nvPr>
+            <p:ph type="body" idx="1"/>
+          </p:nvPr>
+        </p:nvSpPr>
+        <p:spPr/>
+        <p:txBody>
+          <a:bodyPr/>
+          <a:lstStyle/>
+          <a:p>
+            <a:r>
+              <a:rPr lang="en-US" dirty="0"/>
+              <a:t/>
+            </a:r>
+            <a:endParaRPr lang="en-US" dirty="0"/>
+          </a:p>
+        </p:txBody>
+      </p:sp>
+      <p:sp>
+        <p:nvSpPr>
+          <p:cNvPr id="4" name="Slide Number Placeholder 3"/>
+          <p:cNvSpPr>
+            <a:spLocks noGrp="1"/>
+          </p:cNvSpPr>
+          <p:nvPr>
+            <p:ph type="sldNum" sz="quarter" idx="10"/>
+          </p:nvPr>
+        </p:nvSpPr>
+        <p:spPr/>
+        <p:txBody>
+          <a:bodyPr/>
+          <a:lstStyle/>
+          <a:p>
+            <a:fld id="{F7021451-1387-4CA6-816F-3879F97B5CBC}" type="slidenum">
+              <a:rPr lang="en-US"/>
+              <a:t>41</a:t>
+            </a:fld>
+            <a:endParaRPr lang="en-US"/>
+          </a:p>
+        </p:txBody>
+      </p:sp>
+    </p:spTree>
+    <p:extLst>
+      <p:ext uri="{BB962C8B-B14F-4D97-AF65-F5344CB8AC3E}">
+        <p14:creationId xmlns:p14="http://schemas.microsoft.com/office/powerpoint/2010/main" val="1024086991"/>
+      </p:ext>
+    </p:extLst>
+  </p:cSld>
+  <p:clrMapOvr>
+    <a:masterClrMapping/>
+  </p:clrMapOvr>
+</p:notes>
+</file>
+
+<file path=ppt/notesSlides/notesSlide42.xml><?xml version="1.0" encoding="utf-8"?>
+<p:notes xmlns:a="http://schemas.openxmlformats.org/drawingml/2006/main" xmlns:r="http://schemas.openxmlformats.org/officeDocument/2006/relationships" xmlns:p="http://schemas.openxmlformats.org/presentationml/2006/main">
+  <p:cSld>
+    <p:spTree>
+      <p:nvGrpSpPr>
+        <p:cNvPr id="1" name=""/>
+        <p:cNvGrpSpPr/>
+        <p:nvPr/>
+      </p:nvGrpSpPr>
+      <p:grpSpPr>
+        <a:xfrm>
+          <a:off x="0" y="0"/>
+          <a:ext cx="0" cy="0"/>
+          <a:chOff x="0" y="0"/>
+          <a:chExt cx="0" cy="0"/>
+        </a:xfrm>
+      </p:grpSpPr>
+      <p:sp>
+        <p:nvSpPr>
+          <p:cNvPr id="2" name="Slide Image Placeholder 1"/>
+          <p:cNvSpPr>
+            <a:spLocks noGrp="1" noRot="1" noChangeAspect="1"/>
+          </p:cNvSpPr>
+          <p:nvPr>
+            <p:ph type="sldImg"/>
+          </p:nvPr>
+        </p:nvSpPr>
+        <p:spPr/>
+      </p:sp>
+      <p:sp>
+        <p:nvSpPr>
+          <p:cNvPr id="3" name="Notes Placeholder 2"/>
+          <p:cNvSpPr>
+            <a:spLocks noGrp="1"/>
+          </p:cNvSpPr>
+          <p:nvPr>
+            <p:ph type="body" idx="1"/>
+          </p:nvPr>
+        </p:nvSpPr>
+        <p:spPr/>
+        <p:txBody>
+          <a:bodyPr/>
+          <a:lstStyle/>
+          <a:p>
+            <a:r>
+              <a:rPr lang="en-US" dirty="0"/>
+              <a:t/>
+            </a:r>
+            <a:endParaRPr lang="en-US" dirty="0"/>
+          </a:p>
+        </p:txBody>
+      </p:sp>
+      <p:sp>
+        <p:nvSpPr>
+          <p:cNvPr id="4" name="Slide Number Placeholder 3"/>
+          <p:cNvSpPr>
+            <a:spLocks noGrp="1"/>
+          </p:cNvSpPr>
+          <p:nvPr>
+            <p:ph type="sldNum" sz="quarter" idx="10"/>
+          </p:nvPr>
+        </p:nvSpPr>
+        <p:spPr/>
+        <p:txBody>
+          <a:bodyPr/>
+          <a:lstStyle/>
+          <a:p>
+            <a:fld id="{F7021451-1387-4CA6-816F-3879F97B5CBC}" type="slidenum">
+              <a:rPr lang="en-US"/>
+              <a:t>42</a:t>
             </a:fld>
             <a:endParaRPr lang="en-US"/>
           </a:p>
@@ -15515,7 +15782,7 @@
                 <a:ea typeface="Calibri" pitchFamily="34" charset="-122"/>
                 <a:cs typeface="Calibri" pitchFamily="34" charset="-120"/>
               </a:rPr>
-              <a:t>BILAN</a:t>
+              <a:t>PARTIE 7</a:t>
             </a:r>
             <a:endParaRPr lang="en-US" sz="1200" dirty="0"/>
           </a:p>
@@ -15554,7 +15821,7 @@
                 <a:ea typeface="Cambria" pitchFamily="34" charset="-122"/>
                 <a:cs typeface="Cambria" pitchFamily="34" charset="-120"/>
               </a:rPr>
-              <a:t>Tableau récapitulatif</a:t>
+              <a:t>Infrastructure — conteneurs Docker</a:t>
             </a:r>
             <a:endParaRPr lang="en-US" sz="3800" dirty="0"/>
           </a:p>
@@ -15678,7 +15945,7 @@
         </p:nvSpPr>
         <p:spPr>
           <a:xfrm>
-            <a:off x="548640" y="411480"/>
+            <a:off x="548640" y="457200"/>
             <a:ext cx="502920" cy="502920"/>
           </a:xfrm>
           <a:prstGeom prst="ellipse">
@@ -15706,7 +15973,7 @@
         </p:blipFill>
         <p:spPr>
           <a:xfrm>
-            <a:off x="608990" y="471830"/>
+            <a:off x="608990" y="517550"/>
             <a:ext cx="382219" cy="382219"/>
           </a:xfrm>
           <a:prstGeom prst="rect">
@@ -15722,8 +15989,8 @@
         </p:nvSpPr>
         <p:spPr>
           <a:xfrm>
-            <a:off x="1170432" y="365760"/>
-            <a:ext cx="8229600" cy="502920"/>
+            <a:off x="1170432" y="420624"/>
+            <a:ext cx="9418320" cy="548640"/>
           </a:xfrm>
           <a:prstGeom prst="rect">
             <a:avLst/>
@@ -15747,7 +16014,7 @@
                 <a:ea typeface="Cambria" pitchFamily="34" charset="-122"/>
                 <a:cs typeface="Cambria" pitchFamily="34" charset="-120"/>
               </a:rPr>
-              <a:t>Tableau récapitulatif</a:t>
+              <a:t>Infrastructure — conteneurs Docker</a:t>
             </a:r>
             <a:endParaRPr lang="en-US" sz="2600" dirty="0"/>
           </a:p>
@@ -15761,7 +16028,7 @@
         </p:nvSpPr>
         <p:spPr>
           <a:xfrm>
-            <a:off x="10607040" y="438912"/>
+            <a:off x="10607040" y="502920"/>
             <a:ext cx="1097280" cy="365760"/>
           </a:xfrm>
           <a:prstGeom prst="rect">
@@ -15786,6 +16053,3523 @@
                 <a:ea typeface="Calibri" pitchFamily="34" charset="-122"/>
                 <a:cs typeface="Calibri" pitchFamily="34" charset="-120"/>
               </a:rPr>
+              <a:t>1 / 2</a:t>
+            </a:r>
+            <a:endParaRPr lang="en-US" sz="1100" dirty="0"/>
+          </a:p>
+        </p:txBody>
+      </p:sp>
+      <p:sp>
+        <p:nvSpPr>
+          <p:cNvPr id="6" name="Shape 3"/>
+          <p:cNvSpPr/>
+          <p:nvPr/>
+        </p:nvSpPr>
+        <p:spPr>
+          <a:xfrm>
+            <a:off x="548640" y="1143000"/>
+            <a:ext cx="5394960" cy="1691640"/>
+          </a:xfrm>
+          <a:prstGeom prst="roundRect">
+            <a:avLst>
+              <a:gd name="adj" fmla="val 4324"/>
+            </a:avLst>
+          </a:prstGeom>
+          <a:solidFill>
+            <a:srgbClr val="F3E9DA"/>
+          </a:solidFill>
+          <a:ln/>
+        </p:spPr>
+      </p:sp>
+      <p:sp>
+        <p:nvSpPr>
+          <p:cNvPr id="7" name="Text 4"/>
+          <p:cNvSpPr txBox="1"/>
+          <p:nvPr/>
+        </p:nvSpPr>
+        <p:spPr>
+          <a:xfrm>
+            <a:off x="804672" y="1271016"/>
+            <a:ext cx="4937760" cy="292608"/>
+          </a:xfrm>
+          <a:prstGeom prst="rect">
+            <a:avLst/>
+          </a:prstGeom>
+          <a:noFill/>
+          <a:ln/>
+        </p:spPr>
+        <p:txBody>
+          <a:bodyPr wrap="square" lIns="0" tIns="0" rIns="0" bIns="0" rtlCol="0" anchor="ctr"/>
+          <a:lstStyle/>
+          <a:p>
+            <a:pPr indent="0" marL="0">
+              <a:buNone/>
+            </a:pPr>
+            <a:r>
+              <a:rPr lang="en-US" sz="1350" b="1" dirty="0">
+                <a:solidFill>
+                  <a:srgbClr val="B5813F"/>
+                </a:solidFill>
+                <a:latin typeface="Courier New" pitchFamily="34" charset="0"/>
+                <a:ea typeface="Courier New" pitchFamily="34" charset="-122"/>
+                <a:cs typeface="Courier New" pitchFamily="34" charset="-120"/>
+              </a:rPr>
+              <a:t>app</a:t>
+            </a:r>
+            <a:endParaRPr lang="en-US" sz="1350" dirty="0"/>
+          </a:p>
+        </p:txBody>
+      </p:sp>
+      <p:sp>
+        <p:nvSpPr>
+          <p:cNvPr id="8" name="Text 5"/>
+          <p:cNvSpPr txBox="1"/>
+          <p:nvPr/>
+        </p:nvSpPr>
+        <p:spPr>
+          <a:xfrm>
+            <a:off x="804672" y="1545336"/>
+            <a:ext cx="4937760" cy="237744"/>
+          </a:xfrm>
+          <a:prstGeom prst="rect">
+            <a:avLst/>
+          </a:prstGeom>
+          <a:noFill/>
+          <a:ln/>
+        </p:spPr>
+        <p:txBody>
+          <a:bodyPr wrap="square" lIns="0" tIns="0" rIns="0" bIns="0" rtlCol="0" anchor="ctr"/>
+          <a:lstStyle/>
+          <a:p>
+            <a:pPr indent="0" marL="0">
+              <a:buNone/>
+            </a:pPr>
+            <a:r>
+              <a:rPr lang="en-US" sz="850" dirty="0">
+                <a:solidFill>
+                  <a:srgbClr val="7C6552"/>
+                </a:solidFill>
+                <a:latin typeface="Courier New" pitchFamily="34" charset="0"/>
+                <a:ea typeface="Courier New" pitchFamily="34" charset="-122"/>
+                <a:cs typeface="Courier New" pitchFamily="34" charset="-120"/>
+              </a:rPr>
+              <a:t>ghcr.io/lloyd-koutele/madearchive-app</a:t>
+            </a:r>
+            <a:endParaRPr lang="en-US" sz="850" dirty="0"/>
+          </a:p>
+        </p:txBody>
+      </p:sp>
+      <p:sp>
+        <p:nvSpPr>
+          <p:cNvPr id="9" name="Text 6"/>
+          <p:cNvSpPr txBox="1"/>
+          <p:nvPr/>
+        </p:nvSpPr>
+        <p:spPr>
+          <a:xfrm>
+            <a:off x="804672" y="1819656"/>
+            <a:ext cx="4882896" cy="905256"/>
+          </a:xfrm>
+          <a:prstGeom prst="rect">
+            <a:avLst/>
+          </a:prstGeom>
+          <a:noFill/>
+          <a:ln/>
+        </p:spPr>
+        <p:txBody>
+          <a:bodyPr wrap="square" lIns="0" tIns="0" rIns="0" bIns="0" rtlCol="0" anchor="ctr"/>
+          <a:lstStyle/>
+          <a:p>
+            <a:pPr indent="0" marL="0">
+              <a:lnSpc>
+                <a:spcPct val="108000"/>
+              </a:lnSpc>
+              <a:spcAft>
+                <a:spcPts val="400"/>
+              </a:spcAft>
+              <a:buNone/>
+            </a:pPr>
+            <a:r>
+              <a:rPr lang="en-US" sz="970" dirty="0">
+                <a:solidFill>
+                  <a:srgbClr val="2C1A0E"/>
+                </a:solidFill>
+                <a:latin typeface="Calibri" pitchFamily="34" charset="0"/>
+                <a:ea typeface="Calibri" pitchFamily="34" charset="-122"/>
+                <a:cs typeface="Calibri" pitchFamily="34" charset="-120"/>
+              </a:rPr>
+              <a:t>Le backend Spring Boot — toute la logique métier de ce document. Seul conteneur autorisé à parler à tous les autres ; aucun port publié, joignable uniquement via Traefik.</a:t>
+            </a:r>
+            <a:endParaRPr lang="en-US" sz="970" dirty="0"/>
+          </a:p>
+        </p:txBody>
+      </p:sp>
+      <p:sp>
+        <p:nvSpPr>
+          <p:cNvPr id="10" name="Shape 7"/>
+          <p:cNvSpPr/>
+          <p:nvPr/>
+        </p:nvSpPr>
+        <p:spPr>
+          <a:xfrm>
+            <a:off x="6062472" y="1143000"/>
+            <a:ext cx="5394960" cy="1691640"/>
+          </a:xfrm>
+          <a:prstGeom prst="roundRect">
+            <a:avLst>
+              <a:gd name="adj" fmla="val 4324"/>
+            </a:avLst>
+          </a:prstGeom>
+          <a:solidFill>
+            <a:srgbClr val="F3E9DA"/>
+          </a:solidFill>
+          <a:ln/>
+        </p:spPr>
+      </p:sp>
+      <p:sp>
+        <p:nvSpPr>
+          <p:cNvPr id="11" name="Text 8"/>
+          <p:cNvSpPr txBox="1"/>
+          <p:nvPr/>
+        </p:nvSpPr>
+        <p:spPr>
+          <a:xfrm>
+            <a:off x="6318504" y="1271016"/>
+            <a:ext cx="4937760" cy="292608"/>
+          </a:xfrm>
+          <a:prstGeom prst="rect">
+            <a:avLst/>
+          </a:prstGeom>
+          <a:noFill/>
+          <a:ln/>
+        </p:spPr>
+        <p:txBody>
+          <a:bodyPr wrap="square" lIns="0" tIns="0" rIns="0" bIns="0" rtlCol="0" anchor="ctr"/>
+          <a:lstStyle/>
+          <a:p>
+            <a:pPr indent="0" marL="0">
+              <a:buNone/>
+            </a:pPr>
+            <a:r>
+              <a:rPr lang="en-US" sz="1350" b="1" dirty="0">
+                <a:solidFill>
+                  <a:srgbClr val="B5813F"/>
+                </a:solidFill>
+                <a:latin typeface="Courier New" pitchFamily="34" charset="0"/>
+                <a:ea typeface="Courier New" pitchFamily="34" charset="-122"/>
+                <a:cs typeface="Courier New" pitchFamily="34" charset="-120"/>
+              </a:rPr>
+              <a:t>frontend</a:t>
+            </a:r>
+            <a:endParaRPr lang="en-US" sz="1350" dirty="0"/>
+          </a:p>
+        </p:txBody>
+      </p:sp>
+      <p:sp>
+        <p:nvSpPr>
+          <p:cNvPr id="12" name="Text 9"/>
+          <p:cNvSpPr txBox="1"/>
+          <p:nvPr/>
+        </p:nvSpPr>
+        <p:spPr>
+          <a:xfrm>
+            <a:off x="6318504" y="1545336"/>
+            <a:ext cx="4937760" cy="237744"/>
+          </a:xfrm>
+          <a:prstGeom prst="rect">
+            <a:avLst/>
+          </a:prstGeom>
+          <a:noFill/>
+          <a:ln/>
+        </p:spPr>
+        <p:txBody>
+          <a:bodyPr wrap="square" lIns="0" tIns="0" rIns="0" bIns="0" rtlCol="0" anchor="ctr"/>
+          <a:lstStyle/>
+          <a:p>
+            <a:pPr indent="0" marL="0">
+              <a:buNone/>
+            </a:pPr>
+            <a:r>
+              <a:rPr lang="en-US" sz="850" dirty="0">
+                <a:solidFill>
+                  <a:srgbClr val="7C6552"/>
+                </a:solidFill>
+                <a:latin typeface="Courier New" pitchFamily="34" charset="0"/>
+                <a:ea typeface="Courier New" pitchFamily="34" charset="-122"/>
+                <a:cs typeface="Courier New" pitchFamily="34" charset="-120"/>
+              </a:rPr>
+              <a:t>ghcr.io/lloyd-koutele/madearchive-frontend</a:t>
+            </a:r>
+            <a:endParaRPr lang="en-US" sz="850" dirty="0"/>
+          </a:p>
+        </p:txBody>
+      </p:sp>
+      <p:sp>
+        <p:nvSpPr>
+          <p:cNvPr id="13" name="Text 10"/>
+          <p:cNvSpPr txBox="1"/>
+          <p:nvPr/>
+        </p:nvSpPr>
+        <p:spPr>
+          <a:xfrm>
+            <a:off x="6318504" y="1819656"/>
+            <a:ext cx="4882896" cy="905256"/>
+          </a:xfrm>
+          <a:prstGeom prst="rect">
+            <a:avLst/>
+          </a:prstGeom>
+          <a:noFill/>
+          <a:ln/>
+        </p:spPr>
+        <p:txBody>
+          <a:bodyPr wrap="square" lIns="0" tIns="0" rIns="0" bIns="0" rtlCol="0" anchor="ctr"/>
+          <a:lstStyle/>
+          <a:p>
+            <a:pPr indent="0" marL="0">
+              <a:lnSpc>
+                <a:spcPct val="108000"/>
+              </a:lnSpc>
+              <a:spcAft>
+                <a:spcPts val="400"/>
+              </a:spcAft>
+              <a:buNone/>
+            </a:pPr>
+            <a:r>
+              <a:rPr lang="en-US" sz="970" dirty="0">
+                <a:solidFill>
+                  <a:srgbClr val="2C1A0E"/>
+                </a:solidFill>
+                <a:latin typeface="Calibri" pitchFamily="34" charset="0"/>
+                <a:ea typeface="Calibri" pitchFamily="34" charset="-122"/>
+                <a:cs typeface="Calibri" pitchFamily="34" charset="-120"/>
+              </a:rPr>
+              <a:t>L'interface React, servie statiquement. Même durcissement que "app" : aucun accès direct, uniquement via Traefik.</a:t>
+            </a:r>
+            <a:endParaRPr lang="en-US" sz="970" dirty="0"/>
+          </a:p>
+        </p:txBody>
+      </p:sp>
+      <p:sp>
+        <p:nvSpPr>
+          <p:cNvPr id="14" name="Shape 11"/>
+          <p:cNvSpPr/>
+          <p:nvPr/>
+        </p:nvSpPr>
+        <p:spPr>
+          <a:xfrm>
+            <a:off x="548640" y="2999232"/>
+            <a:ext cx="5394960" cy="1691640"/>
+          </a:xfrm>
+          <a:prstGeom prst="roundRect">
+            <a:avLst>
+              <a:gd name="adj" fmla="val 4324"/>
+            </a:avLst>
+          </a:prstGeom>
+          <a:solidFill>
+            <a:srgbClr val="F3E9DA"/>
+          </a:solidFill>
+          <a:ln/>
+        </p:spPr>
+      </p:sp>
+      <p:sp>
+        <p:nvSpPr>
+          <p:cNvPr id="15" name="Text 12"/>
+          <p:cNvSpPr txBox="1"/>
+          <p:nvPr/>
+        </p:nvSpPr>
+        <p:spPr>
+          <a:xfrm>
+            <a:off x="804672" y="3127248"/>
+            <a:ext cx="4937760" cy="292608"/>
+          </a:xfrm>
+          <a:prstGeom prst="rect">
+            <a:avLst/>
+          </a:prstGeom>
+          <a:noFill/>
+          <a:ln/>
+        </p:spPr>
+        <p:txBody>
+          <a:bodyPr wrap="square" lIns="0" tIns="0" rIns="0" bIns="0" rtlCol="0" anchor="ctr"/>
+          <a:lstStyle/>
+          <a:p>
+            <a:pPr indent="0" marL="0">
+              <a:buNone/>
+            </a:pPr>
+            <a:r>
+              <a:rPr lang="en-US" sz="1350" b="1" dirty="0">
+                <a:solidFill>
+                  <a:srgbClr val="B5813F"/>
+                </a:solidFill>
+                <a:latin typeface="Courier New" pitchFamily="34" charset="0"/>
+                <a:ea typeface="Courier New" pitchFamily="34" charset="-122"/>
+                <a:cs typeface="Courier New" pitchFamily="34" charset="-120"/>
+              </a:rPr>
+              <a:t>postgres</a:t>
+            </a:r>
+            <a:endParaRPr lang="en-US" sz="1350" dirty="0"/>
+          </a:p>
+        </p:txBody>
+      </p:sp>
+      <p:sp>
+        <p:nvSpPr>
+          <p:cNvPr id="16" name="Text 13"/>
+          <p:cNvSpPr txBox="1"/>
+          <p:nvPr/>
+        </p:nvSpPr>
+        <p:spPr>
+          <a:xfrm>
+            <a:off x="804672" y="3401568"/>
+            <a:ext cx="4937760" cy="237744"/>
+          </a:xfrm>
+          <a:prstGeom prst="rect">
+            <a:avLst/>
+          </a:prstGeom>
+          <a:noFill/>
+          <a:ln/>
+        </p:spPr>
+        <p:txBody>
+          <a:bodyPr wrap="square" lIns="0" tIns="0" rIns="0" bIns="0" rtlCol="0" anchor="ctr"/>
+          <a:lstStyle/>
+          <a:p>
+            <a:pPr indent="0" marL="0">
+              <a:buNone/>
+            </a:pPr>
+            <a:r>
+              <a:rPr lang="en-US" sz="850" dirty="0">
+                <a:solidFill>
+                  <a:srgbClr val="7C6552"/>
+                </a:solidFill>
+                <a:latin typeface="Courier New" pitchFamily="34" charset="0"/>
+                <a:ea typeface="Courier New" pitchFamily="34" charset="-122"/>
+                <a:cs typeface="Courier New" pitchFamily="34" charset="-120"/>
+              </a:rPr>
+              <a:t>postgres:16-alpine</a:t>
+            </a:r>
+            <a:endParaRPr lang="en-US" sz="850" dirty="0"/>
+          </a:p>
+        </p:txBody>
+      </p:sp>
+      <p:sp>
+        <p:nvSpPr>
+          <p:cNvPr id="17" name="Text 14"/>
+          <p:cNvSpPr txBox="1"/>
+          <p:nvPr/>
+        </p:nvSpPr>
+        <p:spPr>
+          <a:xfrm>
+            <a:off x="804672" y="3675888"/>
+            <a:ext cx="4882896" cy="905256"/>
+          </a:xfrm>
+          <a:prstGeom prst="rect">
+            <a:avLst/>
+          </a:prstGeom>
+          <a:noFill/>
+          <a:ln/>
+        </p:spPr>
+        <p:txBody>
+          <a:bodyPr wrap="square" lIns="0" tIns="0" rIns="0" bIns="0" rtlCol="0" anchor="ctr"/>
+          <a:lstStyle/>
+          <a:p>
+            <a:pPr indent="0" marL="0">
+              <a:lnSpc>
+                <a:spcPct val="108000"/>
+              </a:lnSpc>
+              <a:spcAft>
+                <a:spcPts val="400"/>
+              </a:spcAft>
+              <a:buNone/>
+            </a:pPr>
+            <a:r>
+              <a:rPr lang="en-US" sz="970" dirty="0">
+                <a:solidFill>
+                  <a:srgbClr val="2C1A0E"/>
+                </a:solidFill>
+                <a:latin typeface="Calibri" pitchFamily="34" charset="0"/>
+                <a:ea typeface="Calibri" pitchFamily="34" charset="-122"/>
+                <a:cs typeface="Calibri" pitchFamily="34" charset="-120"/>
+              </a:rPr>
+              <a:t>Base de données relationnelle — LA source de vérité (documents, utilisateurs, UO, métadonnées).</a:t>
+            </a:r>
+            <a:endParaRPr lang="en-US" sz="970" dirty="0"/>
+          </a:p>
+          <a:p>
+            <a:pPr indent="0" marL="0">
+              <a:lnSpc>
+                <a:spcPct val="108000"/>
+              </a:lnSpc>
+              <a:spcAft>
+                <a:spcPts val="400"/>
+              </a:spcAft>
+              <a:buNone/>
+            </a:pPr>
+            <a:r>
+              <a:rPr lang="en-US" sz="970" i="1" dirty="0">
+                <a:solidFill>
+                  <a:srgbClr val="7C6552"/>
+                </a:solidFill>
+                <a:latin typeface="Calibri" pitchFamily="34" charset="0"/>
+                <a:ea typeface="Calibri" pitchFamily="34" charset="-122"/>
+                <a:cs typeface="Calibri" pitchFamily="34" charset="-120"/>
+              </a:rPr>
+              <a:t>Seul conteneur en volume nommé dès le départ — ses données doivent survivre à un redémarrage, sans exception.</a:t>
+            </a:r>
+            <a:endParaRPr lang="en-US" sz="970" dirty="0"/>
+          </a:p>
+        </p:txBody>
+      </p:sp>
+      <p:sp>
+        <p:nvSpPr>
+          <p:cNvPr id="18" name="Shape 15"/>
+          <p:cNvSpPr/>
+          <p:nvPr/>
+        </p:nvSpPr>
+        <p:spPr>
+          <a:xfrm>
+            <a:off x="6062472" y="2999232"/>
+            <a:ext cx="5394960" cy="1691640"/>
+          </a:xfrm>
+          <a:prstGeom prst="roundRect">
+            <a:avLst>
+              <a:gd name="adj" fmla="val 4324"/>
+            </a:avLst>
+          </a:prstGeom>
+          <a:solidFill>
+            <a:srgbClr val="F3E9DA"/>
+          </a:solidFill>
+          <a:ln/>
+        </p:spPr>
+      </p:sp>
+      <p:sp>
+        <p:nvSpPr>
+          <p:cNvPr id="19" name="Text 16"/>
+          <p:cNvSpPr txBox="1"/>
+          <p:nvPr/>
+        </p:nvSpPr>
+        <p:spPr>
+          <a:xfrm>
+            <a:off x="6318504" y="3127248"/>
+            <a:ext cx="4937760" cy="292608"/>
+          </a:xfrm>
+          <a:prstGeom prst="rect">
+            <a:avLst/>
+          </a:prstGeom>
+          <a:noFill/>
+          <a:ln/>
+        </p:spPr>
+        <p:txBody>
+          <a:bodyPr wrap="square" lIns="0" tIns="0" rIns="0" bIns="0" rtlCol="0" anchor="ctr"/>
+          <a:lstStyle/>
+          <a:p>
+            <a:pPr indent="0" marL="0">
+              <a:buNone/>
+            </a:pPr>
+            <a:r>
+              <a:rPr lang="en-US" sz="1350" b="1" dirty="0">
+                <a:solidFill>
+                  <a:srgbClr val="B5813F"/>
+                </a:solidFill>
+                <a:latin typeface="Courier New" pitchFamily="34" charset="0"/>
+                <a:ea typeface="Courier New" pitchFamily="34" charset="-122"/>
+                <a:cs typeface="Courier New" pitchFamily="34" charset="-120"/>
+              </a:rPr>
+              <a:t>minio</a:t>
+            </a:r>
+            <a:endParaRPr lang="en-US" sz="1350" dirty="0"/>
+          </a:p>
+        </p:txBody>
+      </p:sp>
+      <p:sp>
+        <p:nvSpPr>
+          <p:cNvPr id="20" name="Text 17"/>
+          <p:cNvSpPr txBox="1"/>
+          <p:nvPr/>
+        </p:nvSpPr>
+        <p:spPr>
+          <a:xfrm>
+            <a:off x="6318504" y="3401568"/>
+            <a:ext cx="4937760" cy="237744"/>
+          </a:xfrm>
+          <a:prstGeom prst="rect">
+            <a:avLst/>
+          </a:prstGeom>
+          <a:noFill/>
+          <a:ln/>
+        </p:spPr>
+        <p:txBody>
+          <a:bodyPr wrap="square" lIns="0" tIns="0" rIns="0" bIns="0" rtlCol="0" anchor="ctr"/>
+          <a:lstStyle/>
+          <a:p>
+            <a:pPr indent="0" marL="0">
+              <a:buNone/>
+            </a:pPr>
+            <a:r>
+              <a:rPr lang="en-US" sz="850" dirty="0">
+                <a:solidFill>
+                  <a:srgbClr val="7C6552"/>
+                </a:solidFill>
+                <a:latin typeface="Courier New" pitchFamily="34" charset="0"/>
+                <a:ea typeface="Courier New" pitchFamily="34" charset="-122"/>
+                <a:cs typeface="Courier New" pitchFamily="34" charset="-120"/>
+              </a:rPr>
+              <a:t>minio/minio:latest</a:t>
+            </a:r>
+            <a:endParaRPr lang="en-US" sz="850" dirty="0"/>
+          </a:p>
+        </p:txBody>
+      </p:sp>
+      <p:sp>
+        <p:nvSpPr>
+          <p:cNvPr id="21" name="Text 18"/>
+          <p:cNvSpPr txBox="1"/>
+          <p:nvPr/>
+        </p:nvSpPr>
+        <p:spPr>
+          <a:xfrm>
+            <a:off x="6318504" y="3675888"/>
+            <a:ext cx="4882896" cy="905256"/>
+          </a:xfrm>
+          <a:prstGeom prst="rect">
+            <a:avLst/>
+          </a:prstGeom>
+          <a:noFill/>
+          <a:ln/>
+        </p:spPr>
+        <p:txBody>
+          <a:bodyPr wrap="square" lIns="0" tIns="0" rIns="0" bIns="0" rtlCol="0" anchor="ctr"/>
+          <a:lstStyle/>
+          <a:p>
+            <a:pPr indent="0" marL="0">
+              <a:lnSpc>
+                <a:spcPct val="108000"/>
+              </a:lnSpc>
+              <a:spcAft>
+                <a:spcPts val="400"/>
+              </a:spcAft>
+              <a:buNone/>
+            </a:pPr>
+            <a:r>
+              <a:rPr lang="en-US" sz="970" dirty="0">
+                <a:solidFill>
+                  <a:srgbClr val="2C1A0E"/>
+                </a:solidFill>
+                <a:latin typeface="Calibri" pitchFamily="34" charset="0"/>
+                <a:ea typeface="Calibri" pitchFamily="34" charset="-122"/>
+                <a:cs typeface="Calibri" pitchFamily="34" charset="-120"/>
+              </a:rPr>
+              <a:t>Stockage objet compatible S3 — seul endroit où les PDF/A archivés, chiffrés, sont réellement conservés.</a:t>
+            </a:r>
+            <a:endParaRPr lang="en-US" sz="970" dirty="0"/>
+          </a:p>
+        </p:txBody>
+      </p:sp>
+      <p:sp>
+        <p:nvSpPr>
+          <p:cNvPr id="22" name="Shape 19"/>
+          <p:cNvSpPr/>
+          <p:nvPr/>
+        </p:nvSpPr>
+        <p:spPr>
+          <a:xfrm>
+            <a:off x="548640" y="4855464"/>
+            <a:ext cx="5394960" cy="1691640"/>
+          </a:xfrm>
+          <a:prstGeom prst="roundRect">
+            <a:avLst>
+              <a:gd name="adj" fmla="val 4324"/>
+            </a:avLst>
+          </a:prstGeom>
+          <a:solidFill>
+            <a:srgbClr val="F3E9DA"/>
+          </a:solidFill>
+          <a:ln/>
+        </p:spPr>
+      </p:sp>
+      <p:sp>
+        <p:nvSpPr>
+          <p:cNvPr id="23" name="Text 20"/>
+          <p:cNvSpPr txBox="1"/>
+          <p:nvPr/>
+        </p:nvSpPr>
+        <p:spPr>
+          <a:xfrm>
+            <a:off x="804672" y="4983480"/>
+            <a:ext cx="4937760" cy="292608"/>
+          </a:xfrm>
+          <a:prstGeom prst="rect">
+            <a:avLst/>
+          </a:prstGeom>
+          <a:noFill/>
+          <a:ln/>
+        </p:spPr>
+        <p:txBody>
+          <a:bodyPr wrap="square" lIns="0" tIns="0" rIns="0" bIns="0" rtlCol="0" anchor="ctr"/>
+          <a:lstStyle/>
+          <a:p>
+            <a:pPr indent="0" marL="0">
+              <a:buNone/>
+            </a:pPr>
+            <a:r>
+              <a:rPr lang="en-US" sz="1350" b="1" dirty="0">
+                <a:solidFill>
+                  <a:srgbClr val="B5813F"/>
+                </a:solidFill>
+                <a:latin typeface="Courier New" pitchFamily="34" charset="0"/>
+                <a:ea typeface="Courier New" pitchFamily="34" charset="-122"/>
+                <a:cs typeface="Courier New" pitchFamily="34" charset="-120"/>
+              </a:rPr>
+              <a:t>meilisearch</a:t>
+            </a:r>
+            <a:endParaRPr lang="en-US" sz="1350" dirty="0"/>
+          </a:p>
+        </p:txBody>
+      </p:sp>
+      <p:sp>
+        <p:nvSpPr>
+          <p:cNvPr id="24" name="Text 21"/>
+          <p:cNvSpPr txBox="1"/>
+          <p:nvPr/>
+        </p:nvSpPr>
+        <p:spPr>
+          <a:xfrm>
+            <a:off x="804672" y="5257800"/>
+            <a:ext cx="4937760" cy="237744"/>
+          </a:xfrm>
+          <a:prstGeom prst="rect">
+            <a:avLst/>
+          </a:prstGeom>
+          <a:noFill/>
+          <a:ln/>
+        </p:spPr>
+        <p:txBody>
+          <a:bodyPr wrap="square" lIns="0" tIns="0" rIns="0" bIns="0" rtlCol="0" anchor="ctr"/>
+          <a:lstStyle/>
+          <a:p>
+            <a:pPr indent="0" marL="0">
+              <a:buNone/>
+            </a:pPr>
+            <a:r>
+              <a:rPr lang="en-US" sz="850" dirty="0">
+                <a:solidFill>
+                  <a:srgbClr val="7C6552"/>
+                </a:solidFill>
+                <a:latin typeface="Courier New" pitchFamily="34" charset="0"/>
+                <a:ea typeface="Courier New" pitchFamily="34" charset="-122"/>
+                <a:cs typeface="Courier New" pitchFamily="34" charset="-120"/>
+              </a:rPr>
+              <a:t>getmeili/meilisearch:latest</a:t>
+            </a:r>
+            <a:endParaRPr lang="en-US" sz="850" dirty="0"/>
+          </a:p>
+        </p:txBody>
+      </p:sp>
+      <p:sp>
+        <p:nvSpPr>
+          <p:cNvPr id="25" name="Text 22"/>
+          <p:cNvSpPr txBox="1"/>
+          <p:nvPr/>
+        </p:nvSpPr>
+        <p:spPr>
+          <a:xfrm>
+            <a:off x="804672" y="5532120"/>
+            <a:ext cx="4882896" cy="905256"/>
+          </a:xfrm>
+          <a:prstGeom prst="rect">
+            <a:avLst/>
+          </a:prstGeom>
+          <a:noFill/>
+          <a:ln/>
+        </p:spPr>
+        <p:txBody>
+          <a:bodyPr wrap="square" lIns="0" tIns="0" rIns="0" bIns="0" rtlCol="0" anchor="ctr"/>
+          <a:lstStyle/>
+          <a:p>
+            <a:pPr indent="0" marL="0">
+              <a:lnSpc>
+                <a:spcPct val="108000"/>
+              </a:lnSpc>
+              <a:spcAft>
+                <a:spcPts val="400"/>
+              </a:spcAft>
+              <a:buNone/>
+            </a:pPr>
+            <a:r>
+              <a:rPr lang="en-US" sz="970" dirty="0">
+                <a:solidFill>
+                  <a:srgbClr val="2C1A0E"/>
+                </a:solidFill>
+                <a:latin typeface="Calibri" pitchFamily="34" charset="0"/>
+                <a:ea typeface="Calibri" pitchFamily="34" charset="-122"/>
+                <a:cs typeface="Calibri" pitchFamily="34" charset="-120"/>
+              </a:rPr>
+              <a:t>Moteur de recherche plein texte — ne fait jamais autorité sur le contenu ou les droits d'accès, seulement sur la pertinence.</a:t>
+            </a:r>
+            <a:endParaRPr lang="en-US" sz="970" dirty="0"/>
+          </a:p>
+        </p:txBody>
+      </p:sp>
+      <p:sp>
+        <p:nvSpPr>
+          <p:cNvPr id="26" name="Shape 23"/>
+          <p:cNvSpPr/>
+          <p:nvPr/>
+        </p:nvSpPr>
+        <p:spPr>
+          <a:xfrm>
+            <a:off x="6062472" y="4855464"/>
+            <a:ext cx="5394960" cy="1691640"/>
+          </a:xfrm>
+          <a:prstGeom prst="roundRect">
+            <a:avLst>
+              <a:gd name="adj" fmla="val 4324"/>
+            </a:avLst>
+          </a:prstGeom>
+          <a:solidFill>
+            <a:srgbClr val="F3E9DA"/>
+          </a:solidFill>
+          <a:ln/>
+        </p:spPr>
+      </p:sp>
+      <p:sp>
+        <p:nvSpPr>
+          <p:cNvPr id="27" name="Text 24"/>
+          <p:cNvSpPr txBox="1"/>
+          <p:nvPr/>
+        </p:nvSpPr>
+        <p:spPr>
+          <a:xfrm>
+            <a:off x="6318504" y="4983480"/>
+            <a:ext cx="4937760" cy="292608"/>
+          </a:xfrm>
+          <a:prstGeom prst="rect">
+            <a:avLst/>
+          </a:prstGeom>
+          <a:noFill/>
+          <a:ln/>
+        </p:spPr>
+        <p:txBody>
+          <a:bodyPr wrap="square" lIns="0" tIns="0" rIns="0" bIns="0" rtlCol="0" anchor="ctr"/>
+          <a:lstStyle/>
+          <a:p>
+            <a:pPr indent="0" marL="0">
+              <a:buNone/>
+            </a:pPr>
+            <a:r>
+              <a:rPr lang="en-US" sz="1350" b="1" dirty="0">
+                <a:solidFill>
+                  <a:srgbClr val="B5813F"/>
+                </a:solidFill>
+                <a:latin typeface="Courier New" pitchFamily="34" charset="0"/>
+                <a:ea typeface="Courier New" pitchFamily="34" charset="-122"/>
+                <a:cs typeface="Courier New" pitchFamily="34" charset="-120"/>
+              </a:rPr>
+              <a:t>redis</a:t>
+            </a:r>
+            <a:endParaRPr lang="en-US" sz="1350" dirty="0"/>
+          </a:p>
+        </p:txBody>
+      </p:sp>
+      <p:sp>
+        <p:nvSpPr>
+          <p:cNvPr id="28" name="Text 25"/>
+          <p:cNvSpPr txBox="1"/>
+          <p:nvPr/>
+        </p:nvSpPr>
+        <p:spPr>
+          <a:xfrm>
+            <a:off x="6318504" y="5257800"/>
+            <a:ext cx="4937760" cy="237744"/>
+          </a:xfrm>
+          <a:prstGeom prst="rect">
+            <a:avLst/>
+          </a:prstGeom>
+          <a:noFill/>
+          <a:ln/>
+        </p:spPr>
+        <p:txBody>
+          <a:bodyPr wrap="square" lIns="0" tIns="0" rIns="0" bIns="0" rtlCol="0" anchor="ctr"/>
+          <a:lstStyle/>
+          <a:p>
+            <a:pPr indent="0" marL="0">
+              <a:buNone/>
+            </a:pPr>
+            <a:r>
+              <a:rPr lang="en-US" sz="850" dirty="0">
+                <a:solidFill>
+                  <a:srgbClr val="7C6552"/>
+                </a:solidFill>
+                <a:latin typeface="Courier New" pitchFamily="34" charset="0"/>
+                <a:ea typeface="Courier New" pitchFamily="34" charset="-122"/>
+                <a:cs typeface="Courier New" pitchFamily="34" charset="-120"/>
+              </a:rPr>
+              <a:t>redis:7-alpine</a:t>
+            </a:r>
+            <a:endParaRPr lang="en-US" sz="850" dirty="0"/>
+          </a:p>
+        </p:txBody>
+      </p:sp>
+      <p:sp>
+        <p:nvSpPr>
+          <p:cNvPr id="29" name="Text 26"/>
+          <p:cNvSpPr txBox="1"/>
+          <p:nvPr/>
+        </p:nvSpPr>
+        <p:spPr>
+          <a:xfrm>
+            <a:off x="6318504" y="5532120"/>
+            <a:ext cx="4882896" cy="905256"/>
+          </a:xfrm>
+          <a:prstGeom prst="rect">
+            <a:avLst/>
+          </a:prstGeom>
+          <a:noFill/>
+          <a:ln/>
+        </p:spPr>
+        <p:txBody>
+          <a:bodyPr wrap="square" lIns="0" tIns="0" rIns="0" bIns="0" rtlCol="0" anchor="ctr"/>
+          <a:lstStyle/>
+          <a:p>
+            <a:pPr indent="0" marL="0">
+              <a:lnSpc>
+                <a:spcPct val="108000"/>
+              </a:lnSpc>
+              <a:spcAft>
+                <a:spcPts val="400"/>
+              </a:spcAft>
+              <a:buNone/>
+            </a:pPr>
+            <a:r>
+              <a:rPr lang="en-US" sz="970" dirty="0">
+                <a:solidFill>
+                  <a:srgbClr val="2C1A0E"/>
+                </a:solidFill>
+                <a:latin typeface="Calibri" pitchFamily="34" charset="0"/>
+                <a:ea typeface="Calibri" pitchFamily="34" charset="-122"/>
+                <a:cs typeface="Calibri" pitchFamily="34" charset="-120"/>
+              </a:rPr>
+              <a:t>Cache d'authentification — reconstruit le principal de sécurité (rôles, session) à chaque requête sans retaper PostgreSQL.</a:t>
+            </a:r>
+            <a:endParaRPr lang="en-US" sz="970" dirty="0"/>
+          </a:p>
+        </p:txBody>
+      </p:sp>
+      <p:sp>
+        <p:nvSpPr>
+          <p:cNvPr id="30" name="Text 27"/>
+          <p:cNvSpPr txBox="1"/>
+          <p:nvPr/>
+        </p:nvSpPr>
+        <p:spPr>
+          <a:xfrm>
+            <a:off x="457200" y="6510528"/>
+            <a:ext cx="7315200" cy="274320"/>
+          </a:xfrm>
+          <a:prstGeom prst="rect">
+            <a:avLst/>
+          </a:prstGeom>
+          <a:noFill/>
+          <a:ln/>
+        </p:spPr>
+        <p:txBody>
+          <a:bodyPr wrap="square" lIns="0" tIns="0" rIns="0" bIns="0" rtlCol="0" anchor="ctr"/>
+          <a:lstStyle/>
+          <a:p>
+            <a:pPr indent="0" marL="0">
+              <a:buNone/>
+            </a:pPr>
+            <a:r>
+              <a:rPr lang="en-US" sz="900" dirty="0">
+                <a:solidFill>
+                  <a:srgbClr val="7C6552"/>
+                </a:solidFill>
+                <a:latin typeface="Calibri" pitchFamily="34" charset="0"/>
+                <a:ea typeface="Calibri" pitchFamily="34" charset="-122"/>
+                <a:cs typeface="Calibri" pitchFamily="34" charset="-120"/>
+              </a:rPr>
+              <a:t>MadeArchive — Documentation technique</a:t>
+            </a:r>
+            <a:endParaRPr lang="en-US" sz="900" dirty="0"/>
+          </a:p>
+        </p:txBody>
+      </p:sp>
+      <p:sp>
+        <p:nvSpPr>
+          <p:cNvPr id="31" name="Text 28"/>
+          <p:cNvSpPr txBox="1"/>
+          <p:nvPr/>
+        </p:nvSpPr>
+        <p:spPr>
+          <a:xfrm>
+            <a:off x="11338560" y="6510528"/>
+            <a:ext cx="457200" cy="274320"/>
+          </a:xfrm>
+          <a:prstGeom prst="rect">
+            <a:avLst/>
+          </a:prstGeom>
+          <a:noFill/>
+          <a:ln/>
+        </p:spPr>
+        <p:txBody>
+          <a:bodyPr wrap="square" lIns="0" tIns="0" rIns="0" bIns="0" rtlCol="0" anchor="ctr"/>
+          <a:lstStyle/>
+          <a:p>
+            <a:pPr algn="r" indent="0" marL="0">
+              <a:buNone/>
+            </a:pPr>
+            <a:r>
+              <a:rPr lang="en-US" sz="900" dirty="0">
+                <a:solidFill>
+                  <a:srgbClr val="7C6552"/>
+                </a:solidFill>
+                <a:latin typeface="Calibri" pitchFamily="34" charset="0"/>
+                <a:ea typeface="Calibri" pitchFamily="34" charset="-122"/>
+                <a:cs typeface="Calibri" pitchFamily="34" charset="-120"/>
+              </a:rPr>
+              <a:t>37</a:t>
+            </a:r>
+            <a:endParaRPr lang="en-US" sz="900" dirty="0"/>
+          </a:p>
+        </p:txBody>
+      </p:sp>
+    </p:spTree>
+  </p:cSld>
+  <p:clrMapOvr>
+    <a:masterClrMapping/>
+  </p:clrMapOvr>
+</p:sld>
+</file>
+
+<file path=ppt/slides/slide38.xml><?xml version="1.0" encoding="utf-8"?>
+<p:sld xmlns:a="http://schemas.openxmlformats.org/drawingml/2006/main" xmlns:r="http://schemas.openxmlformats.org/officeDocument/2006/relationships" xmlns:p="http://schemas.openxmlformats.org/presentationml/2006/main">
+  <p:cSld name="Slide 38">
+    <p:bg>
+      <p:bgPr>
+        <a:solidFill>
+          <a:srgbClr val="FFFFFF"/>
+        </a:solidFill>
+      </p:bgPr>
+    </p:bg>
+    <p:spTree>
+      <p:nvGrpSpPr>
+        <p:cNvPr id="1" name=""/>
+        <p:cNvGrpSpPr/>
+        <p:nvPr/>
+      </p:nvGrpSpPr>
+      <p:grpSpPr>
+        <a:xfrm>
+          <a:off x="0" y="0"/>
+          <a:ext cx="0" cy="0"/>
+          <a:chOff x="0" y="0"/>
+          <a:chExt cx="0" cy="0"/>
+        </a:xfrm>
+      </p:grpSpPr>
+      <p:sp>
+        <p:nvSpPr>
+          <p:cNvPr id="2" name="Shape 0"/>
+          <p:cNvSpPr/>
+          <p:nvPr/>
+        </p:nvSpPr>
+        <p:spPr>
+          <a:xfrm>
+            <a:off x="548640" y="457200"/>
+            <a:ext cx="502920" cy="502920"/>
+          </a:xfrm>
+          <a:prstGeom prst="ellipse">
+            <a:avLst/>
+          </a:prstGeom>
+          <a:solidFill>
+            <a:srgbClr val="B5813F"/>
+          </a:solidFill>
+          <a:ln/>
+        </p:spPr>
+      </p:sp>
+      <p:pic>
+        <p:nvPicPr>
+          <p:cNvPr id="3" name="Image 0" descr="preencoded.png">    </p:cNvPr>
+          <p:cNvPicPr>
+            <a:picLocks noChangeAspect="1"/>
+          </p:cNvPicPr>
+          <p:nvPr/>
+        </p:nvPicPr>
+        <p:blipFill>
+          <a:blip r:embed="rId1"/>
+          <a:stretch>
+            <a:fillRect/>
+          </a:stretch>
+        </p:blipFill>
+        <p:spPr>
+          <a:xfrm>
+            <a:off x="608990" y="517550"/>
+            <a:ext cx="382219" cy="382219"/>
+          </a:xfrm>
+          <a:prstGeom prst="rect">
+            <a:avLst/>
+          </a:prstGeom>
+        </p:spPr>
+      </p:pic>
+      <p:sp>
+        <p:nvSpPr>
+          <p:cNvPr id="4" name="Text 1"/>
+          <p:cNvSpPr txBox="1"/>
+          <p:nvPr/>
+        </p:nvSpPr>
+        <p:spPr>
+          <a:xfrm>
+            <a:off x="1170432" y="420624"/>
+            <a:ext cx="9418320" cy="548640"/>
+          </a:xfrm>
+          <a:prstGeom prst="rect">
+            <a:avLst/>
+          </a:prstGeom>
+          <a:noFill/>
+          <a:ln/>
+        </p:spPr>
+        <p:txBody>
+          <a:bodyPr wrap="square" lIns="0" tIns="0" rIns="0" bIns="0" rtlCol="0" anchor="ctr"/>
+          <a:lstStyle/>
+          <a:p>
+            <a:pPr indent="0" marL="0">
+              <a:buNone/>
+            </a:pPr>
+            <a:r>
+              <a:rPr lang="en-US" sz="2600" b="1" dirty="0">
+                <a:solidFill>
+                  <a:srgbClr val="2C1A0E"/>
+                </a:solidFill>
+                <a:latin typeface="Cambria" pitchFamily="34" charset="0"/>
+                <a:ea typeface="Cambria" pitchFamily="34" charset="-122"/>
+                <a:cs typeface="Cambria" pitchFamily="34" charset="-120"/>
+              </a:rPr>
+              <a:t>Infrastructure — conteneurs Docker</a:t>
+            </a:r>
+            <a:endParaRPr lang="en-US" sz="2600" dirty="0"/>
+          </a:p>
+        </p:txBody>
+      </p:sp>
+      <p:sp>
+        <p:nvSpPr>
+          <p:cNvPr id="5" name="Text 2"/>
+          <p:cNvSpPr txBox="1"/>
+          <p:nvPr/>
+        </p:nvSpPr>
+        <p:spPr>
+          <a:xfrm>
+            <a:off x="10607040" y="502920"/>
+            <a:ext cx="1097280" cy="365760"/>
+          </a:xfrm>
+          <a:prstGeom prst="rect">
+            <a:avLst/>
+          </a:prstGeom>
+          <a:noFill/>
+          <a:ln/>
+        </p:spPr>
+        <p:txBody>
+          <a:bodyPr wrap="square" lIns="0" tIns="0" rIns="0" bIns="0" rtlCol="0" anchor="ctr"/>
+          <a:lstStyle/>
+          <a:p>
+            <a:pPr algn="r" indent="0" marL="0">
+              <a:buNone/>
+            </a:pPr>
+            <a:r>
+              <a:rPr lang="en-US" sz="1100" dirty="0">
+                <a:solidFill>
+                  <a:srgbClr val="7C6552"/>
+                </a:solidFill>
+                <a:latin typeface="Calibri" pitchFamily="34" charset="0"/>
+                <a:ea typeface="Calibri" pitchFamily="34" charset="-122"/>
+                <a:cs typeface="Calibri" pitchFamily="34" charset="-120"/>
+              </a:rPr>
+              <a:t>2 / 2</a:t>
+            </a:r>
+            <a:endParaRPr lang="en-US" sz="1100" dirty="0"/>
+          </a:p>
+        </p:txBody>
+      </p:sp>
+      <p:sp>
+        <p:nvSpPr>
+          <p:cNvPr id="6" name="Shape 3"/>
+          <p:cNvSpPr/>
+          <p:nvPr/>
+        </p:nvSpPr>
+        <p:spPr>
+          <a:xfrm>
+            <a:off x="548640" y="1143000"/>
+            <a:ext cx="5394960" cy="1691640"/>
+          </a:xfrm>
+          <a:prstGeom prst="roundRect">
+            <a:avLst>
+              <a:gd name="adj" fmla="val 4324"/>
+            </a:avLst>
+          </a:prstGeom>
+          <a:solidFill>
+            <a:srgbClr val="F3E9DA"/>
+          </a:solidFill>
+          <a:ln/>
+        </p:spPr>
+      </p:sp>
+      <p:sp>
+        <p:nvSpPr>
+          <p:cNvPr id="7" name="Text 4"/>
+          <p:cNvSpPr txBox="1"/>
+          <p:nvPr/>
+        </p:nvSpPr>
+        <p:spPr>
+          <a:xfrm>
+            <a:off x="804672" y="1271016"/>
+            <a:ext cx="4937760" cy="292608"/>
+          </a:xfrm>
+          <a:prstGeom prst="rect">
+            <a:avLst/>
+          </a:prstGeom>
+          <a:noFill/>
+          <a:ln/>
+        </p:spPr>
+        <p:txBody>
+          <a:bodyPr wrap="square" lIns="0" tIns="0" rIns="0" bIns="0" rtlCol="0" anchor="ctr"/>
+          <a:lstStyle/>
+          <a:p>
+            <a:pPr indent="0" marL="0">
+              <a:buNone/>
+            </a:pPr>
+            <a:r>
+              <a:rPr lang="en-US" sz="1350" b="1" dirty="0">
+                <a:solidFill>
+                  <a:srgbClr val="B5813F"/>
+                </a:solidFill>
+                <a:latin typeface="Courier New" pitchFamily="34" charset="0"/>
+                <a:ea typeface="Courier New" pitchFamily="34" charset="-122"/>
+                <a:cs typeface="Courier New" pitchFamily="34" charset="-120"/>
+              </a:rPr>
+              <a:t>gotenberg</a:t>
+            </a:r>
+            <a:endParaRPr lang="en-US" sz="1350" dirty="0"/>
+          </a:p>
+        </p:txBody>
+      </p:sp>
+      <p:sp>
+        <p:nvSpPr>
+          <p:cNvPr id="8" name="Text 5"/>
+          <p:cNvSpPr txBox="1"/>
+          <p:nvPr/>
+        </p:nvSpPr>
+        <p:spPr>
+          <a:xfrm>
+            <a:off x="804672" y="1545336"/>
+            <a:ext cx="4937760" cy="237744"/>
+          </a:xfrm>
+          <a:prstGeom prst="rect">
+            <a:avLst/>
+          </a:prstGeom>
+          <a:noFill/>
+          <a:ln/>
+        </p:spPr>
+        <p:txBody>
+          <a:bodyPr wrap="square" lIns="0" tIns="0" rIns="0" bIns="0" rtlCol="0" anchor="ctr"/>
+          <a:lstStyle/>
+          <a:p>
+            <a:pPr indent="0" marL="0">
+              <a:buNone/>
+            </a:pPr>
+            <a:r>
+              <a:rPr lang="en-US" sz="850" dirty="0">
+                <a:solidFill>
+                  <a:srgbClr val="7C6552"/>
+                </a:solidFill>
+                <a:latin typeface="Courier New" pitchFamily="34" charset="0"/>
+                <a:ea typeface="Courier New" pitchFamily="34" charset="-122"/>
+                <a:cs typeface="Courier New" pitchFamily="34" charset="-120"/>
+              </a:rPr>
+              <a:t>gotenberg/gotenberg:8</a:t>
+            </a:r>
+            <a:endParaRPr lang="en-US" sz="850" dirty="0"/>
+          </a:p>
+        </p:txBody>
+      </p:sp>
+      <p:sp>
+        <p:nvSpPr>
+          <p:cNvPr id="9" name="Text 6"/>
+          <p:cNvSpPr txBox="1"/>
+          <p:nvPr/>
+        </p:nvSpPr>
+        <p:spPr>
+          <a:xfrm>
+            <a:off x="804672" y="1819656"/>
+            <a:ext cx="4882896" cy="905256"/>
+          </a:xfrm>
+          <a:prstGeom prst="rect">
+            <a:avLst/>
+          </a:prstGeom>
+          <a:noFill/>
+          <a:ln/>
+        </p:spPr>
+        <p:txBody>
+          <a:bodyPr wrap="square" lIns="0" tIns="0" rIns="0" bIns="0" rtlCol="0" anchor="ctr"/>
+          <a:lstStyle/>
+          <a:p>
+            <a:pPr indent="0" marL="0">
+              <a:lnSpc>
+                <a:spcPct val="108000"/>
+              </a:lnSpc>
+              <a:spcAft>
+                <a:spcPts val="400"/>
+              </a:spcAft>
+              <a:buNone/>
+            </a:pPr>
+            <a:r>
+              <a:rPr lang="en-US" sz="970" dirty="0">
+                <a:solidFill>
+                  <a:srgbClr val="2C1A0E"/>
+                </a:solidFill>
+                <a:latin typeface="Calibri" pitchFamily="34" charset="0"/>
+                <a:ea typeface="Calibri" pitchFamily="34" charset="-122"/>
+                <a:cs typeface="Calibri" pitchFamily="34" charset="-120"/>
+              </a:rPr>
+              <a:t>Conteneur LibreOffice persistant, dédié à la conversion de tout format bureautique/image en PDF.</a:t>
+            </a:r>
+            <a:endParaRPr lang="en-US" sz="970" dirty="0"/>
+          </a:p>
+          <a:p>
+            <a:pPr indent="0" marL="0">
+              <a:lnSpc>
+                <a:spcPct val="108000"/>
+              </a:lnSpc>
+              <a:spcAft>
+                <a:spcPts val="400"/>
+              </a:spcAft>
+              <a:buNone/>
+            </a:pPr>
+            <a:r>
+              <a:rPr lang="en-US" sz="970" i="1" dirty="0">
+                <a:solidFill>
+                  <a:srgbClr val="7C6552"/>
+                </a:solidFill>
+                <a:latin typeface="Calibri" pitchFamily="34" charset="0"/>
+                <a:ea typeface="Calibri" pitchFamily="34" charset="-122"/>
+                <a:cs typeface="Calibri" pitchFamily="34" charset="-120"/>
+              </a:rPr>
+              <a:t>Remplace un "soffice" relancé à chaque fichier (démarrage à froid de plusieurs secondes) — pool LibreOffice chaud en permanence, RAM/CPU jamais en concurrence avec l'appli.</a:t>
+            </a:r>
+            <a:endParaRPr lang="en-US" sz="970" dirty="0"/>
+          </a:p>
+        </p:txBody>
+      </p:sp>
+      <p:sp>
+        <p:nvSpPr>
+          <p:cNvPr id="10" name="Shape 7"/>
+          <p:cNvSpPr/>
+          <p:nvPr/>
+        </p:nvSpPr>
+        <p:spPr>
+          <a:xfrm>
+            <a:off x="6062472" y="1143000"/>
+            <a:ext cx="5394960" cy="1691640"/>
+          </a:xfrm>
+          <a:prstGeom prst="roundRect">
+            <a:avLst>
+              <a:gd name="adj" fmla="val 4324"/>
+            </a:avLst>
+          </a:prstGeom>
+          <a:solidFill>
+            <a:srgbClr val="F3E9DA"/>
+          </a:solidFill>
+          <a:ln/>
+        </p:spPr>
+      </p:sp>
+      <p:sp>
+        <p:nvSpPr>
+          <p:cNvPr id="11" name="Text 8"/>
+          <p:cNvSpPr txBox="1"/>
+          <p:nvPr/>
+        </p:nvSpPr>
+        <p:spPr>
+          <a:xfrm>
+            <a:off x="6318504" y="1271016"/>
+            <a:ext cx="4937760" cy="292608"/>
+          </a:xfrm>
+          <a:prstGeom prst="rect">
+            <a:avLst/>
+          </a:prstGeom>
+          <a:noFill/>
+          <a:ln/>
+        </p:spPr>
+        <p:txBody>
+          <a:bodyPr wrap="square" lIns="0" tIns="0" rIns="0" bIns="0" rtlCol="0" anchor="ctr"/>
+          <a:lstStyle/>
+          <a:p>
+            <a:pPr indent="0" marL="0">
+              <a:buNone/>
+            </a:pPr>
+            <a:r>
+              <a:rPr lang="en-US" sz="1350" b="1" dirty="0">
+                <a:solidFill>
+                  <a:srgbClr val="B5813F"/>
+                </a:solidFill>
+                <a:latin typeface="Courier New" pitchFamily="34" charset="0"/>
+                <a:ea typeface="Courier New" pitchFamily="34" charset="-122"/>
+                <a:cs typeface="Courier New" pitchFamily="34" charset="-120"/>
+              </a:rPr>
+              <a:t>ollama</a:t>
+            </a:r>
+            <a:endParaRPr lang="en-US" sz="1350" dirty="0"/>
+          </a:p>
+        </p:txBody>
+      </p:sp>
+      <p:sp>
+        <p:nvSpPr>
+          <p:cNvPr id="12" name="Text 9"/>
+          <p:cNvSpPr txBox="1"/>
+          <p:nvPr/>
+        </p:nvSpPr>
+        <p:spPr>
+          <a:xfrm>
+            <a:off x="6318504" y="1545336"/>
+            <a:ext cx="4937760" cy="237744"/>
+          </a:xfrm>
+          <a:prstGeom prst="rect">
+            <a:avLst/>
+          </a:prstGeom>
+          <a:noFill/>
+          <a:ln/>
+        </p:spPr>
+        <p:txBody>
+          <a:bodyPr wrap="square" lIns="0" tIns="0" rIns="0" bIns="0" rtlCol="0" anchor="ctr"/>
+          <a:lstStyle/>
+          <a:p>
+            <a:pPr indent="0" marL="0">
+              <a:buNone/>
+            </a:pPr>
+            <a:r>
+              <a:rPr lang="en-US" sz="850" dirty="0">
+                <a:solidFill>
+                  <a:srgbClr val="7C6552"/>
+                </a:solidFill>
+                <a:latin typeface="Courier New" pitchFamily="34" charset="0"/>
+                <a:ea typeface="Courier New" pitchFamily="34" charset="-122"/>
+                <a:cs typeface="Courier New" pitchFamily="34" charset="-120"/>
+              </a:rPr>
+              <a:t>ollama/ollama — modèle qwen2.5-coder:7b</a:t>
+            </a:r>
+            <a:endParaRPr lang="en-US" sz="850" dirty="0"/>
+          </a:p>
+        </p:txBody>
+      </p:sp>
+      <p:sp>
+        <p:nvSpPr>
+          <p:cNvPr id="13" name="Text 10"/>
+          <p:cNvSpPr txBox="1"/>
+          <p:nvPr/>
+        </p:nvSpPr>
+        <p:spPr>
+          <a:xfrm>
+            <a:off x="6318504" y="1819656"/>
+            <a:ext cx="4882896" cy="905256"/>
+          </a:xfrm>
+          <a:prstGeom prst="rect">
+            <a:avLst/>
+          </a:prstGeom>
+          <a:noFill/>
+          <a:ln/>
+        </p:spPr>
+        <p:txBody>
+          <a:bodyPr wrap="square" lIns="0" tIns="0" rIns="0" bIns="0" rtlCol="0" anchor="ctr"/>
+          <a:lstStyle/>
+          <a:p>
+            <a:pPr indent="0" marL="0">
+              <a:lnSpc>
+                <a:spcPct val="108000"/>
+              </a:lnSpc>
+              <a:spcAft>
+                <a:spcPts val="400"/>
+              </a:spcAft>
+              <a:buNone/>
+            </a:pPr>
+            <a:r>
+              <a:rPr lang="en-US" sz="970" dirty="0">
+                <a:solidFill>
+                  <a:srgbClr val="2C1A0E"/>
+                </a:solidFill>
+                <a:latin typeface="Calibri" pitchFamily="34" charset="0"/>
+                <a:ea typeface="Calibri" pitchFamily="34" charset="-122"/>
+                <a:cs typeface="Calibri" pitchFamily="34" charset="-120"/>
+              </a:rPr>
+              <a:t>Sert le modèle de langage local (Qwen) qui génère les règles d'extraction automatique des métadonnées.</a:t>
+            </a:r>
+            <a:endParaRPr lang="en-US" sz="970" dirty="0"/>
+          </a:p>
+        </p:txBody>
+      </p:sp>
+      <p:sp>
+        <p:nvSpPr>
+          <p:cNvPr id="14" name="Shape 11"/>
+          <p:cNvSpPr/>
+          <p:nvPr/>
+        </p:nvSpPr>
+        <p:spPr>
+          <a:xfrm>
+            <a:off x="548640" y="2999232"/>
+            <a:ext cx="5394960" cy="1691640"/>
+          </a:xfrm>
+          <a:prstGeom prst="roundRect">
+            <a:avLst>
+              <a:gd name="adj" fmla="val 4324"/>
+            </a:avLst>
+          </a:prstGeom>
+          <a:solidFill>
+            <a:srgbClr val="F3E9DA"/>
+          </a:solidFill>
+          <a:ln/>
+        </p:spPr>
+      </p:sp>
+      <p:sp>
+        <p:nvSpPr>
+          <p:cNvPr id="15" name="Text 12"/>
+          <p:cNvSpPr txBox="1"/>
+          <p:nvPr/>
+        </p:nvSpPr>
+        <p:spPr>
+          <a:xfrm>
+            <a:off x="804672" y="3127248"/>
+            <a:ext cx="4937760" cy="292608"/>
+          </a:xfrm>
+          <a:prstGeom prst="rect">
+            <a:avLst/>
+          </a:prstGeom>
+          <a:noFill/>
+          <a:ln/>
+        </p:spPr>
+        <p:txBody>
+          <a:bodyPr wrap="square" lIns="0" tIns="0" rIns="0" bIns="0" rtlCol="0" anchor="ctr"/>
+          <a:lstStyle/>
+          <a:p>
+            <a:pPr indent="0" marL="0">
+              <a:buNone/>
+            </a:pPr>
+            <a:r>
+              <a:rPr lang="en-US" sz="1350" b="1" dirty="0">
+                <a:solidFill>
+                  <a:srgbClr val="B5813F"/>
+                </a:solidFill>
+                <a:latin typeface="Courier New" pitchFamily="34" charset="0"/>
+                <a:ea typeface="Courier New" pitchFamily="34" charset="-122"/>
+                <a:cs typeface="Courier New" pitchFamily="34" charset="-120"/>
+              </a:rPr>
+              <a:t>chromium</a:t>
+            </a:r>
+            <a:endParaRPr lang="en-US" sz="1350" dirty="0"/>
+          </a:p>
+        </p:txBody>
+      </p:sp>
+      <p:sp>
+        <p:nvSpPr>
+          <p:cNvPr id="16" name="Text 13"/>
+          <p:cNvSpPr txBox="1"/>
+          <p:nvPr/>
+        </p:nvSpPr>
+        <p:spPr>
+          <a:xfrm>
+            <a:off x="804672" y="3401568"/>
+            <a:ext cx="4937760" cy="237744"/>
+          </a:xfrm>
+          <a:prstGeom prst="rect">
+            <a:avLst/>
+          </a:prstGeom>
+          <a:noFill/>
+          <a:ln/>
+        </p:spPr>
+        <p:txBody>
+          <a:bodyPr wrap="square" lIns="0" tIns="0" rIns="0" bIns="0" rtlCol="0" anchor="ctr"/>
+          <a:lstStyle/>
+          <a:p>
+            <a:pPr indent="0" marL="0">
+              <a:buNone/>
+            </a:pPr>
+            <a:r>
+              <a:rPr lang="en-US" sz="850" dirty="0">
+                <a:solidFill>
+                  <a:srgbClr val="7C6552"/>
+                </a:solidFill>
+                <a:latin typeface="Courier New" pitchFamily="34" charset="0"/>
+                <a:ea typeface="Courier New" pitchFamily="34" charset="-122"/>
+                <a:cs typeface="Courier New" pitchFamily="34" charset="-120"/>
+              </a:rPr>
+              <a:t>ghcr.io/browserless/chromium:v2.56.0</a:t>
+            </a:r>
+            <a:endParaRPr lang="en-US" sz="850" dirty="0"/>
+          </a:p>
+        </p:txBody>
+      </p:sp>
+      <p:sp>
+        <p:nvSpPr>
+          <p:cNvPr id="17" name="Text 14"/>
+          <p:cNvSpPr txBox="1"/>
+          <p:nvPr/>
+        </p:nvSpPr>
+        <p:spPr>
+          <a:xfrm>
+            <a:off x="804672" y="3675888"/>
+            <a:ext cx="4882896" cy="905256"/>
+          </a:xfrm>
+          <a:prstGeom prst="rect">
+            <a:avLst/>
+          </a:prstGeom>
+          <a:noFill/>
+          <a:ln/>
+        </p:spPr>
+        <p:txBody>
+          <a:bodyPr wrap="square" lIns="0" tIns="0" rIns="0" bIns="0" rtlCol="0" anchor="ctr"/>
+          <a:lstStyle/>
+          <a:p>
+            <a:pPr indent="0" marL="0">
+              <a:lnSpc>
+                <a:spcPct val="108000"/>
+              </a:lnSpc>
+              <a:spcAft>
+                <a:spcPts val="400"/>
+              </a:spcAft>
+              <a:buNone/>
+            </a:pPr>
+            <a:r>
+              <a:rPr lang="en-US" sz="970" dirty="0">
+                <a:solidFill>
+                  <a:srgbClr val="2C1A0E"/>
+                </a:solidFill>
+                <a:latin typeface="Calibri" pitchFamily="34" charset="0"/>
+                <a:ea typeface="Calibri" pitchFamily="34" charset="-122"/>
+                <a:cs typeface="Calibri" pitchFamily="34" charset="-120"/>
+              </a:rPr>
+              <a:t>Navigateur headless dédié à l'import de documents par navigation web assistée.</a:t>
+            </a:r>
+            <a:endParaRPr lang="en-US" sz="970" dirty="0"/>
+          </a:p>
+          <a:p>
+            <a:pPr indent="0" marL="0">
+              <a:lnSpc>
+                <a:spcPct val="108000"/>
+              </a:lnSpc>
+              <a:spcAft>
+                <a:spcPts val="400"/>
+              </a:spcAft>
+              <a:buNone/>
+            </a:pPr>
+            <a:r>
+              <a:rPr lang="en-US" sz="970" i="1" dirty="0">
+                <a:solidFill>
+                  <a:srgbClr val="7C6552"/>
+                </a:solidFill>
+                <a:latin typeface="Calibri" pitchFamily="34" charset="0"/>
+                <a:ea typeface="Calibri" pitchFamily="34" charset="-122"/>
+                <a:cs typeface="Calibri" pitchFamily="34" charset="-120"/>
+              </a:rPr>
+              <a:t>Mémoire/CPU strictement plafonnés (1 Go, 1 cœur) — un afflux d'imports web ne peut jamais affecter le reste de l'application.</a:t>
+            </a:r>
+            <a:endParaRPr lang="en-US" sz="970" dirty="0"/>
+          </a:p>
+        </p:txBody>
+      </p:sp>
+      <p:sp>
+        <p:nvSpPr>
+          <p:cNvPr id="18" name="Shape 15"/>
+          <p:cNvSpPr/>
+          <p:nvPr/>
+        </p:nvSpPr>
+        <p:spPr>
+          <a:xfrm>
+            <a:off x="6062472" y="2999232"/>
+            <a:ext cx="5394960" cy="1691640"/>
+          </a:xfrm>
+          <a:prstGeom prst="roundRect">
+            <a:avLst>
+              <a:gd name="adj" fmla="val 4324"/>
+            </a:avLst>
+          </a:prstGeom>
+          <a:solidFill>
+            <a:srgbClr val="F3E9DA"/>
+          </a:solidFill>
+          <a:ln/>
+        </p:spPr>
+      </p:sp>
+      <p:sp>
+        <p:nvSpPr>
+          <p:cNvPr id="19" name="Text 16"/>
+          <p:cNvSpPr txBox="1"/>
+          <p:nvPr/>
+        </p:nvSpPr>
+        <p:spPr>
+          <a:xfrm>
+            <a:off x="6318504" y="3127248"/>
+            <a:ext cx="4937760" cy="292608"/>
+          </a:xfrm>
+          <a:prstGeom prst="rect">
+            <a:avLst/>
+          </a:prstGeom>
+          <a:noFill/>
+          <a:ln/>
+        </p:spPr>
+        <p:txBody>
+          <a:bodyPr wrap="square" lIns="0" tIns="0" rIns="0" bIns="0" rtlCol="0" anchor="ctr"/>
+          <a:lstStyle/>
+          <a:p>
+            <a:pPr indent="0" marL="0">
+              <a:buNone/>
+            </a:pPr>
+            <a:r>
+              <a:rPr lang="en-US" sz="1350" b="1" dirty="0">
+                <a:solidFill>
+                  <a:srgbClr val="B5813F"/>
+                </a:solidFill>
+                <a:latin typeface="Courier New" pitchFamily="34" charset="0"/>
+                <a:ea typeface="Courier New" pitchFamily="34" charset="-122"/>
+                <a:cs typeface="Courier New" pitchFamily="34" charset="-120"/>
+              </a:rPr>
+              <a:t>traefik</a:t>
+            </a:r>
+            <a:endParaRPr lang="en-US" sz="1350" dirty="0"/>
+          </a:p>
+        </p:txBody>
+      </p:sp>
+      <p:sp>
+        <p:nvSpPr>
+          <p:cNvPr id="20" name="Text 17"/>
+          <p:cNvSpPr txBox="1"/>
+          <p:nvPr/>
+        </p:nvSpPr>
+        <p:spPr>
+          <a:xfrm>
+            <a:off x="6318504" y="3401568"/>
+            <a:ext cx="4937760" cy="237744"/>
+          </a:xfrm>
+          <a:prstGeom prst="rect">
+            <a:avLst/>
+          </a:prstGeom>
+          <a:noFill/>
+          <a:ln/>
+        </p:spPr>
+        <p:txBody>
+          <a:bodyPr wrap="square" lIns="0" tIns="0" rIns="0" bIns="0" rtlCol="0" anchor="ctr"/>
+          <a:lstStyle/>
+          <a:p>
+            <a:pPr indent="0" marL="0">
+              <a:buNone/>
+            </a:pPr>
+            <a:r>
+              <a:rPr lang="en-US" sz="850" dirty="0">
+                <a:solidFill>
+                  <a:srgbClr val="7C6552"/>
+                </a:solidFill>
+                <a:latin typeface="Courier New" pitchFamily="34" charset="0"/>
+                <a:ea typeface="Courier New" pitchFamily="34" charset="-122"/>
+                <a:cs typeface="Courier New" pitchFamily="34" charset="-120"/>
+              </a:rPr>
+              <a:t>image maison, basée sur Traefik</a:t>
+            </a:r>
+            <a:endParaRPr lang="en-US" sz="850" dirty="0"/>
+          </a:p>
+        </p:txBody>
+      </p:sp>
+      <p:sp>
+        <p:nvSpPr>
+          <p:cNvPr id="21" name="Text 18"/>
+          <p:cNvSpPr txBox="1"/>
+          <p:nvPr/>
+        </p:nvSpPr>
+        <p:spPr>
+          <a:xfrm>
+            <a:off x="6318504" y="3675888"/>
+            <a:ext cx="4882896" cy="905256"/>
+          </a:xfrm>
+          <a:prstGeom prst="rect">
+            <a:avLst/>
+          </a:prstGeom>
+          <a:noFill/>
+          <a:ln/>
+        </p:spPr>
+        <p:txBody>
+          <a:bodyPr wrap="square" lIns="0" tIns="0" rIns="0" bIns="0" rtlCol="0" anchor="ctr"/>
+          <a:lstStyle/>
+          <a:p>
+            <a:pPr indent="0" marL="0">
+              <a:lnSpc>
+                <a:spcPct val="108000"/>
+              </a:lnSpc>
+              <a:spcAft>
+                <a:spcPts val="400"/>
+              </a:spcAft>
+              <a:buNone/>
+            </a:pPr>
+            <a:r>
+              <a:rPr lang="en-US" sz="970" dirty="0">
+                <a:solidFill>
+                  <a:srgbClr val="2C1A0E"/>
+                </a:solidFill>
+                <a:latin typeface="Calibri" pitchFamily="34" charset="0"/>
+                <a:ea typeface="Calibri" pitchFamily="34" charset="-122"/>
+                <a:cs typeface="Calibri" pitchFamily="34" charset="-120"/>
+              </a:rPr>
+              <a:t>Unique point d'entrée public (80/443) : termine le HTTPS, redirige tout HTTP, route vers "frontend" ou "app" selon le chemin.</a:t>
+            </a:r>
+            <a:endParaRPr lang="en-US" sz="970" dirty="0"/>
+          </a:p>
+          <a:p>
+            <a:pPr indent="0" marL="0">
+              <a:lnSpc>
+                <a:spcPct val="108000"/>
+              </a:lnSpc>
+              <a:spcAft>
+                <a:spcPts val="400"/>
+              </a:spcAft>
+              <a:buNone/>
+            </a:pPr>
+            <a:r>
+              <a:rPr lang="en-US" sz="970" i="1" dirty="0">
+                <a:solidFill>
+                  <a:srgbClr val="7C6552"/>
+                </a:solidFill>
+                <a:latin typeface="Calibri" pitchFamily="34" charset="0"/>
+                <a:ea typeface="Calibri" pitchFamily="34" charset="-122"/>
+                <a:cs typeface="Calibri" pitchFamily="34" charset="-120"/>
+              </a:rPr>
+              <a:t>Aucun autre conteneur n'est exposé directement — un accès qui contournerait le HTTPS est structurellement impossible.</a:t>
+            </a:r>
+            <a:endParaRPr lang="en-US" sz="970" dirty="0"/>
+          </a:p>
+        </p:txBody>
+      </p:sp>
+      <p:sp>
+        <p:nvSpPr>
+          <p:cNvPr id="22" name="Text 19"/>
+          <p:cNvSpPr txBox="1"/>
+          <p:nvPr/>
+        </p:nvSpPr>
+        <p:spPr>
+          <a:xfrm>
+            <a:off x="457200" y="6510528"/>
+            <a:ext cx="7315200" cy="274320"/>
+          </a:xfrm>
+          <a:prstGeom prst="rect">
+            <a:avLst/>
+          </a:prstGeom>
+          <a:noFill/>
+          <a:ln/>
+        </p:spPr>
+        <p:txBody>
+          <a:bodyPr wrap="square" lIns="0" tIns="0" rIns="0" bIns="0" rtlCol="0" anchor="ctr"/>
+          <a:lstStyle/>
+          <a:p>
+            <a:pPr indent="0" marL="0">
+              <a:buNone/>
+            </a:pPr>
+            <a:r>
+              <a:rPr lang="en-US" sz="900" dirty="0">
+                <a:solidFill>
+                  <a:srgbClr val="7C6552"/>
+                </a:solidFill>
+                <a:latin typeface="Calibri" pitchFamily="34" charset="0"/>
+                <a:ea typeface="Calibri" pitchFamily="34" charset="-122"/>
+                <a:cs typeface="Calibri" pitchFamily="34" charset="-120"/>
+              </a:rPr>
+              <a:t>MadeArchive — Documentation technique</a:t>
+            </a:r>
+            <a:endParaRPr lang="en-US" sz="900" dirty="0"/>
+          </a:p>
+        </p:txBody>
+      </p:sp>
+      <p:sp>
+        <p:nvSpPr>
+          <p:cNvPr id="23" name="Text 20"/>
+          <p:cNvSpPr txBox="1"/>
+          <p:nvPr/>
+        </p:nvSpPr>
+        <p:spPr>
+          <a:xfrm>
+            <a:off x="11338560" y="6510528"/>
+            <a:ext cx="457200" cy="274320"/>
+          </a:xfrm>
+          <a:prstGeom prst="rect">
+            <a:avLst/>
+          </a:prstGeom>
+          <a:noFill/>
+          <a:ln/>
+        </p:spPr>
+        <p:txBody>
+          <a:bodyPr wrap="square" lIns="0" tIns="0" rIns="0" bIns="0" rtlCol="0" anchor="ctr"/>
+          <a:lstStyle/>
+          <a:p>
+            <a:pPr algn="r" indent="0" marL="0">
+              <a:buNone/>
+            </a:pPr>
+            <a:r>
+              <a:rPr lang="en-US" sz="900" dirty="0">
+                <a:solidFill>
+                  <a:srgbClr val="7C6552"/>
+                </a:solidFill>
+                <a:latin typeface="Calibri" pitchFamily="34" charset="0"/>
+                <a:ea typeface="Calibri" pitchFamily="34" charset="-122"/>
+                <a:cs typeface="Calibri" pitchFamily="34" charset="-120"/>
+              </a:rPr>
+              <a:t>38</a:t>
+            </a:r>
+            <a:endParaRPr lang="en-US" sz="900" dirty="0"/>
+          </a:p>
+        </p:txBody>
+      </p:sp>
+    </p:spTree>
+  </p:cSld>
+  <p:clrMapOvr>
+    <a:masterClrMapping/>
+  </p:clrMapOvr>
+</p:sld>
+</file>
+
+<file path=ppt/slides/slide39.xml><?xml version="1.0" encoding="utf-8"?>
+<p:sld xmlns:a="http://schemas.openxmlformats.org/drawingml/2006/main" xmlns:r="http://schemas.openxmlformats.org/officeDocument/2006/relationships" xmlns:p="http://schemas.openxmlformats.org/presentationml/2006/main">
+  <p:cSld name="Slide 39">
+    <p:bg>
+      <p:bgPr>
+        <a:solidFill>
+          <a:srgbClr val="2C1A0E"/>
+        </a:solidFill>
+      </p:bgPr>
+    </p:bg>
+    <p:spTree>
+      <p:nvGrpSpPr>
+        <p:cNvPr id="1" name=""/>
+        <p:cNvGrpSpPr/>
+        <p:nvPr/>
+      </p:nvGrpSpPr>
+      <p:grpSpPr>
+        <a:xfrm>
+          <a:off x="0" y="0"/>
+          <a:ext cx="0" cy="0"/>
+          <a:chOff x="0" y="0"/>
+          <a:chExt cx="0" cy="0"/>
+        </a:xfrm>
+      </p:grpSpPr>
+      <p:sp>
+        <p:nvSpPr>
+          <p:cNvPr id="2" name="Shape 0"/>
+          <p:cNvSpPr/>
+          <p:nvPr/>
+        </p:nvSpPr>
+        <p:spPr>
+          <a:xfrm>
+            <a:off x="640080" y="2331720"/>
+            <a:ext cx="914400" cy="914400"/>
+          </a:xfrm>
+          <a:prstGeom prst="ellipse">
+            <a:avLst/>
+          </a:prstGeom>
+          <a:solidFill>
+            <a:srgbClr val="B5813F"/>
+          </a:solidFill>
+          <a:ln/>
+        </p:spPr>
+      </p:sp>
+      <p:pic>
+        <p:nvPicPr>
+          <p:cNvPr id="3" name="Image 0" descr="preencoded.png">    </p:cNvPr>
+          <p:cNvPicPr>
+            <a:picLocks noChangeAspect="1"/>
+          </p:cNvPicPr>
+          <p:nvPr/>
+        </p:nvPicPr>
+        <p:blipFill>
+          <a:blip r:embed="rId1"/>
+          <a:stretch>
+            <a:fillRect/>
+          </a:stretch>
+        </p:blipFill>
+        <p:spPr>
+          <a:xfrm>
+            <a:off x="749808" y="2441448"/>
+            <a:ext cx="694944" cy="694944"/>
+          </a:xfrm>
+          <a:prstGeom prst="rect">
+            <a:avLst/>
+          </a:prstGeom>
+        </p:spPr>
+      </p:pic>
+      <p:sp>
+        <p:nvSpPr>
+          <p:cNvPr id="4" name="Text 1"/>
+          <p:cNvSpPr txBox="1"/>
+          <p:nvPr/>
+        </p:nvSpPr>
+        <p:spPr>
+          <a:xfrm>
+            <a:off x="1737360" y="2395728"/>
+            <a:ext cx="8229600" cy="365760"/>
+          </a:xfrm>
+          <a:prstGeom prst="rect">
+            <a:avLst/>
+          </a:prstGeom>
+          <a:noFill/>
+          <a:ln/>
+        </p:spPr>
+        <p:txBody>
+          <a:bodyPr wrap="square" lIns="0" tIns="0" rIns="0" bIns="0" rtlCol="0" anchor="ctr"/>
+          <a:lstStyle/>
+          <a:p>
+            <a:pPr indent="0" marL="0">
+              <a:buNone/>
+            </a:pPr>
+            <a:r>
+              <a:rPr lang="en-US" sz="1200" spc="200" kern="0" dirty="0">
+                <a:solidFill>
+                  <a:srgbClr val="D9AE6C"/>
+                </a:solidFill>
+                <a:latin typeface="Calibri" pitchFamily="34" charset="0"/>
+                <a:ea typeface="Calibri" pitchFamily="34" charset="-122"/>
+                <a:cs typeface="Calibri" pitchFamily="34" charset="-120"/>
+              </a:rPr>
+              <a:t>BILAN</a:t>
+            </a:r>
+            <a:endParaRPr lang="en-US" sz="1200" dirty="0"/>
+          </a:p>
+        </p:txBody>
+      </p:sp>
+      <p:sp>
+        <p:nvSpPr>
+          <p:cNvPr id="5" name="Text 2"/>
+          <p:cNvSpPr txBox="1"/>
+          <p:nvPr/>
+        </p:nvSpPr>
+        <p:spPr>
+          <a:xfrm>
+            <a:off x="1719072" y="2743200"/>
+            <a:ext cx="9601200" cy="1005840"/>
+          </a:xfrm>
+          <a:prstGeom prst="rect">
+            <a:avLst/>
+          </a:prstGeom>
+          <a:noFill/>
+          <a:ln/>
+        </p:spPr>
+        <p:txBody>
+          <a:bodyPr wrap="square" lIns="0" tIns="0" rIns="0" bIns="0" rtlCol="0" anchor="ctr"/>
+          <a:lstStyle/>
+          <a:p>
+            <a:pPr indent="0" marL="0">
+              <a:buNone/>
+            </a:pPr>
+            <a:r>
+              <a:rPr lang="en-US" sz="3800" b="1" dirty="0">
+                <a:solidFill>
+                  <a:srgbClr val="FFFFFF"/>
+                </a:solidFill>
+                <a:latin typeface="Cambria" pitchFamily="34" charset="0"/>
+                <a:ea typeface="Cambria" pitchFamily="34" charset="-122"/>
+                <a:cs typeface="Cambria" pitchFamily="34" charset="-120"/>
+              </a:rPr>
+              <a:t>Tableau récapitulatif</a:t>
+            </a:r>
+            <a:endParaRPr lang="en-US" sz="3800" dirty="0"/>
+          </a:p>
+        </p:txBody>
+      </p:sp>
+      <p:sp>
+        <p:nvSpPr>
+          <p:cNvPr id="6" name="Text 3"/>
+          <p:cNvSpPr txBox="1"/>
+          <p:nvPr/>
+        </p:nvSpPr>
+        <p:spPr>
+          <a:xfrm>
+            <a:off x="457200" y="6510528"/>
+            <a:ext cx="7315200" cy="274320"/>
+          </a:xfrm>
+          <a:prstGeom prst="rect">
+            <a:avLst/>
+          </a:prstGeom>
+          <a:noFill/>
+          <a:ln/>
+        </p:spPr>
+        <p:txBody>
+          <a:bodyPr wrap="square" lIns="0" tIns="0" rIns="0" bIns="0" rtlCol="0" anchor="ctr"/>
+          <a:lstStyle/>
+          <a:p>
+            <a:pPr indent="0" marL="0">
+              <a:buNone/>
+            </a:pPr>
+            <a:r>
+              <a:rPr lang="en-US" sz="900" dirty="0">
+                <a:solidFill>
+                  <a:srgbClr val="7C6552"/>
+                </a:solidFill>
+                <a:latin typeface="Calibri" pitchFamily="34" charset="0"/>
+                <a:ea typeface="Calibri" pitchFamily="34" charset="-122"/>
+                <a:cs typeface="Calibri" pitchFamily="34" charset="-120"/>
+              </a:rPr>
+              <a:t>MadeArchive — Documentation technique</a:t>
+            </a:r>
+            <a:endParaRPr lang="en-US" sz="900" dirty="0"/>
+          </a:p>
+        </p:txBody>
+      </p:sp>
+      <p:sp>
+        <p:nvSpPr>
+          <p:cNvPr id="7" name="Text 4"/>
+          <p:cNvSpPr txBox="1"/>
+          <p:nvPr/>
+        </p:nvSpPr>
+        <p:spPr>
+          <a:xfrm>
+            <a:off x="11338560" y="6510528"/>
+            <a:ext cx="457200" cy="274320"/>
+          </a:xfrm>
+          <a:prstGeom prst="rect">
+            <a:avLst/>
+          </a:prstGeom>
+          <a:noFill/>
+          <a:ln/>
+        </p:spPr>
+        <p:txBody>
+          <a:bodyPr wrap="square" lIns="0" tIns="0" rIns="0" bIns="0" rtlCol="0" anchor="ctr"/>
+          <a:lstStyle/>
+          <a:p>
+            <a:pPr algn="r" indent="0" marL="0">
+              <a:buNone/>
+            </a:pPr>
+            <a:r>
+              <a:rPr lang="en-US" sz="900" dirty="0">
+                <a:solidFill>
+                  <a:srgbClr val="7C6552"/>
+                </a:solidFill>
+                <a:latin typeface="Calibri" pitchFamily="34" charset="0"/>
+                <a:ea typeface="Calibri" pitchFamily="34" charset="-122"/>
+                <a:cs typeface="Calibri" pitchFamily="34" charset="-120"/>
+              </a:rPr>
+              <a:t>39</a:t>
+            </a:r>
+            <a:endParaRPr lang="en-US" sz="900" dirty="0"/>
+          </a:p>
+        </p:txBody>
+      </p:sp>
+    </p:spTree>
+  </p:cSld>
+  <p:clrMapOvr>
+    <a:masterClrMapping/>
+  </p:clrMapOvr>
+</p:sld>
+</file>
+
+<file path=ppt/slides/slide4.xml><?xml version="1.0" encoding="utf-8"?>
+<p:sld xmlns:a="http://schemas.openxmlformats.org/drawingml/2006/main" xmlns:r="http://schemas.openxmlformats.org/officeDocument/2006/relationships" xmlns:p="http://schemas.openxmlformats.org/presentationml/2006/main">
+  <p:cSld name="Slide 4">
+    <p:bg>
+      <p:bgPr>
+        <a:solidFill>
+          <a:srgbClr val="FFFFFF"/>
+        </a:solidFill>
+      </p:bgPr>
+    </p:bg>
+    <p:spTree>
+      <p:nvGrpSpPr>
+        <p:cNvPr id="1" name=""/>
+        <p:cNvGrpSpPr/>
+        <p:nvPr/>
+      </p:nvGrpSpPr>
+      <p:grpSpPr>
+        <a:xfrm>
+          <a:off x="0" y="0"/>
+          <a:ext cx="0" cy="0"/>
+          <a:chOff x="0" y="0"/>
+          <a:chExt cx="0" cy="0"/>
+        </a:xfrm>
+      </p:grpSpPr>
+      <p:sp>
+        <p:nvSpPr>
+          <p:cNvPr id="2" name="Shape 0"/>
+          <p:cNvSpPr/>
+          <p:nvPr/>
+        </p:nvSpPr>
+        <p:spPr>
+          <a:xfrm>
+            <a:off x="548640" y="502920"/>
+            <a:ext cx="566928" cy="566928"/>
+          </a:xfrm>
+          <a:prstGeom prst="ellipse">
+            <a:avLst/>
+          </a:prstGeom>
+          <a:solidFill>
+            <a:srgbClr val="B5813F"/>
+          </a:solidFill>
+          <a:ln/>
+        </p:spPr>
+      </p:sp>
+      <p:pic>
+        <p:nvPicPr>
+          <p:cNvPr id="3" name="Image 0" descr="preencoded.png">    </p:cNvPr>
+          <p:cNvPicPr>
+            <a:picLocks noChangeAspect="1"/>
+          </p:cNvPicPr>
+          <p:nvPr/>
+        </p:nvPicPr>
+        <p:blipFill>
+          <a:blip r:embed="rId1"/>
+          <a:stretch>
+            <a:fillRect/>
+          </a:stretch>
+        </p:blipFill>
+        <p:spPr>
+          <a:xfrm>
+            <a:off x="616671" y="570951"/>
+            <a:ext cx="430865" cy="430865"/>
+          </a:xfrm>
+          <a:prstGeom prst="rect">
+            <a:avLst/>
+          </a:prstGeom>
+        </p:spPr>
+      </p:pic>
+      <p:sp>
+        <p:nvSpPr>
+          <p:cNvPr id="4" name="Text 1"/>
+          <p:cNvSpPr txBox="1"/>
+          <p:nvPr/>
+        </p:nvSpPr>
+        <p:spPr>
+          <a:xfrm>
+            <a:off x="1234440" y="475488"/>
+            <a:ext cx="9144000" cy="640080"/>
+          </a:xfrm>
+          <a:prstGeom prst="rect">
+            <a:avLst/>
+          </a:prstGeom>
+          <a:noFill/>
+          <a:ln/>
+        </p:spPr>
+        <p:txBody>
+          <a:bodyPr wrap="square" lIns="0" tIns="0" rIns="0" bIns="0" rtlCol="0" anchor="ctr"/>
+          <a:lstStyle/>
+          <a:p>
+            <a:pPr indent="0" marL="0">
+              <a:buNone/>
+            </a:pPr>
+            <a:r>
+              <a:rPr lang="en-US" sz="3000" b="1" dirty="0">
+                <a:solidFill>
+                  <a:srgbClr val="2C1A0E"/>
+                </a:solidFill>
+                <a:latin typeface="Cambria" pitchFamily="34" charset="0"/>
+                <a:ea typeface="Cambria" pitchFamily="34" charset="-122"/>
+                <a:cs typeface="Cambria" pitchFamily="34" charset="-120"/>
+              </a:rPr>
+              <a:t>Cycle de vie d'un document</a:t>
+            </a:r>
+            <a:endParaRPr lang="en-US" sz="3000" dirty="0"/>
+          </a:p>
+        </p:txBody>
+      </p:sp>
+      <p:sp>
+        <p:nvSpPr>
+          <p:cNvPr id="5" name="Text 2"/>
+          <p:cNvSpPr txBox="1"/>
+          <p:nvPr/>
+        </p:nvSpPr>
+        <p:spPr>
+          <a:xfrm>
+            <a:off x="1280160" y="1170432"/>
+            <a:ext cx="9692640" cy="411480"/>
+          </a:xfrm>
+          <a:prstGeom prst="rect">
+            <a:avLst/>
+          </a:prstGeom>
+          <a:noFill/>
+          <a:ln/>
+        </p:spPr>
+        <p:txBody>
+          <a:bodyPr wrap="square" lIns="0" tIns="0" rIns="0" bIns="0" rtlCol="0" anchor="ctr"/>
+          <a:lstStyle/>
+          <a:p>
+            <a:pPr indent="0" marL="0">
+              <a:buNone/>
+            </a:pPr>
+            <a:r>
+              <a:rPr lang="en-US" sz="1350" dirty="0">
+                <a:solidFill>
+                  <a:srgbClr val="7C6552"/>
+                </a:solidFill>
+                <a:latin typeface="Calibri" pitchFamily="34" charset="0"/>
+                <a:ea typeface="Calibri" pitchFamily="34" charset="-122"/>
+                <a:cs typeface="Calibri" pitchFamily="34" charset="-120"/>
+              </a:rPr>
+              <a:t>Six statuts possibles : PENDING → ACTIVE / ACTIVE_WARNING → CORRUPTED → CORBEILLE → DELETED.</a:t>
+            </a:r>
+            <a:endParaRPr lang="en-US" sz="1350" dirty="0"/>
+          </a:p>
+        </p:txBody>
+      </p:sp>
+      <p:sp>
+        <p:nvSpPr>
+          <p:cNvPr id="6" name="Shape 3"/>
+          <p:cNvSpPr/>
+          <p:nvPr/>
+        </p:nvSpPr>
+        <p:spPr>
+          <a:xfrm>
+            <a:off x="548640" y="2788920"/>
+            <a:ext cx="1755648" cy="1554480"/>
+          </a:xfrm>
+          <a:prstGeom prst="roundRect">
+            <a:avLst>
+              <a:gd name="adj" fmla="val 4706"/>
+            </a:avLst>
+          </a:prstGeom>
+          <a:solidFill>
+            <a:srgbClr val="F3E9DA"/>
+          </a:solidFill>
+          <a:ln/>
+        </p:spPr>
+      </p:sp>
+      <p:sp>
+        <p:nvSpPr>
+          <p:cNvPr id="7" name="Text 4"/>
+          <p:cNvSpPr txBox="1"/>
+          <p:nvPr/>
+        </p:nvSpPr>
+        <p:spPr>
+          <a:xfrm>
+            <a:off x="685800" y="2898648"/>
+            <a:ext cx="548640" cy="365760"/>
+          </a:xfrm>
+          <a:prstGeom prst="rect">
+            <a:avLst/>
+          </a:prstGeom>
+          <a:noFill/>
+          <a:ln/>
+        </p:spPr>
+        <p:txBody>
+          <a:bodyPr wrap="square" lIns="0" tIns="0" rIns="0" bIns="0" rtlCol="0" anchor="ctr"/>
+          <a:lstStyle/>
+          <a:p>
+            <a:pPr indent="0" marL="0">
+              <a:buNone/>
+            </a:pPr>
+            <a:r>
+              <a:rPr lang="en-US" sz="2000" b="1" dirty="0">
+                <a:solidFill>
+                  <a:srgbClr val="B5813F"/>
+                </a:solidFill>
+                <a:latin typeface="Cambria" pitchFamily="34" charset="0"/>
+                <a:ea typeface="Cambria" pitchFamily="34" charset="-122"/>
+                <a:cs typeface="Cambria" pitchFamily="34" charset="-120"/>
+              </a:rPr>
+              <a:t>1</a:t>
+            </a:r>
+            <a:endParaRPr lang="en-US" sz="2000" dirty="0"/>
+          </a:p>
+        </p:txBody>
+      </p:sp>
+      <p:sp>
+        <p:nvSpPr>
+          <p:cNvPr id="8" name="Text 5"/>
+          <p:cNvSpPr txBox="1"/>
+          <p:nvPr/>
+        </p:nvSpPr>
+        <p:spPr>
+          <a:xfrm>
+            <a:off x="685800" y="3355848"/>
+            <a:ext cx="1481328" cy="594360"/>
+          </a:xfrm>
+          <a:prstGeom prst="rect">
+            <a:avLst/>
+          </a:prstGeom>
+          <a:noFill/>
+          <a:ln/>
+        </p:spPr>
+        <p:txBody>
+          <a:bodyPr wrap="square" lIns="0" tIns="0" rIns="0" bIns="0" rtlCol="0" anchor="ctr"/>
+          <a:lstStyle/>
+          <a:p>
+            <a:pPr indent="0" marL="0">
+              <a:lnSpc>
+                <a:spcPct val="105000"/>
+              </a:lnSpc>
+              <a:buNone/>
+            </a:pPr>
+            <a:r>
+              <a:rPr lang="en-US" sz="1250" b="1" dirty="0">
+                <a:solidFill>
+                  <a:srgbClr val="2C1A0E"/>
+                </a:solidFill>
+                <a:latin typeface="Calibri" pitchFamily="34" charset="0"/>
+                <a:ea typeface="Calibri" pitchFamily="34" charset="-122"/>
+                <a:cs typeface="Calibri" pitchFamily="34" charset="-120"/>
+              </a:rPr>
+              <a:t>Upload</a:t>
+            </a:r>
+            <a:endParaRPr lang="en-US" sz="1250" dirty="0"/>
+          </a:p>
+        </p:txBody>
+      </p:sp>
+      <p:sp>
+        <p:nvSpPr>
+          <p:cNvPr id="9" name="Text 6"/>
+          <p:cNvSpPr txBox="1"/>
+          <p:nvPr/>
+        </p:nvSpPr>
+        <p:spPr>
+          <a:xfrm>
+            <a:off x="685800" y="3886200"/>
+            <a:ext cx="1481328" cy="384048"/>
+          </a:xfrm>
+          <a:prstGeom prst="rect">
+            <a:avLst/>
+          </a:prstGeom>
+          <a:noFill/>
+          <a:ln/>
+        </p:spPr>
+        <p:txBody>
+          <a:bodyPr wrap="square" lIns="0" tIns="0" rIns="0" bIns="0" rtlCol="0" anchor="ctr"/>
+          <a:lstStyle/>
+          <a:p>
+            <a:pPr indent="0" marL="0">
+              <a:buNone/>
+            </a:pPr>
+            <a:r>
+              <a:rPr lang="en-US" sz="950" dirty="0">
+                <a:solidFill>
+                  <a:srgbClr val="7C6552"/>
+                </a:solidFill>
+                <a:latin typeface="Calibri" pitchFamily="34" charset="0"/>
+                <a:ea typeface="Calibri" pitchFamily="34" charset="-122"/>
+                <a:cs typeface="Calibri" pitchFamily="34" charset="-120"/>
+              </a:rPr>
+              <a:t>docx, odt, jpg, pdf…</a:t>
+            </a:r>
+            <a:endParaRPr lang="en-US" sz="950" dirty="0"/>
+          </a:p>
+        </p:txBody>
+      </p:sp>
+      <p:sp>
+        <p:nvSpPr>
+          <p:cNvPr id="10" name="Text 7"/>
+          <p:cNvSpPr txBox="1"/>
+          <p:nvPr/>
+        </p:nvSpPr>
+        <p:spPr>
+          <a:xfrm>
+            <a:off x="2286000" y="3364992"/>
+            <a:ext cx="397764" cy="365760"/>
+          </a:xfrm>
+          <a:prstGeom prst="rect">
+            <a:avLst/>
+          </a:prstGeom>
+          <a:noFill/>
+          <a:ln/>
+        </p:spPr>
+        <p:txBody>
+          <a:bodyPr wrap="square" lIns="0" tIns="0" rIns="0" bIns="0" rtlCol="0" anchor="ctr"/>
+          <a:lstStyle/>
+          <a:p>
+            <a:pPr algn="ctr" indent="0" marL="0">
+              <a:buNone/>
+            </a:pPr>
+            <a:r>
+              <a:rPr lang="en-US" sz="1600" dirty="0">
+                <a:solidFill>
+                  <a:srgbClr val="7C6552"/>
+                </a:solidFill>
+                <a:latin typeface="Calibri" pitchFamily="34" charset="0"/>
+                <a:ea typeface="Calibri" pitchFamily="34" charset="-122"/>
+                <a:cs typeface="Calibri" pitchFamily="34" charset="-120"/>
+              </a:rPr>
+              <a:t>→</a:t>
+            </a:r>
+            <a:endParaRPr lang="en-US" sz="1600" dirty="0"/>
+          </a:p>
+        </p:txBody>
+      </p:sp>
+      <p:sp>
+        <p:nvSpPr>
+          <p:cNvPr id="11" name="Shape 8"/>
+          <p:cNvSpPr/>
+          <p:nvPr/>
+        </p:nvSpPr>
+        <p:spPr>
+          <a:xfrm>
+            <a:off x="2427732" y="2788920"/>
+            <a:ext cx="1755648" cy="1554480"/>
+          </a:xfrm>
+          <a:prstGeom prst="roundRect">
+            <a:avLst>
+              <a:gd name="adj" fmla="val 4706"/>
+            </a:avLst>
+          </a:prstGeom>
+          <a:solidFill>
+            <a:srgbClr val="F3E9DA"/>
+          </a:solidFill>
+          <a:ln/>
+        </p:spPr>
+      </p:sp>
+      <p:sp>
+        <p:nvSpPr>
+          <p:cNvPr id="12" name="Text 9"/>
+          <p:cNvSpPr txBox="1"/>
+          <p:nvPr/>
+        </p:nvSpPr>
+        <p:spPr>
+          <a:xfrm>
+            <a:off x="2564892" y="2898648"/>
+            <a:ext cx="548640" cy="365760"/>
+          </a:xfrm>
+          <a:prstGeom prst="rect">
+            <a:avLst/>
+          </a:prstGeom>
+          <a:noFill/>
+          <a:ln/>
+        </p:spPr>
+        <p:txBody>
+          <a:bodyPr wrap="square" lIns="0" tIns="0" rIns="0" bIns="0" rtlCol="0" anchor="ctr"/>
+          <a:lstStyle/>
+          <a:p>
+            <a:pPr indent="0" marL="0">
+              <a:buNone/>
+            </a:pPr>
+            <a:r>
+              <a:rPr lang="en-US" sz="2000" b="1" dirty="0">
+                <a:solidFill>
+                  <a:srgbClr val="B5813F"/>
+                </a:solidFill>
+                <a:latin typeface="Cambria" pitchFamily="34" charset="0"/>
+                <a:ea typeface="Cambria" pitchFamily="34" charset="-122"/>
+                <a:cs typeface="Cambria" pitchFamily="34" charset="-120"/>
+              </a:rPr>
+              <a:t>2</a:t>
+            </a:r>
+            <a:endParaRPr lang="en-US" sz="2000" dirty="0"/>
+          </a:p>
+        </p:txBody>
+      </p:sp>
+      <p:sp>
+        <p:nvSpPr>
+          <p:cNvPr id="13" name="Text 10"/>
+          <p:cNvSpPr txBox="1"/>
+          <p:nvPr/>
+        </p:nvSpPr>
+        <p:spPr>
+          <a:xfrm>
+            <a:off x="2564892" y="3355848"/>
+            <a:ext cx="1481328" cy="594360"/>
+          </a:xfrm>
+          <a:prstGeom prst="rect">
+            <a:avLst/>
+          </a:prstGeom>
+          <a:noFill/>
+          <a:ln/>
+        </p:spPr>
+        <p:txBody>
+          <a:bodyPr wrap="square" lIns="0" tIns="0" rIns="0" bIns="0" rtlCol="0" anchor="ctr"/>
+          <a:lstStyle/>
+          <a:p>
+            <a:pPr indent="0" marL="0">
+              <a:lnSpc>
+                <a:spcPct val="105000"/>
+              </a:lnSpc>
+              <a:buNone/>
+            </a:pPr>
+            <a:r>
+              <a:rPr lang="en-US" sz="1250" b="1" dirty="0">
+                <a:solidFill>
+                  <a:srgbClr val="2C1A0E"/>
+                </a:solidFill>
+                <a:latin typeface="Calibri" pitchFamily="34" charset="0"/>
+                <a:ea typeface="Calibri" pitchFamily="34" charset="-122"/>
+                <a:cs typeface="Calibri" pitchFamily="34" charset="-120"/>
+              </a:rPr>
+              <a:t>OCR + suggestions</a:t>
+            </a:r>
+            <a:endParaRPr lang="en-US" sz="1250" dirty="0"/>
+          </a:p>
+        </p:txBody>
+      </p:sp>
+      <p:sp>
+        <p:nvSpPr>
+          <p:cNvPr id="14" name="Text 11"/>
+          <p:cNvSpPr txBox="1"/>
+          <p:nvPr/>
+        </p:nvSpPr>
+        <p:spPr>
+          <a:xfrm>
+            <a:off x="2564892" y="3886200"/>
+            <a:ext cx="1481328" cy="384048"/>
+          </a:xfrm>
+          <a:prstGeom prst="rect">
+            <a:avLst/>
+          </a:prstGeom>
+          <a:noFill/>
+          <a:ln/>
+        </p:spPr>
+        <p:txBody>
+          <a:bodyPr wrap="square" lIns="0" tIns="0" rIns="0" bIns="0" rtlCol="0" anchor="ctr"/>
+          <a:lstStyle/>
+          <a:p>
+            <a:pPr indent="0" marL="0">
+              <a:buNone/>
+            </a:pPr>
+            <a:r>
+              <a:rPr lang="en-US" sz="950" dirty="0">
+                <a:solidFill>
+                  <a:srgbClr val="7C6552"/>
+                </a:solidFill>
+                <a:latin typeface="Calibri" pitchFamily="34" charset="0"/>
+                <a:ea typeface="Calibri" pitchFamily="34" charset="-122"/>
+                <a:cs typeface="Calibri" pitchFamily="34" charset="-120"/>
+              </a:rPr>
+              <a:t>métadonnées pré-remplies</a:t>
+            </a:r>
+            <a:endParaRPr lang="en-US" sz="950" dirty="0"/>
+          </a:p>
+        </p:txBody>
+      </p:sp>
+      <p:sp>
+        <p:nvSpPr>
+          <p:cNvPr id="15" name="Text 12"/>
+          <p:cNvSpPr txBox="1"/>
+          <p:nvPr/>
+        </p:nvSpPr>
+        <p:spPr>
+          <a:xfrm>
+            <a:off x="4165092" y="3364992"/>
+            <a:ext cx="397764" cy="365760"/>
+          </a:xfrm>
+          <a:prstGeom prst="rect">
+            <a:avLst/>
+          </a:prstGeom>
+          <a:noFill/>
+          <a:ln/>
+        </p:spPr>
+        <p:txBody>
+          <a:bodyPr wrap="square" lIns="0" tIns="0" rIns="0" bIns="0" rtlCol="0" anchor="ctr"/>
+          <a:lstStyle/>
+          <a:p>
+            <a:pPr algn="ctr" indent="0" marL="0">
+              <a:buNone/>
+            </a:pPr>
+            <a:r>
+              <a:rPr lang="en-US" sz="1600" dirty="0">
+                <a:solidFill>
+                  <a:srgbClr val="7C6552"/>
+                </a:solidFill>
+                <a:latin typeface="Calibri" pitchFamily="34" charset="0"/>
+                <a:ea typeface="Calibri" pitchFamily="34" charset="-122"/>
+                <a:cs typeface="Calibri" pitchFamily="34" charset="-120"/>
+              </a:rPr>
+              <a:t>→</a:t>
+            </a:r>
+            <a:endParaRPr lang="en-US" sz="1600" dirty="0"/>
+          </a:p>
+        </p:txBody>
+      </p:sp>
+      <p:sp>
+        <p:nvSpPr>
+          <p:cNvPr id="16" name="Shape 13"/>
+          <p:cNvSpPr/>
+          <p:nvPr/>
+        </p:nvSpPr>
+        <p:spPr>
+          <a:xfrm>
+            <a:off x="4306824" y="2788920"/>
+            <a:ext cx="1755648" cy="1554480"/>
+          </a:xfrm>
+          <a:prstGeom prst="roundRect">
+            <a:avLst>
+              <a:gd name="adj" fmla="val 4706"/>
+            </a:avLst>
+          </a:prstGeom>
+          <a:solidFill>
+            <a:srgbClr val="F3E9DA"/>
+          </a:solidFill>
+          <a:ln/>
+        </p:spPr>
+      </p:sp>
+      <p:sp>
+        <p:nvSpPr>
+          <p:cNvPr id="17" name="Text 14"/>
+          <p:cNvSpPr txBox="1"/>
+          <p:nvPr/>
+        </p:nvSpPr>
+        <p:spPr>
+          <a:xfrm>
+            <a:off x="4443984" y="2898648"/>
+            <a:ext cx="548640" cy="365760"/>
+          </a:xfrm>
+          <a:prstGeom prst="rect">
+            <a:avLst/>
+          </a:prstGeom>
+          <a:noFill/>
+          <a:ln/>
+        </p:spPr>
+        <p:txBody>
+          <a:bodyPr wrap="square" lIns="0" tIns="0" rIns="0" bIns="0" rtlCol="0" anchor="ctr"/>
+          <a:lstStyle/>
+          <a:p>
+            <a:pPr indent="0" marL="0">
+              <a:buNone/>
+            </a:pPr>
+            <a:r>
+              <a:rPr lang="en-US" sz="2000" b="1" dirty="0">
+                <a:solidFill>
+                  <a:srgbClr val="B5813F"/>
+                </a:solidFill>
+                <a:latin typeface="Cambria" pitchFamily="34" charset="0"/>
+                <a:ea typeface="Cambria" pitchFamily="34" charset="-122"/>
+                <a:cs typeface="Cambria" pitchFamily="34" charset="-120"/>
+              </a:rPr>
+              <a:t>3</a:t>
+            </a:r>
+            <a:endParaRPr lang="en-US" sz="2000" dirty="0"/>
+          </a:p>
+        </p:txBody>
+      </p:sp>
+      <p:sp>
+        <p:nvSpPr>
+          <p:cNvPr id="18" name="Text 15"/>
+          <p:cNvSpPr txBox="1"/>
+          <p:nvPr/>
+        </p:nvSpPr>
+        <p:spPr>
+          <a:xfrm>
+            <a:off x="4443984" y="3355848"/>
+            <a:ext cx="1481328" cy="594360"/>
+          </a:xfrm>
+          <a:prstGeom prst="rect">
+            <a:avLst/>
+          </a:prstGeom>
+          <a:noFill/>
+          <a:ln/>
+        </p:spPr>
+        <p:txBody>
+          <a:bodyPr wrap="square" lIns="0" tIns="0" rIns="0" bIns="0" rtlCol="0" anchor="ctr"/>
+          <a:lstStyle/>
+          <a:p>
+            <a:pPr indent="0" marL="0">
+              <a:lnSpc>
+                <a:spcPct val="105000"/>
+              </a:lnSpc>
+              <a:buNone/>
+            </a:pPr>
+            <a:r>
+              <a:rPr lang="en-US" sz="1250" b="1" dirty="0">
+                <a:solidFill>
+                  <a:srgbClr val="2C1A0E"/>
+                </a:solidFill>
+                <a:latin typeface="Calibri" pitchFamily="34" charset="0"/>
+                <a:ea typeface="Calibri" pitchFamily="34" charset="-122"/>
+                <a:cs typeface="Calibri" pitchFamily="34" charset="-120"/>
+              </a:rPr>
+              <a:t>Conversion PDF/A-3b</a:t>
+            </a:r>
+            <a:endParaRPr lang="en-US" sz="1250" dirty="0"/>
+          </a:p>
+        </p:txBody>
+      </p:sp>
+      <p:sp>
+        <p:nvSpPr>
+          <p:cNvPr id="19" name="Text 16"/>
+          <p:cNvSpPr txBox="1"/>
+          <p:nvPr/>
+        </p:nvSpPr>
+        <p:spPr>
+          <a:xfrm>
+            <a:off x="4443984" y="3886200"/>
+            <a:ext cx="1481328" cy="384048"/>
+          </a:xfrm>
+          <a:prstGeom prst="rect">
+            <a:avLst/>
+          </a:prstGeom>
+          <a:noFill/>
+          <a:ln/>
+        </p:spPr>
+        <p:txBody>
+          <a:bodyPr wrap="square" lIns="0" tIns="0" rIns="0" bIns="0" rtlCol="0" anchor="ctr"/>
+          <a:lstStyle/>
+          <a:p>
+            <a:pPr indent="0" marL="0">
+              <a:buNone/>
+            </a:pPr>
+            <a:r>
+              <a:rPr lang="en-US" sz="950" dirty="0">
+                <a:solidFill>
+                  <a:srgbClr val="7C6552"/>
+                </a:solidFill>
+                <a:latin typeface="Calibri" pitchFamily="34" charset="0"/>
+                <a:ea typeface="Calibri" pitchFamily="34" charset="-122"/>
+                <a:cs typeface="Calibri" pitchFamily="34" charset="-120"/>
+              </a:rPr>
+              <a:t>LibreOffice + PDFBox</a:t>
+            </a:r>
+            <a:endParaRPr lang="en-US" sz="950" dirty="0"/>
+          </a:p>
+        </p:txBody>
+      </p:sp>
+      <p:sp>
+        <p:nvSpPr>
+          <p:cNvPr id="20" name="Text 17"/>
+          <p:cNvSpPr txBox="1"/>
+          <p:nvPr/>
+        </p:nvSpPr>
+        <p:spPr>
+          <a:xfrm>
+            <a:off x="6044184" y="3364992"/>
+            <a:ext cx="397764" cy="365760"/>
+          </a:xfrm>
+          <a:prstGeom prst="rect">
+            <a:avLst/>
+          </a:prstGeom>
+          <a:noFill/>
+          <a:ln/>
+        </p:spPr>
+        <p:txBody>
+          <a:bodyPr wrap="square" lIns="0" tIns="0" rIns="0" bIns="0" rtlCol="0" anchor="ctr"/>
+          <a:lstStyle/>
+          <a:p>
+            <a:pPr algn="ctr" indent="0" marL="0">
+              <a:buNone/>
+            </a:pPr>
+            <a:r>
+              <a:rPr lang="en-US" sz="1600" dirty="0">
+                <a:solidFill>
+                  <a:srgbClr val="7C6552"/>
+                </a:solidFill>
+                <a:latin typeface="Calibri" pitchFamily="34" charset="0"/>
+                <a:ea typeface="Calibri" pitchFamily="34" charset="-122"/>
+                <a:cs typeface="Calibri" pitchFamily="34" charset="-120"/>
+              </a:rPr>
+              <a:t>→</a:t>
+            </a:r>
+            <a:endParaRPr lang="en-US" sz="1600" dirty="0"/>
+          </a:p>
+        </p:txBody>
+      </p:sp>
+      <p:sp>
+        <p:nvSpPr>
+          <p:cNvPr id="21" name="Shape 18"/>
+          <p:cNvSpPr/>
+          <p:nvPr/>
+        </p:nvSpPr>
+        <p:spPr>
+          <a:xfrm>
+            <a:off x="6185916" y="2788920"/>
+            <a:ext cx="1755648" cy="1554480"/>
+          </a:xfrm>
+          <a:prstGeom prst="roundRect">
+            <a:avLst>
+              <a:gd name="adj" fmla="val 4706"/>
+            </a:avLst>
+          </a:prstGeom>
+          <a:solidFill>
+            <a:srgbClr val="F3E9DA"/>
+          </a:solidFill>
+          <a:ln/>
+        </p:spPr>
+      </p:sp>
+      <p:sp>
+        <p:nvSpPr>
+          <p:cNvPr id="22" name="Text 19"/>
+          <p:cNvSpPr txBox="1"/>
+          <p:nvPr/>
+        </p:nvSpPr>
+        <p:spPr>
+          <a:xfrm>
+            <a:off x="6323076" y="2898648"/>
+            <a:ext cx="548640" cy="365760"/>
+          </a:xfrm>
+          <a:prstGeom prst="rect">
+            <a:avLst/>
+          </a:prstGeom>
+          <a:noFill/>
+          <a:ln/>
+        </p:spPr>
+        <p:txBody>
+          <a:bodyPr wrap="square" lIns="0" tIns="0" rIns="0" bIns="0" rtlCol="0" anchor="ctr"/>
+          <a:lstStyle/>
+          <a:p>
+            <a:pPr indent="0" marL="0">
+              <a:buNone/>
+            </a:pPr>
+            <a:r>
+              <a:rPr lang="en-US" sz="2000" b="1" dirty="0">
+                <a:solidFill>
+                  <a:srgbClr val="B5813F"/>
+                </a:solidFill>
+                <a:latin typeface="Cambria" pitchFamily="34" charset="0"/>
+                <a:ea typeface="Cambria" pitchFamily="34" charset="-122"/>
+                <a:cs typeface="Cambria" pitchFamily="34" charset="-120"/>
+              </a:rPr>
+              <a:t>4</a:t>
+            </a:r>
+            <a:endParaRPr lang="en-US" sz="2000" dirty="0"/>
+          </a:p>
+        </p:txBody>
+      </p:sp>
+      <p:sp>
+        <p:nvSpPr>
+          <p:cNvPr id="23" name="Text 20"/>
+          <p:cNvSpPr txBox="1"/>
+          <p:nvPr/>
+        </p:nvSpPr>
+        <p:spPr>
+          <a:xfrm>
+            <a:off x="6323076" y="3355848"/>
+            <a:ext cx="1481328" cy="594360"/>
+          </a:xfrm>
+          <a:prstGeom prst="rect">
+            <a:avLst/>
+          </a:prstGeom>
+          <a:noFill/>
+          <a:ln/>
+        </p:spPr>
+        <p:txBody>
+          <a:bodyPr wrap="square" lIns="0" tIns="0" rIns="0" bIns="0" rtlCol="0" anchor="ctr"/>
+          <a:lstStyle/>
+          <a:p>
+            <a:pPr indent="0" marL="0">
+              <a:lnSpc>
+                <a:spcPct val="105000"/>
+              </a:lnSpc>
+              <a:buNone/>
+            </a:pPr>
+            <a:r>
+              <a:rPr lang="en-US" sz="1250" b="1" dirty="0">
+                <a:solidFill>
+                  <a:srgbClr val="2C1A0E"/>
+                </a:solidFill>
+                <a:latin typeface="Calibri" pitchFamily="34" charset="0"/>
+                <a:ea typeface="Calibri" pitchFamily="34" charset="-122"/>
+                <a:cs typeface="Calibri" pitchFamily="34" charset="-120"/>
+              </a:rPr>
+              <a:t>Signature PKI</a:t>
+            </a:r>
+            <a:endParaRPr lang="en-US" sz="1250" dirty="0"/>
+          </a:p>
+        </p:txBody>
+      </p:sp>
+      <p:sp>
+        <p:nvSpPr>
+          <p:cNvPr id="24" name="Text 21"/>
+          <p:cNvSpPr txBox="1"/>
+          <p:nvPr/>
+        </p:nvSpPr>
+        <p:spPr>
+          <a:xfrm>
+            <a:off x="6323076" y="3886200"/>
+            <a:ext cx="1481328" cy="384048"/>
+          </a:xfrm>
+          <a:prstGeom prst="rect">
+            <a:avLst/>
+          </a:prstGeom>
+          <a:noFill/>
+          <a:ln/>
+        </p:spPr>
+        <p:txBody>
+          <a:bodyPr wrap="square" lIns="0" tIns="0" rIns="0" bIns="0" rtlCol="0" anchor="ctr"/>
+          <a:lstStyle/>
+          <a:p>
+            <a:pPr indent="0" marL="0">
+              <a:buNone/>
+            </a:pPr>
+            <a:r>
+              <a:rPr lang="en-US" sz="950" dirty="0">
+                <a:solidFill>
+                  <a:srgbClr val="7C6552"/>
+                </a:solidFill>
+                <a:latin typeface="Calibri" pitchFamily="34" charset="0"/>
+                <a:ea typeface="Calibri" pitchFamily="34" charset="-122"/>
+                <a:cs typeface="Calibri" pitchFamily="34" charset="-120"/>
+              </a:rPr>
+              <a:t>clé HSM de l'éditeur</a:t>
+            </a:r>
+            <a:endParaRPr lang="en-US" sz="950" dirty="0"/>
+          </a:p>
+        </p:txBody>
+      </p:sp>
+      <p:sp>
+        <p:nvSpPr>
+          <p:cNvPr id="25" name="Text 22"/>
+          <p:cNvSpPr txBox="1"/>
+          <p:nvPr/>
+        </p:nvSpPr>
+        <p:spPr>
+          <a:xfrm>
+            <a:off x="7923276" y="3364992"/>
+            <a:ext cx="397764" cy="365760"/>
+          </a:xfrm>
+          <a:prstGeom prst="rect">
+            <a:avLst/>
+          </a:prstGeom>
+          <a:noFill/>
+          <a:ln/>
+        </p:spPr>
+        <p:txBody>
+          <a:bodyPr wrap="square" lIns="0" tIns="0" rIns="0" bIns="0" rtlCol="0" anchor="ctr"/>
+          <a:lstStyle/>
+          <a:p>
+            <a:pPr algn="ctr" indent="0" marL="0">
+              <a:buNone/>
+            </a:pPr>
+            <a:r>
+              <a:rPr lang="en-US" sz="1600" dirty="0">
+                <a:solidFill>
+                  <a:srgbClr val="7C6552"/>
+                </a:solidFill>
+                <a:latin typeface="Calibri" pitchFamily="34" charset="0"/>
+                <a:ea typeface="Calibri" pitchFamily="34" charset="-122"/>
+                <a:cs typeface="Calibri" pitchFamily="34" charset="-120"/>
+              </a:rPr>
+              <a:t>→</a:t>
+            </a:r>
+            <a:endParaRPr lang="en-US" sz="1600" dirty="0"/>
+          </a:p>
+        </p:txBody>
+      </p:sp>
+      <p:sp>
+        <p:nvSpPr>
+          <p:cNvPr id="26" name="Shape 23"/>
+          <p:cNvSpPr/>
+          <p:nvPr/>
+        </p:nvSpPr>
+        <p:spPr>
+          <a:xfrm>
+            <a:off x="8065008" y="2788920"/>
+            <a:ext cx="1755648" cy="1554480"/>
+          </a:xfrm>
+          <a:prstGeom prst="roundRect">
+            <a:avLst>
+              <a:gd name="adj" fmla="val 4706"/>
+            </a:avLst>
+          </a:prstGeom>
+          <a:solidFill>
+            <a:srgbClr val="F3E9DA"/>
+          </a:solidFill>
+          <a:ln/>
+        </p:spPr>
+      </p:sp>
+      <p:sp>
+        <p:nvSpPr>
+          <p:cNvPr id="27" name="Text 24"/>
+          <p:cNvSpPr txBox="1"/>
+          <p:nvPr/>
+        </p:nvSpPr>
+        <p:spPr>
+          <a:xfrm>
+            <a:off x="8202168" y="2898648"/>
+            <a:ext cx="548640" cy="365760"/>
+          </a:xfrm>
+          <a:prstGeom prst="rect">
+            <a:avLst/>
+          </a:prstGeom>
+          <a:noFill/>
+          <a:ln/>
+        </p:spPr>
+        <p:txBody>
+          <a:bodyPr wrap="square" lIns="0" tIns="0" rIns="0" bIns="0" rtlCol="0" anchor="ctr"/>
+          <a:lstStyle/>
+          <a:p>
+            <a:pPr indent="0" marL="0">
+              <a:buNone/>
+            </a:pPr>
+            <a:r>
+              <a:rPr lang="en-US" sz="2000" b="1" dirty="0">
+                <a:solidFill>
+                  <a:srgbClr val="B5813F"/>
+                </a:solidFill>
+                <a:latin typeface="Cambria" pitchFamily="34" charset="0"/>
+                <a:ea typeface="Cambria" pitchFamily="34" charset="-122"/>
+                <a:cs typeface="Cambria" pitchFamily="34" charset="-120"/>
+              </a:rPr>
+              <a:t>5</a:t>
+            </a:r>
+            <a:endParaRPr lang="en-US" sz="2000" dirty="0"/>
+          </a:p>
+        </p:txBody>
+      </p:sp>
+      <p:sp>
+        <p:nvSpPr>
+          <p:cNvPr id="28" name="Text 25"/>
+          <p:cNvSpPr txBox="1"/>
+          <p:nvPr/>
+        </p:nvSpPr>
+        <p:spPr>
+          <a:xfrm>
+            <a:off x="8202168" y="3355848"/>
+            <a:ext cx="1481328" cy="594360"/>
+          </a:xfrm>
+          <a:prstGeom prst="rect">
+            <a:avLst/>
+          </a:prstGeom>
+          <a:noFill/>
+          <a:ln/>
+        </p:spPr>
+        <p:txBody>
+          <a:bodyPr wrap="square" lIns="0" tIns="0" rIns="0" bIns="0" rtlCol="0" anchor="ctr"/>
+          <a:lstStyle/>
+          <a:p>
+            <a:pPr indent="0" marL="0">
+              <a:lnSpc>
+                <a:spcPct val="105000"/>
+              </a:lnSpc>
+              <a:buNone/>
+            </a:pPr>
+            <a:r>
+              <a:rPr lang="en-US" sz="1250" b="1" dirty="0">
+                <a:solidFill>
+                  <a:srgbClr val="2C1A0E"/>
+                </a:solidFill>
+                <a:latin typeface="Calibri" pitchFamily="34" charset="0"/>
+                <a:ea typeface="Calibri" pitchFamily="34" charset="-122"/>
+                <a:cs typeface="Calibri" pitchFamily="34" charset="-120"/>
+              </a:rPr>
+              <a:t>Chiffrement</a:t>
+            </a:r>
+            <a:endParaRPr lang="en-US" sz="1250" dirty="0"/>
+          </a:p>
+        </p:txBody>
+      </p:sp>
+      <p:sp>
+        <p:nvSpPr>
+          <p:cNvPr id="29" name="Text 26"/>
+          <p:cNvSpPr txBox="1"/>
+          <p:nvPr/>
+        </p:nvSpPr>
+        <p:spPr>
+          <a:xfrm>
+            <a:off x="8202168" y="3886200"/>
+            <a:ext cx="1481328" cy="384048"/>
+          </a:xfrm>
+          <a:prstGeom prst="rect">
+            <a:avLst/>
+          </a:prstGeom>
+          <a:noFill/>
+          <a:ln/>
+        </p:spPr>
+        <p:txBody>
+          <a:bodyPr wrap="square" lIns="0" tIns="0" rIns="0" bIns="0" rtlCol="0" anchor="ctr"/>
+          <a:lstStyle/>
+          <a:p>
+            <a:pPr indent="0" marL="0">
+              <a:buNone/>
+            </a:pPr>
+            <a:r>
+              <a:rPr lang="en-US" sz="950" dirty="0">
+                <a:solidFill>
+                  <a:srgbClr val="7C6552"/>
+                </a:solidFill>
+                <a:latin typeface="Calibri" pitchFamily="34" charset="0"/>
+                <a:ea typeface="Calibri" pitchFamily="34" charset="-122"/>
+                <a:cs typeface="Calibri" pitchFamily="34" charset="-120"/>
+              </a:rPr>
+              <a:t>AES-256-GCM</a:t>
+            </a:r>
+            <a:endParaRPr lang="en-US" sz="950" dirty="0"/>
+          </a:p>
+        </p:txBody>
+      </p:sp>
+      <p:sp>
+        <p:nvSpPr>
+          <p:cNvPr id="30" name="Text 27"/>
+          <p:cNvSpPr txBox="1"/>
+          <p:nvPr/>
+        </p:nvSpPr>
+        <p:spPr>
+          <a:xfrm>
+            <a:off x="9802368" y="3364992"/>
+            <a:ext cx="397764" cy="365760"/>
+          </a:xfrm>
+          <a:prstGeom prst="rect">
+            <a:avLst/>
+          </a:prstGeom>
+          <a:noFill/>
+          <a:ln/>
+        </p:spPr>
+        <p:txBody>
+          <a:bodyPr wrap="square" lIns="0" tIns="0" rIns="0" bIns="0" rtlCol="0" anchor="ctr"/>
+          <a:lstStyle/>
+          <a:p>
+            <a:pPr algn="ctr" indent="0" marL="0">
+              <a:buNone/>
+            </a:pPr>
+            <a:r>
+              <a:rPr lang="en-US" sz="1600" dirty="0">
+                <a:solidFill>
+                  <a:srgbClr val="7C6552"/>
+                </a:solidFill>
+                <a:latin typeface="Calibri" pitchFamily="34" charset="0"/>
+                <a:ea typeface="Calibri" pitchFamily="34" charset="-122"/>
+                <a:cs typeface="Calibri" pitchFamily="34" charset="-120"/>
+              </a:rPr>
+              <a:t>→</a:t>
+            </a:r>
+            <a:endParaRPr lang="en-US" sz="1600" dirty="0"/>
+          </a:p>
+        </p:txBody>
+      </p:sp>
+      <p:sp>
+        <p:nvSpPr>
+          <p:cNvPr id="31" name="Shape 28"/>
+          <p:cNvSpPr/>
+          <p:nvPr/>
+        </p:nvSpPr>
+        <p:spPr>
+          <a:xfrm>
+            <a:off x="9944100" y="2788920"/>
+            <a:ext cx="1755648" cy="1554480"/>
+          </a:xfrm>
+          <a:prstGeom prst="roundRect">
+            <a:avLst>
+              <a:gd name="adj" fmla="val 4706"/>
+            </a:avLst>
+          </a:prstGeom>
+          <a:solidFill>
+            <a:srgbClr val="B5813F"/>
+          </a:solidFill>
+          <a:ln/>
+        </p:spPr>
+      </p:sp>
+      <p:sp>
+        <p:nvSpPr>
+          <p:cNvPr id="32" name="Text 29"/>
+          <p:cNvSpPr txBox="1"/>
+          <p:nvPr/>
+        </p:nvSpPr>
+        <p:spPr>
+          <a:xfrm>
+            <a:off x="10081260" y="2898648"/>
+            <a:ext cx="548640" cy="365760"/>
+          </a:xfrm>
+          <a:prstGeom prst="rect">
+            <a:avLst/>
+          </a:prstGeom>
+          <a:noFill/>
+          <a:ln/>
+        </p:spPr>
+        <p:txBody>
+          <a:bodyPr wrap="square" lIns="0" tIns="0" rIns="0" bIns="0" rtlCol="0" anchor="ctr"/>
+          <a:lstStyle/>
+          <a:p>
+            <a:pPr indent="0" marL="0">
+              <a:buNone/>
+            </a:pPr>
+            <a:r>
+              <a:rPr lang="en-US" sz="2000" b="1" dirty="0">
+                <a:solidFill>
+                  <a:srgbClr val="FFFFFF"/>
+                </a:solidFill>
+                <a:latin typeface="Cambria" pitchFamily="34" charset="0"/>
+                <a:ea typeface="Cambria" pitchFamily="34" charset="-122"/>
+                <a:cs typeface="Cambria" pitchFamily="34" charset="-120"/>
+              </a:rPr>
+              <a:t>6</a:t>
+            </a:r>
+            <a:endParaRPr lang="en-US" sz="2000" dirty="0"/>
+          </a:p>
+        </p:txBody>
+      </p:sp>
+      <p:sp>
+        <p:nvSpPr>
+          <p:cNvPr id="33" name="Text 30"/>
+          <p:cNvSpPr txBox="1"/>
+          <p:nvPr/>
+        </p:nvSpPr>
+        <p:spPr>
+          <a:xfrm>
+            <a:off x="10081260" y="3355848"/>
+            <a:ext cx="1481328" cy="594360"/>
+          </a:xfrm>
+          <a:prstGeom prst="rect">
+            <a:avLst/>
+          </a:prstGeom>
+          <a:noFill/>
+          <a:ln/>
+        </p:spPr>
+        <p:txBody>
+          <a:bodyPr wrap="square" lIns="0" tIns="0" rIns="0" bIns="0" rtlCol="0" anchor="ctr"/>
+          <a:lstStyle/>
+          <a:p>
+            <a:pPr indent="0" marL="0">
+              <a:lnSpc>
+                <a:spcPct val="105000"/>
+              </a:lnSpc>
+              <a:buNone/>
+            </a:pPr>
+            <a:r>
+              <a:rPr lang="en-US" sz="1250" b="1" dirty="0">
+                <a:solidFill>
+                  <a:srgbClr val="FFFFFF"/>
+                </a:solidFill>
+                <a:latin typeface="Calibri" pitchFamily="34" charset="0"/>
+                <a:ea typeface="Calibri" pitchFamily="34" charset="-122"/>
+                <a:cs typeface="Calibri" pitchFamily="34" charset="-120"/>
+              </a:rPr>
+              <a:t>Archivage MinIO</a:t>
+            </a:r>
+            <a:endParaRPr lang="en-US" sz="1250" dirty="0"/>
+          </a:p>
+        </p:txBody>
+      </p:sp>
+      <p:sp>
+        <p:nvSpPr>
+          <p:cNvPr id="34" name="Text 31"/>
+          <p:cNvSpPr txBox="1"/>
+          <p:nvPr/>
+        </p:nvSpPr>
+        <p:spPr>
+          <a:xfrm>
+            <a:off x="10081260" y="3886200"/>
+            <a:ext cx="1481328" cy="384048"/>
+          </a:xfrm>
+          <a:prstGeom prst="rect">
+            <a:avLst/>
+          </a:prstGeom>
+          <a:noFill/>
+          <a:ln/>
+        </p:spPr>
+        <p:txBody>
+          <a:bodyPr wrap="square" lIns="0" tIns="0" rIns="0" bIns="0" rtlCol="0" anchor="ctr"/>
+          <a:lstStyle/>
+          <a:p>
+            <a:pPr indent="0" marL="0">
+              <a:buNone/>
+            </a:pPr>
+            <a:r>
+              <a:rPr lang="en-US" sz="950" dirty="0">
+                <a:solidFill>
+                  <a:srgbClr val="F3E9DA"/>
+                </a:solidFill>
+                <a:latin typeface="Calibri" pitchFamily="34" charset="0"/>
+                <a:ea typeface="Calibri" pitchFamily="34" charset="-122"/>
+                <a:cs typeface="Calibri" pitchFamily="34" charset="-120"/>
+              </a:rPr>
+              <a:t>statut ACTIVE</a:t>
+            </a:r>
+            <a:endParaRPr lang="en-US" sz="950" dirty="0"/>
+          </a:p>
+        </p:txBody>
+      </p:sp>
+      <p:sp>
+        <p:nvSpPr>
+          <p:cNvPr id="35" name="Text 32"/>
+          <p:cNvSpPr txBox="1"/>
+          <p:nvPr/>
+        </p:nvSpPr>
+        <p:spPr>
+          <a:xfrm>
+            <a:off x="457200" y="6510528"/>
+            <a:ext cx="7315200" cy="274320"/>
+          </a:xfrm>
+          <a:prstGeom prst="rect">
+            <a:avLst/>
+          </a:prstGeom>
+          <a:noFill/>
+          <a:ln/>
+        </p:spPr>
+        <p:txBody>
+          <a:bodyPr wrap="square" lIns="0" tIns="0" rIns="0" bIns="0" rtlCol="0" anchor="ctr"/>
+          <a:lstStyle/>
+          <a:p>
+            <a:pPr indent="0" marL="0">
+              <a:buNone/>
+            </a:pPr>
+            <a:r>
+              <a:rPr lang="en-US" sz="900" dirty="0">
+                <a:solidFill>
+                  <a:srgbClr val="7C6552"/>
+                </a:solidFill>
+                <a:latin typeface="Calibri" pitchFamily="34" charset="0"/>
+                <a:ea typeface="Calibri" pitchFamily="34" charset="-122"/>
+                <a:cs typeface="Calibri" pitchFamily="34" charset="-120"/>
+              </a:rPr>
+              <a:t>MadeArchive — Documentation technique</a:t>
+            </a:r>
+            <a:endParaRPr lang="en-US" sz="900" dirty="0"/>
+          </a:p>
+        </p:txBody>
+      </p:sp>
+      <p:sp>
+        <p:nvSpPr>
+          <p:cNvPr id="36" name="Text 33"/>
+          <p:cNvSpPr txBox="1"/>
+          <p:nvPr/>
+        </p:nvSpPr>
+        <p:spPr>
+          <a:xfrm>
+            <a:off x="11338560" y="6510528"/>
+            <a:ext cx="457200" cy="274320"/>
+          </a:xfrm>
+          <a:prstGeom prst="rect">
+            <a:avLst/>
+          </a:prstGeom>
+          <a:noFill/>
+          <a:ln/>
+        </p:spPr>
+        <p:txBody>
+          <a:bodyPr wrap="square" lIns="0" tIns="0" rIns="0" bIns="0" rtlCol="0" anchor="ctr"/>
+          <a:lstStyle/>
+          <a:p>
+            <a:pPr algn="r" indent="0" marL="0">
+              <a:buNone/>
+            </a:pPr>
+            <a:r>
+              <a:rPr lang="en-US" sz="900" dirty="0">
+                <a:solidFill>
+                  <a:srgbClr val="7C6552"/>
+                </a:solidFill>
+                <a:latin typeface="Calibri" pitchFamily="34" charset="0"/>
+                <a:ea typeface="Calibri" pitchFamily="34" charset="-122"/>
+                <a:cs typeface="Calibri" pitchFamily="34" charset="-120"/>
+              </a:rPr>
+              <a:t>4</a:t>
+            </a:r>
+            <a:endParaRPr lang="en-US" sz="900" dirty="0"/>
+          </a:p>
+        </p:txBody>
+      </p:sp>
+    </p:spTree>
+  </p:cSld>
+  <p:clrMapOvr>
+    <a:masterClrMapping/>
+  </p:clrMapOvr>
+</p:sld>
+</file>
+
+<file path=ppt/slides/slide40.xml><?xml version="1.0" encoding="utf-8"?>
+<p:sld xmlns:a="http://schemas.openxmlformats.org/drawingml/2006/main" xmlns:r="http://schemas.openxmlformats.org/officeDocument/2006/relationships" xmlns:p="http://schemas.openxmlformats.org/presentationml/2006/main">
+  <p:cSld name="Slide 40">
+    <p:bg>
+      <p:bgPr>
+        <a:solidFill>
+          <a:srgbClr val="FFFFFF"/>
+        </a:solidFill>
+      </p:bgPr>
+    </p:bg>
+    <p:spTree>
+      <p:nvGrpSpPr>
+        <p:cNvPr id="1" name=""/>
+        <p:cNvGrpSpPr/>
+        <p:nvPr/>
+      </p:nvGrpSpPr>
+      <p:grpSpPr>
+        <a:xfrm>
+          <a:off x="0" y="0"/>
+          <a:ext cx="0" cy="0"/>
+          <a:chOff x="0" y="0"/>
+          <a:chExt cx="0" cy="0"/>
+        </a:xfrm>
+      </p:grpSpPr>
+      <p:sp>
+        <p:nvSpPr>
+          <p:cNvPr id="2" name="Shape 0"/>
+          <p:cNvSpPr/>
+          <p:nvPr/>
+        </p:nvSpPr>
+        <p:spPr>
+          <a:xfrm>
+            <a:off x="548640" y="411480"/>
+            <a:ext cx="502920" cy="502920"/>
+          </a:xfrm>
+          <a:prstGeom prst="ellipse">
+            <a:avLst/>
+          </a:prstGeom>
+          <a:solidFill>
+            <a:srgbClr val="B5813F"/>
+          </a:solidFill>
+          <a:ln/>
+        </p:spPr>
+      </p:sp>
+      <p:pic>
+        <p:nvPicPr>
+          <p:cNvPr id="3" name="Image 0" descr="preencoded.png">    </p:cNvPr>
+          <p:cNvPicPr>
+            <a:picLocks noChangeAspect="1"/>
+          </p:cNvPicPr>
+          <p:nvPr/>
+        </p:nvPicPr>
+        <p:blipFill>
+          <a:blip r:embed="rId1"/>
+          <a:stretch>
+            <a:fillRect/>
+          </a:stretch>
+        </p:blipFill>
+        <p:spPr>
+          <a:xfrm>
+            <a:off x="608990" y="471830"/>
+            <a:ext cx="382219" cy="382219"/>
+          </a:xfrm>
+          <a:prstGeom prst="rect">
+            <a:avLst/>
+          </a:prstGeom>
+        </p:spPr>
+      </p:pic>
+      <p:sp>
+        <p:nvSpPr>
+          <p:cNvPr id="4" name="Text 1"/>
+          <p:cNvSpPr txBox="1"/>
+          <p:nvPr/>
+        </p:nvSpPr>
+        <p:spPr>
+          <a:xfrm>
+            <a:off x="1170432" y="365760"/>
+            <a:ext cx="8229600" cy="502920"/>
+          </a:xfrm>
+          <a:prstGeom prst="rect">
+            <a:avLst/>
+          </a:prstGeom>
+          <a:noFill/>
+          <a:ln/>
+        </p:spPr>
+        <p:txBody>
+          <a:bodyPr wrap="square" lIns="0" tIns="0" rIns="0" bIns="0" rtlCol="0" anchor="ctr"/>
+          <a:lstStyle/>
+          <a:p>
+            <a:pPr indent="0" marL="0">
+              <a:buNone/>
+            </a:pPr>
+            <a:r>
+              <a:rPr lang="en-US" sz="2600" b="1" dirty="0">
+                <a:solidFill>
+                  <a:srgbClr val="2C1A0E"/>
+                </a:solidFill>
+                <a:latin typeface="Cambria" pitchFamily="34" charset="0"/>
+                <a:ea typeface="Cambria" pitchFamily="34" charset="-122"/>
+                <a:cs typeface="Cambria" pitchFamily="34" charset="-120"/>
+              </a:rPr>
+              <a:t>Tableau récapitulatif</a:t>
+            </a:r>
+            <a:endParaRPr lang="en-US" sz="2600" dirty="0"/>
+          </a:p>
+        </p:txBody>
+      </p:sp>
+      <p:sp>
+        <p:nvSpPr>
+          <p:cNvPr id="5" name="Text 2"/>
+          <p:cNvSpPr txBox="1"/>
+          <p:nvPr/>
+        </p:nvSpPr>
+        <p:spPr>
+          <a:xfrm>
+            <a:off x="10607040" y="438912"/>
+            <a:ext cx="1097280" cy="365760"/>
+          </a:xfrm>
+          <a:prstGeom prst="rect">
+            <a:avLst/>
+          </a:prstGeom>
+          <a:noFill/>
+          <a:ln/>
+        </p:spPr>
+        <p:txBody>
+          <a:bodyPr wrap="square" lIns="0" tIns="0" rIns="0" bIns="0" rtlCol="0" anchor="ctr"/>
+          <a:lstStyle/>
+          <a:p>
+            <a:pPr algn="r" indent="0" marL="0">
+              <a:buNone/>
+            </a:pPr>
+            <a:r>
+              <a:rPr lang="en-US" sz="1100" dirty="0">
+                <a:solidFill>
+                  <a:srgbClr val="7C6552"/>
+                </a:solidFill>
+                <a:latin typeface="Calibri" pitchFamily="34" charset="0"/>
+                <a:ea typeface="Calibri" pitchFamily="34" charset="-122"/>
+                <a:cs typeface="Calibri" pitchFamily="34" charset="-120"/>
+              </a:rPr>
               <a:t>1 / 3</a:t>
             </a:r>
             <a:endParaRPr lang="en-US" sz="1100" dirty="0"/>
@@ -15794,7 +19578,7 @@
       </p:sp>
       <p:graphicFrame>
         <p:nvGraphicFramePr>
-          <p:cNvPr id="38" name="Table 0"/>
+          <p:cNvPr id="41" name="Table 0"/>
           <p:cNvGraphicFramePr>
             <a:graphicFrameLocks noGrp="1"/>
           </p:cNvGraphicFramePr>
@@ -17955,7 +21739,7 @@
                 <a:ea typeface="Calibri" pitchFamily="34" charset="-122"/>
                 <a:cs typeface="Calibri" pitchFamily="34" charset="-120"/>
               </a:rPr>
-              <a:t>37</a:t>
+              <a:t>40</a:t>
             </a:r>
             <a:endParaRPr lang="en-US" sz="900" dirty="0"/>
           </a:p>
@@ -17969,9 +21753,9 @@
 </p:sld>
 </file>
 
-<file path=ppt/slides/slide38.xml><?xml version="1.0" encoding="utf-8"?>
+<file path=ppt/slides/slide41.xml><?xml version="1.0" encoding="utf-8"?>
 <p:sld xmlns:a="http://schemas.openxmlformats.org/drawingml/2006/main" xmlns:r="http://schemas.openxmlformats.org/officeDocument/2006/relationships" xmlns:p="http://schemas.openxmlformats.org/presentationml/2006/main">
-  <p:cSld name="Slide 38">
+  <p:cSld name="Slide 41">
     <p:bg>
       <p:bgPr>
         <a:solidFill>
@@ -18117,7 +21901,7 @@
       </p:sp>
       <p:graphicFrame>
         <p:nvGraphicFramePr>
-          <p:cNvPr id="39" name="Table 0"/>
+          <p:cNvPr id="42" name="Table 0"/>
           <p:cNvGraphicFramePr>
             <a:graphicFrameLocks noGrp="1"/>
           </p:cNvGraphicFramePr>
@@ -20278,7 +24062,7 @@
                 <a:ea typeface="Calibri" pitchFamily="34" charset="-122"/>
                 <a:cs typeface="Calibri" pitchFamily="34" charset="-120"/>
               </a:rPr>
-              <a:t>38</a:t>
+              <a:t>41</a:t>
             </a:r>
             <a:endParaRPr lang="en-US" sz="900" dirty="0"/>
           </a:p>
@@ -20292,9 +24076,9 @@
 </p:sld>
 </file>
 
-<file path=ppt/slides/slide39.xml><?xml version="1.0" encoding="utf-8"?>
+<file path=ppt/slides/slide42.xml><?xml version="1.0" encoding="utf-8"?>
 <p:sld xmlns:a="http://schemas.openxmlformats.org/drawingml/2006/main" xmlns:r="http://schemas.openxmlformats.org/officeDocument/2006/relationships" xmlns:p="http://schemas.openxmlformats.org/presentationml/2006/main">
-  <p:cSld name="Slide 39">
+  <p:cSld name="Slide 42">
     <p:bg>
       <p:bgPr>
         <a:solidFill>
@@ -20440,7 +24224,7 @@
       </p:sp>
       <p:graphicFrame>
         <p:nvGraphicFramePr>
-          <p:cNvPr id="40" name="Table 0"/>
+          <p:cNvPr id="43" name="Table 0"/>
           <p:cNvGraphicFramePr>
             <a:graphicFrameLocks noGrp="1"/>
           </p:cNvGraphicFramePr>
@@ -22189,1286 +25973,7 @@
                 <a:ea typeface="Calibri" pitchFamily="34" charset="-122"/>
                 <a:cs typeface="Calibri" pitchFamily="34" charset="-120"/>
               </a:rPr>
-              <a:t>39</a:t>
-            </a:r>
-            <a:endParaRPr lang="en-US" sz="900" dirty="0"/>
-          </a:p>
-        </p:txBody>
-      </p:sp>
-    </p:spTree>
-  </p:cSld>
-  <p:clrMapOvr>
-    <a:masterClrMapping/>
-  </p:clrMapOvr>
-</p:sld>
-</file>
-
-<file path=ppt/slides/slide4.xml><?xml version="1.0" encoding="utf-8"?>
-<p:sld xmlns:a="http://schemas.openxmlformats.org/drawingml/2006/main" xmlns:r="http://schemas.openxmlformats.org/officeDocument/2006/relationships" xmlns:p="http://schemas.openxmlformats.org/presentationml/2006/main">
-  <p:cSld name="Slide 4">
-    <p:bg>
-      <p:bgPr>
-        <a:solidFill>
-          <a:srgbClr val="FFFFFF"/>
-        </a:solidFill>
-      </p:bgPr>
-    </p:bg>
-    <p:spTree>
-      <p:nvGrpSpPr>
-        <p:cNvPr id="1" name=""/>
-        <p:cNvGrpSpPr/>
-        <p:nvPr/>
-      </p:nvGrpSpPr>
-      <p:grpSpPr>
-        <a:xfrm>
-          <a:off x="0" y="0"/>
-          <a:ext cx="0" cy="0"/>
-          <a:chOff x="0" y="0"/>
-          <a:chExt cx="0" cy="0"/>
-        </a:xfrm>
-      </p:grpSpPr>
-      <p:sp>
-        <p:nvSpPr>
-          <p:cNvPr id="2" name="Shape 0"/>
-          <p:cNvSpPr/>
-          <p:nvPr/>
-        </p:nvSpPr>
-        <p:spPr>
-          <a:xfrm>
-            <a:off x="548640" y="502920"/>
-            <a:ext cx="566928" cy="566928"/>
-          </a:xfrm>
-          <a:prstGeom prst="ellipse">
-            <a:avLst/>
-          </a:prstGeom>
-          <a:solidFill>
-            <a:srgbClr val="B5813F"/>
-          </a:solidFill>
-          <a:ln/>
-        </p:spPr>
-      </p:sp>
-      <p:pic>
-        <p:nvPicPr>
-          <p:cNvPr id="3" name="Image 0" descr="preencoded.png">    </p:cNvPr>
-          <p:cNvPicPr>
-            <a:picLocks noChangeAspect="1"/>
-          </p:cNvPicPr>
-          <p:nvPr/>
-        </p:nvPicPr>
-        <p:blipFill>
-          <a:blip r:embed="rId1"/>
-          <a:stretch>
-            <a:fillRect/>
-          </a:stretch>
-        </p:blipFill>
-        <p:spPr>
-          <a:xfrm>
-            <a:off x="616671" y="570951"/>
-            <a:ext cx="430865" cy="430865"/>
-          </a:xfrm>
-          <a:prstGeom prst="rect">
-            <a:avLst/>
-          </a:prstGeom>
-        </p:spPr>
-      </p:pic>
-      <p:sp>
-        <p:nvSpPr>
-          <p:cNvPr id="4" name="Text 1"/>
-          <p:cNvSpPr txBox="1"/>
-          <p:nvPr/>
-        </p:nvSpPr>
-        <p:spPr>
-          <a:xfrm>
-            <a:off x="1234440" y="475488"/>
-            <a:ext cx="9144000" cy="640080"/>
-          </a:xfrm>
-          <a:prstGeom prst="rect">
-            <a:avLst/>
-          </a:prstGeom>
-          <a:noFill/>
-          <a:ln/>
-        </p:spPr>
-        <p:txBody>
-          <a:bodyPr wrap="square" lIns="0" tIns="0" rIns="0" bIns="0" rtlCol="0" anchor="ctr"/>
-          <a:lstStyle/>
-          <a:p>
-            <a:pPr indent="0" marL="0">
-              <a:buNone/>
-            </a:pPr>
-            <a:r>
-              <a:rPr lang="en-US" sz="3000" b="1" dirty="0">
-                <a:solidFill>
-                  <a:srgbClr val="2C1A0E"/>
-                </a:solidFill>
-                <a:latin typeface="Cambria" pitchFamily="34" charset="0"/>
-                <a:ea typeface="Cambria" pitchFamily="34" charset="-122"/>
-                <a:cs typeface="Cambria" pitchFamily="34" charset="-120"/>
-              </a:rPr>
-              <a:t>Cycle de vie d'un document</a:t>
-            </a:r>
-            <a:endParaRPr lang="en-US" sz="3000" dirty="0"/>
-          </a:p>
-        </p:txBody>
-      </p:sp>
-      <p:sp>
-        <p:nvSpPr>
-          <p:cNvPr id="5" name="Text 2"/>
-          <p:cNvSpPr txBox="1"/>
-          <p:nvPr/>
-        </p:nvSpPr>
-        <p:spPr>
-          <a:xfrm>
-            <a:off x="1280160" y="1170432"/>
-            <a:ext cx="9692640" cy="411480"/>
-          </a:xfrm>
-          <a:prstGeom prst="rect">
-            <a:avLst/>
-          </a:prstGeom>
-          <a:noFill/>
-          <a:ln/>
-        </p:spPr>
-        <p:txBody>
-          <a:bodyPr wrap="square" lIns="0" tIns="0" rIns="0" bIns="0" rtlCol="0" anchor="ctr"/>
-          <a:lstStyle/>
-          <a:p>
-            <a:pPr indent="0" marL="0">
-              <a:buNone/>
-            </a:pPr>
-            <a:r>
-              <a:rPr lang="en-US" sz="1350" dirty="0">
-                <a:solidFill>
-                  <a:srgbClr val="7C6552"/>
-                </a:solidFill>
-                <a:latin typeface="Calibri" pitchFamily="34" charset="0"/>
-                <a:ea typeface="Calibri" pitchFamily="34" charset="-122"/>
-                <a:cs typeface="Calibri" pitchFamily="34" charset="-120"/>
-              </a:rPr>
-              <a:t>Six statuts possibles : PENDING → ACTIVE / ACTIVE_WARNING → CORRUPTED → CORBEILLE → DELETED.</a:t>
-            </a:r>
-            <a:endParaRPr lang="en-US" sz="1350" dirty="0"/>
-          </a:p>
-        </p:txBody>
-      </p:sp>
-      <p:sp>
-        <p:nvSpPr>
-          <p:cNvPr id="6" name="Shape 3"/>
-          <p:cNvSpPr/>
-          <p:nvPr/>
-        </p:nvSpPr>
-        <p:spPr>
-          <a:xfrm>
-            <a:off x="548640" y="2788920"/>
-            <a:ext cx="1755648" cy="1554480"/>
-          </a:xfrm>
-          <a:prstGeom prst="roundRect">
-            <a:avLst>
-              <a:gd name="adj" fmla="val 4706"/>
-            </a:avLst>
-          </a:prstGeom>
-          <a:solidFill>
-            <a:srgbClr val="F3E9DA"/>
-          </a:solidFill>
-          <a:ln/>
-        </p:spPr>
-      </p:sp>
-      <p:sp>
-        <p:nvSpPr>
-          <p:cNvPr id="7" name="Text 4"/>
-          <p:cNvSpPr txBox="1"/>
-          <p:nvPr/>
-        </p:nvSpPr>
-        <p:spPr>
-          <a:xfrm>
-            <a:off x="685800" y="2898648"/>
-            <a:ext cx="548640" cy="365760"/>
-          </a:xfrm>
-          <a:prstGeom prst="rect">
-            <a:avLst/>
-          </a:prstGeom>
-          <a:noFill/>
-          <a:ln/>
-        </p:spPr>
-        <p:txBody>
-          <a:bodyPr wrap="square" lIns="0" tIns="0" rIns="0" bIns="0" rtlCol="0" anchor="ctr"/>
-          <a:lstStyle/>
-          <a:p>
-            <a:pPr indent="0" marL="0">
-              <a:buNone/>
-            </a:pPr>
-            <a:r>
-              <a:rPr lang="en-US" sz="2000" b="1" dirty="0">
-                <a:solidFill>
-                  <a:srgbClr val="B5813F"/>
-                </a:solidFill>
-                <a:latin typeface="Cambria" pitchFamily="34" charset="0"/>
-                <a:ea typeface="Cambria" pitchFamily="34" charset="-122"/>
-                <a:cs typeface="Cambria" pitchFamily="34" charset="-120"/>
-              </a:rPr>
-              <a:t>1</a:t>
-            </a:r>
-            <a:endParaRPr lang="en-US" sz="2000" dirty="0"/>
-          </a:p>
-        </p:txBody>
-      </p:sp>
-      <p:sp>
-        <p:nvSpPr>
-          <p:cNvPr id="8" name="Text 5"/>
-          <p:cNvSpPr txBox="1"/>
-          <p:nvPr/>
-        </p:nvSpPr>
-        <p:spPr>
-          <a:xfrm>
-            <a:off x="685800" y="3355848"/>
-            <a:ext cx="1481328" cy="594360"/>
-          </a:xfrm>
-          <a:prstGeom prst="rect">
-            <a:avLst/>
-          </a:prstGeom>
-          <a:noFill/>
-          <a:ln/>
-        </p:spPr>
-        <p:txBody>
-          <a:bodyPr wrap="square" lIns="0" tIns="0" rIns="0" bIns="0" rtlCol="0" anchor="ctr"/>
-          <a:lstStyle/>
-          <a:p>
-            <a:pPr indent="0" marL="0">
-              <a:lnSpc>
-                <a:spcPct val="105000"/>
-              </a:lnSpc>
-              <a:buNone/>
-            </a:pPr>
-            <a:r>
-              <a:rPr lang="en-US" sz="1250" b="1" dirty="0">
-                <a:solidFill>
-                  <a:srgbClr val="2C1A0E"/>
-                </a:solidFill>
-                <a:latin typeface="Calibri" pitchFamily="34" charset="0"/>
-                <a:ea typeface="Calibri" pitchFamily="34" charset="-122"/>
-                <a:cs typeface="Calibri" pitchFamily="34" charset="-120"/>
-              </a:rPr>
-              <a:t>Upload</a:t>
-            </a:r>
-            <a:endParaRPr lang="en-US" sz="1250" dirty="0"/>
-          </a:p>
-        </p:txBody>
-      </p:sp>
-      <p:sp>
-        <p:nvSpPr>
-          <p:cNvPr id="9" name="Text 6"/>
-          <p:cNvSpPr txBox="1"/>
-          <p:nvPr/>
-        </p:nvSpPr>
-        <p:spPr>
-          <a:xfrm>
-            <a:off x="685800" y="3886200"/>
-            <a:ext cx="1481328" cy="384048"/>
-          </a:xfrm>
-          <a:prstGeom prst="rect">
-            <a:avLst/>
-          </a:prstGeom>
-          <a:noFill/>
-          <a:ln/>
-        </p:spPr>
-        <p:txBody>
-          <a:bodyPr wrap="square" lIns="0" tIns="0" rIns="0" bIns="0" rtlCol="0" anchor="ctr"/>
-          <a:lstStyle/>
-          <a:p>
-            <a:pPr indent="0" marL="0">
-              <a:buNone/>
-            </a:pPr>
-            <a:r>
-              <a:rPr lang="en-US" sz="950" dirty="0">
-                <a:solidFill>
-                  <a:srgbClr val="7C6552"/>
-                </a:solidFill>
-                <a:latin typeface="Calibri" pitchFamily="34" charset="0"/>
-                <a:ea typeface="Calibri" pitchFamily="34" charset="-122"/>
-                <a:cs typeface="Calibri" pitchFamily="34" charset="-120"/>
-              </a:rPr>
-              <a:t>docx, odt, jpg, pdf…</a:t>
-            </a:r>
-            <a:endParaRPr lang="en-US" sz="950" dirty="0"/>
-          </a:p>
-        </p:txBody>
-      </p:sp>
-      <p:sp>
-        <p:nvSpPr>
-          <p:cNvPr id="10" name="Text 7"/>
-          <p:cNvSpPr txBox="1"/>
-          <p:nvPr/>
-        </p:nvSpPr>
-        <p:spPr>
-          <a:xfrm>
-            <a:off x="2286000" y="3364992"/>
-            <a:ext cx="397764" cy="365760"/>
-          </a:xfrm>
-          <a:prstGeom prst="rect">
-            <a:avLst/>
-          </a:prstGeom>
-          <a:noFill/>
-          <a:ln/>
-        </p:spPr>
-        <p:txBody>
-          <a:bodyPr wrap="square" lIns="0" tIns="0" rIns="0" bIns="0" rtlCol="0" anchor="ctr"/>
-          <a:lstStyle/>
-          <a:p>
-            <a:pPr algn="ctr" indent="0" marL="0">
-              <a:buNone/>
-            </a:pPr>
-            <a:r>
-              <a:rPr lang="en-US" sz="1600" dirty="0">
-                <a:solidFill>
-                  <a:srgbClr val="7C6552"/>
-                </a:solidFill>
-                <a:latin typeface="Calibri" pitchFamily="34" charset="0"/>
-                <a:ea typeface="Calibri" pitchFamily="34" charset="-122"/>
-                <a:cs typeface="Calibri" pitchFamily="34" charset="-120"/>
-              </a:rPr>
-              <a:t>→</a:t>
-            </a:r>
-            <a:endParaRPr lang="en-US" sz="1600" dirty="0"/>
-          </a:p>
-        </p:txBody>
-      </p:sp>
-      <p:sp>
-        <p:nvSpPr>
-          <p:cNvPr id="11" name="Shape 8"/>
-          <p:cNvSpPr/>
-          <p:nvPr/>
-        </p:nvSpPr>
-        <p:spPr>
-          <a:xfrm>
-            <a:off x="2427732" y="2788920"/>
-            <a:ext cx="1755648" cy="1554480"/>
-          </a:xfrm>
-          <a:prstGeom prst="roundRect">
-            <a:avLst>
-              <a:gd name="adj" fmla="val 4706"/>
-            </a:avLst>
-          </a:prstGeom>
-          <a:solidFill>
-            <a:srgbClr val="F3E9DA"/>
-          </a:solidFill>
-          <a:ln/>
-        </p:spPr>
-      </p:sp>
-      <p:sp>
-        <p:nvSpPr>
-          <p:cNvPr id="12" name="Text 9"/>
-          <p:cNvSpPr txBox="1"/>
-          <p:nvPr/>
-        </p:nvSpPr>
-        <p:spPr>
-          <a:xfrm>
-            <a:off x="2564892" y="2898648"/>
-            <a:ext cx="548640" cy="365760"/>
-          </a:xfrm>
-          <a:prstGeom prst="rect">
-            <a:avLst/>
-          </a:prstGeom>
-          <a:noFill/>
-          <a:ln/>
-        </p:spPr>
-        <p:txBody>
-          <a:bodyPr wrap="square" lIns="0" tIns="0" rIns="0" bIns="0" rtlCol="0" anchor="ctr"/>
-          <a:lstStyle/>
-          <a:p>
-            <a:pPr indent="0" marL="0">
-              <a:buNone/>
-            </a:pPr>
-            <a:r>
-              <a:rPr lang="en-US" sz="2000" b="1" dirty="0">
-                <a:solidFill>
-                  <a:srgbClr val="B5813F"/>
-                </a:solidFill>
-                <a:latin typeface="Cambria" pitchFamily="34" charset="0"/>
-                <a:ea typeface="Cambria" pitchFamily="34" charset="-122"/>
-                <a:cs typeface="Cambria" pitchFamily="34" charset="-120"/>
-              </a:rPr>
-              <a:t>2</a:t>
-            </a:r>
-            <a:endParaRPr lang="en-US" sz="2000" dirty="0"/>
-          </a:p>
-        </p:txBody>
-      </p:sp>
-      <p:sp>
-        <p:nvSpPr>
-          <p:cNvPr id="13" name="Text 10"/>
-          <p:cNvSpPr txBox="1"/>
-          <p:nvPr/>
-        </p:nvSpPr>
-        <p:spPr>
-          <a:xfrm>
-            <a:off x="2564892" y="3355848"/>
-            <a:ext cx="1481328" cy="594360"/>
-          </a:xfrm>
-          <a:prstGeom prst="rect">
-            <a:avLst/>
-          </a:prstGeom>
-          <a:noFill/>
-          <a:ln/>
-        </p:spPr>
-        <p:txBody>
-          <a:bodyPr wrap="square" lIns="0" tIns="0" rIns="0" bIns="0" rtlCol="0" anchor="ctr"/>
-          <a:lstStyle/>
-          <a:p>
-            <a:pPr indent="0" marL="0">
-              <a:lnSpc>
-                <a:spcPct val="105000"/>
-              </a:lnSpc>
-              <a:buNone/>
-            </a:pPr>
-            <a:r>
-              <a:rPr lang="en-US" sz="1250" b="1" dirty="0">
-                <a:solidFill>
-                  <a:srgbClr val="2C1A0E"/>
-                </a:solidFill>
-                <a:latin typeface="Calibri" pitchFamily="34" charset="0"/>
-                <a:ea typeface="Calibri" pitchFamily="34" charset="-122"/>
-                <a:cs typeface="Calibri" pitchFamily="34" charset="-120"/>
-              </a:rPr>
-              <a:t>OCR + suggestions</a:t>
-            </a:r>
-            <a:endParaRPr lang="en-US" sz="1250" dirty="0"/>
-          </a:p>
-        </p:txBody>
-      </p:sp>
-      <p:sp>
-        <p:nvSpPr>
-          <p:cNvPr id="14" name="Text 11"/>
-          <p:cNvSpPr txBox="1"/>
-          <p:nvPr/>
-        </p:nvSpPr>
-        <p:spPr>
-          <a:xfrm>
-            <a:off x="2564892" y="3886200"/>
-            <a:ext cx="1481328" cy="384048"/>
-          </a:xfrm>
-          <a:prstGeom prst="rect">
-            <a:avLst/>
-          </a:prstGeom>
-          <a:noFill/>
-          <a:ln/>
-        </p:spPr>
-        <p:txBody>
-          <a:bodyPr wrap="square" lIns="0" tIns="0" rIns="0" bIns="0" rtlCol="0" anchor="ctr"/>
-          <a:lstStyle/>
-          <a:p>
-            <a:pPr indent="0" marL="0">
-              <a:buNone/>
-            </a:pPr>
-            <a:r>
-              <a:rPr lang="en-US" sz="950" dirty="0">
-                <a:solidFill>
-                  <a:srgbClr val="7C6552"/>
-                </a:solidFill>
-                <a:latin typeface="Calibri" pitchFamily="34" charset="0"/>
-                <a:ea typeface="Calibri" pitchFamily="34" charset="-122"/>
-                <a:cs typeface="Calibri" pitchFamily="34" charset="-120"/>
-              </a:rPr>
-              <a:t>métadonnées pré-remplies</a:t>
-            </a:r>
-            <a:endParaRPr lang="en-US" sz="950" dirty="0"/>
-          </a:p>
-        </p:txBody>
-      </p:sp>
-      <p:sp>
-        <p:nvSpPr>
-          <p:cNvPr id="15" name="Text 12"/>
-          <p:cNvSpPr txBox="1"/>
-          <p:nvPr/>
-        </p:nvSpPr>
-        <p:spPr>
-          <a:xfrm>
-            <a:off x="4165092" y="3364992"/>
-            <a:ext cx="397764" cy="365760"/>
-          </a:xfrm>
-          <a:prstGeom prst="rect">
-            <a:avLst/>
-          </a:prstGeom>
-          <a:noFill/>
-          <a:ln/>
-        </p:spPr>
-        <p:txBody>
-          <a:bodyPr wrap="square" lIns="0" tIns="0" rIns="0" bIns="0" rtlCol="0" anchor="ctr"/>
-          <a:lstStyle/>
-          <a:p>
-            <a:pPr algn="ctr" indent="0" marL="0">
-              <a:buNone/>
-            </a:pPr>
-            <a:r>
-              <a:rPr lang="en-US" sz="1600" dirty="0">
-                <a:solidFill>
-                  <a:srgbClr val="7C6552"/>
-                </a:solidFill>
-                <a:latin typeface="Calibri" pitchFamily="34" charset="0"/>
-                <a:ea typeface="Calibri" pitchFamily="34" charset="-122"/>
-                <a:cs typeface="Calibri" pitchFamily="34" charset="-120"/>
-              </a:rPr>
-              <a:t>→</a:t>
-            </a:r>
-            <a:endParaRPr lang="en-US" sz="1600" dirty="0"/>
-          </a:p>
-        </p:txBody>
-      </p:sp>
-      <p:sp>
-        <p:nvSpPr>
-          <p:cNvPr id="16" name="Shape 13"/>
-          <p:cNvSpPr/>
-          <p:nvPr/>
-        </p:nvSpPr>
-        <p:spPr>
-          <a:xfrm>
-            <a:off x="4306824" y="2788920"/>
-            <a:ext cx="1755648" cy="1554480"/>
-          </a:xfrm>
-          <a:prstGeom prst="roundRect">
-            <a:avLst>
-              <a:gd name="adj" fmla="val 4706"/>
-            </a:avLst>
-          </a:prstGeom>
-          <a:solidFill>
-            <a:srgbClr val="F3E9DA"/>
-          </a:solidFill>
-          <a:ln/>
-        </p:spPr>
-      </p:sp>
-      <p:sp>
-        <p:nvSpPr>
-          <p:cNvPr id="17" name="Text 14"/>
-          <p:cNvSpPr txBox="1"/>
-          <p:nvPr/>
-        </p:nvSpPr>
-        <p:spPr>
-          <a:xfrm>
-            <a:off x="4443984" y="2898648"/>
-            <a:ext cx="548640" cy="365760"/>
-          </a:xfrm>
-          <a:prstGeom prst="rect">
-            <a:avLst/>
-          </a:prstGeom>
-          <a:noFill/>
-          <a:ln/>
-        </p:spPr>
-        <p:txBody>
-          <a:bodyPr wrap="square" lIns="0" tIns="0" rIns="0" bIns="0" rtlCol="0" anchor="ctr"/>
-          <a:lstStyle/>
-          <a:p>
-            <a:pPr indent="0" marL="0">
-              <a:buNone/>
-            </a:pPr>
-            <a:r>
-              <a:rPr lang="en-US" sz="2000" b="1" dirty="0">
-                <a:solidFill>
-                  <a:srgbClr val="B5813F"/>
-                </a:solidFill>
-                <a:latin typeface="Cambria" pitchFamily="34" charset="0"/>
-                <a:ea typeface="Cambria" pitchFamily="34" charset="-122"/>
-                <a:cs typeface="Cambria" pitchFamily="34" charset="-120"/>
-              </a:rPr>
-              <a:t>3</a:t>
-            </a:r>
-            <a:endParaRPr lang="en-US" sz="2000" dirty="0"/>
-          </a:p>
-        </p:txBody>
-      </p:sp>
-      <p:sp>
-        <p:nvSpPr>
-          <p:cNvPr id="18" name="Text 15"/>
-          <p:cNvSpPr txBox="1"/>
-          <p:nvPr/>
-        </p:nvSpPr>
-        <p:spPr>
-          <a:xfrm>
-            <a:off x="4443984" y="3355848"/>
-            <a:ext cx="1481328" cy="594360"/>
-          </a:xfrm>
-          <a:prstGeom prst="rect">
-            <a:avLst/>
-          </a:prstGeom>
-          <a:noFill/>
-          <a:ln/>
-        </p:spPr>
-        <p:txBody>
-          <a:bodyPr wrap="square" lIns="0" tIns="0" rIns="0" bIns="0" rtlCol="0" anchor="ctr"/>
-          <a:lstStyle/>
-          <a:p>
-            <a:pPr indent="0" marL="0">
-              <a:lnSpc>
-                <a:spcPct val="105000"/>
-              </a:lnSpc>
-              <a:buNone/>
-            </a:pPr>
-            <a:r>
-              <a:rPr lang="en-US" sz="1250" b="1" dirty="0">
-                <a:solidFill>
-                  <a:srgbClr val="2C1A0E"/>
-                </a:solidFill>
-                <a:latin typeface="Calibri" pitchFamily="34" charset="0"/>
-                <a:ea typeface="Calibri" pitchFamily="34" charset="-122"/>
-                <a:cs typeface="Calibri" pitchFamily="34" charset="-120"/>
-              </a:rPr>
-              <a:t>Conversion PDF/A-3b</a:t>
-            </a:r>
-            <a:endParaRPr lang="en-US" sz="1250" dirty="0"/>
-          </a:p>
-        </p:txBody>
-      </p:sp>
-      <p:sp>
-        <p:nvSpPr>
-          <p:cNvPr id="19" name="Text 16"/>
-          <p:cNvSpPr txBox="1"/>
-          <p:nvPr/>
-        </p:nvSpPr>
-        <p:spPr>
-          <a:xfrm>
-            <a:off x="4443984" y="3886200"/>
-            <a:ext cx="1481328" cy="384048"/>
-          </a:xfrm>
-          <a:prstGeom prst="rect">
-            <a:avLst/>
-          </a:prstGeom>
-          <a:noFill/>
-          <a:ln/>
-        </p:spPr>
-        <p:txBody>
-          <a:bodyPr wrap="square" lIns="0" tIns="0" rIns="0" bIns="0" rtlCol="0" anchor="ctr"/>
-          <a:lstStyle/>
-          <a:p>
-            <a:pPr indent="0" marL="0">
-              <a:buNone/>
-            </a:pPr>
-            <a:r>
-              <a:rPr lang="en-US" sz="950" dirty="0">
-                <a:solidFill>
-                  <a:srgbClr val="7C6552"/>
-                </a:solidFill>
-                <a:latin typeface="Calibri" pitchFamily="34" charset="0"/>
-                <a:ea typeface="Calibri" pitchFamily="34" charset="-122"/>
-                <a:cs typeface="Calibri" pitchFamily="34" charset="-120"/>
-              </a:rPr>
-              <a:t>LibreOffice + PDFBox</a:t>
-            </a:r>
-            <a:endParaRPr lang="en-US" sz="950" dirty="0"/>
-          </a:p>
-        </p:txBody>
-      </p:sp>
-      <p:sp>
-        <p:nvSpPr>
-          <p:cNvPr id="20" name="Text 17"/>
-          <p:cNvSpPr txBox="1"/>
-          <p:nvPr/>
-        </p:nvSpPr>
-        <p:spPr>
-          <a:xfrm>
-            <a:off x="6044184" y="3364992"/>
-            <a:ext cx="397764" cy="365760"/>
-          </a:xfrm>
-          <a:prstGeom prst="rect">
-            <a:avLst/>
-          </a:prstGeom>
-          <a:noFill/>
-          <a:ln/>
-        </p:spPr>
-        <p:txBody>
-          <a:bodyPr wrap="square" lIns="0" tIns="0" rIns="0" bIns="0" rtlCol="0" anchor="ctr"/>
-          <a:lstStyle/>
-          <a:p>
-            <a:pPr algn="ctr" indent="0" marL="0">
-              <a:buNone/>
-            </a:pPr>
-            <a:r>
-              <a:rPr lang="en-US" sz="1600" dirty="0">
-                <a:solidFill>
-                  <a:srgbClr val="7C6552"/>
-                </a:solidFill>
-                <a:latin typeface="Calibri" pitchFamily="34" charset="0"/>
-                <a:ea typeface="Calibri" pitchFamily="34" charset="-122"/>
-                <a:cs typeface="Calibri" pitchFamily="34" charset="-120"/>
-              </a:rPr>
-              <a:t>→</a:t>
-            </a:r>
-            <a:endParaRPr lang="en-US" sz="1600" dirty="0"/>
-          </a:p>
-        </p:txBody>
-      </p:sp>
-      <p:sp>
-        <p:nvSpPr>
-          <p:cNvPr id="21" name="Shape 18"/>
-          <p:cNvSpPr/>
-          <p:nvPr/>
-        </p:nvSpPr>
-        <p:spPr>
-          <a:xfrm>
-            <a:off x="6185916" y="2788920"/>
-            <a:ext cx="1755648" cy="1554480"/>
-          </a:xfrm>
-          <a:prstGeom prst="roundRect">
-            <a:avLst>
-              <a:gd name="adj" fmla="val 4706"/>
-            </a:avLst>
-          </a:prstGeom>
-          <a:solidFill>
-            <a:srgbClr val="F3E9DA"/>
-          </a:solidFill>
-          <a:ln/>
-        </p:spPr>
-      </p:sp>
-      <p:sp>
-        <p:nvSpPr>
-          <p:cNvPr id="22" name="Text 19"/>
-          <p:cNvSpPr txBox="1"/>
-          <p:nvPr/>
-        </p:nvSpPr>
-        <p:spPr>
-          <a:xfrm>
-            <a:off x="6323076" y="2898648"/>
-            <a:ext cx="548640" cy="365760"/>
-          </a:xfrm>
-          <a:prstGeom prst="rect">
-            <a:avLst/>
-          </a:prstGeom>
-          <a:noFill/>
-          <a:ln/>
-        </p:spPr>
-        <p:txBody>
-          <a:bodyPr wrap="square" lIns="0" tIns="0" rIns="0" bIns="0" rtlCol="0" anchor="ctr"/>
-          <a:lstStyle/>
-          <a:p>
-            <a:pPr indent="0" marL="0">
-              <a:buNone/>
-            </a:pPr>
-            <a:r>
-              <a:rPr lang="en-US" sz="2000" b="1" dirty="0">
-                <a:solidFill>
-                  <a:srgbClr val="B5813F"/>
-                </a:solidFill>
-                <a:latin typeface="Cambria" pitchFamily="34" charset="0"/>
-                <a:ea typeface="Cambria" pitchFamily="34" charset="-122"/>
-                <a:cs typeface="Cambria" pitchFamily="34" charset="-120"/>
-              </a:rPr>
-              <a:t>4</a:t>
-            </a:r>
-            <a:endParaRPr lang="en-US" sz="2000" dirty="0"/>
-          </a:p>
-        </p:txBody>
-      </p:sp>
-      <p:sp>
-        <p:nvSpPr>
-          <p:cNvPr id="23" name="Text 20"/>
-          <p:cNvSpPr txBox="1"/>
-          <p:nvPr/>
-        </p:nvSpPr>
-        <p:spPr>
-          <a:xfrm>
-            <a:off x="6323076" y="3355848"/>
-            <a:ext cx="1481328" cy="594360"/>
-          </a:xfrm>
-          <a:prstGeom prst="rect">
-            <a:avLst/>
-          </a:prstGeom>
-          <a:noFill/>
-          <a:ln/>
-        </p:spPr>
-        <p:txBody>
-          <a:bodyPr wrap="square" lIns="0" tIns="0" rIns="0" bIns="0" rtlCol="0" anchor="ctr"/>
-          <a:lstStyle/>
-          <a:p>
-            <a:pPr indent="0" marL="0">
-              <a:lnSpc>
-                <a:spcPct val="105000"/>
-              </a:lnSpc>
-              <a:buNone/>
-            </a:pPr>
-            <a:r>
-              <a:rPr lang="en-US" sz="1250" b="1" dirty="0">
-                <a:solidFill>
-                  <a:srgbClr val="2C1A0E"/>
-                </a:solidFill>
-                <a:latin typeface="Calibri" pitchFamily="34" charset="0"/>
-                <a:ea typeface="Calibri" pitchFamily="34" charset="-122"/>
-                <a:cs typeface="Calibri" pitchFamily="34" charset="-120"/>
-              </a:rPr>
-              <a:t>Signature PKI</a:t>
-            </a:r>
-            <a:endParaRPr lang="en-US" sz="1250" dirty="0"/>
-          </a:p>
-        </p:txBody>
-      </p:sp>
-      <p:sp>
-        <p:nvSpPr>
-          <p:cNvPr id="24" name="Text 21"/>
-          <p:cNvSpPr txBox="1"/>
-          <p:nvPr/>
-        </p:nvSpPr>
-        <p:spPr>
-          <a:xfrm>
-            <a:off x="6323076" y="3886200"/>
-            <a:ext cx="1481328" cy="384048"/>
-          </a:xfrm>
-          <a:prstGeom prst="rect">
-            <a:avLst/>
-          </a:prstGeom>
-          <a:noFill/>
-          <a:ln/>
-        </p:spPr>
-        <p:txBody>
-          <a:bodyPr wrap="square" lIns="0" tIns="0" rIns="0" bIns="0" rtlCol="0" anchor="ctr"/>
-          <a:lstStyle/>
-          <a:p>
-            <a:pPr indent="0" marL="0">
-              <a:buNone/>
-            </a:pPr>
-            <a:r>
-              <a:rPr lang="en-US" sz="950" dirty="0">
-                <a:solidFill>
-                  <a:srgbClr val="7C6552"/>
-                </a:solidFill>
-                <a:latin typeface="Calibri" pitchFamily="34" charset="0"/>
-                <a:ea typeface="Calibri" pitchFamily="34" charset="-122"/>
-                <a:cs typeface="Calibri" pitchFamily="34" charset="-120"/>
-              </a:rPr>
-              <a:t>clé HSM de l'éditeur</a:t>
-            </a:r>
-            <a:endParaRPr lang="en-US" sz="950" dirty="0"/>
-          </a:p>
-        </p:txBody>
-      </p:sp>
-      <p:sp>
-        <p:nvSpPr>
-          <p:cNvPr id="25" name="Text 22"/>
-          <p:cNvSpPr txBox="1"/>
-          <p:nvPr/>
-        </p:nvSpPr>
-        <p:spPr>
-          <a:xfrm>
-            <a:off x="7923276" y="3364992"/>
-            <a:ext cx="397764" cy="365760"/>
-          </a:xfrm>
-          <a:prstGeom prst="rect">
-            <a:avLst/>
-          </a:prstGeom>
-          <a:noFill/>
-          <a:ln/>
-        </p:spPr>
-        <p:txBody>
-          <a:bodyPr wrap="square" lIns="0" tIns="0" rIns="0" bIns="0" rtlCol="0" anchor="ctr"/>
-          <a:lstStyle/>
-          <a:p>
-            <a:pPr algn="ctr" indent="0" marL="0">
-              <a:buNone/>
-            </a:pPr>
-            <a:r>
-              <a:rPr lang="en-US" sz="1600" dirty="0">
-                <a:solidFill>
-                  <a:srgbClr val="7C6552"/>
-                </a:solidFill>
-                <a:latin typeface="Calibri" pitchFamily="34" charset="0"/>
-                <a:ea typeface="Calibri" pitchFamily="34" charset="-122"/>
-                <a:cs typeface="Calibri" pitchFamily="34" charset="-120"/>
-              </a:rPr>
-              <a:t>→</a:t>
-            </a:r>
-            <a:endParaRPr lang="en-US" sz="1600" dirty="0"/>
-          </a:p>
-        </p:txBody>
-      </p:sp>
-      <p:sp>
-        <p:nvSpPr>
-          <p:cNvPr id="26" name="Shape 23"/>
-          <p:cNvSpPr/>
-          <p:nvPr/>
-        </p:nvSpPr>
-        <p:spPr>
-          <a:xfrm>
-            <a:off x="8065008" y="2788920"/>
-            <a:ext cx="1755648" cy="1554480"/>
-          </a:xfrm>
-          <a:prstGeom prst="roundRect">
-            <a:avLst>
-              <a:gd name="adj" fmla="val 4706"/>
-            </a:avLst>
-          </a:prstGeom>
-          <a:solidFill>
-            <a:srgbClr val="F3E9DA"/>
-          </a:solidFill>
-          <a:ln/>
-        </p:spPr>
-      </p:sp>
-      <p:sp>
-        <p:nvSpPr>
-          <p:cNvPr id="27" name="Text 24"/>
-          <p:cNvSpPr txBox="1"/>
-          <p:nvPr/>
-        </p:nvSpPr>
-        <p:spPr>
-          <a:xfrm>
-            <a:off x="8202168" y="2898648"/>
-            <a:ext cx="548640" cy="365760"/>
-          </a:xfrm>
-          <a:prstGeom prst="rect">
-            <a:avLst/>
-          </a:prstGeom>
-          <a:noFill/>
-          <a:ln/>
-        </p:spPr>
-        <p:txBody>
-          <a:bodyPr wrap="square" lIns="0" tIns="0" rIns="0" bIns="0" rtlCol="0" anchor="ctr"/>
-          <a:lstStyle/>
-          <a:p>
-            <a:pPr indent="0" marL="0">
-              <a:buNone/>
-            </a:pPr>
-            <a:r>
-              <a:rPr lang="en-US" sz="2000" b="1" dirty="0">
-                <a:solidFill>
-                  <a:srgbClr val="B5813F"/>
-                </a:solidFill>
-                <a:latin typeface="Cambria" pitchFamily="34" charset="0"/>
-                <a:ea typeface="Cambria" pitchFamily="34" charset="-122"/>
-                <a:cs typeface="Cambria" pitchFamily="34" charset="-120"/>
-              </a:rPr>
-              <a:t>5</a:t>
-            </a:r>
-            <a:endParaRPr lang="en-US" sz="2000" dirty="0"/>
-          </a:p>
-        </p:txBody>
-      </p:sp>
-      <p:sp>
-        <p:nvSpPr>
-          <p:cNvPr id="28" name="Text 25"/>
-          <p:cNvSpPr txBox="1"/>
-          <p:nvPr/>
-        </p:nvSpPr>
-        <p:spPr>
-          <a:xfrm>
-            <a:off x="8202168" y="3355848"/>
-            <a:ext cx="1481328" cy="594360"/>
-          </a:xfrm>
-          <a:prstGeom prst="rect">
-            <a:avLst/>
-          </a:prstGeom>
-          <a:noFill/>
-          <a:ln/>
-        </p:spPr>
-        <p:txBody>
-          <a:bodyPr wrap="square" lIns="0" tIns="0" rIns="0" bIns="0" rtlCol="0" anchor="ctr"/>
-          <a:lstStyle/>
-          <a:p>
-            <a:pPr indent="0" marL="0">
-              <a:lnSpc>
-                <a:spcPct val="105000"/>
-              </a:lnSpc>
-              <a:buNone/>
-            </a:pPr>
-            <a:r>
-              <a:rPr lang="en-US" sz="1250" b="1" dirty="0">
-                <a:solidFill>
-                  <a:srgbClr val="2C1A0E"/>
-                </a:solidFill>
-                <a:latin typeface="Calibri" pitchFamily="34" charset="0"/>
-                <a:ea typeface="Calibri" pitchFamily="34" charset="-122"/>
-                <a:cs typeface="Calibri" pitchFamily="34" charset="-120"/>
-              </a:rPr>
-              <a:t>Chiffrement</a:t>
-            </a:r>
-            <a:endParaRPr lang="en-US" sz="1250" dirty="0"/>
-          </a:p>
-        </p:txBody>
-      </p:sp>
-      <p:sp>
-        <p:nvSpPr>
-          <p:cNvPr id="29" name="Text 26"/>
-          <p:cNvSpPr txBox="1"/>
-          <p:nvPr/>
-        </p:nvSpPr>
-        <p:spPr>
-          <a:xfrm>
-            <a:off x="8202168" y="3886200"/>
-            <a:ext cx="1481328" cy="384048"/>
-          </a:xfrm>
-          <a:prstGeom prst="rect">
-            <a:avLst/>
-          </a:prstGeom>
-          <a:noFill/>
-          <a:ln/>
-        </p:spPr>
-        <p:txBody>
-          <a:bodyPr wrap="square" lIns="0" tIns="0" rIns="0" bIns="0" rtlCol="0" anchor="ctr"/>
-          <a:lstStyle/>
-          <a:p>
-            <a:pPr indent="0" marL="0">
-              <a:buNone/>
-            </a:pPr>
-            <a:r>
-              <a:rPr lang="en-US" sz="950" dirty="0">
-                <a:solidFill>
-                  <a:srgbClr val="7C6552"/>
-                </a:solidFill>
-                <a:latin typeface="Calibri" pitchFamily="34" charset="0"/>
-                <a:ea typeface="Calibri" pitchFamily="34" charset="-122"/>
-                <a:cs typeface="Calibri" pitchFamily="34" charset="-120"/>
-              </a:rPr>
-              <a:t>AES-256-GCM</a:t>
-            </a:r>
-            <a:endParaRPr lang="en-US" sz="950" dirty="0"/>
-          </a:p>
-        </p:txBody>
-      </p:sp>
-      <p:sp>
-        <p:nvSpPr>
-          <p:cNvPr id="30" name="Text 27"/>
-          <p:cNvSpPr txBox="1"/>
-          <p:nvPr/>
-        </p:nvSpPr>
-        <p:spPr>
-          <a:xfrm>
-            <a:off x="9802368" y="3364992"/>
-            <a:ext cx="397764" cy="365760"/>
-          </a:xfrm>
-          <a:prstGeom prst="rect">
-            <a:avLst/>
-          </a:prstGeom>
-          <a:noFill/>
-          <a:ln/>
-        </p:spPr>
-        <p:txBody>
-          <a:bodyPr wrap="square" lIns="0" tIns="0" rIns="0" bIns="0" rtlCol="0" anchor="ctr"/>
-          <a:lstStyle/>
-          <a:p>
-            <a:pPr algn="ctr" indent="0" marL="0">
-              <a:buNone/>
-            </a:pPr>
-            <a:r>
-              <a:rPr lang="en-US" sz="1600" dirty="0">
-                <a:solidFill>
-                  <a:srgbClr val="7C6552"/>
-                </a:solidFill>
-                <a:latin typeface="Calibri" pitchFamily="34" charset="0"/>
-                <a:ea typeface="Calibri" pitchFamily="34" charset="-122"/>
-                <a:cs typeface="Calibri" pitchFamily="34" charset="-120"/>
-              </a:rPr>
-              <a:t>→</a:t>
-            </a:r>
-            <a:endParaRPr lang="en-US" sz="1600" dirty="0"/>
-          </a:p>
-        </p:txBody>
-      </p:sp>
-      <p:sp>
-        <p:nvSpPr>
-          <p:cNvPr id="31" name="Shape 28"/>
-          <p:cNvSpPr/>
-          <p:nvPr/>
-        </p:nvSpPr>
-        <p:spPr>
-          <a:xfrm>
-            <a:off x="9944100" y="2788920"/>
-            <a:ext cx="1755648" cy="1554480"/>
-          </a:xfrm>
-          <a:prstGeom prst="roundRect">
-            <a:avLst>
-              <a:gd name="adj" fmla="val 4706"/>
-            </a:avLst>
-          </a:prstGeom>
-          <a:solidFill>
-            <a:srgbClr val="B5813F"/>
-          </a:solidFill>
-          <a:ln/>
-        </p:spPr>
-      </p:sp>
-      <p:sp>
-        <p:nvSpPr>
-          <p:cNvPr id="32" name="Text 29"/>
-          <p:cNvSpPr txBox="1"/>
-          <p:nvPr/>
-        </p:nvSpPr>
-        <p:spPr>
-          <a:xfrm>
-            <a:off x="10081260" y="2898648"/>
-            <a:ext cx="548640" cy="365760"/>
-          </a:xfrm>
-          <a:prstGeom prst="rect">
-            <a:avLst/>
-          </a:prstGeom>
-          <a:noFill/>
-          <a:ln/>
-        </p:spPr>
-        <p:txBody>
-          <a:bodyPr wrap="square" lIns="0" tIns="0" rIns="0" bIns="0" rtlCol="0" anchor="ctr"/>
-          <a:lstStyle/>
-          <a:p>
-            <a:pPr indent="0" marL="0">
-              <a:buNone/>
-            </a:pPr>
-            <a:r>
-              <a:rPr lang="en-US" sz="2000" b="1" dirty="0">
-                <a:solidFill>
-                  <a:srgbClr val="FFFFFF"/>
-                </a:solidFill>
-                <a:latin typeface="Cambria" pitchFamily="34" charset="0"/>
-                <a:ea typeface="Cambria" pitchFamily="34" charset="-122"/>
-                <a:cs typeface="Cambria" pitchFamily="34" charset="-120"/>
-              </a:rPr>
-              <a:t>6</a:t>
-            </a:r>
-            <a:endParaRPr lang="en-US" sz="2000" dirty="0"/>
-          </a:p>
-        </p:txBody>
-      </p:sp>
-      <p:sp>
-        <p:nvSpPr>
-          <p:cNvPr id="33" name="Text 30"/>
-          <p:cNvSpPr txBox="1"/>
-          <p:nvPr/>
-        </p:nvSpPr>
-        <p:spPr>
-          <a:xfrm>
-            <a:off x="10081260" y="3355848"/>
-            <a:ext cx="1481328" cy="594360"/>
-          </a:xfrm>
-          <a:prstGeom prst="rect">
-            <a:avLst/>
-          </a:prstGeom>
-          <a:noFill/>
-          <a:ln/>
-        </p:spPr>
-        <p:txBody>
-          <a:bodyPr wrap="square" lIns="0" tIns="0" rIns="0" bIns="0" rtlCol="0" anchor="ctr"/>
-          <a:lstStyle/>
-          <a:p>
-            <a:pPr indent="0" marL="0">
-              <a:lnSpc>
-                <a:spcPct val="105000"/>
-              </a:lnSpc>
-              <a:buNone/>
-            </a:pPr>
-            <a:r>
-              <a:rPr lang="en-US" sz="1250" b="1" dirty="0">
-                <a:solidFill>
-                  <a:srgbClr val="FFFFFF"/>
-                </a:solidFill>
-                <a:latin typeface="Calibri" pitchFamily="34" charset="0"/>
-                <a:ea typeface="Calibri" pitchFamily="34" charset="-122"/>
-                <a:cs typeface="Calibri" pitchFamily="34" charset="-120"/>
-              </a:rPr>
-              <a:t>Archivage MinIO</a:t>
-            </a:r>
-            <a:endParaRPr lang="en-US" sz="1250" dirty="0"/>
-          </a:p>
-        </p:txBody>
-      </p:sp>
-      <p:sp>
-        <p:nvSpPr>
-          <p:cNvPr id="34" name="Text 31"/>
-          <p:cNvSpPr txBox="1"/>
-          <p:nvPr/>
-        </p:nvSpPr>
-        <p:spPr>
-          <a:xfrm>
-            <a:off x="10081260" y="3886200"/>
-            <a:ext cx="1481328" cy="384048"/>
-          </a:xfrm>
-          <a:prstGeom prst="rect">
-            <a:avLst/>
-          </a:prstGeom>
-          <a:noFill/>
-          <a:ln/>
-        </p:spPr>
-        <p:txBody>
-          <a:bodyPr wrap="square" lIns="0" tIns="0" rIns="0" bIns="0" rtlCol="0" anchor="ctr"/>
-          <a:lstStyle/>
-          <a:p>
-            <a:pPr indent="0" marL="0">
-              <a:buNone/>
-            </a:pPr>
-            <a:r>
-              <a:rPr lang="en-US" sz="950" dirty="0">
-                <a:solidFill>
-                  <a:srgbClr val="F3E9DA"/>
-                </a:solidFill>
-                <a:latin typeface="Calibri" pitchFamily="34" charset="0"/>
-                <a:ea typeface="Calibri" pitchFamily="34" charset="-122"/>
-                <a:cs typeface="Calibri" pitchFamily="34" charset="-120"/>
-              </a:rPr>
-              <a:t>statut ACTIVE</a:t>
-            </a:r>
-            <a:endParaRPr lang="en-US" sz="950" dirty="0"/>
-          </a:p>
-        </p:txBody>
-      </p:sp>
-      <p:sp>
-        <p:nvSpPr>
-          <p:cNvPr id="35" name="Text 32"/>
-          <p:cNvSpPr txBox="1"/>
-          <p:nvPr/>
-        </p:nvSpPr>
-        <p:spPr>
-          <a:xfrm>
-            <a:off x="457200" y="6510528"/>
-            <a:ext cx="7315200" cy="274320"/>
-          </a:xfrm>
-          <a:prstGeom prst="rect">
-            <a:avLst/>
-          </a:prstGeom>
-          <a:noFill/>
-          <a:ln/>
-        </p:spPr>
-        <p:txBody>
-          <a:bodyPr wrap="square" lIns="0" tIns="0" rIns="0" bIns="0" rtlCol="0" anchor="ctr"/>
-          <a:lstStyle/>
-          <a:p>
-            <a:pPr indent="0" marL="0">
-              <a:buNone/>
-            </a:pPr>
-            <a:r>
-              <a:rPr lang="en-US" sz="900" dirty="0">
-                <a:solidFill>
-                  <a:srgbClr val="7C6552"/>
-                </a:solidFill>
-                <a:latin typeface="Calibri" pitchFamily="34" charset="0"/>
-                <a:ea typeface="Calibri" pitchFamily="34" charset="-122"/>
-                <a:cs typeface="Calibri" pitchFamily="34" charset="-120"/>
-              </a:rPr>
-              <a:t>MadeArchive — Documentation technique</a:t>
-            </a:r>
-            <a:endParaRPr lang="en-US" sz="900" dirty="0"/>
-          </a:p>
-        </p:txBody>
-      </p:sp>
-      <p:sp>
-        <p:nvSpPr>
-          <p:cNvPr id="36" name="Text 33"/>
-          <p:cNvSpPr txBox="1"/>
-          <p:nvPr/>
-        </p:nvSpPr>
-        <p:spPr>
-          <a:xfrm>
-            <a:off x="11338560" y="6510528"/>
-            <a:ext cx="457200" cy="274320"/>
-          </a:xfrm>
-          <a:prstGeom prst="rect">
-            <a:avLst/>
-          </a:prstGeom>
-          <a:noFill/>
-          <a:ln/>
-        </p:spPr>
-        <p:txBody>
-          <a:bodyPr wrap="square" lIns="0" tIns="0" rIns="0" bIns="0" rtlCol="0" anchor="ctr"/>
-          <a:lstStyle/>
-          <a:p>
-            <a:pPr algn="r" indent="0" marL="0">
-              <a:buNone/>
-            </a:pPr>
-            <a:r>
-              <a:rPr lang="en-US" sz="900" dirty="0">
-                <a:solidFill>
-                  <a:srgbClr val="7C6552"/>
-                </a:solidFill>
-                <a:latin typeface="Calibri" pitchFamily="34" charset="0"/>
-                <a:ea typeface="Calibri" pitchFamily="34" charset="-122"/>
-                <a:cs typeface="Calibri" pitchFamily="34" charset="-120"/>
-              </a:rPr>
-              <a:t>4</a:t>
+              <a:t>42</a:t>
             </a:r>
             <a:endParaRPr lang="en-US" sz="900" dirty="0"/>
           </a:p>

--- a/docs/documentation-application.pptx
+++ b/docs/documentation-application.pptx
@@ -47,9 +47,16 @@
     <p:sldId id="295" r:id="rId41"/>
     <p:sldId id="296" r:id="rId42"/>
     <p:sldId id="297" r:id="rId43"/>
+    <p:sldId id="298" r:id="rId44"/>
+    <p:sldId id="299" r:id="rId45"/>
+    <p:sldId id="300" r:id="rId46"/>
+    <p:sldId id="301" r:id="rId47"/>
+    <p:sldId id="302" r:id="rId48"/>
+    <p:sldId id="303" r:id="rId49"/>
+    <p:sldId id="304" r:id="rId50"/>
   </p:sldIdLst>
   <p:notesMasterIdLst>
-    <p:notesMasterId r:id="rId44"/>
+    <p:notesMasterId r:id="rId51"/>
   </p:notesMasterIdLst>
   <p:sldSz cx="12192000" cy="6858000"/>
   <p:notesSz cx="6858000" cy="12192000"/>
@@ -3735,6 +3742,622 @@
             <a:fld id="{F7021451-1387-4CA6-816F-3879F97B5CBC}" type="slidenum">
               <a:rPr lang="en-US"/>
               <a:t>42</a:t>
+            </a:fld>
+            <a:endParaRPr lang="en-US"/>
+          </a:p>
+        </p:txBody>
+      </p:sp>
+    </p:spTree>
+    <p:extLst>
+      <p:ext uri="{BB962C8B-B14F-4D97-AF65-F5344CB8AC3E}">
+        <p14:creationId xmlns:p14="http://schemas.microsoft.com/office/powerpoint/2010/main" val="1024086991"/>
+      </p:ext>
+    </p:extLst>
+  </p:cSld>
+  <p:clrMapOvr>
+    <a:masterClrMapping/>
+  </p:clrMapOvr>
+</p:notes>
+</file>
+
+<file path=ppt/notesSlides/notesSlide43.xml><?xml version="1.0" encoding="utf-8"?>
+<p:notes xmlns:a="http://schemas.openxmlformats.org/drawingml/2006/main" xmlns:r="http://schemas.openxmlformats.org/officeDocument/2006/relationships" xmlns:p="http://schemas.openxmlformats.org/presentationml/2006/main">
+  <p:cSld>
+    <p:spTree>
+      <p:nvGrpSpPr>
+        <p:cNvPr id="1" name=""/>
+        <p:cNvGrpSpPr/>
+        <p:nvPr/>
+      </p:nvGrpSpPr>
+      <p:grpSpPr>
+        <a:xfrm>
+          <a:off x="0" y="0"/>
+          <a:ext cx="0" cy="0"/>
+          <a:chOff x="0" y="0"/>
+          <a:chExt cx="0" cy="0"/>
+        </a:xfrm>
+      </p:grpSpPr>
+      <p:sp>
+        <p:nvSpPr>
+          <p:cNvPr id="2" name="Slide Image Placeholder 1"/>
+          <p:cNvSpPr>
+            <a:spLocks noGrp="1" noRot="1" noChangeAspect="1"/>
+          </p:cNvSpPr>
+          <p:nvPr>
+            <p:ph type="sldImg"/>
+          </p:nvPr>
+        </p:nvSpPr>
+        <p:spPr/>
+      </p:sp>
+      <p:sp>
+        <p:nvSpPr>
+          <p:cNvPr id="3" name="Notes Placeholder 2"/>
+          <p:cNvSpPr>
+            <a:spLocks noGrp="1"/>
+          </p:cNvSpPr>
+          <p:nvPr>
+            <p:ph type="body" idx="1"/>
+          </p:nvPr>
+        </p:nvSpPr>
+        <p:spPr/>
+        <p:txBody>
+          <a:bodyPr/>
+          <a:lstStyle/>
+          <a:p>
+            <a:r>
+              <a:rPr lang="en-US" dirty="0"/>
+              <a:t/>
+            </a:r>
+            <a:endParaRPr lang="en-US" dirty="0"/>
+          </a:p>
+        </p:txBody>
+      </p:sp>
+      <p:sp>
+        <p:nvSpPr>
+          <p:cNvPr id="4" name="Slide Number Placeholder 3"/>
+          <p:cNvSpPr>
+            <a:spLocks noGrp="1"/>
+          </p:cNvSpPr>
+          <p:nvPr>
+            <p:ph type="sldNum" sz="quarter" idx="10"/>
+          </p:nvPr>
+        </p:nvSpPr>
+        <p:spPr/>
+        <p:txBody>
+          <a:bodyPr/>
+          <a:lstStyle/>
+          <a:p>
+            <a:fld id="{F7021451-1387-4CA6-816F-3879F97B5CBC}" type="slidenum">
+              <a:rPr lang="en-US"/>
+              <a:t>43</a:t>
+            </a:fld>
+            <a:endParaRPr lang="en-US"/>
+          </a:p>
+        </p:txBody>
+      </p:sp>
+    </p:spTree>
+    <p:extLst>
+      <p:ext uri="{BB962C8B-B14F-4D97-AF65-F5344CB8AC3E}">
+        <p14:creationId xmlns:p14="http://schemas.microsoft.com/office/powerpoint/2010/main" val="1024086991"/>
+      </p:ext>
+    </p:extLst>
+  </p:cSld>
+  <p:clrMapOvr>
+    <a:masterClrMapping/>
+  </p:clrMapOvr>
+</p:notes>
+</file>
+
+<file path=ppt/notesSlides/notesSlide44.xml><?xml version="1.0" encoding="utf-8"?>
+<p:notes xmlns:a="http://schemas.openxmlformats.org/drawingml/2006/main" xmlns:r="http://schemas.openxmlformats.org/officeDocument/2006/relationships" xmlns:p="http://schemas.openxmlformats.org/presentationml/2006/main">
+  <p:cSld>
+    <p:spTree>
+      <p:nvGrpSpPr>
+        <p:cNvPr id="1" name=""/>
+        <p:cNvGrpSpPr/>
+        <p:nvPr/>
+      </p:nvGrpSpPr>
+      <p:grpSpPr>
+        <a:xfrm>
+          <a:off x="0" y="0"/>
+          <a:ext cx="0" cy="0"/>
+          <a:chOff x="0" y="0"/>
+          <a:chExt cx="0" cy="0"/>
+        </a:xfrm>
+      </p:grpSpPr>
+      <p:sp>
+        <p:nvSpPr>
+          <p:cNvPr id="2" name="Slide Image Placeholder 1"/>
+          <p:cNvSpPr>
+            <a:spLocks noGrp="1" noRot="1" noChangeAspect="1"/>
+          </p:cNvSpPr>
+          <p:nvPr>
+            <p:ph type="sldImg"/>
+          </p:nvPr>
+        </p:nvSpPr>
+        <p:spPr/>
+      </p:sp>
+      <p:sp>
+        <p:nvSpPr>
+          <p:cNvPr id="3" name="Notes Placeholder 2"/>
+          <p:cNvSpPr>
+            <a:spLocks noGrp="1"/>
+          </p:cNvSpPr>
+          <p:nvPr>
+            <p:ph type="body" idx="1"/>
+          </p:nvPr>
+        </p:nvSpPr>
+        <p:spPr/>
+        <p:txBody>
+          <a:bodyPr/>
+          <a:lstStyle/>
+          <a:p>
+            <a:r>
+              <a:rPr lang="en-US" dirty="0"/>
+              <a:t/>
+            </a:r>
+            <a:endParaRPr lang="en-US" dirty="0"/>
+          </a:p>
+        </p:txBody>
+      </p:sp>
+      <p:sp>
+        <p:nvSpPr>
+          <p:cNvPr id="4" name="Slide Number Placeholder 3"/>
+          <p:cNvSpPr>
+            <a:spLocks noGrp="1"/>
+          </p:cNvSpPr>
+          <p:nvPr>
+            <p:ph type="sldNum" sz="quarter" idx="10"/>
+          </p:nvPr>
+        </p:nvSpPr>
+        <p:spPr/>
+        <p:txBody>
+          <a:bodyPr/>
+          <a:lstStyle/>
+          <a:p>
+            <a:fld id="{F7021451-1387-4CA6-816F-3879F97B5CBC}" type="slidenum">
+              <a:rPr lang="en-US"/>
+              <a:t>44</a:t>
+            </a:fld>
+            <a:endParaRPr lang="en-US"/>
+          </a:p>
+        </p:txBody>
+      </p:sp>
+    </p:spTree>
+    <p:extLst>
+      <p:ext uri="{BB962C8B-B14F-4D97-AF65-F5344CB8AC3E}">
+        <p14:creationId xmlns:p14="http://schemas.microsoft.com/office/powerpoint/2010/main" val="1024086991"/>
+      </p:ext>
+    </p:extLst>
+  </p:cSld>
+  <p:clrMapOvr>
+    <a:masterClrMapping/>
+  </p:clrMapOvr>
+</p:notes>
+</file>
+
+<file path=ppt/notesSlides/notesSlide45.xml><?xml version="1.0" encoding="utf-8"?>
+<p:notes xmlns:a="http://schemas.openxmlformats.org/drawingml/2006/main" xmlns:r="http://schemas.openxmlformats.org/officeDocument/2006/relationships" xmlns:p="http://schemas.openxmlformats.org/presentationml/2006/main">
+  <p:cSld>
+    <p:spTree>
+      <p:nvGrpSpPr>
+        <p:cNvPr id="1" name=""/>
+        <p:cNvGrpSpPr/>
+        <p:nvPr/>
+      </p:nvGrpSpPr>
+      <p:grpSpPr>
+        <a:xfrm>
+          <a:off x="0" y="0"/>
+          <a:ext cx="0" cy="0"/>
+          <a:chOff x="0" y="0"/>
+          <a:chExt cx="0" cy="0"/>
+        </a:xfrm>
+      </p:grpSpPr>
+      <p:sp>
+        <p:nvSpPr>
+          <p:cNvPr id="2" name="Slide Image Placeholder 1"/>
+          <p:cNvSpPr>
+            <a:spLocks noGrp="1" noRot="1" noChangeAspect="1"/>
+          </p:cNvSpPr>
+          <p:nvPr>
+            <p:ph type="sldImg"/>
+          </p:nvPr>
+        </p:nvSpPr>
+        <p:spPr/>
+      </p:sp>
+      <p:sp>
+        <p:nvSpPr>
+          <p:cNvPr id="3" name="Notes Placeholder 2"/>
+          <p:cNvSpPr>
+            <a:spLocks noGrp="1"/>
+          </p:cNvSpPr>
+          <p:nvPr>
+            <p:ph type="body" idx="1"/>
+          </p:nvPr>
+        </p:nvSpPr>
+        <p:spPr/>
+        <p:txBody>
+          <a:bodyPr/>
+          <a:lstStyle/>
+          <a:p>
+            <a:r>
+              <a:rPr lang="en-US" dirty="0"/>
+              <a:t/>
+            </a:r>
+            <a:endParaRPr lang="en-US" dirty="0"/>
+          </a:p>
+        </p:txBody>
+      </p:sp>
+      <p:sp>
+        <p:nvSpPr>
+          <p:cNvPr id="4" name="Slide Number Placeholder 3"/>
+          <p:cNvSpPr>
+            <a:spLocks noGrp="1"/>
+          </p:cNvSpPr>
+          <p:nvPr>
+            <p:ph type="sldNum" sz="quarter" idx="10"/>
+          </p:nvPr>
+        </p:nvSpPr>
+        <p:spPr/>
+        <p:txBody>
+          <a:bodyPr/>
+          <a:lstStyle/>
+          <a:p>
+            <a:fld id="{F7021451-1387-4CA6-816F-3879F97B5CBC}" type="slidenum">
+              <a:rPr lang="en-US"/>
+              <a:t>45</a:t>
+            </a:fld>
+            <a:endParaRPr lang="en-US"/>
+          </a:p>
+        </p:txBody>
+      </p:sp>
+    </p:spTree>
+    <p:extLst>
+      <p:ext uri="{BB962C8B-B14F-4D97-AF65-F5344CB8AC3E}">
+        <p14:creationId xmlns:p14="http://schemas.microsoft.com/office/powerpoint/2010/main" val="1024086991"/>
+      </p:ext>
+    </p:extLst>
+  </p:cSld>
+  <p:clrMapOvr>
+    <a:masterClrMapping/>
+  </p:clrMapOvr>
+</p:notes>
+</file>
+
+<file path=ppt/notesSlides/notesSlide46.xml><?xml version="1.0" encoding="utf-8"?>
+<p:notes xmlns:a="http://schemas.openxmlformats.org/drawingml/2006/main" xmlns:r="http://schemas.openxmlformats.org/officeDocument/2006/relationships" xmlns:p="http://schemas.openxmlformats.org/presentationml/2006/main">
+  <p:cSld>
+    <p:spTree>
+      <p:nvGrpSpPr>
+        <p:cNvPr id="1" name=""/>
+        <p:cNvGrpSpPr/>
+        <p:nvPr/>
+      </p:nvGrpSpPr>
+      <p:grpSpPr>
+        <a:xfrm>
+          <a:off x="0" y="0"/>
+          <a:ext cx="0" cy="0"/>
+          <a:chOff x="0" y="0"/>
+          <a:chExt cx="0" cy="0"/>
+        </a:xfrm>
+      </p:grpSpPr>
+      <p:sp>
+        <p:nvSpPr>
+          <p:cNvPr id="2" name="Slide Image Placeholder 1"/>
+          <p:cNvSpPr>
+            <a:spLocks noGrp="1" noRot="1" noChangeAspect="1"/>
+          </p:cNvSpPr>
+          <p:nvPr>
+            <p:ph type="sldImg"/>
+          </p:nvPr>
+        </p:nvSpPr>
+        <p:spPr/>
+      </p:sp>
+      <p:sp>
+        <p:nvSpPr>
+          <p:cNvPr id="3" name="Notes Placeholder 2"/>
+          <p:cNvSpPr>
+            <a:spLocks noGrp="1"/>
+          </p:cNvSpPr>
+          <p:nvPr>
+            <p:ph type="body" idx="1"/>
+          </p:nvPr>
+        </p:nvSpPr>
+        <p:spPr/>
+        <p:txBody>
+          <a:bodyPr/>
+          <a:lstStyle/>
+          <a:p>
+            <a:r>
+              <a:rPr lang="en-US" dirty="0"/>
+              <a:t/>
+            </a:r>
+            <a:endParaRPr lang="en-US" dirty="0"/>
+          </a:p>
+        </p:txBody>
+      </p:sp>
+      <p:sp>
+        <p:nvSpPr>
+          <p:cNvPr id="4" name="Slide Number Placeholder 3"/>
+          <p:cNvSpPr>
+            <a:spLocks noGrp="1"/>
+          </p:cNvSpPr>
+          <p:nvPr>
+            <p:ph type="sldNum" sz="quarter" idx="10"/>
+          </p:nvPr>
+        </p:nvSpPr>
+        <p:spPr/>
+        <p:txBody>
+          <a:bodyPr/>
+          <a:lstStyle/>
+          <a:p>
+            <a:fld id="{F7021451-1387-4CA6-816F-3879F97B5CBC}" type="slidenum">
+              <a:rPr lang="en-US"/>
+              <a:t>46</a:t>
+            </a:fld>
+            <a:endParaRPr lang="en-US"/>
+          </a:p>
+        </p:txBody>
+      </p:sp>
+    </p:spTree>
+    <p:extLst>
+      <p:ext uri="{BB962C8B-B14F-4D97-AF65-F5344CB8AC3E}">
+        <p14:creationId xmlns:p14="http://schemas.microsoft.com/office/powerpoint/2010/main" val="1024086991"/>
+      </p:ext>
+    </p:extLst>
+  </p:cSld>
+  <p:clrMapOvr>
+    <a:masterClrMapping/>
+  </p:clrMapOvr>
+</p:notes>
+</file>
+
+<file path=ppt/notesSlides/notesSlide47.xml><?xml version="1.0" encoding="utf-8"?>
+<p:notes xmlns:a="http://schemas.openxmlformats.org/drawingml/2006/main" xmlns:r="http://schemas.openxmlformats.org/officeDocument/2006/relationships" xmlns:p="http://schemas.openxmlformats.org/presentationml/2006/main">
+  <p:cSld>
+    <p:spTree>
+      <p:nvGrpSpPr>
+        <p:cNvPr id="1" name=""/>
+        <p:cNvGrpSpPr/>
+        <p:nvPr/>
+      </p:nvGrpSpPr>
+      <p:grpSpPr>
+        <a:xfrm>
+          <a:off x="0" y="0"/>
+          <a:ext cx="0" cy="0"/>
+          <a:chOff x="0" y="0"/>
+          <a:chExt cx="0" cy="0"/>
+        </a:xfrm>
+      </p:grpSpPr>
+      <p:sp>
+        <p:nvSpPr>
+          <p:cNvPr id="2" name="Slide Image Placeholder 1"/>
+          <p:cNvSpPr>
+            <a:spLocks noGrp="1" noRot="1" noChangeAspect="1"/>
+          </p:cNvSpPr>
+          <p:nvPr>
+            <p:ph type="sldImg"/>
+          </p:nvPr>
+        </p:nvSpPr>
+        <p:spPr/>
+      </p:sp>
+      <p:sp>
+        <p:nvSpPr>
+          <p:cNvPr id="3" name="Notes Placeholder 2"/>
+          <p:cNvSpPr>
+            <a:spLocks noGrp="1"/>
+          </p:cNvSpPr>
+          <p:nvPr>
+            <p:ph type="body" idx="1"/>
+          </p:nvPr>
+        </p:nvSpPr>
+        <p:spPr/>
+        <p:txBody>
+          <a:bodyPr/>
+          <a:lstStyle/>
+          <a:p>
+            <a:r>
+              <a:rPr lang="en-US" dirty="0"/>
+              <a:t/>
+            </a:r>
+            <a:endParaRPr lang="en-US" dirty="0"/>
+          </a:p>
+        </p:txBody>
+      </p:sp>
+      <p:sp>
+        <p:nvSpPr>
+          <p:cNvPr id="4" name="Slide Number Placeholder 3"/>
+          <p:cNvSpPr>
+            <a:spLocks noGrp="1"/>
+          </p:cNvSpPr>
+          <p:nvPr>
+            <p:ph type="sldNum" sz="quarter" idx="10"/>
+          </p:nvPr>
+        </p:nvSpPr>
+        <p:spPr/>
+        <p:txBody>
+          <a:bodyPr/>
+          <a:lstStyle/>
+          <a:p>
+            <a:fld id="{F7021451-1387-4CA6-816F-3879F97B5CBC}" type="slidenum">
+              <a:rPr lang="en-US"/>
+              <a:t>47</a:t>
+            </a:fld>
+            <a:endParaRPr lang="en-US"/>
+          </a:p>
+        </p:txBody>
+      </p:sp>
+    </p:spTree>
+    <p:extLst>
+      <p:ext uri="{BB962C8B-B14F-4D97-AF65-F5344CB8AC3E}">
+        <p14:creationId xmlns:p14="http://schemas.microsoft.com/office/powerpoint/2010/main" val="1024086991"/>
+      </p:ext>
+    </p:extLst>
+  </p:cSld>
+  <p:clrMapOvr>
+    <a:masterClrMapping/>
+  </p:clrMapOvr>
+</p:notes>
+</file>
+
+<file path=ppt/notesSlides/notesSlide48.xml><?xml version="1.0" encoding="utf-8"?>
+<p:notes xmlns:a="http://schemas.openxmlformats.org/drawingml/2006/main" xmlns:r="http://schemas.openxmlformats.org/officeDocument/2006/relationships" xmlns:p="http://schemas.openxmlformats.org/presentationml/2006/main">
+  <p:cSld>
+    <p:spTree>
+      <p:nvGrpSpPr>
+        <p:cNvPr id="1" name=""/>
+        <p:cNvGrpSpPr/>
+        <p:nvPr/>
+      </p:nvGrpSpPr>
+      <p:grpSpPr>
+        <a:xfrm>
+          <a:off x="0" y="0"/>
+          <a:ext cx="0" cy="0"/>
+          <a:chOff x="0" y="0"/>
+          <a:chExt cx="0" cy="0"/>
+        </a:xfrm>
+      </p:grpSpPr>
+      <p:sp>
+        <p:nvSpPr>
+          <p:cNvPr id="2" name="Slide Image Placeholder 1"/>
+          <p:cNvSpPr>
+            <a:spLocks noGrp="1" noRot="1" noChangeAspect="1"/>
+          </p:cNvSpPr>
+          <p:nvPr>
+            <p:ph type="sldImg"/>
+          </p:nvPr>
+        </p:nvSpPr>
+        <p:spPr/>
+      </p:sp>
+      <p:sp>
+        <p:nvSpPr>
+          <p:cNvPr id="3" name="Notes Placeholder 2"/>
+          <p:cNvSpPr>
+            <a:spLocks noGrp="1"/>
+          </p:cNvSpPr>
+          <p:nvPr>
+            <p:ph type="body" idx="1"/>
+          </p:nvPr>
+        </p:nvSpPr>
+        <p:spPr/>
+        <p:txBody>
+          <a:bodyPr/>
+          <a:lstStyle/>
+          <a:p>
+            <a:r>
+              <a:rPr lang="en-US" dirty="0"/>
+              <a:t/>
+            </a:r>
+            <a:endParaRPr lang="en-US" dirty="0"/>
+          </a:p>
+        </p:txBody>
+      </p:sp>
+      <p:sp>
+        <p:nvSpPr>
+          <p:cNvPr id="4" name="Slide Number Placeholder 3"/>
+          <p:cNvSpPr>
+            <a:spLocks noGrp="1"/>
+          </p:cNvSpPr>
+          <p:nvPr>
+            <p:ph type="sldNum" sz="quarter" idx="10"/>
+          </p:nvPr>
+        </p:nvSpPr>
+        <p:spPr/>
+        <p:txBody>
+          <a:bodyPr/>
+          <a:lstStyle/>
+          <a:p>
+            <a:fld id="{F7021451-1387-4CA6-816F-3879F97B5CBC}" type="slidenum">
+              <a:rPr lang="en-US"/>
+              <a:t>48</a:t>
+            </a:fld>
+            <a:endParaRPr lang="en-US"/>
+          </a:p>
+        </p:txBody>
+      </p:sp>
+    </p:spTree>
+    <p:extLst>
+      <p:ext uri="{BB962C8B-B14F-4D97-AF65-F5344CB8AC3E}">
+        <p14:creationId xmlns:p14="http://schemas.microsoft.com/office/powerpoint/2010/main" val="1024086991"/>
+      </p:ext>
+    </p:extLst>
+  </p:cSld>
+  <p:clrMapOvr>
+    <a:masterClrMapping/>
+  </p:clrMapOvr>
+</p:notes>
+</file>
+
+<file path=ppt/notesSlides/notesSlide49.xml><?xml version="1.0" encoding="utf-8"?>
+<p:notes xmlns:a="http://schemas.openxmlformats.org/drawingml/2006/main" xmlns:r="http://schemas.openxmlformats.org/officeDocument/2006/relationships" xmlns:p="http://schemas.openxmlformats.org/presentationml/2006/main">
+  <p:cSld>
+    <p:spTree>
+      <p:nvGrpSpPr>
+        <p:cNvPr id="1" name=""/>
+        <p:cNvGrpSpPr/>
+        <p:nvPr/>
+      </p:nvGrpSpPr>
+      <p:grpSpPr>
+        <a:xfrm>
+          <a:off x="0" y="0"/>
+          <a:ext cx="0" cy="0"/>
+          <a:chOff x="0" y="0"/>
+          <a:chExt cx="0" cy="0"/>
+        </a:xfrm>
+      </p:grpSpPr>
+      <p:sp>
+        <p:nvSpPr>
+          <p:cNvPr id="2" name="Slide Image Placeholder 1"/>
+          <p:cNvSpPr>
+            <a:spLocks noGrp="1" noRot="1" noChangeAspect="1"/>
+          </p:cNvSpPr>
+          <p:nvPr>
+            <p:ph type="sldImg"/>
+          </p:nvPr>
+        </p:nvSpPr>
+        <p:spPr/>
+      </p:sp>
+      <p:sp>
+        <p:nvSpPr>
+          <p:cNvPr id="3" name="Notes Placeholder 2"/>
+          <p:cNvSpPr>
+            <a:spLocks noGrp="1"/>
+          </p:cNvSpPr>
+          <p:nvPr>
+            <p:ph type="body" idx="1"/>
+          </p:nvPr>
+        </p:nvSpPr>
+        <p:spPr/>
+        <p:txBody>
+          <a:bodyPr/>
+          <a:lstStyle/>
+          <a:p>
+            <a:r>
+              <a:rPr lang="en-US" dirty="0"/>
+              <a:t/>
+            </a:r>
+            <a:endParaRPr lang="en-US" dirty="0"/>
+          </a:p>
+        </p:txBody>
+      </p:sp>
+      <p:sp>
+        <p:nvSpPr>
+          <p:cNvPr id="4" name="Slide Number Placeholder 3"/>
+          <p:cNvSpPr>
+            <a:spLocks noGrp="1"/>
+          </p:cNvSpPr>
+          <p:nvPr>
+            <p:ph type="sldNum" sz="quarter" idx="10"/>
+          </p:nvPr>
+        </p:nvSpPr>
+        <p:spPr/>
+        <p:txBody>
+          <a:bodyPr/>
+          <a:lstStyle/>
+          <a:p>
+            <a:fld id="{F7021451-1387-4CA6-816F-3879F97B5CBC}" type="slidenum">
+              <a:rPr lang="en-US"/>
+              <a:t>49</a:t>
             </a:fld>
             <a:endParaRPr lang="en-US"/>
           </a:p>
@@ -17925,7 +18548,7 @@
     <p:bg>
       <p:bgPr>
         <a:solidFill>
-          <a:srgbClr val="2C1A0E"/>
+          <a:srgbClr val="FFFFFF"/>
         </a:solidFill>
       </p:bgPr>
     </p:bg>
@@ -17951,8 +18574,8 @@
         </p:nvSpPr>
         <p:spPr>
           <a:xfrm>
-            <a:off x="640080" y="2331720"/>
-            <a:ext cx="914400" cy="914400"/>
+            <a:off x="548640" y="502920"/>
+            <a:ext cx="566928" cy="566928"/>
           </a:xfrm>
           <a:prstGeom prst="ellipse">
             <a:avLst/>
@@ -17979,8 +18602,8 @@
         </p:blipFill>
         <p:spPr>
           <a:xfrm>
-            <a:off x="749808" y="2441448"/>
-            <a:ext cx="694944" cy="694944"/>
+            <a:off x="616671" y="570951"/>
+            <a:ext cx="430865" cy="430865"/>
           </a:xfrm>
           <a:prstGeom prst="rect">
             <a:avLst/>
@@ -17995,8 +18618,8 @@
         </p:nvSpPr>
         <p:spPr>
           <a:xfrm>
-            <a:off x="1737360" y="2395728"/>
-            <a:ext cx="8229600" cy="365760"/>
+            <a:off x="1234440" y="475488"/>
+            <a:ext cx="9601200" cy="640080"/>
           </a:xfrm>
           <a:prstGeom prst="rect">
             <a:avLst/>
@@ -18012,30 +18635,94 @@
               <a:buNone/>
             </a:pPr>
             <a:r>
-              <a:rPr lang="en-US" sz="1200" spc="200" kern="0" dirty="0">
-                <a:solidFill>
-                  <a:srgbClr val="D9AE6C"/>
+              <a:rPr lang="en-US" sz="2800" b="1" dirty="0">
+                <a:solidFill>
+                  <a:srgbClr val="2C1A0E"/>
+                </a:solidFill>
+                <a:latin typeface="Cambria" pitchFamily="34" charset="0"/>
+                <a:ea typeface="Cambria" pitchFamily="34" charset="-122"/>
+                <a:cs typeface="Cambria" pitchFamily="34" charset="-120"/>
+              </a:rPr>
+              <a:t>Initialisation &amp; démarrage</a:t>
+            </a:r>
+            <a:endParaRPr lang="en-US" sz="2800" dirty="0"/>
+          </a:p>
+        </p:txBody>
+      </p:sp>
+      <p:sp>
+        <p:nvSpPr>
+          <p:cNvPr id="5" name="Text 2"/>
+          <p:cNvSpPr txBox="1"/>
+          <p:nvPr/>
+        </p:nvSpPr>
+        <p:spPr>
+          <a:xfrm>
+            <a:off x="1280160" y="1188720"/>
+            <a:ext cx="9966960" cy="548640"/>
+          </a:xfrm>
+          <a:prstGeom prst="rect">
+            <a:avLst/>
+          </a:prstGeom>
+          <a:noFill/>
+          <a:ln/>
+        </p:spPr>
+        <p:txBody>
+          <a:bodyPr wrap="square" lIns="0" tIns="0" rIns="0" bIns="0" rtlCol="0" anchor="ctr"/>
+          <a:lstStyle/>
+          <a:p>
+            <a:pPr indent="0" marL="0">
+              <a:lnSpc>
+                <a:spcPct val="115000"/>
+              </a:lnSpc>
+              <a:buNone/>
+            </a:pPr>
+            <a:r>
+              <a:rPr lang="en-US" sz="1300" dirty="0">
+                <a:solidFill>
+                  <a:srgbClr val="7C6552"/>
                 </a:solidFill>
                 <a:latin typeface="Calibri" pitchFamily="34" charset="0"/>
                 <a:ea typeface="Calibri" pitchFamily="34" charset="-122"/>
                 <a:cs typeface="Calibri" pitchFamily="34" charset="-120"/>
               </a:rPr>
-              <a:t>BILAN</a:t>
-            </a:r>
-            <a:endParaRPr lang="en-US" sz="1200" dirty="0"/>
-          </a:p>
-        </p:txBody>
-      </p:sp>
-      <p:sp>
-        <p:nvSpPr>
-          <p:cNvPr id="5" name="Text 2"/>
-          <p:cNvSpPr txBox="1"/>
-          <p:nvPr/>
-        </p:nvSpPr>
-        <p:spPr>
-          <a:xfrm>
-            <a:off x="1719072" y="2743200"/>
-            <a:ext cx="9601200" cy="1005840"/>
+              <a:t>docker compose up -d respecte un ordre de dépendance strict — "app" attend que TOUS les autres services répondent sains avant de démarrer.</a:t>
+            </a:r>
+            <a:endParaRPr lang="en-US" sz="1300" dirty="0"/>
+          </a:p>
+        </p:txBody>
+      </p:sp>
+      <p:sp>
+        <p:nvSpPr>
+          <p:cNvPr id="6" name="Shape 3"/>
+          <p:cNvSpPr/>
+          <p:nvPr/>
+        </p:nvSpPr>
+        <p:spPr>
+          <a:xfrm>
+            <a:off x="548640" y="2788920"/>
+            <a:ext cx="1745742" cy="1965960"/>
+          </a:xfrm>
+          <a:prstGeom prst="roundRect">
+            <a:avLst>
+              <a:gd name="adj" fmla="val 4190"/>
+            </a:avLst>
+          </a:prstGeom>
+          <a:solidFill>
+            <a:srgbClr val="F3E9DA"/>
+          </a:solidFill>
+          <a:ln/>
+        </p:spPr>
+      </p:sp>
+      <p:sp>
+        <p:nvSpPr>
+          <p:cNvPr id="7" name="Text 4"/>
+          <p:cNvSpPr txBox="1"/>
+          <p:nvPr/>
+        </p:nvSpPr>
+        <p:spPr>
+          <a:xfrm>
+            <a:off x="685800" y="2898648"/>
+            <a:ext cx="548640" cy="365760"/>
           </a:xfrm>
           <a:prstGeom prst="rect">
             <a:avLst/>
@@ -18051,30 +18738,30 @@
               <a:buNone/>
             </a:pPr>
             <a:r>
-              <a:rPr lang="en-US" sz="3800" b="1" dirty="0">
-                <a:solidFill>
-                  <a:srgbClr val="FFFFFF"/>
+              <a:rPr lang="en-US" sz="2000" b="1" dirty="0">
+                <a:solidFill>
+                  <a:srgbClr val="B5813F"/>
                 </a:solidFill>
                 <a:latin typeface="Cambria" pitchFamily="34" charset="0"/>
                 <a:ea typeface="Cambria" pitchFamily="34" charset="-122"/>
                 <a:cs typeface="Cambria" pitchFamily="34" charset="-120"/>
               </a:rPr>
-              <a:t>Tableau récapitulatif</a:t>
-            </a:r>
-            <a:endParaRPr lang="en-US" sz="3800" dirty="0"/>
-          </a:p>
-        </p:txBody>
-      </p:sp>
-      <p:sp>
-        <p:nvSpPr>
-          <p:cNvPr id="6" name="Text 3"/>
-          <p:cNvSpPr txBox="1"/>
-          <p:nvPr/>
-        </p:nvSpPr>
-        <p:spPr>
-          <a:xfrm>
-            <a:off x="457200" y="6510528"/>
-            <a:ext cx="7315200" cy="274320"/>
+              <a:t>1</a:t>
+            </a:r>
+            <a:endParaRPr lang="en-US" sz="2000" dirty="0"/>
+          </a:p>
+        </p:txBody>
+      </p:sp>
+      <p:sp>
+        <p:nvSpPr>
+          <p:cNvPr id="8" name="Text 5"/>
+          <p:cNvSpPr txBox="1"/>
+          <p:nvPr/>
+        </p:nvSpPr>
+        <p:spPr>
+          <a:xfrm>
+            <a:off x="685800" y="3355848"/>
+            <a:ext cx="1471422" cy="777240"/>
           </a:xfrm>
           <a:prstGeom prst="rect">
             <a:avLst/>
@@ -18087,17 +18774,826 @@
           <a:lstStyle/>
           <a:p>
             <a:pPr indent="0" marL="0">
-              <a:buNone/>
-            </a:pPr>
-            <a:r>
-              <a:rPr lang="en-US" sz="900" dirty="0">
-                <a:solidFill>
-                  <a:srgbClr val="7C6552"/>
+              <a:lnSpc>
+                <a:spcPct val="105000"/>
+              </a:lnSpc>
+              <a:buNone/>
+            </a:pPr>
+            <a:r>
+              <a:rPr lang="en-US" sz="1150" b="1" dirty="0">
+                <a:solidFill>
+                  <a:srgbClr val="2C1A0E"/>
                 </a:solidFill>
                 <a:latin typeface="Calibri" pitchFamily="34" charset="0"/>
                 <a:ea typeface="Calibri" pitchFamily="34" charset="-122"/>
                 <a:cs typeface="Calibri" pitchFamily="34" charset="-120"/>
               </a:rPr>
+              <a:t>Services sans état</a:t>
+            </a:r>
+            <a:endParaRPr lang="en-US" sz="1150" dirty="0"/>
+          </a:p>
+        </p:txBody>
+      </p:sp>
+      <p:sp>
+        <p:nvSpPr>
+          <p:cNvPr id="9" name="Text 6"/>
+          <p:cNvSpPr txBox="1"/>
+          <p:nvPr/>
+        </p:nvSpPr>
+        <p:spPr>
+          <a:xfrm>
+            <a:off x="685800" y="4069080"/>
+            <a:ext cx="1471422" cy="621792"/>
+          </a:xfrm>
+          <a:prstGeom prst="rect">
+            <a:avLst/>
+          </a:prstGeom>
+          <a:noFill/>
+          <a:ln/>
+        </p:spPr>
+        <p:txBody>
+          <a:bodyPr wrap="square" lIns="0" tIns="0" rIns="0" bIns="0" rtlCol="0" anchor="ctr"/>
+          <a:lstStyle/>
+          <a:p>
+            <a:pPr indent="0" marL="0">
+              <a:lnSpc>
+                <a:spcPct val="105000"/>
+              </a:lnSpc>
+              <a:buNone/>
+            </a:pPr>
+            <a:r>
+              <a:rPr lang="en-US" sz="880" dirty="0">
+                <a:solidFill>
+                  <a:srgbClr val="7C6552"/>
+                </a:solidFill>
+                <a:latin typeface="Calibri" pitchFamily="34" charset="0"/>
+                <a:ea typeface="Calibri" pitchFamily="34" charset="-122"/>
+                <a:cs typeface="Calibri" pitchFamily="34" charset="-120"/>
+              </a:rPr>
+              <a:t>postgres, minio, meilisearch, redis, gotenberg — prêts dès leur healthcheck</a:t>
+            </a:r>
+            <a:endParaRPr lang="en-US" sz="880" dirty="0"/>
+          </a:p>
+        </p:txBody>
+      </p:sp>
+      <p:sp>
+        <p:nvSpPr>
+          <p:cNvPr id="10" name="Shape 7"/>
+          <p:cNvSpPr/>
+          <p:nvPr/>
+        </p:nvSpPr>
+        <p:spPr>
+          <a:xfrm>
+            <a:off x="2417826" y="2788920"/>
+            <a:ext cx="1745742" cy="1965960"/>
+          </a:xfrm>
+          <a:prstGeom prst="roundRect">
+            <a:avLst>
+              <a:gd name="adj" fmla="val 4190"/>
+            </a:avLst>
+          </a:prstGeom>
+          <a:solidFill>
+            <a:srgbClr val="F3E9DA"/>
+          </a:solidFill>
+          <a:ln/>
+        </p:spPr>
+      </p:sp>
+      <p:sp>
+        <p:nvSpPr>
+          <p:cNvPr id="11" name="Text 8"/>
+          <p:cNvSpPr txBox="1"/>
+          <p:nvPr/>
+        </p:nvSpPr>
+        <p:spPr>
+          <a:xfrm>
+            <a:off x="2554986" y="2898648"/>
+            <a:ext cx="548640" cy="365760"/>
+          </a:xfrm>
+          <a:prstGeom prst="rect">
+            <a:avLst/>
+          </a:prstGeom>
+          <a:noFill/>
+          <a:ln/>
+        </p:spPr>
+        <p:txBody>
+          <a:bodyPr wrap="square" lIns="0" tIns="0" rIns="0" bIns="0" rtlCol="0" anchor="ctr"/>
+          <a:lstStyle/>
+          <a:p>
+            <a:pPr indent="0" marL="0">
+              <a:buNone/>
+            </a:pPr>
+            <a:r>
+              <a:rPr lang="en-US" sz="2000" b="1" dirty="0">
+                <a:solidFill>
+                  <a:srgbClr val="B5813F"/>
+                </a:solidFill>
+                <a:latin typeface="Cambria" pitchFamily="34" charset="0"/>
+                <a:ea typeface="Cambria" pitchFamily="34" charset="-122"/>
+                <a:cs typeface="Cambria" pitchFamily="34" charset="-120"/>
+              </a:rPr>
+              <a:t>2</a:t>
+            </a:r>
+            <a:endParaRPr lang="en-US" sz="2000" dirty="0"/>
+          </a:p>
+        </p:txBody>
+      </p:sp>
+      <p:sp>
+        <p:nvSpPr>
+          <p:cNvPr id="12" name="Text 9"/>
+          <p:cNvSpPr txBox="1"/>
+          <p:nvPr/>
+        </p:nvSpPr>
+        <p:spPr>
+          <a:xfrm>
+            <a:off x="2554986" y="3355848"/>
+            <a:ext cx="1471422" cy="777240"/>
+          </a:xfrm>
+          <a:prstGeom prst="rect">
+            <a:avLst/>
+          </a:prstGeom>
+          <a:noFill/>
+          <a:ln/>
+        </p:spPr>
+        <p:txBody>
+          <a:bodyPr wrap="square" lIns="0" tIns="0" rIns="0" bIns="0" rtlCol="0" anchor="ctr"/>
+          <a:lstStyle/>
+          <a:p>
+            <a:pPr indent="0" marL="0">
+              <a:lnSpc>
+                <a:spcPct val="105000"/>
+              </a:lnSpc>
+              <a:buNone/>
+            </a:pPr>
+            <a:r>
+              <a:rPr lang="en-US" sz="1150" b="1" dirty="0">
+                <a:solidFill>
+                  <a:srgbClr val="2C1A0E"/>
+                </a:solidFill>
+                <a:latin typeface="Calibri" pitchFamily="34" charset="0"/>
+                <a:ea typeface="Calibri" pitchFamily="34" charset="-122"/>
+                <a:cs typeface="Calibri" pitchFamily="34" charset="-120"/>
+              </a:rPr>
+              <a:t>Ollama</a:t>
+            </a:r>
+            <a:endParaRPr lang="en-US" sz="1150" dirty="0"/>
+          </a:p>
+        </p:txBody>
+      </p:sp>
+      <p:sp>
+        <p:nvSpPr>
+          <p:cNvPr id="13" name="Text 10"/>
+          <p:cNvSpPr txBox="1"/>
+          <p:nvPr/>
+        </p:nvSpPr>
+        <p:spPr>
+          <a:xfrm>
+            <a:off x="2554986" y="4069080"/>
+            <a:ext cx="1471422" cy="621792"/>
+          </a:xfrm>
+          <a:prstGeom prst="rect">
+            <a:avLst/>
+          </a:prstGeom>
+          <a:noFill/>
+          <a:ln/>
+        </p:spPr>
+        <p:txBody>
+          <a:bodyPr wrap="square" lIns="0" tIns="0" rIns="0" bIns="0" rtlCol="0" anchor="ctr"/>
+          <a:lstStyle/>
+          <a:p>
+            <a:pPr indent="0" marL="0">
+              <a:lnSpc>
+                <a:spcPct val="105000"/>
+              </a:lnSpc>
+              <a:buNone/>
+            </a:pPr>
+            <a:r>
+              <a:rPr lang="en-US" sz="880" dirty="0">
+                <a:solidFill>
+                  <a:srgbClr val="7C6552"/>
+                </a:solidFill>
+                <a:latin typeface="Calibri" pitchFamily="34" charset="0"/>
+                <a:ea typeface="Calibri" pitchFamily="34" charset="-122"/>
+                <a:cs typeface="Calibri" pitchFamily="34" charset="-120"/>
+              </a:rPr>
+              <a:t>télécharge qwen2.5-coder:7b s'il n'est pas déjà dans le volume nommé</a:t>
+            </a:r>
+            <a:endParaRPr lang="en-US" sz="880" dirty="0"/>
+          </a:p>
+        </p:txBody>
+      </p:sp>
+      <p:sp>
+        <p:nvSpPr>
+          <p:cNvPr id="14" name="Shape 11"/>
+          <p:cNvSpPr/>
+          <p:nvPr/>
+        </p:nvSpPr>
+        <p:spPr>
+          <a:xfrm>
+            <a:off x="4287012" y="2788920"/>
+            <a:ext cx="1745742" cy="1965960"/>
+          </a:xfrm>
+          <a:prstGeom prst="roundRect">
+            <a:avLst>
+              <a:gd name="adj" fmla="val 4190"/>
+            </a:avLst>
+          </a:prstGeom>
+          <a:solidFill>
+            <a:srgbClr val="F3E9DA"/>
+          </a:solidFill>
+          <a:ln/>
+        </p:spPr>
+      </p:sp>
+      <p:sp>
+        <p:nvSpPr>
+          <p:cNvPr id="15" name="Text 12"/>
+          <p:cNvSpPr txBox="1"/>
+          <p:nvPr/>
+        </p:nvSpPr>
+        <p:spPr>
+          <a:xfrm>
+            <a:off x="4424172" y="2898648"/>
+            <a:ext cx="548640" cy="365760"/>
+          </a:xfrm>
+          <a:prstGeom prst="rect">
+            <a:avLst/>
+          </a:prstGeom>
+          <a:noFill/>
+          <a:ln/>
+        </p:spPr>
+        <p:txBody>
+          <a:bodyPr wrap="square" lIns="0" tIns="0" rIns="0" bIns="0" rtlCol="0" anchor="ctr"/>
+          <a:lstStyle/>
+          <a:p>
+            <a:pPr indent="0" marL="0">
+              <a:buNone/>
+            </a:pPr>
+            <a:r>
+              <a:rPr lang="en-US" sz="2000" b="1" dirty="0">
+                <a:solidFill>
+                  <a:srgbClr val="B5813F"/>
+                </a:solidFill>
+                <a:latin typeface="Cambria" pitchFamily="34" charset="0"/>
+                <a:ea typeface="Cambria" pitchFamily="34" charset="-122"/>
+                <a:cs typeface="Cambria" pitchFamily="34" charset="-120"/>
+              </a:rPr>
+              <a:t>3</a:t>
+            </a:r>
+            <a:endParaRPr lang="en-US" sz="2000" dirty="0"/>
+          </a:p>
+        </p:txBody>
+      </p:sp>
+      <p:sp>
+        <p:nvSpPr>
+          <p:cNvPr id="16" name="Text 13"/>
+          <p:cNvSpPr txBox="1"/>
+          <p:nvPr/>
+        </p:nvSpPr>
+        <p:spPr>
+          <a:xfrm>
+            <a:off x="4424172" y="3355848"/>
+            <a:ext cx="1471422" cy="777240"/>
+          </a:xfrm>
+          <a:prstGeom prst="rect">
+            <a:avLst/>
+          </a:prstGeom>
+          <a:noFill/>
+          <a:ln/>
+        </p:spPr>
+        <p:txBody>
+          <a:bodyPr wrap="square" lIns="0" tIns="0" rIns="0" bIns="0" rtlCol="0" anchor="ctr"/>
+          <a:lstStyle/>
+          <a:p>
+            <a:pPr indent="0" marL="0">
+              <a:lnSpc>
+                <a:spcPct val="105000"/>
+              </a:lnSpc>
+              <a:buNone/>
+            </a:pPr>
+            <a:r>
+              <a:rPr lang="en-US" sz="1150" b="1" dirty="0">
+                <a:solidFill>
+                  <a:srgbClr val="2C1A0E"/>
+                </a:solidFill>
+                <a:latin typeface="Calibri" pitchFamily="34" charset="0"/>
+                <a:ea typeface="Calibri" pitchFamily="34" charset="-122"/>
+                <a:cs typeface="Calibri" pitchFamily="34" charset="-120"/>
+              </a:rPr>
+              <a:t>Traefik</a:t>
+            </a:r>
+            <a:endParaRPr lang="en-US" sz="1150" dirty="0"/>
+          </a:p>
+        </p:txBody>
+      </p:sp>
+      <p:sp>
+        <p:nvSpPr>
+          <p:cNvPr id="17" name="Text 14"/>
+          <p:cNvSpPr txBox="1"/>
+          <p:nvPr/>
+        </p:nvSpPr>
+        <p:spPr>
+          <a:xfrm>
+            <a:off x="4424172" y="4069080"/>
+            <a:ext cx="1471422" cy="621792"/>
+          </a:xfrm>
+          <a:prstGeom prst="rect">
+            <a:avLst/>
+          </a:prstGeom>
+          <a:noFill/>
+          <a:ln/>
+        </p:spPr>
+        <p:txBody>
+          <a:bodyPr wrap="square" lIns="0" tIns="0" rIns="0" bIns="0" rtlCol="0" anchor="ctr"/>
+          <a:lstStyle/>
+          <a:p>
+            <a:pPr indent="0" marL="0">
+              <a:lnSpc>
+                <a:spcPct val="105000"/>
+              </a:lnSpc>
+              <a:buNone/>
+            </a:pPr>
+            <a:r>
+              <a:rPr lang="en-US" sz="880" dirty="0">
+                <a:solidFill>
+                  <a:srgbClr val="7C6552"/>
+                </a:solidFill>
+                <a:latin typeface="Calibri" pitchFamily="34" charset="0"/>
+                <a:ea typeface="Calibri" pitchFamily="34" charset="-122"/>
+                <a:cs typeface="Calibri" pitchFamily="34" charset="-120"/>
+              </a:rPr>
+              <a:t>régénère dynamic.yml depuis le gabarit, jamais versionné</a:t>
+            </a:r>
+            <a:endParaRPr lang="en-US" sz="880" dirty="0"/>
+          </a:p>
+        </p:txBody>
+      </p:sp>
+      <p:sp>
+        <p:nvSpPr>
+          <p:cNvPr id="18" name="Shape 15"/>
+          <p:cNvSpPr/>
+          <p:nvPr/>
+        </p:nvSpPr>
+        <p:spPr>
+          <a:xfrm>
+            <a:off x="6156198" y="2788920"/>
+            <a:ext cx="1745742" cy="1965960"/>
+          </a:xfrm>
+          <a:prstGeom prst="roundRect">
+            <a:avLst>
+              <a:gd name="adj" fmla="val 4190"/>
+            </a:avLst>
+          </a:prstGeom>
+          <a:solidFill>
+            <a:srgbClr val="F3E9DA"/>
+          </a:solidFill>
+          <a:ln/>
+        </p:spPr>
+      </p:sp>
+      <p:sp>
+        <p:nvSpPr>
+          <p:cNvPr id="19" name="Text 16"/>
+          <p:cNvSpPr txBox="1"/>
+          <p:nvPr/>
+        </p:nvSpPr>
+        <p:spPr>
+          <a:xfrm>
+            <a:off x="6293358" y="2898648"/>
+            <a:ext cx="548640" cy="365760"/>
+          </a:xfrm>
+          <a:prstGeom prst="rect">
+            <a:avLst/>
+          </a:prstGeom>
+          <a:noFill/>
+          <a:ln/>
+        </p:spPr>
+        <p:txBody>
+          <a:bodyPr wrap="square" lIns="0" tIns="0" rIns="0" bIns="0" rtlCol="0" anchor="ctr"/>
+          <a:lstStyle/>
+          <a:p>
+            <a:pPr indent="0" marL="0">
+              <a:buNone/>
+            </a:pPr>
+            <a:r>
+              <a:rPr lang="en-US" sz="2000" b="1" dirty="0">
+                <a:solidFill>
+                  <a:srgbClr val="B5813F"/>
+                </a:solidFill>
+                <a:latin typeface="Cambria" pitchFamily="34" charset="0"/>
+                <a:ea typeface="Cambria" pitchFamily="34" charset="-122"/>
+                <a:cs typeface="Cambria" pitchFamily="34" charset="-120"/>
+              </a:rPr>
+              <a:t>4</a:t>
+            </a:r>
+            <a:endParaRPr lang="en-US" sz="2000" dirty="0"/>
+          </a:p>
+        </p:txBody>
+      </p:sp>
+      <p:sp>
+        <p:nvSpPr>
+          <p:cNvPr id="20" name="Text 17"/>
+          <p:cNvSpPr txBox="1"/>
+          <p:nvPr/>
+        </p:nvSpPr>
+        <p:spPr>
+          <a:xfrm>
+            <a:off x="6293358" y="3355848"/>
+            <a:ext cx="1471422" cy="777240"/>
+          </a:xfrm>
+          <a:prstGeom prst="rect">
+            <a:avLst/>
+          </a:prstGeom>
+          <a:noFill/>
+          <a:ln/>
+        </p:spPr>
+        <p:txBody>
+          <a:bodyPr wrap="square" lIns="0" tIns="0" rIns="0" bIns="0" rtlCol="0" anchor="ctr"/>
+          <a:lstStyle/>
+          <a:p>
+            <a:pPr indent="0" marL="0">
+              <a:lnSpc>
+                <a:spcPct val="105000"/>
+              </a:lnSpc>
+              <a:buNone/>
+            </a:pPr>
+            <a:r>
+              <a:rPr lang="en-US" sz="1150" b="1" dirty="0">
+                <a:solidFill>
+                  <a:srgbClr val="2C1A0E"/>
+                </a:solidFill>
+                <a:latin typeface="Calibri" pitchFamily="34" charset="0"/>
+                <a:ea typeface="Calibri" pitchFamily="34" charset="-122"/>
+                <a:cs typeface="Calibri" pitchFamily="34" charset="-120"/>
+              </a:rPr>
+              <a:t>app démarre</a:t>
+            </a:r>
+            <a:endParaRPr lang="en-US" sz="1150" dirty="0"/>
+          </a:p>
+        </p:txBody>
+      </p:sp>
+      <p:sp>
+        <p:nvSpPr>
+          <p:cNvPr id="21" name="Text 18"/>
+          <p:cNvSpPr txBox="1"/>
+          <p:nvPr/>
+        </p:nvSpPr>
+        <p:spPr>
+          <a:xfrm>
+            <a:off x="6293358" y="4069080"/>
+            <a:ext cx="1471422" cy="621792"/>
+          </a:xfrm>
+          <a:prstGeom prst="rect">
+            <a:avLst/>
+          </a:prstGeom>
+          <a:noFill/>
+          <a:ln/>
+        </p:spPr>
+        <p:txBody>
+          <a:bodyPr wrap="square" lIns="0" tIns="0" rIns="0" bIns="0" rtlCol="0" anchor="ctr"/>
+          <a:lstStyle/>
+          <a:p>
+            <a:pPr indent="0" marL="0">
+              <a:lnSpc>
+                <a:spcPct val="105000"/>
+              </a:lnSpc>
+              <a:buNone/>
+            </a:pPr>
+            <a:r>
+              <a:rPr lang="en-US" sz="880" dirty="0">
+                <a:solidFill>
+                  <a:srgbClr val="7C6552"/>
+                </a:solidFill>
+                <a:latin typeface="Calibri" pitchFamily="34" charset="0"/>
+                <a:ea typeface="Calibri" pitchFamily="34" charset="-122"/>
+                <a:cs typeface="Calibri" pitchFamily="34" charset="-120"/>
+              </a:rPr>
+              <a:t>une fois tous les services ci-dessus sains</a:t>
+            </a:r>
+            <a:endParaRPr lang="en-US" sz="880" dirty="0"/>
+          </a:p>
+        </p:txBody>
+      </p:sp>
+      <p:sp>
+        <p:nvSpPr>
+          <p:cNvPr id="22" name="Shape 19"/>
+          <p:cNvSpPr/>
+          <p:nvPr/>
+        </p:nvSpPr>
+        <p:spPr>
+          <a:xfrm>
+            <a:off x="8025384" y="2788920"/>
+            <a:ext cx="1745742" cy="1965960"/>
+          </a:xfrm>
+          <a:prstGeom prst="roundRect">
+            <a:avLst>
+              <a:gd name="adj" fmla="val 4190"/>
+            </a:avLst>
+          </a:prstGeom>
+          <a:solidFill>
+            <a:srgbClr val="F3E9DA"/>
+          </a:solidFill>
+          <a:ln/>
+        </p:spPr>
+      </p:sp>
+      <p:sp>
+        <p:nvSpPr>
+          <p:cNvPr id="23" name="Text 20"/>
+          <p:cNvSpPr txBox="1"/>
+          <p:nvPr/>
+        </p:nvSpPr>
+        <p:spPr>
+          <a:xfrm>
+            <a:off x="8162544" y="2898648"/>
+            <a:ext cx="548640" cy="365760"/>
+          </a:xfrm>
+          <a:prstGeom prst="rect">
+            <a:avLst/>
+          </a:prstGeom>
+          <a:noFill/>
+          <a:ln/>
+        </p:spPr>
+        <p:txBody>
+          <a:bodyPr wrap="square" lIns="0" tIns="0" rIns="0" bIns="0" rtlCol="0" anchor="ctr"/>
+          <a:lstStyle/>
+          <a:p>
+            <a:pPr indent="0" marL="0">
+              <a:buNone/>
+            </a:pPr>
+            <a:r>
+              <a:rPr lang="en-US" sz="2000" b="1" dirty="0">
+                <a:solidFill>
+                  <a:srgbClr val="B5813F"/>
+                </a:solidFill>
+                <a:latin typeface="Cambria" pitchFamily="34" charset="0"/>
+                <a:ea typeface="Cambria" pitchFamily="34" charset="-122"/>
+                <a:cs typeface="Cambria" pitchFamily="34" charset="-120"/>
+              </a:rPr>
+              <a:t>5</a:t>
+            </a:r>
+            <a:endParaRPr lang="en-US" sz="2000" dirty="0"/>
+          </a:p>
+        </p:txBody>
+      </p:sp>
+      <p:sp>
+        <p:nvSpPr>
+          <p:cNvPr id="24" name="Text 21"/>
+          <p:cNvSpPr txBox="1"/>
+          <p:nvPr/>
+        </p:nvSpPr>
+        <p:spPr>
+          <a:xfrm>
+            <a:off x="8162544" y="3355848"/>
+            <a:ext cx="1471422" cy="777240"/>
+          </a:xfrm>
+          <a:prstGeom prst="rect">
+            <a:avLst/>
+          </a:prstGeom>
+          <a:noFill/>
+          <a:ln/>
+        </p:spPr>
+        <p:txBody>
+          <a:bodyPr wrap="square" lIns="0" tIns="0" rIns="0" bIns="0" rtlCol="0" anchor="ctr"/>
+          <a:lstStyle/>
+          <a:p>
+            <a:pPr indent="0" marL="0">
+              <a:lnSpc>
+                <a:spcPct val="105000"/>
+              </a:lnSpc>
+              <a:buNone/>
+            </a:pPr>
+            <a:r>
+              <a:rPr lang="en-US" sz="1150" b="1" dirty="0">
+                <a:solidFill>
+                  <a:srgbClr val="2C1A0E"/>
+                </a:solidFill>
+                <a:latin typeface="Calibri" pitchFamily="34" charset="0"/>
+                <a:ea typeface="Calibri" pitchFamily="34" charset="-122"/>
+                <a:cs typeface="Calibri" pitchFamily="34" charset="-120"/>
+              </a:rPr>
+              <a:t>Migrations Flyway</a:t>
+            </a:r>
+            <a:endParaRPr lang="en-US" sz="1150" dirty="0"/>
+          </a:p>
+        </p:txBody>
+      </p:sp>
+      <p:sp>
+        <p:nvSpPr>
+          <p:cNvPr id="25" name="Text 22"/>
+          <p:cNvSpPr txBox="1"/>
+          <p:nvPr/>
+        </p:nvSpPr>
+        <p:spPr>
+          <a:xfrm>
+            <a:off x="8162544" y="4069080"/>
+            <a:ext cx="1471422" cy="621792"/>
+          </a:xfrm>
+          <a:prstGeom prst="rect">
+            <a:avLst/>
+          </a:prstGeom>
+          <a:noFill/>
+          <a:ln/>
+        </p:spPr>
+        <p:txBody>
+          <a:bodyPr wrap="square" lIns="0" tIns="0" rIns="0" bIns="0" rtlCol="0" anchor="ctr"/>
+          <a:lstStyle/>
+          <a:p>
+            <a:pPr indent="0" marL="0">
+              <a:lnSpc>
+                <a:spcPct val="105000"/>
+              </a:lnSpc>
+              <a:buNone/>
+            </a:pPr>
+            <a:r>
+              <a:rPr lang="en-US" sz="880" dirty="0">
+                <a:solidFill>
+                  <a:srgbClr val="7C6552"/>
+                </a:solidFill>
+                <a:latin typeface="Calibri" pitchFamily="34" charset="0"/>
+                <a:ea typeface="Calibri" pitchFamily="34" charset="-122"/>
+                <a:cs typeface="Calibri" pitchFamily="34" charset="-120"/>
+              </a:rPr>
+              <a:t>schéma appliqué automatiquement</a:t>
+            </a:r>
+            <a:endParaRPr lang="en-US" sz="880" dirty="0"/>
+          </a:p>
+        </p:txBody>
+      </p:sp>
+      <p:sp>
+        <p:nvSpPr>
+          <p:cNvPr id="26" name="Shape 23"/>
+          <p:cNvSpPr/>
+          <p:nvPr/>
+        </p:nvSpPr>
+        <p:spPr>
+          <a:xfrm>
+            <a:off x="9894570" y="2788920"/>
+            <a:ext cx="1745742" cy="1965960"/>
+          </a:xfrm>
+          <a:prstGeom prst="roundRect">
+            <a:avLst>
+              <a:gd name="adj" fmla="val 4190"/>
+            </a:avLst>
+          </a:prstGeom>
+          <a:solidFill>
+            <a:srgbClr val="B5813F"/>
+          </a:solidFill>
+          <a:ln/>
+        </p:spPr>
+      </p:sp>
+      <p:sp>
+        <p:nvSpPr>
+          <p:cNvPr id="27" name="Text 24"/>
+          <p:cNvSpPr txBox="1"/>
+          <p:nvPr/>
+        </p:nvSpPr>
+        <p:spPr>
+          <a:xfrm>
+            <a:off x="10031730" y="2898648"/>
+            <a:ext cx="548640" cy="365760"/>
+          </a:xfrm>
+          <a:prstGeom prst="rect">
+            <a:avLst/>
+          </a:prstGeom>
+          <a:noFill/>
+          <a:ln/>
+        </p:spPr>
+        <p:txBody>
+          <a:bodyPr wrap="square" lIns="0" tIns="0" rIns="0" bIns="0" rtlCol="0" anchor="ctr"/>
+          <a:lstStyle/>
+          <a:p>
+            <a:pPr indent="0" marL="0">
+              <a:buNone/>
+            </a:pPr>
+            <a:r>
+              <a:rPr lang="en-US" sz="2000" b="1" dirty="0">
+                <a:solidFill>
+                  <a:srgbClr val="FFFFFF"/>
+                </a:solidFill>
+                <a:latin typeface="Cambria" pitchFamily="34" charset="0"/>
+                <a:ea typeface="Cambria" pitchFamily="34" charset="-122"/>
+                <a:cs typeface="Cambria" pitchFamily="34" charset="-120"/>
+              </a:rPr>
+              <a:t>6</a:t>
+            </a:r>
+            <a:endParaRPr lang="en-US" sz="2000" dirty="0"/>
+          </a:p>
+        </p:txBody>
+      </p:sp>
+      <p:sp>
+        <p:nvSpPr>
+          <p:cNvPr id="28" name="Text 25"/>
+          <p:cNvSpPr txBox="1"/>
+          <p:nvPr/>
+        </p:nvSpPr>
+        <p:spPr>
+          <a:xfrm>
+            <a:off x="10031730" y="3355848"/>
+            <a:ext cx="1471422" cy="777240"/>
+          </a:xfrm>
+          <a:prstGeom prst="rect">
+            <a:avLst/>
+          </a:prstGeom>
+          <a:noFill/>
+          <a:ln/>
+        </p:spPr>
+        <p:txBody>
+          <a:bodyPr wrap="square" lIns="0" tIns="0" rIns="0" bIns="0" rtlCol="0" anchor="ctr"/>
+          <a:lstStyle/>
+          <a:p>
+            <a:pPr indent="0" marL="0">
+              <a:lnSpc>
+                <a:spcPct val="105000"/>
+              </a:lnSpc>
+              <a:buNone/>
+            </a:pPr>
+            <a:r>
+              <a:rPr lang="en-US" sz="1150" b="1" dirty="0">
+                <a:solidFill>
+                  <a:srgbClr val="FFFFFF"/>
+                </a:solidFill>
+                <a:latin typeface="Calibri" pitchFamily="34" charset="0"/>
+                <a:ea typeface="Calibri" pitchFamily="34" charset="-122"/>
+                <a:cs typeface="Calibri" pitchFamily="34" charset="-120"/>
+              </a:rPr>
+              <a:t>Rôles + admin</a:t>
+            </a:r>
+            <a:endParaRPr lang="en-US" sz="1150" dirty="0"/>
+          </a:p>
+        </p:txBody>
+      </p:sp>
+      <p:sp>
+        <p:nvSpPr>
+          <p:cNvPr id="29" name="Text 26"/>
+          <p:cNvSpPr txBox="1"/>
+          <p:nvPr/>
+        </p:nvSpPr>
+        <p:spPr>
+          <a:xfrm>
+            <a:off x="10031730" y="4069080"/>
+            <a:ext cx="1471422" cy="621792"/>
+          </a:xfrm>
+          <a:prstGeom prst="rect">
+            <a:avLst/>
+          </a:prstGeom>
+          <a:noFill/>
+          <a:ln/>
+        </p:spPr>
+        <p:txBody>
+          <a:bodyPr wrap="square" lIns="0" tIns="0" rIns="0" bIns="0" rtlCol="0" anchor="ctr"/>
+          <a:lstStyle/>
+          <a:p>
+            <a:pPr indent="0" marL="0">
+              <a:lnSpc>
+                <a:spcPct val="105000"/>
+              </a:lnSpc>
+              <a:buNone/>
+            </a:pPr>
+            <a:r>
+              <a:rPr lang="en-US" sz="880" dirty="0">
+                <a:solidFill>
+                  <a:srgbClr val="F3E9DA"/>
+                </a:solidFill>
+                <a:latin typeface="Calibri" pitchFamily="34" charset="0"/>
+                <a:ea typeface="Calibri" pitchFamily="34" charset="-122"/>
+                <a:cs typeface="Calibri" pitchFamily="34" charset="-120"/>
+              </a:rPr>
+              <a:t>4 rôles créés, admin initial si configuré</a:t>
+            </a:r>
+            <a:endParaRPr lang="en-US" sz="880" dirty="0"/>
+          </a:p>
+        </p:txBody>
+      </p:sp>
+      <p:sp>
+        <p:nvSpPr>
+          <p:cNvPr id="30" name="Text 27"/>
+          <p:cNvSpPr txBox="1"/>
+          <p:nvPr/>
+        </p:nvSpPr>
+        <p:spPr>
+          <a:xfrm>
+            <a:off x="457200" y="6510528"/>
+            <a:ext cx="7315200" cy="274320"/>
+          </a:xfrm>
+          <a:prstGeom prst="rect">
+            <a:avLst/>
+          </a:prstGeom>
+          <a:noFill/>
+          <a:ln/>
+        </p:spPr>
+        <p:txBody>
+          <a:bodyPr wrap="square" lIns="0" tIns="0" rIns="0" bIns="0" rtlCol="0" anchor="ctr"/>
+          <a:lstStyle/>
+          <a:p>
+            <a:pPr indent="0" marL="0">
+              <a:buNone/>
+            </a:pPr>
+            <a:r>
+              <a:rPr lang="en-US" sz="900" dirty="0">
+                <a:solidFill>
+                  <a:srgbClr val="7C6552"/>
+                </a:solidFill>
+                <a:latin typeface="Calibri" pitchFamily="34" charset="0"/>
+                <a:ea typeface="Calibri" pitchFamily="34" charset="-122"/>
+                <a:cs typeface="Calibri" pitchFamily="34" charset="-120"/>
+              </a:rPr>
               <a:t>MadeArchive — Documentation technique</a:t>
             </a:r>
             <a:endParaRPr lang="en-US" sz="900" dirty="0"/>
@@ -18106,7 +19602,7 @@
       </p:sp>
       <p:sp>
         <p:nvSpPr>
-          <p:cNvPr id="7" name="Text 4"/>
+          <p:cNvPr id="31" name="Text 28"/>
           <p:cNvSpPr txBox="1"/>
           <p:nvPr/>
         </p:nvSpPr>
@@ -19462,7 +20958,7 @@
         </p:nvSpPr>
         <p:spPr>
           <a:xfrm>
-            <a:off x="548640" y="411480"/>
+            <a:off x="548640" y="502920"/>
             <a:ext cx="502920" cy="502920"/>
           </a:xfrm>
           <a:prstGeom prst="ellipse">
@@ -19490,7 +20986,7 @@
         </p:blipFill>
         <p:spPr>
           <a:xfrm>
-            <a:off x="608990" y="471830"/>
+            <a:off x="608990" y="563270"/>
             <a:ext cx="382219" cy="382219"/>
           </a:xfrm>
           <a:prstGeom prst="rect">
@@ -19506,8 +21002,8 @@
         </p:nvSpPr>
         <p:spPr>
           <a:xfrm>
-            <a:off x="1170432" y="365760"/>
-            <a:ext cx="8229600" cy="502920"/>
+            <a:off x="1170432" y="457200"/>
+            <a:ext cx="8229600" cy="274320"/>
           </a:xfrm>
           <a:prstGeom prst="rect">
             <a:avLst/>
@@ -19523,7 +21019,46 @@
               <a:buNone/>
             </a:pPr>
             <a:r>
-              <a:rPr lang="en-US" sz="2600" b="1" dirty="0">
+              <a:rPr lang="en-US" sz="1100" spc="150" kern="0" dirty="0">
+                <a:solidFill>
+                  <a:srgbClr val="B5813F"/>
+                </a:solidFill>
+                <a:latin typeface="Calibri" pitchFamily="34" charset="0"/>
+                <a:ea typeface="Calibri" pitchFamily="34" charset="-122"/>
+                <a:cs typeface="Calibri" pitchFamily="34" charset="-120"/>
+              </a:rPr>
+              <a:t>INITIALISATION</a:t>
+            </a:r>
+            <a:endParaRPr lang="en-US" sz="1100" dirty="0"/>
+          </a:p>
+        </p:txBody>
+      </p:sp>
+      <p:sp>
+        <p:nvSpPr>
+          <p:cNvPr id="5" name="Text 2"/>
+          <p:cNvSpPr txBox="1"/>
+          <p:nvPr/>
+        </p:nvSpPr>
+        <p:spPr>
+          <a:xfrm>
+            <a:off x="1152144" y="713232"/>
+            <a:ext cx="9692640" cy="594360"/>
+          </a:xfrm>
+          <a:prstGeom prst="rect">
+            <a:avLst/>
+          </a:prstGeom>
+          <a:noFill/>
+          <a:ln/>
+        </p:spPr>
+        <p:txBody>
+          <a:bodyPr wrap="square" lIns="0" tIns="0" rIns="0" bIns="0" rtlCol="0" anchor="ctr"/>
+          <a:lstStyle/>
+          <a:p>
+            <a:pPr indent="0" marL="0">
+              <a:buNone/>
+            </a:pPr>
+            <a:r>
+              <a:rPr lang="en-US" sz="2400" b="1" dirty="0">
                 <a:solidFill>
                   <a:srgbClr val="2C1A0E"/>
                 </a:solidFill>
@@ -19531,45 +21066,2462 @@
                 <a:ea typeface="Cambria" pitchFamily="34" charset="-122"/>
                 <a:cs typeface="Cambria" pitchFamily="34" charset="-120"/>
               </a:rPr>
-              <a:t>Tableau récapitulatif</a:t>
-            </a:r>
-            <a:endParaRPr lang="en-US" sz="2600" dirty="0"/>
-          </a:p>
-        </p:txBody>
-      </p:sp>
-      <p:sp>
-        <p:nvSpPr>
-          <p:cNvPr id="5" name="Text 2"/>
-          <p:cNvSpPr txBox="1"/>
-          <p:nvPr/>
-        </p:nvSpPr>
-        <p:spPr>
-          <a:xfrm>
-            <a:off x="10607040" y="438912"/>
-            <a:ext cx="1097280" cy="365760"/>
-          </a:xfrm>
-          <a:prstGeom prst="rect">
-            <a:avLst/>
-          </a:prstGeom>
-          <a:noFill/>
-          <a:ln/>
-        </p:spPr>
-        <p:txBody>
-          <a:bodyPr wrap="square" lIns="0" tIns="0" rIns="0" bIns="0" rtlCol="0" anchor="ctr"/>
-          <a:lstStyle/>
-          <a:p>
-            <a:pPr algn="r" indent="0" marL="0">
-              <a:buNone/>
-            </a:pPr>
-            <a:r>
-              <a:rPr lang="en-US" sz="1100" dirty="0">
-                <a:solidFill>
-                  <a:srgbClr val="7C6552"/>
+              <a:t>Ollama : téléchargement du modèle au premier démarrage</a:t>
+            </a:r>
+            <a:endParaRPr lang="en-US" sz="2400" dirty="0"/>
+          </a:p>
+        </p:txBody>
+      </p:sp>
+      <p:sp>
+        <p:nvSpPr>
+          <p:cNvPr id="6" name="Text 3"/>
+          <p:cNvSpPr txBox="1"/>
+          <p:nvPr/>
+        </p:nvSpPr>
+        <p:spPr>
+          <a:xfrm>
+            <a:off x="548640" y="2958084"/>
+            <a:ext cx="10881360" cy="868680"/>
+          </a:xfrm>
+          <a:prstGeom prst="rect">
+            <a:avLst/>
+          </a:prstGeom>
+          <a:noFill/>
+          <a:ln/>
+        </p:spPr>
+        <p:txBody>
+          <a:bodyPr wrap="square" lIns="0" tIns="0" rIns="0" bIns="0" rtlCol="0" anchor="ctr"/>
+          <a:lstStyle/>
+          <a:p>
+            <a:pPr marL="342900" indent="-342900">
+              <a:lnSpc>
+                <a:spcPct val="115000"/>
+              </a:lnSpc>
+              <a:spcAft>
+                <a:spcPts val="800"/>
+              </a:spcAft>
+              <a:buSzPct val="100000"/>
+              <a:buChar char="•"/>
+            </a:pPr>
+            <a:r>
+              <a:rPr lang="en-US" sz="1450" dirty="0">
+                <a:solidFill>
+                  <a:srgbClr val="2C1A0E"/>
                 </a:solidFill>
                 <a:latin typeface="Calibri" pitchFamily="34" charset="0"/>
                 <a:ea typeface="Calibri" pitchFamily="34" charset="-122"/>
                 <a:cs typeface="Calibri" pitchFamily="34" charset="-120"/>
               </a:rPr>
+              <a:t>Point d'entrée particulier : le serveur démarre, attend 10 secondes, puis télécharge le modèle s'il n'est pas déjà présent.</a:t>
+            </a:r>
+            <a:endParaRPr lang="en-US" sz="1450" dirty="0"/>
+          </a:p>
+          <a:p>
+            <a:pPr marL="342900" indent="-342900">
+              <a:lnSpc>
+                <a:spcPct val="115000"/>
+              </a:lnSpc>
+              <a:spcAft>
+                <a:spcPts val="800"/>
+              </a:spcAft>
+              <a:buSzPct val="100000"/>
+              <a:buChar char="•"/>
+            </a:pPr>
+            <a:r>
+              <a:rPr lang="en-US" sz="1450" dirty="0">
+                <a:solidFill>
+                  <a:srgbClr val="2C1A0E"/>
+                </a:solidFill>
+                <a:latin typeface="Calibri" pitchFamily="34" charset="0"/>
+                <a:ea typeface="Calibri" pitchFamily="34" charset="-122"/>
+                <a:cs typeface="Calibri" pitchFamily="34" charset="-120"/>
+              </a:rPr>
+              <a:t>Le modèle reste ensuite en cache dans le volume nommé ollama_data, qui survit à un docker compose down (sans -v).</a:t>
+            </a:r>
+            <a:endParaRPr lang="en-US" sz="1450" dirty="0"/>
+          </a:p>
+        </p:txBody>
+      </p:sp>
+      <p:sp>
+        <p:nvSpPr>
+          <p:cNvPr id="7" name="Shape 4"/>
+          <p:cNvSpPr/>
+          <p:nvPr/>
+        </p:nvSpPr>
+        <p:spPr>
+          <a:xfrm>
+            <a:off x="548640" y="4082796"/>
+            <a:ext cx="10881360" cy="868680"/>
+          </a:xfrm>
+          <a:prstGeom prst="roundRect">
+            <a:avLst>
+              <a:gd name="adj" fmla="val 8421"/>
+            </a:avLst>
+          </a:prstGeom>
+          <a:solidFill>
+            <a:srgbClr val="F3E9DA"/>
+          </a:solidFill>
+          <a:ln/>
+        </p:spPr>
+      </p:sp>
+      <p:sp>
+        <p:nvSpPr>
+          <p:cNvPr id="8" name="Text 5"/>
+          <p:cNvSpPr txBox="1"/>
+          <p:nvPr/>
+        </p:nvSpPr>
+        <p:spPr>
+          <a:xfrm>
+            <a:off x="868680" y="4219956"/>
+            <a:ext cx="1828800" cy="274320"/>
+          </a:xfrm>
+          <a:prstGeom prst="rect">
+            <a:avLst/>
+          </a:prstGeom>
+          <a:noFill/>
+          <a:ln/>
+        </p:spPr>
+        <p:txBody>
+          <a:bodyPr wrap="square" lIns="0" tIns="0" rIns="0" bIns="0" rtlCol="0" anchor="ctr"/>
+          <a:lstStyle/>
+          <a:p>
+            <a:pPr indent="0" marL="0">
+              <a:buNone/>
+            </a:pPr>
+            <a:r>
+              <a:rPr lang="en-US" sz="1000" b="1" spc="100" kern="0" dirty="0">
+                <a:solidFill>
+                  <a:srgbClr val="B5813F"/>
+                </a:solidFill>
+                <a:latin typeface="Calibri" pitchFamily="34" charset="0"/>
+                <a:ea typeface="Calibri" pitchFamily="34" charset="-122"/>
+                <a:cs typeface="Calibri" pitchFamily="34" charset="-120"/>
+              </a:rPr>
+              <a:t>POURQUOI</a:t>
+            </a:r>
+            <a:endParaRPr lang="en-US" sz="1000" dirty="0"/>
+          </a:p>
+        </p:txBody>
+      </p:sp>
+      <p:sp>
+        <p:nvSpPr>
+          <p:cNvPr id="9" name="Text 6"/>
+          <p:cNvSpPr txBox="1"/>
+          <p:nvPr/>
+        </p:nvSpPr>
+        <p:spPr>
+          <a:xfrm>
+            <a:off x="868680" y="4466844"/>
+            <a:ext cx="10241280" cy="411480"/>
+          </a:xfrm>
+          <a:prstGeom prst="rect">
+            <a:avLst/>
+          </a:prstGeom>
+          <a:noFill/>
+          <a:ln/>
+        </p:spPr>
+        <p:txBody>
+          <a:bodyPr wrap="square" lIns="0" tIns="0" rIns="0" bIns="0" rtlCol="0" anchor="ctr"/>
+          <a:lstStyle/>
+          <a:p>
+            <a:pPr indent="0" marL="0">
+              <a:lnSpc>
+                <a:spcPct val="110000"/>
+              </a:lnSpc>
+              <a:buNone/>
+            </a:pPr>
+            <a:r>
+              <a:rPr lang="en-US" sz="1250" dirty="0">
+                <a:solidFill>
+                  <a:srgbClr val="2C1A0E"/>
+                </a:solidFill>
+                <a:latin typeface="Calibri" pitchFamily="34" charset="0"/>
+                <a:ea typeface="Calibri" pitchFamily="34" charset="-122"/>
+                <a:cs typeface="Calibri" pitchFamily="34" charset="-120"/>
+              </a:rPr>
+              <a:t>Le tout premier démarrage peut prendre plusieurs minutes (téléchargement de quelques Go) — les démarrages suivants sont quasi instantanés.</a:t>
+            </a:r>
+            <a:endParaRPr lang="en-US" sz="1250" dirty="0"/>
+          </a:p>
+        </p:txBody>
+      </p:sp>
+      <p:sp>
+        <p:nvSpPr>
+          <p:cNvPr id="10" name="Text 7"/>
+          <p:cNvSpPr txBox="1"/>
+          <p:nvPr/>
+        </p:nvSpPr>
+        <p:spPr>
+          <a:xfrm>
+            <a:off x="457200" y="6510528"/>
+            <a:ext cx="7315200" cy="274320"/>
+          </a:xfrm>
+          <a:prstGeom prst="rect">
+            <a:avLst/>
+          </a:prstGeom>
+          <a:noFill/>
+          <a:ln/>
+        </p:spPr>
+        <p:txBody>
+          <a:bodyPr wrap="square" lIns="0" tIns="0" rIns="0" bIns="0" rtlCol="0" anchor="ctr"/>
+          <a:lstStyle/>
+          <a:p>
+            <a:pPr indent="0" marL="0">
+              <a:buNone/>
+            </a:pPr>
+            <a:r>
+              <a:rPr lang="en-US" sz="900" dirty="0">
+                <a:solidFill>
+                  <a:srgbClr val="7C6552"/>
+                </a:solidFill>
+                <a:latin typeface="Calibri" pitchFamily="34" charset="0"/>
+                <a:ea typeface="Calibri" pitchFamily="34" charset="-122"/>
+                <a:cs typeface="Calibri" pitchFamily="34" charset="-120"/>
+              </a:rPr>
+              <a:t>MadeArchive — Documentation technique</a:t>
+            </a:r>
+            <a:endParaRPr lang="en-US" sz="900" dirty="0"/>
+          </a:p>
+        </p:txBody>
+      </p:sp>
+      <p:sp>
+        <p:nvSpPr>
+          <p:cNvPr id="11" name="Text 8"/>
+          <p:cNvSpPr txBox="1"/>
+          <p:nvPr/>
+        </p:nvSpPr>
+        <p:spPr>
+          <a:xfrm>
+            <a:off x="11338560" y="6510528"/>
+            <a:ext cx="457200" cy="274320"/>
+          </a:xfrm>
+          <a:prstGeom prst="rect">
+            <a:avLst/>
+          </a:prstGeom>
+          <a:noFill/>
+          <a:ln/>
+        </p:spPr>
+        <p:txBody>
+          <a:bodyPr wrap="square" lIns="0" tIns="0" rIns="0" bIns="0" rtlCol="0" anchor="ctr"/>
+          <a:lstStyle/>
+          <a:p>
+            <a:pPr algn="r" indent="0" marL="0">
+              <a:buNone/>
+            </a:pPr>
+            <a:r>
+              <a:rPr lang="en-US" sz="900" dirty="0">
+                <a:solidFill>
+                  <a:srgbClr val="7C6552"/>
+                </a:solidFill>
+                <a:latin typeface="Calibri" pitchFamily="34" charset="0"/>
+                <a:ea typeface="Calibri" pitchFamily="34" charset="-122"/>
+                <a:cs typeface="Calibri" pitchFamily="34" charset="-120"/>
+              </a:rPr>
+              <a:t>40</a:t>
+            </a:r>
+            <a:endParaRPr lang="en-US" sz="900" dirty="0"/>
+          </a:p>
+        </p:txBody>
+      </p:sp>
+    </p:spTree>
+  </p:cSld>
+  <p:clrMapOvr>
+    <a:masterClrMapping/>
+  </p:clrMapOvr>
+</p:sld>
+</file>
+
+<file path=ppt/slides/slide41.xml><?xml version="1.0" encoding="utf-8"?>
+<p:sld xmlns:a="http://schemas.openxmlformats.org/drawingml/2006/main" xmlns:r="http://schemas.openxmlformats.org/officeDocument/2006/relationships" xmlns:p="http://schemas.openxmlformats.org/presentationml/2006/main">
+  <p:cSld name="Slide 41">
+    <p:bg>
+      <p:bgPr>
+        <a:solidFill>
+          <a:srgbClr val="FFFFFF"/>
+        </a:solidFill>
+      </p:bgPr>
+    </p:bg>
+    <p:spTree>
+      <p:nvGrpSpPr>
+        <p:cNvPr id="1" name=""/>
+        <p:cNvGrpSpPr/>
+        <p:nvPr/>
+      </p:nvGrpSpPr>
+      <p:grpSpPr>
+        <a:xfrm>
+          <a:off x="0" y="0"/>
+          <a:ext cx="0" cy="0"/>
+          <a:chOff x="0" y="0"/>
+          <a:chExt cx="0" cy="0"/>
+        </a:xfrm>
+      </p:grpSpPr>
+      <p:sp>
+        <p:nvSpPr>
+          <p:cNvPr id="2" name="Shape 0"/>
+          <p:cNvSpPr/>
+          <p:nvPr/>
+        </p:nvSpPr>
+        <p:spPr>
+          <a:xfrm>
+            <a:off x="548640" y="502920"/>
+            <a:ext cx="502920" cy="502920"/>
+          </a:xfrm>
+          <a:prstGeom prst="ellipse">
+            <a:avLst/>
+          </a:prstGeom>
+          <a:solidFill>
+            <a:srgbClr val="B5813F"/>
+          </a:solidFill>
+          <a:ln/>
+        </p:spPr>
+      </p:sp>
+      <p:pic>
+        <p:nvPicPr>
+          <p:cNvPr id="3" name="Image 0" descr="preencoded.png">    </p:cNvPr>
+          <p:cNvPicPr>
+            <a:picLocks noChangeAspect="1"/>
+          </p:cNvPicPr>
+          <p:nvPr/>
+        </p:nvPicPr>
+        <p:blipFill>
+          <a:blip r:embed="rId1"/>
+          <a:stretch>
+            <a:fillRect/>
+          </a:stretch>
+        </p:blipFill>
+        <p:spPr>
+          <a:xfrm>
+            <a:off x="608990" y="563270"/>
+            <a:ext cx="382219" cy="382219"/>
+          </a:xfrm>
+          <a:prstGeom prst="rect">
+            <a:avLst/>
+          </a:prstGeom>
+        </p:spPr>
+      </p:pic>
+      <p:sp>
+        <p:nvSpPr>
+          <p:cNvPr id="4" name="Text 1"/>
+          <p:cNvSpPr txBox="1"/>
+          <p:nvPr/>
+        </p:nvSpPr>
+        <p:spPr>
+          <a:xfrm>
+            <a:off x="1170432" y="457200"/>
+            <a:ext cx="8229600" cy="274320"/>
+          </a:xfrm>
+          <a:prstGeom prst="rect">
+            <a:avLst/>
+          </a:prstGeom>
+          <a:noFill/>
+          <a:ln/>
+        </p:spPr>
+        <p:txBody>
+          <a:bodyPr wrap="square" lIns="0" tIns="0" rIns="0" bIns="0" rtlCol="0" anchor="ctr"/>
+          <a:lstStyle/>
+          <a:p>
+            <a:pPr indent="0" marL="0">
+              <a:buNone/>
+            </a:pPr>
+            <a:r>
+              <a:rPr lang="en-US" sz="1100" spc="150" kern="0" dirty="0">
+                <a:solidFill>
+                  <a:srgbClr val="B5813F"/>
+                </a:solidFill>
+                <a:latin typeface="Calibri" pitchFamily="34" charset="0"/>
+                <a:ea typeface="Calibri" pitchFamily="34" charset="-122"/>
+                <a:cs typeface="Calibri" pitchFamily="34" charset="-120"/>
+              </a:rPr>
+              <a:t>INITIALISATION</a:t>
+            </a:r>
+            <a:endParaRPr lang="en-US" sz="1100" dirty="0"/>
+          </a:p>
+        </p:txBody>
+      </p:sp>
+      <p:sp>
+        <p:nvSpPr>
+          <p:cNvPr id="5" name="Text 2"/>
+          <p:cNvSpPr txBox="1"/>
+          <p:nvPr/>
+        </p:nvSpPr>
+        <p:spPr>
+          <a:xfrm>
+            <a:off x="1152144" y="713232"/>
+            <a:ext cx="9692640" cy="594360"/>
+          </a:xfrm>
+          <a:prstGeom prst="rect">
+            <a:avLst/>
+          </a:prstGeom>
+          <a:noFill/>
+          <a:ln/>
+        </p:spPr>
+        <p:txBody>
+          <a:bodyPr wrap="square" lIns="0" tIns="0" rIns="0" bIns="0" rtlCol="0" anchor="ctr"/>
+          <a:lstStyle/>
+          <a:p>
+            <a:pPr indent="0" marL="0">
+              <a:buNone/>
+            </a:pPr>
+            <a:r>
+              <a:rPr lang="en-US" sz="2400" b="1" dirty="0">
+                <a:solidFill>
+                  <a:srgbClr val="2C1A0E"/>
+                </a:solidFill>
+                <a:latin typeface="Cambria" pitchFamily="34" charset="0"/>
+                <a:ea typeface="Cambria" pitchFamily="34" charset="-122"/>
+                <a:cs typeface="Cambria" pitchFamily="34" charset="-120"/>
+              </a:rPr>
+              <a:t>Rôles, administrateur initial &amp; migrations</a:t>
+            </a:r>
+            <a:endParaRPr lang="en-US" sz="2400" dirty="0"/>
+          </a:p>
+        </p:txBody>
+      </p:sp>
+      <p:sp>
+        <p:nvSpPr>
+          <p:cNvPr id="6" name="Text 3"/>
+          <p:cNvSpPr txBox="1"/>
+          <p:nvPr/>
+        </p:nvSpPr>
+        <p:spPr>
+          <a:xfrm>
+            <a:off x="548640" y="2820924"/>
+            <a:ext cx="10881360" cy="868680"/>
+          </a:xfrm>
+          <a:prstGeom prst="rect">
+            <a:avLst/>
+          </a:prstGeom>
+          <a:noFill/>
+          <a:ln/>
+        </p:spPr>
+        <p:txBody>
+          <a:bodyPr wrap="square" lIns="0" tIns="0" rIns="0" bIns="0" rtlCol="0" anchor="ctr"/>
+          <a:lstStyle/>
+          <a:p>
+            <a:pPr marL="342900" indent="-342900">
+              <a:lnSpc>
+                <a:spcPct val="115000"/>
+              </a:lnSpc>
+              <a:spcAft>
+                <a:spcPts val="800"/>
+              </a:spcAft>
+              <a:buSzPct val="100000"/>
+              <a:buChar char="•"/>
+            </a:pPr>
+            <a:r>
+              <a:rPr lang="en-US" sz="1450" dirty="0">
+                <a:solidFill>
+                  <a:srgbClr val="2C1A0E"/>
+                </a:solidFill>
+                <a:latin typeface="Calibri" pitchFamily="34" charset="0"/>
+                <a:ea typeface="Calibri" pitchFamily="34" charset="-122"/>
+                <a:cs typeface="Calibri" pitchFamily="34" charset="-120"/>
+              </a:rPr>
+              <a:t>PostgreSQL attend seulement d'être joignable — c'est "app", à SON PROPRE démarrage, qui applique le schéma (Flyway).</a:t>
+            </a:r>
+            <a:endParaRPr lang="en-US" sz="1450" dirty="0"/>
+          </a:p>
+          <a:p>
+            <a:pPr marL="342900" indent="-342900">
+              <a:lnSpc>
+                <a:spcPct val="115000"/>
+              </a:lnSpc>
+              <a:spcAft>
+                <a:spcPts val="800"/>
+              </a:spcAft>
+              <a:buSzPct val="100000"/>
+              <a:buChar char="•"/>
+            </a:pPr>
+            <a:r>
+              <a:rPr lang="en-US" sz="1450" dirty="0">
+                <a:solidFill>
+                  <a:srgbClr val="2C1A0E"/>
+                </a:solidFill>
+                <a:latin typeface="Calibri" pitchFamily="34" charset="0"/>
+                <a:ea typeface="Calibri" pitchFamily="34" charset="-122"/>
+                <a:cs typeface="Calibri" pitchFamily="34" charset="-120"/>
+              </a:rPr>
+              <a:t>Les 4 rôles sont créés s'ils manquent, puis l'admin initial SI configuré via .env (INITIAL_ADMIN_EMAIL/PASSWORD).</a:t>
+            </a:r>
+            <a:endParaRPr lang="en-US" sz="1450" dirty="0"/>
+          </a:p>
+        </p:txBody>
+      </p:sp>
+      <p:sp>
+        <p:nvSpPr>
+          <p:cNvPr id="7" name="Shape 4"/>
+          <p:cNvSpPr/>
+          <p:nvPr/>
+        </p:nvSpPr>
+        <p:spPr>
+          <a:xfrm>
+            <a:off x="548640" y="3945636"/>
+            <a:ext cx="10881360" cy="1143000"/>
+          </a:xfrm>
+          <a:prstGeom prst="roundRect">
+            <a:avLst>
+              <a:gd name="adj" fmla="val 6400"/>
+            </a:avLst>
+          </a:prstGeom>
+          <a:solidFill>
+            <a:srgbClr val="F3E9DA"/>
+          </a:solidFill>
+          <a:ln/>
+        </p:spPr>
+      </p:sp>
+      <p:sp>
+        <p:nvSpPr>
+          <p:cNvPr id="8" name="Text 5"/>
+          <p:cNvSpPr txBox="1"/>
+          <p:nvPr/>
+        </p:nvSpPr>
+        <p:spPr>
+          <a:xfrm>
+            <a:off x="868680" y="4082796"/>
+            <a:ext cx="1828800" cy="274320"/>
+          </a:xfrm>
+          <a:prstGeom prst="rect">
+            <a:avLst/>
+          </a:prstGeom>
+          <a:noFill/>
+          <a:ln/>
+        </p:spPr>
+        <p:txBody>
+          <a:bodyPr wrap="square" lIns="0" tIns="0" rIns="0" bIns="0" rtlCol="0" anchor="ctr"/>
+          <a:lstStyle/>
+          <a:p>
+            <a:pPr indent="0" marL="0">
+              <a:buNone/>
+            </a:pPr>
+            <a:r>
+              <a:rPr lang="en-US" sz="1000" b="1" spc="100" kern="0" dirty="0">
+                <a:solidFill>
+                  <a:srgbClr val="B5813F"/>
+                </a:solidFill>
+                <a:latin typeface="Calibri" pitchFamily="34" charset="0"/>
+                <a:ea typeface="Calibri" pitchFamily="34" charset="-122"/>
+                <a:cs typeface="Calibri" pitchFamily="34" charset="-120"/>
+              </a:rPr>
+              <a:t>POURQUOI</a:t>
+            </a:r>
+            <a:endParaRPr lang="en-US" sz="1000" dirty="0"/>
+          </a:p>
+        </p:txBody>
+      </p:sp>
+      <p:sp>
+        <p:nvSpPr>
+          <p:cNvPr id="9" name="Text 6"/>
+          <p:cNvSpPr txBox="1"/>
+          <p:nvPr/>
+        </p:nvSpPr>
+        <p:spPr>
+          <a:xfrm>
+            <a:off x="868680" y="4329684"/>
+            <a:ext cx="10241280" cy="685800"/>
+          </a:xfrm>
+          <a:prstGeom prst="rect">
+            <a:avLst/>
+          </a:prstGeom>
+          <a:noFill/>
+          <a:ln/>
+        </p:spPr>
+        <p:txBody>
+          <a:bodyPr wrap="square" lIns="0" tIns="0" rIns="0" bIns="0" rtlCol="0" anchor="ctr"/>
+          <a:lstStyle/>
+          <a:p>
+            <a:pPr indent="0" marL="0">
+              <a:lnSpc>
+                <a:spcPct val="110000"/>
+              </a:lnSpc>
+              <a:buNone/>
+            </a:pPr>
+            <a:r>
+              <a:rPr lang="en-US" sz="1250" dirty="0">
+                <a:solidFill>
+                  <a:srgbClr val="2C1A0E"/>
+                </a:solidFill>
+                <a:latin typeface="Calibri" pitchFamily="34" charset="0"/>
+                <a:ea typeface="Calibri" pitchFamily="34" charset="-122"/>
+                <a:cs typeface="Calibri" pitchFamily="34" charset="-120"/>
+              </a:rPr>
+              <a:t>Sans ces variables, l'application démarre volontairement sans administrateur — un assistant public temporaire (/api/public/setup) prend le relais au premier accès, et se referme définitivement dès qu'un admin existe.</a:t>
+            </a:r>
+            <a:endParaRPr lang="en-US" sz="1250" dirty="0"/>
+          </a:p>
+        </p:txBody>
+      </p:sp>
+      <p:sp>
+        <p:nvSpPr>
+          <p:cNvPr id="10" name="Text 7"/>
+          <p:cNvSpPr txBox="1"/>
+          <p:nvPr/>
+        </p:nvSpPr>
+        <p:spPr>
+          <a:xfrm>
+            <a:off x="457200" y="6510528"/>
+            <a:ext cx="7315200" cy="274320"/>
+          </a:xfrm>
+          <a:prstGeom prst="rect">
+            <a:avLst/>
+          </a:prstGeom>
+          <a:noFill/>
+          <a:ln/>
+        </p:spPr>
+        <p:txBody>
+          <a:bodyPr wrap="square" lIns="0" tIns="0" rIns="0" bIns="0" rtlCol="0" anchor="ctr"/>
+          <a:lstStyle/>
+          <a:p>
+            <a:pPr indent="0" marL="0">
+              <a:buNone/>
+            </a:pPr>
+            <a:r>
+              <a:rPr lang="en-US" sz="900" dirty="0">
+                <a:solidFill>
+                  <a:srgbClr val="7C6552"/>
+                </a:solidFill>
+                <a:latin typeface="Calibri" pitchFamily="34" charset="0"/>
+                <a:ea typeface="Calibri" pitchFamily="34" charset="-122"/>
+                <a:cs typeface="Calibri" pitchFamily="34" charset="-120"/>
+              </a:rPr>
+              <a:t>MadeArchive — Documentation technique</a:t>
+            </a:r>
+            <a:endParaRPr lang="en-US" sz="900" dirty="0"/>
+          </a:p>
+        </p:txBody>
+      </p:sp>
+      <p:sp>
+        <p:nvSpPr>
+          <p:cNvPr id="11" name="Text 8"/>
+          <p:cNvSpPr txBox="1"/>
+          <p:nvPr/>
+        </p:nvSpPr>
+        <p:spPr>
+          <a:xfrm>
+            <a:off x="11338560" y="6510528"/>
+            <a:ext cx="457200" cy="274320"/>
+          </a:xfrm>
+          <a:prstGeom prst="rect">
+            <a:avLst/>
+          </a:prstGeom>
+          <a:noFill/>
+          <a:ln/>
+        </p:spPr>
+        <p:txBody>
+          <a:bodyPr wrap="square" lIns="0" tIns="0" rIns="0" bIns="0" rtlCol="0" anchor="ctr"/>
+          <a:lstStyle/>
+          <a:p>
+            <a:pPr algn="r" indent="0" marL="0">
+              <a:buNone/>
+            </a:pPr>
+            <a:r>
+              <a:rPr lang="en-US" sz="900" dirty="0">
+                <a:solidFill>
+                  <a:srgbClr val="7C6552"/>
+                </a:solidFill>
+                <a:latin typeface="Calibri" pitchFamily="34" charset="0"/>
+                <a:ea typeface="Calibri" pitchFamily="34" charset="-122"/>
+                <a:cs typeface="Calibri" pitchFamily="34" charset="-120"/>
+              </a:rPr>
+              <a:t>41</a:t>
+            </a:r>
+            <a:endParaRPr lang="en-US" sz="900" dirty="0"/>
+          </a:p>
+        </p:txBody>
+      </p:sp>
+    </p:spTree>
+  </p:cSld>
+  <p:clrMapOvr>
+    <a:masterClrMapping/>
+  </p:clrMapOvr>
+</p:sld>
+</file>
+
+<file path=ppt/slides/slide42.xml><?xml version="1.0" encoding="utf-8"?>
+<p:sld xmlns:a="http://schemas.openxmlformats.org/drawingml/2006/main" xmlns:r="http://schemas.openxmlformats.org/officeDocument/2006/relationships" xmlns:p="http://schemas.openxmlformats.org/presentationml/2006/main">
+  <p:cSld name="Slide 42">
+    <p:bg>
+      <p:bgPr>
+        <a:solidFill>
+          <a:srgbClr val="FFFFFF"/>
+        </a:solidFill>
+      </p:bgPr>
+    </p:bg>
+    <p:spTree>
+      <p:nvGrpSpPr>
+        <p:cNvPr id="1" name=""/>
+        <p:cNvGrpSpPr/>
+        <p:nvPr/>
+      </p:nvGrpSpPr>
+      <p:grpSpPr>
+        <a:xfrm>
+          <a:off x="0" y="0"/>
+          <a:ext cx="0" cy="0"/>
+          <a:chOff x="0" y="0"/>
+          <a:chExt cx="0" cy="0"/>
+        </a:xfrm>
+      </p:grpSpPr>
+      <p:sp>
+        <p:nvSpPr>
+          <p:cNvPr id="2" name="Shape 0"/>
+          <p:cNvSpPr/>
+          <p:nvPr/>
+        </p:nvSpPr>
+        <p:spPr>
+          <a:xfrm>
+            <a:off x="548640" y="502920"/>
+            <a:ext cx="502920" cy="502920"/>
+          </a:xfrm>
+          <a:prstGeom prst="ellipse">
+            <a:avLst/>
+          </a:prstGeom>
+          <a:solidFill>
+            <a:srgbClr val="B5813F"/>
+          </a:solidFill>
+          <a:ln/>
+        </p:spPr>
+      </p:sp>
+      <p:pic>
+        <p:nvPicPr>
+          <p:cNvPr id="3" name="Image 0" descr="preencoded.png">    </p:cNvPr>
+          <p:cNvPicPr>
+            <a:picLocks noChangeAspect="1"/>
+          </p:cNvPicPr>
+          <p:nvPr/>
+        </p:nvPicPr>
+        <p:blipFill>
+          <a:blip r:embed="rId1"/>
+          <a:stretch>
+            <a:fillRect/>
+          </a:stretch>
+        </p:blipFill>
+        <p:spPr>
+          <a:xfrm>
+            <a:off x="608990" y="563270"/>
+            <a:ext cx="382219" cy="382219"/>
+          </a:xfrm>
+          <a:prstGeom prst="rect">
+            <a:avLst/>
+          </a:prstGeom>
+        </p:spPr>
+      </p:pic>
+      <p:sp>
+        <p:nvSpPr>
+          <p:cNvPr id="4" name="Text 1"/>
+          <p:cNvSpPr txBox="1"/>
+          <p:nvPr/>
+        </p:nvSpPr>
+        <p:spPr>
+          <a:xfrm>
+            <a:off x="1170432" y="457200"/>
+            <a:ext cx="8229600" cy="274320"/>
+          </a:xfrm>
+          <a:prstGeom prst="rect">
+            <a:avLst/>
+          </a:prstGeom>
+          <a:noFill/>
+          <a:ln/>
+        </p:spPr>
+        <p:txBody>
+          <a:bodyPr wrap="square" lIns="0" tIns="0" rIns="0" bIns="0" rtlCol="0" anchor="ctr"/>
+          <a:lstStyle/>
+          <a:p>
+            <a:pPr indent="0" marL="0">
+              <a:buNone/>
+            </a:pPr>
+            <a:r>
+              <a:rPr lang="en-US" sz="1100" spc="150" kern="0" dirty="0">
+                <a:solidFill>
+                  <a:srgbClr val="B5813F"/>
+                </a:solidFill>
+                <a:latin typeface="Calibri" pitchFamily="34" charset="0"/>
+                <a:ea typeface="Calibri" pitchFamily="34" charset="-122"/>
+                <a:cs typeface="Calibri" pitchFamily="34" charset="-120"/>
+              </a:rPr>
+              <a:t>INITIALISATION</a:t>
+            </a:r>
+            <a:endParaRPr lang="en-US" sz="1100" dirty="0"/>
+          </a:p>
+        </p:txBody>
+      </p:sp>
+      <p:sp>
+        <p:nvSpPr>
+          <p:cNvPr id="5" name="Text 2"/>
+          <p:cNvSpPr txBox="1"/>
+          <p:nvPr/>
+        </p:nvSpPr>
+        <p:spPr>
+          <a:xfrm>
+            <a:off x="1152144" y="713232"/>
+            <a:ext cx="9692640" cy="594360"/>
+          </a:xfrm>
+          <a:prstGeom prst="rect">
+            <a:avLst/>
+          </a:prstGeom>
+          <a:noFill/>
+          <a:ln/>
+        </p:spPr>
+        <p:txBody>
+          <a:bodyPr wrap="square" lIns="0" tIns="0" rIns="0" bIns="0" rtlCol="0" anchor="ctr"/>
+          <a:lstStyle/>
+          <a:p>
+            <a:pPr indent="0" marL="0">
+              <a:buNone/>
+            </a:pPr>
+            <a:r>
+              <a:rPr lang="en-US" sz="2400" b="1" dirty="0">
+                <a:solidFill>
+                  <a:srgbClr val="2C1A0E"/>
+                </a:solidFill>
+                <a:latin typeface="Cambria" pitchFamily="34" charset="0"/>
+                <a:ea typeface="Cambria" pitchFamily="34" charset="-122"/>
+                <a:cs typeface="Cambria" pitchFamily="34" charset="-120"/>
+              </a:rPr>
+              <a:t>MinIO et Meilisearch : pas d'étape d'initialisation séparée</a:t>
+            </a:r>
+            <a:endParaRPr lang="en-US" sz="2400" dirty="0"/>
+          </a:p>
+        </p:txBody>
+      </p:sp>
+      <p:sp>
+        <p:nvSpPr>
+          <p:cNvPr id="6" name="Text 3"/>
+          <p:cNvSpPr txBox="1"/>
+          <p:nvPr/>
+        </p:nvSpPr>
+        <p:spPr>
+          <a:xfrm>
+            <a:off x="548640" y="3520440"/>
+            <a:ext cx="10881360" cy="868680"/>
+          </a:xfrm>
+          <a:prstGeom prst="rect">
+            <a:avLst/>
+          </a:prstGeom>
+          <a:noFill/>
+          <a:ln/>
+        </p:spPr>
+        <p:txBody>
+          <a:bodyPr wrap="square" lIns="0" tIns="0" rIns="0" bIns="0" rtlCol="0" anchor="ctr"/>
+          <a:lstStyle/>
+          <a:p>
+            <a:pPr marL="342900" indent="-342900">
+              <a:lnSpc>
+                <a:spcPct val="115000"/>
+              </a:lnSpc>
+              <a:spcAft>
+                <a:spcPts val="800"/>
+              </a:spcAft>
+              <a:buSzPct val="100000"/>
+              <a:buChar char="•"/>
+            </a:pPr>
+            <a:r>
+              <a:rPr lang="en-US" sz="1450" dirty="0">
+                <a:solidFill>
+                  <a:srgbClr val="2C1A0E"/>
+                </a:solidFill>
+                <a:latin typeface="Calibri" pitchFamily="34" charset="0"/>
+                <a:ea typeface="Calibri" pitchFamily="34" charset="-122"/>
+                <a:cs typeface="Calibri" pitchFamily="34" charset="-120"/>
+              </a:rPr>
+              <a:t>Le bucket MinIO est vérifié — et créé s'il manque — à chaque appel du client, pas une fois au démarrage.</a:t>
+            </a:r>
+            <a:endParaRPr lang="en-US" sz="1450" dirty="0"/>
+          </a:p>
+          <a:p>
+            <a:pPr marL="342900" indent="-342900">
+              <a:lnSpc>
+                <a:spcPct val="115000"/>
+              </a:lnSpc>
+              <a:spcAft>
+                <a:spcPts val="800"/>
+              </a:spcAft>
+              <a:buSzPct val="100000"/>
+              <a:buChar char="•"/>
+            </a:pPr>
+            <a:r>
+              <a:rPr lang="en-US" sz="1450" dirty="0">
+                <a:solidFill>
+                  <a:srgbClr val="2C1A0E"/>
+                </a:solidFill>
+                <a:latin typeface="Calibri" pitchFamily="34" charset="0"/>
+                <a:ea typeface="Calibri" pitchFamily="34" charset="-122"/>
+                <a:cs typeface="Calibri" pitchFamily="34" charset="-120"/>
+              </a:rPr>
+              <a:t>L'index Meilisearch se remplit au fil des archivages, ou par une resynchronisation manuelle (ADMIN) s'il doit être reconstruit.</a:t>
+            </a:r>
+            <a:endParaRPr lang="en-US" sz="1450" dirty="0"/>
+          </a:p>
+        </p:txBody>
+      </p:sp>
+      <p:sp>
+        <p:nvSpPr>
+          <p:cNvPr id="7" name="Text 4"/>
+          <p:cNvSpPr txBox="1"/>
+          <p:nvPr/>
+        </p:nvSpPr>
+        <p:spPr>
+          <a:xfrm>
+            <a:off x="457200" y="6510528"/>
+            <a:ext cx="7315200" cy="274320"/>
+          </a:xfrm>
+          <a:prstGeom prst="rect">
+            <a:avLst/>
+          </a:prstGeom>
+          <a:noFill/>
+          <a:ln/>
+        </p:spPr>
+        <p:txBody>
+          <a:bodyPr wrap="square" lIns="0" tIns="0" rIns="0" bIns="0" rtlCol="0" anchor="ctr"/>
+          <a:lstStyle/>
+          <a:p>
+            <a:pPr indent="0" marL="0">
+              <a:buNone/>
+            </a:pPr>
+            <a:r>
+              <a:rPr lang="en-US" sz="900" dirty="0">
+                <a:solidFill>
+                  <a:srgbClr val="7C6552"/>
+                </a:solidFill>
+                <a:latin typeface="Calibri" pitchFamily="34" charset="0"/>
+                <a:ea typeface="Calibri" pitchFamily="34" charset="-122"/>
+                <a:cs typeface="Calibri" pitchFamily="34" charset="-120"/>
+              </a:rPr>
+              <a:t>MadeArchive — Documentation technique</a:t>
+            </a:r>
+            <a:endParaRPr lang="en-US" sz="900" dirty="0"/>
+          </a:p>
+        </p:txBody>
+      </p:sp>
+      <p:sp>
+        <p:nvSpPr>
+          <p:cNvPr id="8" name="Text 5"/>
+          <p:cNvSpPr txBox="1"/>
+          <p:nvPr/>
+        </p:nvSpPr>
+        <p:spPr>
+          <a:xfrm>
+            <a:off x="11338560" y="6510528"/>
+            <a:ext cx="457200" cy="274320"/>
+          </a:xfrm>
+          <a:prstGeom prst="rect">
+            <a:avLst/>
+          </a:prstGeom>
+          <a:noFill/>
+          <a:ln/>
+        </p:spPr>
+        <p:txBody>
+          <a:bodyPr wrap="square" lIns="0" tIns="0" rIns="0" bIns="0" rtlCol="0" anchor="ctr"/>
+          <a:lstStyle/>
+          <a:p>
+            <a:pPr algn="r" indent="0" marL="0">
+              <a:buNone/>
+            </a:pPr>
+            <a:r>
+              <a:rPr lang="en-US" sz="900" dirty="0">
+                <a:solidFill>
+                  <a:srgbClr val="7C6552"/>
+                </a:solidFill>
+                <a:latin typeface="Calibri" pitchFamily="34" charset="0"/>
+                <a:ea typeface="Calibri" pitchFamily="34" charset="-122"/>
+                <a:cs typeface="Calibri" pitchFamily="34" charset="-120"/>
+              </a:rPr>
+              <a:t>42</a:t>
+            </a:r>
+            <a:endParaRPr lang="en-US" sz="900" dirty="0"/>
+          </a:p>
+        </p:txBody>
+      </p:sp>
+    </p:spTree>
+  </p:cSld>
+  <p:clrMapOvr>
+    <a:masterClrMapping/>
+  </p:clrMapOvr>
+</p:sld>
+</file>
+
+<file path=ppt/slides/slide43.xml><?xml version="1.0" encoding="utf-8"?>
+<p:sld xmlns:a="http://schemas.openxmlformats.org/drawingml/2006/main" xmlns:r="http://schemas.openxmlformats.org/officeDocument/2006/relationships" xmlns:p="http://schemas.openxmlformats.org/presentationml/2006/main">
+  <p:cSld name="Slide 43">
+    <p:bg>
+      <p:bgPr>
+        <a:solidFill>
+          <a:srgbClr val="FFFFFF"/>
+        </a:solidFill>
+      </p:bgPr>
+    </p:bg>
+    <p:spTree>
+      <p:nvGrpSpPr>
+        <p:cNvPr id="1" name=""/>
+        <p:cNvGrpSpPr/>
+        <p:nvPr/>
+      </p:nvGrpSpPr>
+      <p:grpSpPr>
+        <a:xfrm>
+          <a:off x="0" y="0"/>
+          <a:ext cx="0" cy="0"/>
+          <a:chOff x="0" y="0"/>
+          <a:chExt cx="0" cy="0"/>
+        </a:xfrm>
+      </p:grpSpPr>
+      <p:sp>
+        <p:nvSpPr>
+          <p:cNvPr id="2" name="Shape 0"/>
+          <p:cNvSpPr/>
+          <p:nvPr/>
+        </p:nvSpPr>
+        <p:spPr>
+          <a:xfrm>
+            <a:off x="548640" y="502920"/>
+            <a:ext cx="502920" cy="502920"/>
+          </a:xfrm>
+          <a:prstGeom prst="ellipse">
+            <a:avLst/>
+          </a:prstGeom>
+          <a:solidFill>
+            <a:srgbClr val="B5813F"/>
+          </a:solidFill>
+          <a:ln/>
+        </p:spPr>
+      </p:sp>
+      <p:pic>
+        <p:nvPicPr>
+          <p:cNvPr id="3" name="Image 0" descr="preencoded.png">    </p:cNvPr>
+          <p:cNvPicPr>
+            <a:picLocks noChangeAspect="1"/>
+          </p:cNvPicPr>
+          <p:nvPr/>
+        </p:nvPicPr>
+        <p:blipFill>
+          <a:blip r:embed="rId1"/>
+          <a:stretch>
+            <a:fillRect/>
+          </a:stretch>
+        </p:blipFill>
+        <p:spPr>
+          <a:xfrm>
+            <a:off x="608990" y="563270"/>
+            <a:ext cx="382219" cy="382219"/>
+          </a:xfrm>
+          <a:prstGeom prst="rect">
+            <a:avLst/>
+          </a:prstGeom>
+        </p:spPr>
+      </p:pic>
+      <p:sp>
+        <p:nvSpPr>
+          <p:cNvPr id="4" name="Text 1"/>
+          <p:cNvSpPr txBox="1"/>
+          <p:nvPr/>
+        </p:nvSpPr>
+        <p:spPr>
+          <a:xfrm>
+            <a:off x="1170432" y="457200"/>
+            <a:ext cx="8229600" cy="274320"/>
+          </a:xfrm>
+          <a:prstGeom prst="rect">
+            <a:avLst/>
+          </a:prstGeom>
+          <a:noFill/>
+          <a:ln/>
+        </p:spPr>
+        <p:txBody>
+          <a:bodyPr wrap="square" lIns="0" tIns="0" rIns="0" bIns="0" rtlCol="0" anchor="ctr"/>
+          <a:lstStyle/>
+          <a:p>
+            <a:pPr indent="0" marL="0">
+              <a:buNone/>
+            </a:pPr>
+            <a:r>
+              <a:rPr lang="en-US" sz="1100" spc="150" kern="0" dirty="0">
+                <a:solidFill>
+                  <a:srgbClr val="B5813F"/>
+                </a:solidFill>
+                <a:latin typeface="Calibri" pitchFamily="34" charset="0"/>
+                <a:ea typeface="Calibri" pitchFamily="34" charset="-122"/>
+                <a:cs typeface="Calibri" pitchFamily="34" charset="-120"/>
+              </a:rPr>
+              <a:t>MISE À L'ÉCHELLE</a:t>
+            </a:r>
+            <a:endParaRPr lang="en-US" sz="1100" dirty="0"/>
+          </a:p>
+        </p:txBody>
+      </p:sp>
+      <p:sp>
+        <p:nvSpPr>
+          <p:cNvPr id="5" name="Text 2"/>
+          <p:cNvSpPr txBox="1"/>
+          <p:nvPr/>
+        </p:nvSpPr>
+        <p:spPr>
+          <a:xfrm>
+            <a:off x="1152144" y="713232"/>
+            <a:ext cx="9692640" cy="594360"/>
+          </a:xfrm>
+          <a:prstGeom prst="rect">
+            <a:avLst/>
+          </a:prstGeom>
+          <a:noFill/>
+          <a:ln/>
+        </p:spPr>
+        <p:txBody>
+          <a:bodyPr wrap="square" lIns="0" tIns="0" rIns="0" bIns="0" rtlCol="0" anchor="ctr"/>
+          <a:lstStyle/>
+          <a:p>
+            <a:pPr indent="0" marL="0">
+              <a:buNone/>
+            </a:pPr>
+            <a:r>
+              <a:rPr lang="en-US" sz="2400" b="1" dirty="0">
+                <a:solidFill>
+                  <a:srgbClr val="2C1A0E"/>
+                </a:solidFill>
+                <a:latin typeface="Cambria" pitchFamily="34" charset="0"/>
+                <a:ea typeface="Cambria" pitchFamily="34" charset="-122"/>
+                <a:cs typeface="Cambria" pitchFamily="34" charset="-120"/>
+              </a:rPr>
+              <a:t>Plusieurs instances de l'API (app)</a:t>
+            </a:r>
+            <a:endParaRPr lang="en-US" sz="2400" dirty="0"/>
+          </a:p>
+        </p:txBody>
+      </p:sp>
+      <p:sp>
+        <p:nvSpPr>
+          <p:cNvPr id="6" name="Text 3"/>
+          <p:cNvSpPr txBox="1"/>
+          <p:nvPr/>
+        </p:nvSpPr>
+        <p:spPr>
+          <a:xfrm>
+            <a:off x="548640" y="2775204"/>
+            <a:ext cx="10881360" cy="868680"/>
+          </a:xfrm>
+          <a:prstGeom prst="rect">
+            <a:avLst/>
+          </a:prstGeom>
+          <a:noFill/>
+          <a:ln/>
+        </p:spPr>
+        <p:txBody>
+          <a:bodyPr wrap="square" lIns="0" tIns="0" rIns="0" bIns="0" rtlCol="0" anchor="ctr"/>
+          <a:lstStyle/>
+          <a:p>
+            <a:pPr marL="342900" indent="-342900">
+              <a:lnSpc>
+                <a:spcPct val="115000"/>
+              </a:lnSpc>
+              <a:spcAft>
+                <a:spcPts val="800"/>
+              </a:spcAft>
+              <a:buSzPct val="100000"/>
+              <a:buChar char="•"/>
+            </a:pPr>
+            <a:r>
+              <a:rPr lang="en-US" sz="1450" dirty="0">
+                <a:solidFill>
+                  <a:srgbClr val="2C1A0E"/>
+                </a:solidFill>
+                <a:latin typeface="Calibri" pitchFamily="34" charset="0"/>
+                <a:ea typeface="Calibri" pitchFamily="34" charset="-122"/>
+                <a:cs typeface="Calibri" pitchFamily="34" charset="-120"/>
+              </a:rPr>
+              <a:t>Déjà centralisé et prêt : PostgreSQL, MinIO, Meilisearch, Redis, le volume HSM — une 2e instance y accède exactement comme la première.</a:t>
+            </a:r>
+            <a:endParaRPr lang="en-US" sz="1450" dirty="0"/>
+          </a:p>
+          <a:p>
+            <a:pPr marL="342900" indent="-342900">
+              <a:lnSpc>
+                <a:spcPct val="115000"/>
+              </a:lnSpc>
+              <a:spcAft>
+                <a:spcPts val="800"/>
+              </a:spcAft>
+              <a:buSzPct val="100000"/>
+              <a:buChar char="•"/>
+            </a:pPr>
+            <a:r>
+              <a:rPr lang="en-US" sz="1450" dirty="0">
+                <a:solidFill>
+                  <a:srgbClr val="2C1A0E"/>
+                </a:solidFill>
+                <a:latin typeface="Calibri" pitchFamily="34" charset="0"/>
+                <a:ea typeface="Calibri" pitchFamily="34" charset="-122"/>
+                <a:cs typeface="Calibri" pitchFamily="34" charset="-120"/>
+              </a:rPr>
+              <a:t>Le cache d'authentification est déjà dans Redis, pas en mémoire locale — un utilisateur peut changer d'instance sans se reconnecter.</a:t>
+            </a:r>
+            <a:endParaRPr lang="en-US" sz="1450" dirty="0"/>
+          </a:p>
+        </p:txBody>
+      </p:sp>
+      <p:sp>
+        <p:nvSpPr>
+          <p:cNvPr id="7" name="Shape 4"/>
+          <p:cNvSpPr/>
+          <p:nvPr/>
+        </p:nvSpPr>
+        <p:spPr>
+          <a:xfrm>
+            <a:off x="548640" y="3899916"/>
+            <a:ext cx="10881360" cy="1234440"/>
+          </a:xfrm>
+          <a:prstGeom prst="roundRect">
+            <a:avLst>
+              <a:gd name="adj" fmla="val 5926"/>
+            </a:avLst>
+          </a:prstGeom>
+          <a:solidFill>
+            <a:srgbClr val="FBE6D6"/>
+          </a:solidFill>
+          <a:ln/>
+        </p:spPr>
+      </p:sp>
+      <p:sp>
+        <p:nvSpPr>
+          <p:cNvPr id="8" name="Text 5"/>
+          <p:cNvSpPr txBox="1"/>
+          <p:nvPr/>
+        </p:nvSpPr>
+        <p:spPr>
+          <a:xfrm>
+            <a:off x="868680" y="4037076"/>
+            <a:ext cx="2743200" cy="274320"/>
+          </a:xfrm>
+          <a:prstGeom prst="rect">
+            <a:avLst/>
+          </a:prstGeom>
+          <a:noFill/>
+          <a:ln/>
+        </p:spPr>
+        <p:txBody>
+          <a:bodyPr wrap="square" lIns="0" tIns="0" rIns="0" bIns="0" rtlCol="0" anchor="ctr"/>
+          <a:lstStyle/>
+          <a:p>
+            <a:pPr indent="0" marL="0">
+              <a:buNone/>
+            </a:pPr>
+            <a:r>
+              <a:rPr lang="en-US" sz="1000" b="1" spc="100" kern="0" dirty="0">
+                <a:solidFill>
+                  <a:srgbClr val="A34E12"/>
+                </a:solidFill>
+                <a:latin typeface="Calibri" pitchFamily="34" charset="0"/>
+                <a:ea typeface="Calibri" pitchFamily="34" charset="-122"/>
+                <a:cs typeface="Calibri" pitchFamily="34" charset="-120"/>
+              </a:rPr>
+              <a:t>LIMITE CONNUE</a:t>
+            </a:r>
+            <a:endParaRPr lang="en-US" sz="1000" dirty="0"/>
+          </a:p>
+        </p:txBody>
+      </p:sp>
+      <p:sp>
+        <p:nvSpPr>
+          <p:cNvPr id="9" name="Text 6"/>
+          <p:cNvSpPr txBox="1"/>
+          <p:nvPr/>
+        </p:nvSpPr>
+        <p:spPr>
+          <a:xfrm>
+            <a:off x="868680" y="4283964"/>
+            <a:ext cx="10241280" cy="777240"/>
+          </a:xfrm>
+          <a:prstGeom prst="rect">
+            <a:avLst/>
+          </a:prstGeom>
+          <a:noFill/>
+          <a:ln/>
+        </p:spPr>
+        <p:txBody>
+          <a:bodyPr wrap="square" lIns="0" tIns="0" rIns="0" bIns="0" rtlCol="0" anchor="ctr"/>
+          <a:lstStyle/>
+          <a:p>
+            <a:pPr indent="0" marL="0">
+              <a:lnSpc>
+                <a:spcPct val="110000"/>
+              </a:lnSpc>
+              <a:buNone/>
+            </a:pPr>
+            <a:r>
+              <a:rPr lang="en-US" sz="1250" dirty="0">
+                <a:solidFill>
+                  <a:srgbClr val="2C1A0E"/>
+                </a:solidFill>
+                <a:latin typeface="Calibri" pitchFamily="34" charset="0"/>
+                <a:ea typeface="Calibri" pitchFamily="34" charset="-122"/>
+                <a:cs typeface="Calibri" pitchFamily="34" charset="-120"/>
+              </a:rPr>
+              <a:t>OcrSessionCache (sessions Phase 1 → Phase 2) vit en mémoire du process Java, propre à CHAQUE instance. Si la Phase 2 atterrit sur une autre instance que la Phase 1, l'archivage échoue avec "session introuvable" — à migrer vers Redis avant toute mise à l'échelle, pas hypothétique.</a:t>
+            </a:r>
+            <a:endParaRPr lang="en-US" sz="1250" dirty="0"/>
+          </a:p>
+        </p:txBody>
+      </p:sp>
+      <p:sp>
+        <p:nvSpPr>
+          <p:cNvPr id="10" name="Text 7"/>
+          <p:cNvSpPr txBox="1"/>
+          <p:nvPr/>
+        </p:nvSpPr>
+        <p:spPr>
+          <a:xfrm>
+            <a:off x="457200" y="6510528"/>
+            <a:ext cx="7315200" cy="274320"/>
+          </a:xfrm>
+          <a:prstGeom prst="rect">
+            <a:avLst/>
+          </a:prstGeom>
+          <a:noFill/>
+          <a:ln/>
+        </p:spPr>
+        <p:txBody>
+          <a:bodyPr wrap="square" lIns="0" tIns="0" rIns="0" bIns="0" rtlCol="0" anchor="ctr"/>
+          <a:lstStyle/>
+          <a:p>
+            <a:pPr indent="0" marL="0">
+              <a:buNone/>
+            </a:pPr>
+            <a:r>
+              <a:rPr lang="en-US" sz="900" dirty="0">
+                <a:solidFill>
+                  <a:srgbClr val="7C6552"/>
+                </a:solidFill>
+                <a:latin typeface="Calibri" pitchFamily="34" charset="0"/>
+                <a:ea typeface="Calibri" pitchFamily="34" charset="-122"/>
+                <a:cs typeface="Calibri" pitchFamily="34" charset="-120"/>
+              </a:rPr>
+              <a:t>MadeArchive — Documentation technique</a:t>
+            </a:r>
+            <a:endParaRPr lang="en-US" sz="900" dirty="0"/>
+          </a:p>
+        </p:txBody>
+      </p:sp>
+      <p:sp>
+        <p:nvSpPr>
+          <p:cNvPr id="11" name="Text 8"/>
+          <p:cNvSpPr txBox="1"/>
+          <p:nvPr/>
+        </p:nvSpPr>
+        <p:spPr>
+          <a:xfrm>
+            <a:off x="11338560" y="6510528"/>
+            <a:ext cx="457200" cy="274320"/>
+          </a:xfrm>
+          <a:prstGeom prst="rect">
+            <a:avLst/>
+          </a:prstGeom>
+          <a:noFill/>
+          <a:ln/>
+        </p:spPr>
+        <p:txBody>
+          <a:bodyPr wrap="square" lIns="0" tIns="0" rIns="0" bIns="0" rtlCol="0" anchor="ctr"/>
+          <a:lstStyle/>
+          <a:p>
+            <a:pPr algn="r" indent="0" marL="0">
+              <a:buNone/>
+            </a:pPr>
+            <a:r>
+              <a:rPr lang="en-US" sz="900" dirty="0">
+                <a:solidFill>
+                  <a:srgbClr val="7C6552"/>
+                </a:solidFill>
+                <a:latin typeface="Calibri" pitchFamily="34" charset="0"/>
+                <a:ea typeface="Calibri" pitchFamily="34" charset="-122"/>
+                <a:cs typeface="Calibri" pitchFamily="34" charset="-120"/>
+              </a:rPr>
+              <a:t>43</a:t>
+            </a:r>
+            <a:endParaRPr lang="en-US" sz="900" dirty="0"/>
+          </a:p>
+        </p:txBody>
+      </p:sp>
+    </p:spTree>
+  </p:cSld>
+  <p:clrMapOvr>
+    <a:masterClrMapping/>
+  </p:clrMapOvr>
+</p:sld>
+</file>
+
+<file path=ppt/slides/slide44.xml><?xml version="1.0" encoding="utf-8"?>
+<p:sld xmlns:a="http://schemas.openxmlformats.org/drawingml/2006/main" xmlns:r="http://schemas.openxmlformats.org/officeDocument/2006/relationships" xmlns:p="http://schemas.openxmlformats.org/presentationml/2006/main">
+  <p:cSld name="Slide 44">
+    <p:bg>
+      <p:bgPr>
+        <a:solidFill>
+          <a:srgbClr val="FFFFFF"/>
+        </a:solidFill>
+      </p:bgPr>
+    </p:bg>
+    <p:spTree>
+      <p:nvGrpSpPr>
+        <p:cNvPr id="1" name=""/>
+        <p:cNvGrpSpPr/>
+        <p:nvPr/>
+      </p:nvGrpSpPr>
+      <p:grpSpPr>
+        <a:xfrm>
+          <a:off x="0" y="0"/>
+          <a:ext cx="0" cy="0"/>
+          <a:chOff x="0" y="0"/>
+          <a:chExt cx="0" cy="0"/>
+        </a:xfrm>
+      </p:grpSpPr>
+      <p:sp>
+        <p:nvSpPr>
+          <p:cNvPr id="2" name="Shape 0"/>
+          <p:cNvSpPr/>
+          <p:nvPr/>
+        </p:nvSpPr>
+        <p:spPr>
+          <a:xfrm>
+            <a:off x="548640" y="502920"/>
+            <a:ext cx="502920" cy="502920"/>
+          </a:xfrm>
+          <a:prstGeom prst="ellipse">
+            <a:avLst/>
+          </a:prstGeom>
+          <a:solidFill>
+            <a:srgbClr val="B5813F"/>
+          </a:solidFill>
+          <a:ln/>
+        </p:spPr>
+      </p:sp>
+      <p:pic>
+        <p:nvPicPr>
+          <p:cNvPr id="3" name="Image 0" descr="preencoded.png">    </p:cNvPr>
+          <p:cNvPicPr>
+            <a:picLocks noChangeAspect="1"/>
+          </p:cNvPicPr>
+          <p:nvPr/>
+        </p:nvPicPr>
+        <p:blipFill>
+          <a:blip r:embed="rId1"/>
+          <a:stretch>
+            <a:fillRect/>
+          </a:stretch>
+        </p:blipFill>
+        <p:spPr>
+          <a:xfrm>
+            <a:off x="608990" y="563270"/>
+            <a:ext cx="382219" cy="382219"/>
+          </a:xfrm>
+          <a:prstGeom prst="rect">
+            <a:avLst/>
+          </a:prstGeom>
+        </p:spPr>
+      </p:pic>
+      <p:sp>
+        <p:nvSpPr>
+          <p:cNvPr id="4" name="Text 1"/>
+          <p:cNvSpPr txBox="1"/>
+          <p:nvPr/>
+        </p:nvSpPr>
+        <p:spPr>
+          <a:xfrm>
+            <a:off x="1170432" y="457200"/>
+            <a:ext cx="8229600" cy="274320"/>
+          </a:xfrm>
+          <a:prstGeom prst="rect">
+            <a:avLst/>
+          </a:prstGeom>
+          <a:noFill/>
+          <a:ln/>
+        </p:spPr>
+        <p:txBody>
+          <a:bodyPr wrap="square" lIns="0" tIns="0" rIns="0" bIns="0" rtlCol="0" anchor="ctr"/>
+          <a:lstStyle/>
+          <a:p>
+            <a:pPr indent="0" marL="0">
+              <a:buNone/>
+            </a:pPr>
+            <a:r>
+              <a:rPr lang="en-US" sz="1100" spc="150" kern="0" dirty="0">
+                <a:solidFill>
+                  <a:srgbClr val="B5813F"/>
+                </a:solidFill>
+                <a:latin typeface="Calibri" pitchFamily="34" charset="0"/>
+                <a:ea typeface="Calibri" pitchFamily="34" charset="-122"/>
+                <a:cs typeface="Calibri" pitchFamily="34" charset="-120"/>
+              </a:rPr>
+              <a:t>MISE À L'ÉCHELLE</a:t>
+            </a:r>
+            <a:endParaRPr lang="en-US" sz="1100" dirty="0"/>
+          </a:p>
+        </p:txBody>
+      </p:sp>
+      <p:sp>
+        <p:nvSpPr>
+          <p:cNvPr id="5" name="Text 2"/>
+          <p:cNvSpPr txBox="1"/>
+          <p:nvPr/>
+        </p:nvSpPr>
+        <p:spPr>
+          <a:xfrm>
+            <a:off x="1152144" y="713232"/>
+            <a:ext cx="9692640" cy="594360"/>
+          </a:xfrm>
+          <a:prstGeom prst="rect">
+            <a:avLst/>
+          </a:prstGeom>
+          <a:noFill/>
+          <a:ln/>
+        </p:spPr>
+        <p:txBody>
+          <a:bodyPr wrap="square" lIns="0" tIns="0" rIns="0" bIns="0" rtlCol="0" anchor="ctr"/>
+          <a:lstStyle/>
+          <a:p>
+            <a:pPr indent="0" marL="0">
+              <a:buNone/>
+            </a:pPr>
+            <a:r>
+              <a:rPr lang="en-US" sz="2400" b="1" dirty="0">
+                <a:solidFill>
+                  <a:srgbClr val="2C1A0E"/>
+                </a:solidFill>
+                <a:latin typeface="Cambria" pitchFamily="34" charset="0"/>
+                <a:ea typeface="Cambria" pitchFamily="34" charset="-122"/>
+                <a:cs typeface="Cambria" pitchFamily="34" charset="-120"/>
+              </a:rPr>
+              <a:t>Plusieurs instances de app — côté déploiement</a:t>
+            </a:r>
+            <a:endParaRPr lang="en-US" sz="2400" dirty="0"/>
+          </a:p>
+        </p:txBody>
+      </p:sp>
+      <p:sp>
+        <p:nvSpPr>
+          <p:cNvPr id="6" name="Text 3"/>
+          <p:cNvSpPr txBox="1"/>
+          <p:nvPr/>
+        </p:nvSpPr>
+        <p:spPr>
+          <a:xfrm>
+            <a:off x="548640" y="3246120"/>
+            <a:ext cx="10881360" cy="1417320"/>
+          </a:xfrm>
+          <a:prstGeom prst="rect">
+            <a:avLst/>
+          </a:prstGeom>
+          <a:noFill/>
+          <a:ln/>
+        </p:spPr>
+        <p:txBody>
+          <a:bodyPr wrap="square" lIns="0" tIns="0" rIns="0" bIns="0" rtlCol="0" anchor="ctr"/>
+          <a:lstStyle/>
+          <a:p>
+            <a:pPr marL="342900" indent="-342900">
+              <a:lnSpc>
+                <a:spcPct val="115000"/>
+              </a:lnSpc>
+              <a:spcAft>
+                <a:spcPts val="800"/>
+              </a:spcAft>
+              <a:buSzPct val="100000"/>
+              <a:buChar char="•"/>
+            </a:pPr>
+            <a:r>
+              <a:rPr lang="en-US" sz="1450" dirty="0">
+                <a:solidFill>
+                  <a:srgbClr val="2C1A0E"/>
+                </a:solidFill>
+                <a:latin typeface="Calibri" pitchFamily="34" charset="0"/>
+                <a:ea typeface="Calibri" pitchFamily="34" charset="-122"/>
+                <a:cs typeface="Calibri" pitchFamily="34" charset="-120"/>
+              </a:rPr>
+              <a:t>container_name fixe sur "app" empêche nativement docker compose --scale — à retirer en premier.</a:t>
+            </a:r>
+            <a:endParaRPr lang="en-US" sz="1450" dirty="0"/>
+          </a:p>
+          <a:p>
+            <a:pPr marL="342900" indent="-342900">
+              <a:lnSpc>
+                <a:spcPct val="115000"/>
+              </a:lnSpc>
+              <a:spcAft>
+                <a:spcPts val="800"/>
+              </a:spcAft>
+              <a:buSzPct val="100000"/>
+              <a:buChar char="•"/>
+            </a:pPr>
+            <a:r>
+              <a:rPr lang="en-US" sz="1450" dirty="0">
+                <a:solidFill>
+                  <a:srgbClr val="2C1A0E"/>
+                </a:solidFill>
+                <a:latin typeface="Calibri" pitchFamily="34" charset="0"/>
+                <a:ea typeface="Calibri" pitchFamily="34" charset="-122"/>
+                <a:cs typeface="Calibri" pitchFamily="34" charset="-120"/>
+              </a:rPr>
+              <a:t>Traefik doit ensuite connaître les réplicas : plusieurs adresses dans dynamic.yml.template, ou son fournisseur Docker natif.</a:t>
+            </a:r>
+            <a:endParaRPr lang="en-US" sz="1450" dirty="0"/>
+          </a:p>
+          <a:p>
+            <a:pPr marL="342900" indent="-342900">
+              <a:lnSpc>
+                <a:spcPct val="115000"/>
+              </a:lnSpc>
+              <a:spcAft>
+                <a:spcPts val="800"/>
+              </a:spcAft>
+              <a:buSzPct val="100000"/>
+              <a:buChar char="•"/>
+            </a:pPr>
+            <a:r>
+              <a:rPr lang="en-US" sz="1450" dirty="0">
+                <a:solidFill>
+                  <a:srgbClr val="2C1A0E"/>
+                </a:solidFill>
+                <a:latin typeface="Calibri" pitchFamily="34" charset="0"/>
+                <a:ea typeface="Calibri" pitchFamily="34" charset="-122"/>
+                <a:cs typeface="Calibri" pitchFamily="34" charset="-120"/>
+              </a:rPr>
+              <a:t>Le fournisseur Docker natif a déjà été essayé et abandonné (incompatible avec Docker Desktop en dev) — jamais retesté sur un vrai hôte Linux de production.</a:t>
+            </a:r>
+            <a:endParaRPr lang="en-US" sz="1450" dirty="0"/>
+          </a:p>
+        </p:txBody>
+      </p:sp>
+      <p:sp>
+        <p:nvSpPr>
+          <p:cNvPr id="7" name="Text 4"/>
+          <p:cNvSpPr txBox="1"/>
+          <p:nvPr/>
+        </p:nvSpPr>
+        <p:spPr>
+          <a:xfrm>
+            <a:off x="457200" y="6510528"/>
+            <a:ext cx="7315200" cy="274320"/>
+          </a:xfrm>
+          <a:prstGeom prst="rect">
+            <a:avLst/>
+          </a:prstGeom>
+          <a:noFill/>
+          <a:ln/>
+        </p:spPr>
+        <p:txBody>
+          <a:bodyPr wrap="square" lIns="0" tIns="0" rIns="0" bIns="0" rtlCol="0" anchor="ctr"/>
+          <a:lstStyle/>
+          <a:p>
+            <a:pPr indent="0" marL="0">
+              <a:buNone/>
+            </a:pPr>
+            <a:r>
+              <a:rPr lang="en-US" sz="900" dirty="0">
+                <a:solidFill>
+                  <a:srgbClr val="7C6552"/>
+                </a:solidFill>
+                <a:latin typeface="Calibri" pitchFamily="34" charset="0"/>
+                <a:ea typeface="Calibri" pitchFamily="34" charset="-122"/>
+                <a:cs typeface="Calibri" pitchFamily="34" charset="-120"/>
+              </a:rPr>
+              <a:t>MadeArchive — Documentation technique</a:t>
+            </a:r>
+            <a:endParaRPr lang="en-US" sz="900" dirty="0"/>
+          </a:p>
+        </p:txBody>
+      </p:sp>
+      <p:sp>
+        <p:nvSpPr>
+          <p:cNvPr id="8" name="Text 5"/>
+          <p:cNvSpPr txBox="1"/>
+          <p:nvPr/>
+        </p:nvSpPr>
+        <p:spPr>
+          <a:xfrm>
+            <a:off x="11338560" y="6510528"/>
+            <a:ext cx="457200" cy="274320"/>
+          </a:xfrm>
+          <a:prstGeom prst="rect">
+            <a:avLst/>
+          </a:prstGeom>
+          <a:noFill/>
+          <a:ln/>
+        </p:spPr>
+        <p:txBody>
+          <a:bodyPr wrap="square" lIns="0" tIns="0" rIns="0" bIns="0" rtlCol="0" anchor="ctr"/>
+          <a:lstStyle/>
+          <a:p>
+            <a:pPr algn="r" indent="0" marL="0">
+              <a:buNone/>
+            </a:pPr>
+            <a:r>
+              <a:rPr lang="en-US" sz="900" dirty="0">
+                <a:solidFill>
+                  <a:srgbClr val="7C6552"/>
+                </a:solidFill>
+                <a:latin typeface="Calibri" pitchFamily="34" charset="0"/>
+                <a:ea typeface="Calibri" pitchFamily="34" charset="-122"/>
+                <a:cs typeface="Calibri" pitchFamily="34" charset="-120"/>
+              </a:rPr>
+              <a:t>44</a:t>
+            </a:r>
+            <a:endParaRPr lang="en-US" sz="900" dirty="0"/>
+          </a:p>
+        </p:txBody>
+      </p:sp>
+    </p:spTree>
+  </p:cSld>
+  <p:clrMapOvr>
+    <a:masterClrMapping/>
+  </p:clrMapOvr>
+</p:sld>
+</file>
+
+<file path=ppt/slides/slide45.xml><?xml version="1.0" encoding="utf-8"?>
+<p:sld xmlns:a="http://schemas.openxmlformats.org/drawingml/2006/main" xmlns:r="http://schemas.openxmlformats.org/officeDocument/2006/relationships" xmlns:p="http://schemas.openxmlformats.org/presentationml/2006/main">
+  <p:cSld name="Slide 45">
+    <p:bg>
+      <p:bgPr>
+        <a:solidFill>
+          <a:srgbClr val="FFFFFF"/>
+        </a:solidFill>
+      </p:bgPr>
+    </p:bg>
+    <p:spTree>
+      <p:nvGrpSpPr>
+        <p:cNvPr id="1" name=""/>
+        <p:cNvGrpSpPr/>
+        <p:nvPr/>
+      </p:nvGrpSpPr>
+      <p:grpSpPr>
+        <a:xfrm>
+          <a:off x="0" y="0"/>
+          <a:ext cx="0" cy="0"/>
+          <a:chOff x="0" y="0"/>
+          <a:chExt cx="0" cy="0"/>
+        </a:xfrm>
+      </p:grpSpPr>
+      <p:sp>
+        <p:nvSpPr>
+          <p:cNvPr id="2" name="Shape 0"/>
+          <p:cNvSpPr/>
+          <p:nvPr/>
+        </p:nvSpPr>
+        <p:spPr>
+          <a:xfrm>
+            <a:off x="548640" y="502920"/>
+            <a:ext cx="502920" cy="502920"/>
+          </a:xfrm>
+          <a:prstGeom prst="ellipse">
+            <a:avLst/>
+          </a:prstGeom>
+          <a:solidFill>
+            <a:srgbClr val="B5813F"/>
+          </a:solidFill>
+          <a:ln/>
+        </p:spPr>
+      </p:sp>
+      <p:pic>
+        <p:nvPicPr>
+          <p:cNvPr id="3" name="Image 0" descr="preencoded.png">    </p:cNvPr>
+          <p:cNvPicPr>
+            <a:picLocks noChangeAspect="1"/>
+          </p:cNvPicPr>
+          <p:nvPr/>
+        </p:nvPicPr>
+        <p:blipFill>
+          <a:blip r:embed="rId1"/>
+          <a:stretch>
+            <a:fillRect/>
+          </a:stretch>
+        </p:blipFill>
+        <p:spPr>
+          <a:xfrm>
+            <a:off x="608990" y="563270"/>
+            <a:ext cx="382219" cy="382219"/>
+          </a:xfrm>
+          <a:prstGeom prst="rect">
+            <a:avLst/>
+          </a:prstGeom>
+        </p:spPr>
+      </p:pic>
+      <p:sp>
+        <p:nvSpPr>
+          <p:cNvPr id="4" name="Text 1"/>
+          <p:cNvSpPr txBox="1"/>
+          <p:nvPr/>
+        </p:nvSpPr>
+        <p:spPr>
+          <a:xfrm>
+            <a:off x="1170432" y="457200"/>
+            <a:ext cx="8229600" cy="274320"/>
+          </a:xfrm>
+          <a:prstGeom prst="rect">
+            <a:avLst/>
+          </a:prstGeom>
+          <a:noFill/>
+          <a:ln/>
+        </p:spPr>
+        <p:txBody>
+          <a:bodyPr wrap="square" lIns="0" tIns="0" rIns="0" bIns="0" rtlCol="0" anchor="ctr"/>
+          <a:lstStyle/>
+          <a:p>
+            <a:pPr indent="0" marL="0">
+              <a:buNone/>
+            </a:pPr>
+            <a:r>
+              <a:rPr lang="en-US" sz="1100" spc="150" kern="0" dirty="0">
+                <a:solidFill>
+                  <a:srgbClr val="B5813F"/>
+                </a:solidFill>
+                <a:latin typeface="Calibri" pitchFamily="34" charset="0"/>
+                <a:ea typeface="Calibri" pitchFamily="34" charset="-122"/>
+                <a:cs typeface="Calibri" pitchFamily="34" charset="-120"/>
+              </a:rPr>
+              <a:t>MISE À L'ÉCHELLE</a:t>
+            </a:r>
+            <a:endParaRPr lang="en-US" sz="1100" dirty="0"/>
+          </a:p>
+        </p:txBody>
+      </p:sp>
+      <p:sp>
+        <p:nvSpPr>
+          <p:cNvPr id="5" name="Text 2"/>
+          <p:cNvSpPr txBox="1"/>
+          <p:nvPr/>
+        </p:nvSpPr>
+        <p:spPr>
+          <a:xfrm>
+            <a:off x="1152144" y="713232"/>
+            <a:ext cx="9692640" cy="594360"/>
+          </a:xfrm>
+          <a:prstGeom prst="rect">
+            <a:avLst/>
+          </a:prstGeom>
+          <a:noFill/>
+          <a:ln/>
+        </p:spPr>
+        <p:txBody>
+          <a:bodyPr wrap="square" lIns="0" tIns="0" rIns="0" bIns="0" rtlCol="0" anchor="ctr"/>
+          <a:lstStyle/>
+          <a:p>
+            <a:pPr indent="0" marL="0">
+              <a:buNone/>
+            </a:pPr>
+            <a:r>
+              <a:rPr lang="en-US" sz="2400" b="1" dirty="0">
+                <a:solidFill>
+                  <a:srgbClr val="2C1A0E"/>
+                </a:solidFill>
+                <a:latin typeface="Cambria" pitchFamily="34" charset="0"/>
+                <a:ea typeface="Cambria" pitchFamily="34" charset="-122"/>
+                <a:cs typeface="Cambria" pitchFamily="34" charset="-120"/>
+              </a:rPr>
+              <a:t>Plusieurs instances d'Ollama (Qwen)</a:t>
+            </a:r>
+            <a:endParaRPr lang="en-US" sz="2400" dirty="0"/>
+          </a:p>
+        </p:txBody>
+      </p:sp>
+      <p:sp>
+        <p:nvSpPr>
+          <p:cNvPr id="6" name="Text 3"/>
+          <p:cNvSpPr txBox="1"/>
+          <p:nvPr/>
+        </p:nvSpPr>
+        <p:spPr>
+          <a:xfrm>
+            <a:off x="548640" y="3003804"/>
+            <a:ext cx="10881360" cy="502920"/>
+          </a:xfrm>
+          <a:prstGeom prst="rect">
+            <a:avLst/>
+          </a:prstGeom>
+          <a:noFill/>
+          <a:ln/>
+        </p:spPr>
+        <p:txBody>
+          <a:bodyPr wrap="square" lIns="0" tIns="0" rIns="0" bIns="0" rtlCol="0" anchor="ctr"/>
+          <a:lstStyle/>
+          <a:p>
+            <a:pPr marL="342900" indent="-342900">
+              <a:lnSpc>
+                <a:spcPct val="115000"/>
+              </a:lnSpc>
+              <a:spcAft>
+                <a:spcPts val="800"/>
+              </a:spcAft>
+              <a:buSzPct val="100000"/>
+              <a:buChar char="•"/>
+            </a:pPr>
+            <a:r>
+              <a:rPr lang="en-US" sz="1450" dirty="0">
+                <a:solidFill>
+                  <a:srgbClr val="2C1A0E"/>
+                </a:solidFill>
+                <a:latin typeface="Calibri" pitchFamily="34" charset="0"/>
+                <a:ea typeface="Calibri" pitchFamily="34" charset="-122"/>
+                <a:cs typeface="Calibri" pitchFamily="34" charset="-120"/>
+              </a:rPr>
+              <a:t>Une seule adresse Ollama connue de l'app (OLLAMA_BASE_URL) — pas de répartition entre plusieurs instances intégrée au code.</a:t>
+            </a:r>
+            <a:endParaRPr lang="en-US" sz="1450" dirty="0"/>
+          </a:p>
+        </p:txBody>
+      </p:sp>
+      <p:sp>
+        <p:nvSpPr>
+          <p:cNvPr id="7" name="Shape 4"/>
+          <p:cNvSpPr/>
+          <p:nvPr/>
+        </p:nvSpPr>
+        <p:spPr>
+          <a:xfrm>
+            <a:off x="548640" y="3762756"/>
+            <a:ext cx="10881360" cy="1143000"/>
+          </a:xfrm>
+          <a:prstGeom prst="roundRect">
+            <a:avLst>
+              <a:gd name="adj" fmla="val 6400"/>
+            </a:avLst>
+          </a:prstGeom>
+          <a:solidFill>
+            <a:srgbClr val="F3E9DA"/>
+          </a:solidFill>
+          <a:ln/>
+        </p:spPr>
+      </p:sp>
+      <p:sp>
+        <p:nvSpPr>
+          <p:cNvPr id="8" name="Text 5"/>
+          <p:cNvSpPr txBox="1"/>
+          <p:nvPr/>
+        </p:nvSpPr>
+        <p:spPr>
+          <a:xfrm>
+            <a:off x="868680" y="3899916"/>
+            <a:ext cx="1828800" cy="274320"/>
+          </a:xfrm>
+          <a:prstGeom prst="rect">
+            <a:avLst/>
+          </a:prstGeom>
+          <a:noFill/>
+          <a:ln/>
+        </p:spPr>
+        <p:txBody>
+          <a:bodyPr wrap="square" lIns="0" tIns="0" rIns="0" bIns="0" rtlCol="0" anchor="ctr"/>
+          <a:lstStyle/>
+          <a:p>
+            <a:pPr indent="0" marL="0">
+              <a:buNone/>
+            </a:pPr>
+            <a:r>
+              <a:rPr lang="en-US" sz="1000" b="1" spc="100" kern="0" dirty="0">
+                <a:solidFill>
+                  <a:srgbClr val="B5813F"/>
+                </a:solidFill>
+                <a:latin typeface="Calibri" pitchFamily="34" charset="0"/>
+                <a:ea typeface="Calibri" pitchFamily="34" charset="-122"/>
+                <a:cs typeface="Calibri" pitchFamily="34" charset="-120"/>
+              </a:rPr>
+              <a:t>POURQUOI</a:t>
+            </a:r>
+            <a:endParaRPr lang="en-US" sz="1000" dirty="0"/>
+          </a:p>
+        </p:txBody>
+      </p:sp>
+      <p:sp>
+        <p:nvSpPr>
+          <p:cNvPr id="9" name="Text 6"/>
+          <p:cNvSpPr txBox="1"/>
+          <p:nvPr/>
+        </p:nvSpPr>
+        <p:spPr>
+          <a:xfrm>
+            <a:off x="868680" y="4146804"/>
+            <a:ext cx="10241280" cy="685800"/>
+          </a:xfrm>
+          <a:prstGeom prst="rect">
+            <a:avLst/>
+          </a:prstGeom>
+          <a:noFill/>
+          <a:ln/>
+        </p:spPr>
+        <p:txBody>
+          <a:bodyPr wrap="square" lIns="0" tIns="0" rIns="0" bIns="0" rtlCol="0" anchor="ctr"/>
+          <a:lstStyle/>
+          <a:p>
+            <a:pPr indent="0" marL="0">
+              <a:lnSpc>
+                <a:spcPct val="110000"/>
+              </a:lnSpc>
+              <a:buNone/>
+            </a:pPr>
+            <a:r>
+              <a:rPr lang="en-US" sz="1250" dirty="0">
+                <a:solidFill>
+                  <a:srgbClr val="2C1A0E"/>
+                </a:solidFill>
+                <a:latin typeface="Calibri" pitchFamily="34" charset="0"/>
+                <a:ea typeface="Calibri" pitchFamily="34" charset="-122"/>
+                <a:cs typeface="Calibri" pitchFamily="34" charset="-120"/>
+              </a:rPr>
+              <a:t>Ce modèle n'est appelé qu'une fois PAR TYPE de document, jamais par document — le débit réel est probablement déjà faible ; OLLAMA_NUM_PARALLEL permet à une seule instance d'absorber plusieurs requêtes de front avant d'envisager plusieurs conteneurs. Si le besoin apparaît vraiment : même mécanisme que pour app/frontend (plusieurs adresses dans dynamic.yml.template) — aucun changement de code Java.</a:t>
+            </a:r>
+            <a:endParaRPr lang="en-US" sz="1250" dirty="0"/>
+          </a:p>
+        </p:txBody>
+      </p:sp>
+      <p:sp>
+        <p:nvSpPr>
+          <p:cNvPr id="10" name="Text 7"/>
+          <p:cNvSpPr txBox="1"/>
+          <p:nvPr/>
+        </p:nvSpPr>
+        <p:spPr>
+          <a:xfrm>
+            <a:off x="457200" y="6510528"/>
+            <a:ext cx="7315200" cy="274320"/>
+          </a:xfrm>
+          <a:prstGeom prst="rect">
+            <a:avLst/>
+          </a:prstGeom>
+          <a:noFill/>
+          <a:ln/>
+        </p:spPr>
+        <p:txBody>
+          <a:bodyPr wrap="square" lIns="0" tIns="0" rIns="0" bIns="0" rtlCol="0" anchor="ctr"/>
+          <a:lstStyle/>
+          <a:p>
+            <a:pPr indent="0" marL="0">
+              <a:buNone/>
+            </a:pPr>
+            <a:r>
+              <a:rPr lang="en-US" sz="900" dirty="0">
+                <a:solidFill>
+                  <a:srgbClr val="7C6552"/>
+                </a:solidFill>
+                <a:latin typeface="Calibri" pitchFamily="34" charset="0"/>
+                <a:ea typeface="Calibri" pitchFamily="34" charset="-122"/>
+                <a:cs typeface="Calibri" pitchFamily="34" charset="-120"/>
+              </a:rPr>
+              <a:t>MadeArchive — Documentation technique</a:t>
+            </a:r>
+            <a:endParaRPr lang="en-US" sz="900" dirty="0"/>
+          </a:p>
+        </p:txBody>
+      </p:sp>
+      <p:sp>
+        <p:nvSpPr>
+          <p:cNvPr id="11" name="Text 8"/>
+          <p:cNvSpPr txBox="1"/>
+          <p:nvPr/>
+        </p:nvSpPr>
+        <p:spPr>
+          <a:xfrm>
+            <a:off x="11338560" y="6510528"/>
+            <a:ext cx="457200" cy="274320"/>
+          </a:xfrm>
+          <a:prstGeom prst="rect">
+            <a:avLst/>
+          </a:prstGeom>
+          <a:noFill/>
+          <a:ln/>
+        </p:spPr>
+        <p:txBody>
+          <a:bodyPr wrap="square" lIns="0" tIns="0" rIns="0" bIns="0" rtlCol="0" anchor="ctr"/>
+          <a:lstStyle/>
+          <a:p>
+            <a:pPr algn="r" indent="0" marL="0">
+              <a:buNone/>
+            </a:pPr>
+            <a:r>
+              <a:rPr lang="en-US" sz="900" dirty="0">
+                <a:solidFill>
+                  <a:srgbClr val="7C6552"/>
+                </a:solidFill>
+                <a:latin typeface="Calibri" pitchFamily="34" charset="0"/>
+                <a:ea typeface="Calibri" pitchFamily="34" charset="-122"/>
+                <a:cs typeface="Calibri" pitchFamily="34" charset="-120"/>
+              </a:rPr>
+              <a:t>45</a:t>
+            </a:r>
+            <a:endParaRPr lang="en-US" sz="900" dirty="0"/>
+          </a:p>
+        </p:txBody>
+      </p:sp>
+    </p:spTree>
+  </p:cSld>
+  <p:clrMapOvr>
+    <a:masterClrMapping/>
+  </p:clrMapOvr>
+</p:sld>
+</file>
+
+<file path=ppt/slides/slide46.xml><?xml version="1.0" encoding="utf-8"?>
+<p:sld xmlns:a="http://schemas.openxmlformats.org/drawingml/2006/main" xmlns:r="http://schemas.openxmlformats.org/officeDocument/2006/relationships" xmlns:p="http://schemas.openxmlformats.org/presentationml/2006/main">
+  <p:cSld name="Slide 46">
+    <p:bg>
+      <p:bgPr>
+        <a:solidFill>
+          <a:srgbClr val="2C1A0E"/>
+        </a:solidFill>
+      </p:bgPr>
+    </p:bg>
+    <p:spTree>
+      <p:nvGrpSpPr>
+        <p:cNvPr id="1" name=""/>
+        <p:cNvGrpSpPr/>
+        <p:nvPr/>
+      </p:nvGrpSpPr>
+      <p:grpSpPr>
+        <a:xfrm>
+          <a:off x="0" y="0"/>
+          <a:ext cx="0" cy="0"/>
+          <a:chOff x="0" y="0"/>
+          <a:chExt cx="0" cy="0"/>
+        </a:xfrm>
+      </p:grpSpPr>
+      <p:sp>
+        <p:nvSpPr>
+          <p:cNvPr id="2" name="Shape 0"/>
+          <p:cNvSpPr/>
+          <p:nvPr/>
+        </p:nvSpPr>
+        <p:spPr>
+          <a:xfrm>
+            <a:off x="640080" y="2331720"/>
+            <a:ext cx="914400" cy="914400"/>
+          </a:xfrm>
+          <a:prstGeom prst="ellipse">
+            <a:avLst/>
+          </a:prstGeom>
+          <a:solidFill>
+            <a:srgbClr val="B5813F"/>
+          </a:solidFill>
+          <a:ln/>
+        </p:spPr>
+      </p:sp>
+      <p:pic>
+        <p:nvPicPr>
+          <p:cNvPr id="3" name="Image 0" descr="preencoded.png">    </p:cNvPr>
+          <p:cNvPicPr>
+            <a:picLocks noChangeAspect="1"/>
+          </p:cNvPicPr>
+          <p:nvPr/>
+        </p:nvPicPr>
+        <p:blipFill>
+          <a:blip r:embed="rId1"/>
+          <a:stretch>
+            <a:fillRect/>
+          </a:stretch>
+        </p:blipFill>
+        <p:spPr>
+          <a:xfrm>
+            <a:off x="749808" y="2441448"/>
+            <a:ext cx="694944" cy="694944"/>
+          </a:xfrm>
+          <a:prstGeom prst="rect">
+            <a:avLst/>
+          </a:prstGeom>
+        </p:spPr>
+      </p:pic>
+      <p:sp>
+        <p:nvSpPr>
+          <p:cNvPr id="4" name="Text 1"/>
+          <p:cNvSpPr txBox="1"/>
+          <p:nvPr/>
+        </p:nvSpPr>
+        <p:spPr>
+          <a:xfrm>
+            <a:off x="1737360" y="2395728"/>
+            <a:ext cx="8229600" cy="365760"/>
+          </a:xfrm>
+          <a:prstGeom prst="rect">
+            <a:avLst/>
+          </a:prstGeom>
+          <a:noFill/>
+          <a:ln/>
+        </p:spPr>
+        <p:txBody>
+          <a:bodyPr wrap="square" lIns="0" tIns="0" rIns="0" bIns="0" rtlCol="0" anchor="ctr"/>
+          <a:lstStyle/>
+          <a:p>
+            <a:pPr indent="0" marL="0">
+              <a:buNone/>
+            </a:pPr>
+            <a:r>
+              <a:rPr lang="en-US" sz="1200" spc="200" kern="0" dirty="0">
+                <a:solidFill>
+                  <a:srgbClr val="D9AE6C"/>
+                </a:solidFill>
+                <a:latin typeface="Calibri" pitchFamily="34" charset="0"/>
+                <a:ea typeface="Calibri" pitchFamily="34" charset="-122"/>
+                <a:cs typeface="Calibri" pitchFamily="34" charset="-120"/>
+              </a:rPr>
+              <a:t>BILAN</a:t>
+            </a:r>
+            <a:endParaRPr lang="en-US" sz="1200" dirty="0"/>
+          </a:p>
+        </p:txBody>
+      </p:sp>
+      <p:sp>
+        <p:nvSpPr>
+          <p:cNvPr id="5" name="Text 2"/>
+          <p:cNvSpPr txBox="1"/>
+          <p:nvPr/>
+        </p:nvSpPr>
+        <p:spPr>
+          <a:xfrm>
+            <a:off x="1719072" y="2743200"/>
+            <a:ext cx="9601200" cy="1005840"/>
+          </a:xfrm>
+          <a:prstGeom prst="rect">
+            <a:avLst/>
+          </a:prstGeom>
+          <a:noFill/>
+          <a:ln/>
+        </p:spPr>
+        <p:txBody>
+          <a:bodyPr wrap="square" lIns="0" tIns="0" rIns="0" bIns="0" rtlCol="0" anchor="ctr"/>
+          <a:lstStyle/>
+          <a:p>
+            <a:pPr indent="0" marL="0">
+              <a:buNone/>
+            </a:pPr>
+            <a:r>
+              <a:rPr lang="en-US" sz="3800" b="1" dirty="0">
+                <a:solidFill>
+                  <a:srgbClr val="FFFFFF"/>
+                </a:solidFill>
+                <a:latin typeface="Cambria" pitchFamily="34" charset="0"/>
+                <a:ea typeface="Cambria" pitchFamily="34" charset="-122"/>
+                <a:cs typeface="Cambria" pitchFamily="34" charset="-120"/>
+              </a:rPr>
+              <a:t>Tableau récapitulatif</a:t>
+            </a:r>
+            <a:endParaRPr lang="en-US" sz="3800" dirty="0"/>
+          </a:p>
+        </p:txBody>
+      </p:sp>
+      <p:sp>
+        <p:nvSpPr>
+          <p:cNvPr id="6" name="Text 3"/>
+          <p:cNvSpPr txBox="1"/>
+          <p:nvPr/>
+        </p:nvSpPr>
+        <p:spPr>
+          <a:xfrm>
+            <a:off x="457200" y="6510528"/>
+            <a:ext cx="7315200" cy="274320"/>
+          </a:xfrm>
+          <a:prstGeom prst="rect">
+            <a:avLst/>
+          </a:prstGeom>
+          <a:noFill/>
+          <a:ln/>
+        </p:spPr>
+        <p:txBody>
+          <a:bodyPr wrap="square" lIns="0" tIns="0" rIns="0" bIns="0" rtlCol="0" anchor="ctr"/>
+          <a:lstStyle/>
+          <a:p>
+            <a:pPr indent="0" marL="0">
+              <a:buNone/>
+            </a:pPr>
+            <a:r>
+              <a:rPr lang="en-US" sz="900" dirty="0">
+                <a:solidFill>
+                  <a:srgbClr val="7C6552"/>
+                </a:solidFill>
+                <a:latin typeface="Calibri" pitchFamily="34" charset="0"/>
+                <a:ea typeface="Calibri" pitchFamily="34" charset="-122"/>
+                <a:cs typeface="Calibri" pitchFamily="34" charset="-120"/>
+              </a:rPr>
+              <a:t>MadeArchive — Documentation technique</a:t>
+            </a:r>
+            <a:endParaRPr lang="en-US" sz="900" dirty="0"/>
+          </a:p>
+        </p:txBody>
+      </p:sp>
+      <p:sp>
+        <p:nvSpPr>
+          <p:cNvPr id="7" name="Text 4"/>
+          <p:cNvSpPr txBox="1"/>
+          <p:nvPr/>
+        </p:nvSpPr>
+        <p:spPr>
+          <a:xfrm>
+            <a:off x="11338560" y="6510528"/>
+            <a:ext cx="457200" cy="274320"/>
+          </a:xfrm>
+          <a:prstGeom prst="rect">
+            <a:avLst/>
+          </a:prstGeom>
+          <a:noFill/>
+          <a:ln/>
+        </p:spPr>
+        <p:txBody>
+          <a:bodyPr wrap="square" lIns="0" tIns="0" rIns="0" bIns="0" rtlCol="0" anchor="ctr"/>
+          <a:lstStyle/>
+          <a:p>
+            <a:pPr algn="r" indent="0" marL="0">
+              <a:buNone/>
+            </a:pPr>
+            <a:r>
+              <a:rPr lang="en-US" sz="900" dirty="0">
+                <a:solidFill>
+                  <a:srgbClr val="7C6552"/>
+                </a:solidFill>
+                <a:latin typeface="Calibri" pitchFamily="34" charset="0"/>
+                <a:ea typeface="Calibri" pitchFamily="34" charset="-122"/>
+                <a:cs typeface="Calibri" pitchFamily="34" charset="-120"/>
+              </a:rPr>
+              <a:t>46</a:t>
+            </a:r>
+            <a:endParaRPr lang="en-US" sz="900" dirty="0"/>
+          </a:p>
+        </p:txBody>
+      </p:sp>
+    </p:spTree>
+  </p:cSld>
+  <p:clrMapOvr>
+    <a:masterClrMapping/>
+  </p:clrMapOvr>
+</p:sld>
+</file>
+
+<file path=ppt/slides/slide47.xml><?xml version="1.0" encoding="utf-8"?>
+<p:sld xmlns:a="http://schemas.openxmlformats.org/drawingml/2006/main" xmlns:r="http://schemas.openxmlformats.org/officeDocument/2006/relationships" xmlns:p="http://schemas.openxmlformats.org/presentationml/2006/main">
+  <p:cSld name="Slide 47">
+    <p:bg>
+      <p:bgPr>
+        <a:solidFill>
+          <a:srgbClr val="FFFFFF"/>
+        </a:solidFill>
+      </p:bgPr>
+    </p:bg>
+    <p:spTree>
+      <p:nvGrpSpPr>
+        <p:cNvPr id="1" name=""/>
+        <p:cNvGrpSpPr/>
+        <p:nvPr/>
+      </p:nvGrpSpPr>
+      <p:grpSpPr>
+        <a:xfrm>
+          <a:off x="0" y="0"/>
+          <a:ext cx="0" cy="0"/>
+          <a:chOff x="0" y="0"/>
+          <a:chExt cx="0" cy="0"/>
+        </a:xfrm>
+      </p:grpSpPr>
+      <p:sp>
+        <p:nvSpPr>
+          <p:cNvPr id="2" name="Shape 0"/>
+          <p:cNvSpPr/>
+          <p:nvPr/>
+        </p:nvSpPr>
+        <p:spPr>
+          <a:xfrm>
+            <a:off x="548640" y="411480"/>
+            <a:ext cx="502920" cy="502920"/>
+          </a:xfrm>
+          <a:prstGeom prst="ellipse">
+            <a:avLst/>
+          </a:prstGeom>
+          <a:solidFill>
+            <a:srgbClr val="B5813F"/>
+          </a:solidFill>
+          <a:ln/>
+        </p:spPr>
+      </p:sp>
+      <p:pic>
+        <p:nvPicPr>
+          <p:cNvPr id="3" name="Image 0" descr="preencoded.png">    </p:cNvPr>
+          <p:cNvPicPr>
+            <a:picLocks noChangeAspect="1"/>
+          </p:cNvPicPr>
+          <p:nvPr/>
+        </p:nvPicPr>
+        <p:blipFill>
+          <a:blip r:embed="rId1"/>
+          <a:stretch>
+            <a:fillRect/>
+          </a:stretch>
+        </p:blipFill>
+        <p:spPr>
+          <a:xfrm>
+            <a:off x="608990" y="471830"/>
+            <a:ext cx="382219" cy="382219"/>
+          </a:xfrm>
+          <a:prstGeom prst="rect">
+            <a:avLst/>
+          </a:prstGeom>
+        </p:spPr>
+      </p:pic>
+      <p:sp>
+        <p:nvSpPr>
+          <p:cNvPr id="4" name="Text 1"/>
+          <p:cNvSpPr txBox="1"/>
+          <p:nvPr/>
+        </p:nvSpPr>
+        <p:spPr>
+          <a:xfrm>
+            <a:off x="1170432" y="365760"/>
+            <a:ext cx="8229600" cy="502920"/>
+          </a:xfrm>
+          <a:prstGeom prst="rect">
+            <a:avLst/>
+          </a:prstGeom>
+          <a:noFill/>
+          <a:ln/>
+        </p:spPr>
+        <p:txBody>
+          <a:bodyPr wrap="square" lIns="0" tIns="0" rIns="0" bIns="0" rtlCol="0" anchor="ctr"/>
+          <a:lstStyle/>
+          <a:p>
+            <a:pPr indent="0" marL="0">
+              <a:buNone/>
+            </a:pPr>
+            <a:r>
+              <a:rPr lang="en-US" sz="2600" b="1" dirty="0">
+                <a:solidFill>
+                  <a:srgbClr val="2C1A0E"/>
+                </a:solidFill>
+                <a:latin typeface="Cambria" pitchFamily="34" charset="0"/>
+                <a:ea typeface="Cambria" pitchFamily="34" charset="-122"/>
+                <a:cs typeface="Cambria" pitchFamily="34" charset="-120"/>
+              </a:rPr>
+              <a:t>Tableau récapitulatif</a:t>
+            </a:r>
+            <a:endParaRPr lang="en-US" sz="2600" dirty="0"/>
+          </a:p>
+        </p:txBody>
+      </p:sp>
+      <p:sp>
+        <p:nvSpPr>
+          <p:cNvPr id="5" name="Text 2"/>
+          <p:cNvSpPr txBox="1"/>
+          <p:nvPr/>
+        </p:nvSpPr>
+        <p:spPr>
+          <a:xfrm>
+            <a:off x="10607040" y="438912"/>
+            <a:ext cx="1097280" cy="365760"/>
+          </a:xfrm>
+          <a:prstGeom prst="rect">
+            <a:avLst/>
+          </a:prstGeom>
+          <a:noFill/>
+          <a:ln/>
+        </p:spPr>
+        <p:txBody>
+          <a:bodyPr wrap="square" lIns="0" tIns="0" rIns="0" bIns="0" rtlCol="0" anchor="ctr"/>
+          <a:lstStyle/>
+          <a:p>
+            <a:pPr algn="r" indent="0" marL="0">
+              <a:buNone/>
+            </a:pPr>
+            <a:r>
+              <a:rPr lang="en-US" sz="1100" dirty="0">
+                <a:solidFill>
+                  <a:srgbClr val="7C6552"/>
+                </a:solidFill>
+                <a:latin typeface="Calibri" pitchFamily="34" charset="0"/>
+                <a:ea typeface="Calibri" pitchFamily="34" charset="-122"/>
+                <a:cs typeface="Calibri" pitchFamily="34" charset="-120"/>
+              </a:rPr>
               <a:t>1 / 3</a:t>
             </a:r>
             <a:endParaRPr lang="en-US" sz="1100" dirty="0"/>
@@ -19578,7 +23530,7 @@
       </p:sp>
       <p:graphicFrame>
         <p:nvGraphicFramePr>
-          <p:cNvPr id="41" name="Table 0"/>
+          <p:cNvPr id="48" name="Table 0"/>
           <p:cNvGraphicFramePr>
             <a:graphicFrameLocks noGrp="1"/>
           </p:cNvGraphicFramePr>
@@ -21739,7 +25691,7 @@
                 <a:ea typeface="Calibri" pitchFamily="34" charset="-122"/>
                 <a:cs typeface="Calibri" pitchFamily="34" charset="-120"/>
               </a:rPr>
-              <a:t>40</a:t>
+              <a:t>47</a:t>
             </a:r>
             <a:endParaRPr lang="en-US" sz="900" dirty="0"/>
           </a:p>
@@ -21753,9 +25705,9 @@
 </p:sld>
 </file>
 
-<file path=ppt/slides/slide41.xml><?xml version="1.0" encoding="utf-8"?>
+<file path=ppt/slides/slide48.xml><?xml version="1.0" encoding="utf-8"?>
 <p:sld xmlns:a="http://schemas.openxmlformats.org/drawingml/2006/main" xmlns:r="http://schemas.openxmlformats.org/officeDocument/2006/relationships" xmlns:p="http://schemas.openxmlformats.org/presentationml/2006/main">
-  <p:cSld name="Slide 41">
+  <p:cSld name="Slide 48">
     <p:bg>
       <p:bgPr>
         <a:solidFill>
@@ -21901,7 +25853,7 @@
       </p:sp>
       <p:graphicFrame>
         <p:nvGraphicFramePr>
-          <p:cNvPr id="42" name="Table 0"/>
+          <p:cNvPr id="49" name="Table 0"/>
           <p:cNvGraphicFramePr>
             <a:graphicFrameLocks noGrp="1"/>
           </p:cNvGraphicFramePr>
@@ -24062,7 +28014,7 @@
                 <a:ea typeface="Calibri" pitchFamily="34" charset="-122"/>
                 <a:cs typeface="Calibri" pitchFamily="34" charset="-120"/>
               </a:rPr>
-              <a:t>41</a:t>
+              <a:t>48</a:t>
             </a:r>
             <a:endParaRPr lang="en-US" sz="900" dirty="0"/>
           </a:p>
@@ -24076,9 +28028,9 @@
 </p:sld>
 </file>
 
-<file path=ppt/slides/slide42.xml><?xml version="1.0" encoding="utf-8"?>
+<file path=ppt/slides/slide49.xml><?xml version="1.0" encoding="utf-8"?>
 <p:sld xmlns:a="http://schemas.openxmlformats.org/drawingml/2006/main" xmlns:r="http://schemas.openxmlformats.org/officeDocument/2006/relationships" xmlns:p="http://schemas.openxmlformats.org/presentationml/2006/main">
-  <p:cSld name="Slide 42">
+  <p:cSld name="Slide 49">
     <p:bg>
       <p:bgPr>
         <a:solidFill>
@@ -24224,7 +28176,7 @@
       </p:sp>
       <p:graphicFrame>
         <p:nvGraphicFramePr>
-          <p:cNvPr id="43" name="Table 0"/>
+          <p:cNvPr id="50" name="Table 0"/>
           <p:cNvGraphicFramePr>
             <a:graphicFrameLocks noGrp="1"/>
           </p:cNvGraphicFramePr>
@@ -25973,7 +29925,7 @@
                 <a:ea typeface="Calibri" pitchFamily="34" charset="-122"/>
                 <a:cs typeface="Calibri" pitchFamily="34" charset="-120"/>
               </a:rPr>
-              <a:t>42</a:t>
+              <a:t>49</a:t>
             </a:r>
             <a:endParaRPr lang="en-US" sz="900" dirty="0"/>
           </a:p>

--- a/docs/documentation-application.pptx
+++ b/docs/documentation-application.pptx
@@ -54,9 +54,15 @@
     <p:sldId id="302" r:id="rId48"/>
     <p:sldId id="303" r:id="rId49"/>
     <p:sldId id="304" r:id="rId50"/>
+    <p:sldId id="305" r:id="rId51"/>
+    <p:sldId id="306" r:id="rId52"/>
+    <p:sldId id="307" r:id="rId53"/>
+    <p:sldId id="308" r:id="rId54"/>
+    <p:sldId id="309" r:id="rId55"/>
+    <p:sldId id="310" r:id="rId56"/>
   </p:sldIdLst>
   <p:notesMasterIdLst>
-    <p:notesMasterId r:id="rId51"/>
+    <p:notesMasterId r:id="rId57"/>
   </p:notesMasterIdLst>
   <p:sldSz cx="12192000" cy="6858000"/>
   <p:notesSz cx="6858000" cy="12192000"/>
@@ -4446,6 +4452,534 @@
             <a:fld id="{F7021451-1387-4CA6-816F-3879F97B5CBC}" type="slidenum">
               <a:rPr lang="en-US"/>
               <a:t>5</a:t>
+            </a:fld>
+            <a:endParaRPr lang="en-US"/>
+          </a:p>
+        </p:txBody>
+      </p:sp>
+    </p:spTree>
+    <p:extLst>
+      <p:ext uri="{BB962C8B-B14F-4D97-AF65-F5344CB8AC3E}">
+        <p14:creationId xmlns:p14="http://schemas.microsoft.com/office/powerpoint/2010/main" val="1024086991"/>
+      </p:ext>
+    </p:extLst>
+  </p:cSld>
+  <p:clrMapOvr>
+    <a:masterClrMapping/>
+  </p:clrMapOvr>
+</p:notes>
+</file>
+
+<file path=ppt/notesSlides/notesSlide50.xml><?xml version="1.0" encoding="utf-8"?>
+<p:notes xmlns:a="http://schemas.openxmlformats.org/drawingml/2006/main" xmlns:r="http://schemas.openxmlformats.org/officeDocument/2006/relationships" xmlns:p="http://schemas.openxmlformats.org/presentationml/2006/main">
+  <p:cSld>
+    <p:spTree>
+      <p:nvGrpSpPr>
+        <p:cNvPr id="1" name=""/>
+        <p:cNvGrpSpPr/>
+        <p:nvPr/>
+      </p:nvGrpSpPr>
+      <p:grpSpPr>
+        <a:xfrm>
+          <a:off x="0" y="0"/>
+          <a:ext cx="0" cy="0"/>
+          <a:chOff x="0" y="0"/>
+          <a:chExt cx="0" cy="0"/>
+        </a:xfrm>
+      </p:grpSpPr>
+      <p:sp>
+        <p:nvSpPr>
+          <p:cNvPr id="2" name="Slide Image Placeholder 1"/>
+          <p:cNvSpPr>
+            <a:spLocks noGrp="1" noRot="1" noChangeAspect="1"/>
+          </p:cNvSpPr>
+          <p:nvPr>
+            <p:ph type="sldImg"/>
+          </p:nvPr>
+        </p:nvSpPr>
+        <p:spPr/>
+      </p:sp>
+      <p:sp>
+        <p:nvSpPr>
+          <p:cNvPr id="3" name="Notes Placeholder 2"/>
+          <p:cNvSpPr>
+            <a:spLocks noGrp="1"/>
+          </p:cNvSpPr>
+          <p:nvPr>
+            <p:ph type="body" idx="1"/>
+          </p:nvPr>
+        </p:nvSpPr>
+        <p:spPr/>
+        <p:txBody>
+          <a:bodyPr/>
+          <a:lstStyle/>
+          <a:p>
+            <a:r>
+              <a:rPr lang="en-US" dirty="0"/>
+              <a:t/>
+            </a:r>
+            <a:endParaRPr lang="en-US" dirty="0"/>
+          </a:p>
+        </p:txBody>
+      </p:sp>
+      <p:sp>
+        <p:nvSpPr>
+          <p:cNvPr id="4" name="Slide Number Placeholder 3"/>
+          <p:cNvSpPr>
+            <a:spLocks noGrp="1"/>
+          </p:cNvSpPr>
+          <p:nvPr>
+            <p:ph type="sldNum" sz="quarter" idx="10"/>
+          </p:nvPr>
+        </p:nvSpPr>
+        <p:spPr/>
+        <p:txBody>
+          <a:bodyPr/>
+          <a:lstStyle/>
+          <a:p>
+            <a:fld id="{F7021451-1387-4CA6-816F-3879F97B5CBC}" type="slidenum">
+              <a:rPr lang="en-US"/>
+              <a:t>50</a:t>
+            </a:fld>
+            <a:endParaRPr lang="en-US"/>
+          </a:p>
+        </p:txBody>
+      </p:sp>
+    </p:spTree>
+    <p:extLst>
+      <p:ext uri="{BB962C8B-B14F-4D97-AF65-F5344CB8AC3E}">
+        <p14:creationId xmlns:p14="http://schemas.microsoft.com/office/powerpoint/2010/main" val="1024086991"/>
+      </p:ext>
+    </p:extLst>
+  </p:cSld>
+  <p:clrMapOvr>
+    <a:masterClrMapping/>
+  </p:clrMapOvr>
+</p:notes>
+</file>
+
+<file path=ppt/notesSlides/notesSlide51.xml><?xml version="1.0" encoding="utf-8"?>
+<p:notes xmlns:a="http://schemas.openxmlformats.org/drawingml/2006/main" xmlns:r="http://schemas.openxmlformats.org/officeDocument/2006/relationships" xmlns:p="http://schemas.openxmlformats.org/presentationml/2006/main">
+  <p:cSld>
+    <p:spTree>
+      <p:nvGrpSpPr>
+        <p:cNvPr id="1" name=""/>
+        <p:cNvGrpSpPr/>
+        <p:nvPr/>
+      </p:nvGrpSpPr>
+      <p:grpSpPr>
+        <a:xfrm>
+          <a:off x="0" y="0"/>
+          <a:ext cx="0" cy="0"/>
+          <a:chOff x="0" y="0"/>
+          <a:chExt cx="0" cy="0"/>
+        </a:xfrm>
+      </p:grpSpPr>
+      <p:sp>
+        <p:nvSpPr>
+          <p:cNvPr id="2" name="Slide Image Placeholder 1"/>
+          <p:cNvSpPr>
+            <a:spLocks noGrp="1" noRot="1" noChangeAspect="1"/>
+          </p:cNvSpPr>
+          <p:nvPr>
+            <p:ph type="sldImg"/>
+          </p:nvPr>
+        </p:nvSpPr>
+        <p:spPr/>
+      </p:sp>
+      <p:sp>
+        <p:nvSpPr>
+          <p:cNvPr id="3" name="Notes Placeholder 2"/>
+          <p:cNvSpPr>
+            <a:spLocks noGrp="1"/>
+          </p:cNvSpPr>
+          <p:nvPr>
+            <p:ph type="body" idx="1"/>
+          </p:nvPr>
+        </p:nvSpPr>
+        <p:spPr/>
+        <p:txBody>
+          <a:bodyPr/>
+          <a:lstStyle/>
+          <a:p>
+            <a:r>
+              <a:rPr lang="en-US" dirty="0"/>
+              <a:t/>
+            </a:r>
+            <a:endParaRPr lang="en-US" dirty="0"/>
+          </a:p>
+        </p:txBody>
+      </p:sp>
+      <p:sp>
+        <p:nvSpPr>
+          <p:cNvPr id="4" name="Slide Number Placeholder 3"/>
+          <p:cNvSpPr>
+            <a:spLocks noGrp="1"/>
+          </p:cNvSpPr>
+          <p:nvPr>
+            <p:ph type="sldNum" sz="quarter" idx="10"/>
+          </p:nvPr>
+        </p:nvSpPr>
+        <p:spPr/>
+        <p:txBody>
+          <a:bodyPr/>
+          <a:lstStyle/>
+          <a:p>
+            <a:fld id="{F7021451-1387-4CA6-816F-3879F97B5CBC}" type="slidenum">
+              <a:rPr lang="en-US"/>
+              <a:t>51</a:t>
+            </a:fld>
+            <a:endParaRPr lang="en-US"/>
+          </a:p>
+        </p:txBody>
+      </p:sp>
+    </p:spTree>
+    <p:extLst>
+      <p:ext uri="{BB962C8B-B14F-4D97-AF65-F5344CB8AC3E}">
+        <p14:creationId xmlns:p14="http://schemas.microsoft.com/office/powerpoint/2010/main" val="1024086991"/>
+      </p:ext>
+    </p:extLst>
+  </p:cSld>
+  <p:clrMapOvr>
+    <a:masterClrMapping/>
+  </p:clrMapOvr>
+</p:notes>
+</file>
+
+<file path=ppt/notesSlides/notesSlide52.xml><?xml version="1.0" encoding="utf-8"?>
+<p:notes xmlns:a="http://schemas.openxmlformats.org/drawingml/2006/main" xmlns:r="http://schemas.openxmlformats.org/officeDocument/2006/relationships" xmlns:p="http://schemas.openxmlformats.org/presentationml/2006/main">
+  <p:cSld>
+    <p:spTree>
+      <p:nvGrpSpPr>
+        <p:cNvPr id="1" name=""/>
+        <p:cNvGrpSpPr/>
+        <p:nvPr/>
+      </p:nvGrpSpPr>
+      <p:grpSpPr>
+        <a:xfrm>
+          <a:off x="0" y="0"/>
+          <a:ext cx="0" cy="0"/>
+          <a:chOff x="0" y="0"/>
+          <a:chExt cx="0" cy="0"/>
+        </a:xfrm>
+      </p:grpSpPr>
+      <p:sp>
+        <p:nvSpPr>
+          <p:cNvPr id="2" name="Slide Image Placeholder 1"/>
+          <p:cNvSpPr>
+            <a:spLocks noGrp="1" noRot="1" noChangeAspect="1"/>
+          </p:cNvSpPr>
+          <p:nvPr>
+            <p:ph type="sldImg"/>
+          </p:nvPr>
+        </p:nvSpPr>
+        <p:spPr/>
+      </p:sp>
+      <p:sp>
+        <p:nvSpPr>
+          <p:cNvPr id="3" name="Notes Placeholder 2"/>
+          <p:cNvSpPr>
+            <a:spLocks noGrp="1"/>
+          </p:cNvSpPr>
+          <p:nvPr>
+            <p:ph type="body" idx="1"/>
+          </p:nvPr>
+        </p:nvSpPr>
+        <p:spPr/>
+        <p:txBody>
+          <a:bodyPr/>
+          <a:lstStyle/>
+          <a:p>
+            <a:r>
+              <a:rPr lang="en-US" dirty="0"/>
+              <a:t/>
+            </a:r>
+            <a:endParaRPr lang="en-US" dirty="0"/>
+          </a:p>
+        </p:txBody>
+      </p:sp>
+      <p:sp>
+        <p:nvSpPr>
+          <p:cNvPr id="4" name="Slide Number Placeholder 3"/>
+          <p:cNvSpPr>
+            <a:spLocks noGrp="1"/>
+          </p:cNvSpPr>
+          <p:nvPr>
+            <p:ph type="sldNum" sz="quarter" idx="10"/>
+          </p:nvPr>
+        </p:nvSpPr>
+        <p:spPr/>
+        <p:txBody>
+          <a:bodyPr/>
+          <a:lstStyle/>
+          <a:p>
+            <a:fld id="{F7021451-1387-4CA6-816F-3879F97B5CBC}" type="slidenum">
+              <a:rPr lang="en-US"/>
+              <a:t>52</a:t>
+            </a:fld>
+            <a:endParaRPr lang="en-US"/>
+          </a:p>
+        </p:txBody>
+      </p:sp>
+    </p:spTree>
+    <p:extLst>
+      <p:ext uri="{BB962C8B-B14F-4D97-AF65-F5344CB8AC3E}">
+        <p14:creationId xmlns:p14="http://schemas.microsoft.com/office/powerpoint/2010/main" val="1024086991"/>
+      </p:ext>
+    </p:extLst>
+  </p:cSld>
+  <p:clrMapOvr>
+    <a:masterClrMapping/>
+  </p:clrMapOvr>
+</p:notes>
+</file>
+
+<file path=ppt/notesSlides/notesSlide53.xml><?xml version="1.0" encoding="utf-8"?>
+<p:notes xmlns:a="http://schemas.openxmlformats.org/drawingml/2006/main" xmlns:r="http://schemas.openxmlformats.org/officeDocument/2006/relationships" xmlns:p="http://schemas.openxmlformats.org/presentationml/2006/main">
+  <p:cSld>
+    <p:spTree>
+      <p:nvGrpSpPr>
+        <p:cNvPr id="1" name=""/>
+        <p:cNvGrpSpPr/>
+        <p:nvPr/>
+      </p:nvGrpSpPr>
+      <p:grpSpPr>
+        <a:xfrm>
+          <a:off x="0" y="0"/>
+          <a:ext cx="0" cy="0"/>
+          <a:chOff x="0" y="0"/>
+          <a:chExt cx="0" cy="0"/>
+        </a:xfrm>
+      </p:grpSpPr>
+      <p:sp>
+        <p:nvSpPr>
+          <p:cNvPr id="2" name="Slide Image Placeholder 1"/>
+          <p:cNvSpPr>
+            <a:spLocks noGrp="1" noRot="1" noChangeAspect="1"/>
+          </p:cNvSpPr>
+          <p:nvPr>
+            <p:ph type="sldImg"/>
+          </p:nvPr>
+        </p:nvSpPr>
+        <p:spPr/>
+      </p:sp>
+      <p:sp>
+        <p:nvSpPr>
+          <p:cNvPr id="3" name="Notes Placeholder 2"/>
+          <p:cNvSpPr>
+            <a:spLocks noGrp="1"/>
+          </p:cNvSpPr>
+          <p:nvPr>
+            <p:ph type="body" idx="1"/>
+          </p:nvPr>
+        </p:nvSpPr>
+        <p:spPr/>
+        <p:txBody>
+          <a:bodyPr/>
+          <a:lstStyle/>
+          <a:p>
+            <a:r>
+              <a:rPr lang="en-US" dirty="0"/>
+              <a:t/>
+            </a:r>
+            <a:endParaRPr lang="en-US" dirty="0"/>
+          </a:p>
+        </p:txBody>
+      </p:sp>
+      <p:sp>
+        <p:nvSpPr>
+          <p:cNvPr id="4" name="Slide Number Placeholder 3"/>
+          <p:cNvSpPr>
+            <a:spLocks noGrp="1"/>
+          </p:cNvSpPr>
+          <p:nvPr>
+            <p:ph type="sldNum" sz="quarter" idx="10"/>
+          </p:nvPr>
+        </p:nvSpPr>
+        <p:spPr/>
+        <p:txBody>
+          <a:bodyPr/>
+          <a:lstStyle/>
+          <a:p>
+            <a:fld id="{F7021451-1387-4CA6-816F-3879F97B5CBC}" type="slidenum">
+              <a:rPr lang="en-US"/>
+              <a:t>53</a:t>
+            </a:fld>
+            <a:endParaRPr lang="en-US"/>
+          </a:p>
+        </p:txBody>
+      </p:sp>
+    </p:spTree>
+    <p:extLst>
+      <p:ext uri="{BB962C8B-B14F-4D97-AF65-F5344CB8AC3E}">
+        <p14:creationId xmlns:p14="http://schemas.microsoft.com/office/powerpoint/2010/main" val="1024086991"/>
+      </p:ext>
+    </p:extLst>
+  </p:cSld>
+  <p:clrMapOvr>
+    <a:masterClrMapping/>
+  </p:clrMapOvr>
+</p:notes>
+</file>
+
+<file path=ppt/notesSlides/notesSlide54.xml><?xml version="1.0" encoding="utf-8"?>
+<p:notes xmlns:a="http://schemas.openxmlformats.org/drawingml/2006/main" xmlns:r="http://schemas.openxmlformats.org/officeDocument/2006/relationships" xmlns:p="http://schemas.openxmlformats.org/presentationml/2006/main">
+  <p:cSld>
+    <p:spTree>
+      <p:nvGrpSpPr>
+        <p:cNvPr id="1" name=""/>
+        <p:cNvGrpSpPr/>
+        <p:nvPr/>
+      </p:nvGrpSpPr>
+      <p:grpSpPr>
+        <a:xfrm>
+          <a:off x="0" y="0"/>
+          <a:ext cx="0" cy="0"/>
+          <a:chOff x="0" y="0"/>
+          <a:chExt cx="0" cy="0"/>
+        </a:xfrm>
+      </p:grpSpPr>
+      <p:sp>
+        <p:nvSpPr>
+          <p:cNvPr id="2" name="Slide Image Placeholder 1"/>
+          <p:cNvSpPr>
+            <a:spLocks noGrp="1" noRot="1" noChangeAspect="1"/>
+          </p:cNvSpPr>
+          <p:nvPr>
+            <p:ph type="sldImg"/>
+          </p:nvPr>
+        </p:nvSpPr>
+        <p:spPr/>
+      </p:sp>
+      <p:sp>
+        <p:nvSpPr>
+          <p:cNvPr id="3" name="Notes Placeholder 2"/>
+          <p:cNvSpPr>
+            <a:spLocks noGrp="1"/>
+          </p:cNvSpPr>
+          <p:nvPr>
+            <p:ph type="body" idx="1"/>
+          </p:nvPr>
+        </p:nvSpPr>
+        <p:spPr/>
+        <p:txBody>
+          <a:bodyPr/>
+          <a:lstStyle/>
+          <a:p>
+            <a:r>
+              <a:rPr lang="en-US" dirty="0"/>
+              <a:t/>
+            </a:r>
+            <a:endParaRPr lang="en-US" dirty="0"/>
+          </a:p>
+        </p:txBody>
+      </p:sp>
+      <p:sp>
+        <p:nvSpPr>
+          <p:cNvPr id="4" name="Slide Number Placeholder 3"/>
+          <p:cNvSpPr>
+            <a:spLocks noGrp="1"/>
+          </p:cNvSpPr>
+          <p:nvPr>
+            <p:ph type="sldNum" sz="quarter" idx="10"/>
+          </p:nvPr>
+        </p:nvSpPr>
+        <p:spPr/>
+        <p:txBody>
+          <a:bodyPr/>
+          <a:lstStyle/>
+          <a:p>
+            <a:fld id="{F7021451-1387-4CA6-816F-3879F97B5CBC}" type="slidenum">
+              <a:rPr lang="en-US"/>
+              <a:t>54</a:t>
+            </a:fld>
+            <a:endParaRPr lang="en-US"/>
+          </a:p>
+        </p:txBody>
+      </p:sp>
+    </p:spTree>
+    <p:extLst>
+      <p:ext uri="{BB962C8B-B14F-4D97-AF65-F5344CB8AC3E}">
+        <p14:creationId xmlns:p14="http://schemas.microsoft.com/office/powerpoint/2010/main" val="1024086991"/>
+      </p:ext>
+    </p:extLst>
+  </p:cSld>
+  <p:clrMapOvr>
+    <a:masterClrMapping/>
+  </p:clrMapOvr>
+</p:notes>
+</file>
+
+<file path=ppt/notesSlides/notesSlide55.xml><?xml version="1.0" encoding="utf-8"?>
+<p:notes xmlns:a="http://schemas.openxmlformats.org/drawingml/2006/main" xmlns:r="http://schemas.openxmlformats.org/officeDocument/2006/relationships" xmlns:p="http://schemas.openxmlformats.org/presentationml/2006/main">
+  <p:cSld>
+    <p:spTree>
+      <p:nvGrpSpPr>
+        <p:cNvPr id="1" name=""/>
+        <p:cNvGrpSpPr/>
+        <p:nvPr/>
+      </p:nvGrpSpPr>
+      <p:grpSpPr>
+        <a:xfrm>
+          <a:off x="0" y="0"/>
+          <a:ext cx="0" cy="0"/>
+          <a:chOff x="0" y="0"/>
+          <a:chExt cx="0" cy="0"/>
+        </a:xfrm>
+      </p:grpSpPr>
+      <p:sp>
+        <p:nvSpPr>
+          <p:cNvPr id="2" name="Slide Image Placeholder 1"/>
+          <p:cNvSpPr>
+            <a:spLocks noGrp="1" noRot="1" noChangeAspect="1"/>
+          </p:cNvSpPr>
+          <p:nvPr>
+            <p:ph type="sldImg"/>
+          </p:nvPr>
+        </p:nvSpPr>
+        <p:spPr/>
+      </p:sp>
+      <p:sp>
+        <p:nvSpPr>
+          <p:cNvPr id="3" name="Notes Placeholder 2"/>
+          <p:cNvSpPr>
+            <a:spLocks noGrp="1"/>
+          </p:cNvSpPr>
+          <p:nvPr>
+            <p:ph type="body" idx="1"/>
+          </p:nvPr>
+        </p:nvSpPr>
+        <p:spPr/>
+        <p:txBody>
+          <a:bodyPr/>
+          <a:lstStyle/>
+          <a:p>
+            <a:r>
+              <a:rPr lang="en-US" dirty="0"/>
+              <a:t/>
+            </a:r>
+            <a:endParaRPr lang="en-US" dirty="0"/>
+          </a:p>
+        </p:txBody>
+      </p:sp>
+      <p:sp>
+        <p:nvSpPr>
+          <p:cNvPr id="4" name="Slide Number Placeholder 3"/>
+          <p:cNvSpPr>
+            <a:spLocks noGrp="1"/>
+          </p:cNvSpPr>
+          <p:nvPr>
+            <p:ph type="sldNum" sz="quarter" idx="10"/>
+          </p:nvPr>
+        </p:nvSpPr>
+        <p:spPr/>
+        <p:txBody>
+          <a:bodyPr/>
+          <a:lstStyle/>
+          <a:p>
+            <a:fld id="{F7021451-1387-4CA6-816F-3879F97B5CBC}" type="slidenum">
+              <a:rPr lang="en-US"/>
+              <a:t>55</a:t>
             </a:fld>
             <a:endParaRPr lang="en-US"/>
           </a:p>
@@ -5741,7 +6275,7 @@
         </p:nvSpPr>
         <p:spPr>
           <a:xfrm>
-            <a:off x="548640" y="2820924"/>
+            <a:off x="548640" y="2839212"/>
             <a:ext cx="10881360" cy="868680"/>
           </a:xfrm>
           <a:prstGeom prst="rect">
@@ -5811,7 +6345,7 @@
         </p:nvSpPr>
         <p:spPr>
           <a:xfrm>
-            <a:off x="548640" y="3945636"/>
+            <a:off x="548640" y="3927348"/>
             <a:ext cx="10881360" cy="1143000"/>
           </a:xfrm>
           <a:prstGeom prst="roundRect">
@@ -5833,7 +6367,7 @@
         </p:nvSpPr>
         <p:spPr>
           <a:xfrm>
-            <a:off x="868680" y="4082796"/>
+            <a:off x="868680" y="4064508"/>
             <a:ext cx="1828800" cy="274320"/>
           </a:xfrm>
           <a:prstGeom prst="rect">
@@ -5872,7 +6406,7 @@
         </p:nvSpPr>
         <p:spPr>
           <a:xfrm>
-            <a:off x="868680" y="4329684"/>
+            <a:off x="868680" y="4311396"/>
             <a:ext cx="10241280" cy="685800"/>
           </a:xfrm>
           <a:prstGeom prst="rect">
@@ -6146,7 +6680,7 @@
         </p:nvSpPr>
         <p:spPr>
           <a:xfrm>
-            <a:off x="548640" y="2820924"/>
+            <a:off x="548640" y="2839212"/>
             <a:ext cx="10881360" cy="868680"/>
           </a:xfrm>
           <a:prstGeom prst="rect">
@@ -6216,7 +6750,7 @@
         </p:nvSpPr>
         <p:spPr>
           <a:xfrm>
-            <a:off x="548640" y="3945636"/>
+            <a:off x="548640" y="3927348"/>
             <a:ext cx="10881360" cy="1143000"/>
           </a:xfrm>
           <a:prstGeom prst="roundRect">
@@ -6238,7 +6772,7 @@
         </p:nvSpPr>
         <p:spPr>
           <a:xfrm>
-            <a:off x="868680" y="4082796"/>
+            <a:off x="868680" y="4064508"/>
             <a:ext cx="1828800" cy="274320"/>
           </a:xfrm>
           <a:prstGeom prst="rect">
@@ -6277,7 +6811,7 @@
         </p:nvSpPr>
         <p:spPr>
           <a:xfrm>
-            <a:off x="868680" y="4329684"/>
+            <a:off x="868680" y="4311396"/>
             <a:ext cx="10241280" cy="685800"/>
           </a:xfrm>
           <a:prstGeom prst="rect">
@@ -6590,7 +7124,7 @@
         </p:nvSpPr>
         <p:spPr>
           <a:xfrm>
-            <a:off x="548640" y="2683764"/>
+            <a:off x="548640" y="2702052"/>
             <a:ext cx="10881360" cy="1417320"/>
           </a:xfrm>
           <a:prstGeom prst="rect">
@@ -6684,7 +7218,7 @@
         </p:nvSpPr>
         <p:spPr>
           <a:xfrm>
-            <a:off x="548640" y="4357116"/>
+            <a:off x="548640" y="4338828"/>
             <a:ext cx="10881360" cy="868680"/>
           </a:xfrm>
           <a:prstGeom prst="roundRect">
@@ -6706,7 +7240,7 @@
         </p:nvSpPr>
         <p:spPr>
           <a:xfrm>
-            <a:off x="868680" y="4494276"/>
+            <a:off x="868680" y="4475988"/>
             <a:ext cx="1828800" cy="274320"/>
           </a:xfrm>
           <a:prstGeom prst="rect">
@@ -6745,7 +7279,7 @@
         </p:nvSpPr>
         <p:spPr>
           <a:xfrm>
-            <a:off x="868680" y="4741164"/>
+            <a:off x="868680" y="4722876"/>
             <a:ext cx="10241280" cy="411480"/>
           </a:xfrm>
           <a:prstGeom prst="rect">
@@ -7058,7 +7592,7 @@
         </p:nvSpPr>
         <p:spPr>
           <a:xfrm>
-            <a:off x="548640" y="2683764"/>
+            <a:off x="548640" y="2702052"/>
             <a:ext cx="10881360" cy="1417320"/>
           </a:xfrm>
           <a:prstGeom prst="rect">
@@ -7152,7 +7686,7 @@
         </p:nvSpPr>
         <p:spPr>
           <a:xfrm>
-            <a:off x="548640" y="4357116"/>
+            <a:off x="548640" y="4338828"/>
             <a:ext cx="10881360" cy="868680"/>
           </a:xfrm>
           <a:prstGeom prst="roundRect">
@@ -7174,7 +7708,7 @@
         </p:nvSpPr>
         <p:spPr>
           <a:xfrm>
-            <a:off x="868680" y="4494276"/>
+            <a:off x="868680" y="4475988"/>
             <a:ext cx="1828800" cy="274320"/>
           </a:xfrm>
           <a:prstGeom prst="rect">
@@ -7213,7 +7747,7 @@
         </p:nvSpPr>
         <p:spPr>
           <a:xfrm>
-            <a:off x="868680" y="4741164"/>
+            <a:off x="868680" y="4722876"/>
             <a:ext cx="10241280" cy="411480"/>
           </a:xfrm>
           <a:prstGeom prst="rect">
@@ -7789,7 +8323,7 @@
         </p:nvSpPr>
         <p:spPr>
           <a:xfrm>
-            <a:off x="548640" y="1938528"/>
+            <a:off x="548640" y="1975104"/>
             <a:ext cx="10881360" cy="1417320"/>
           </a:xfrm>
           <a:prstGeom prst="rect">
@@ -7986,7 +8520,7 @@
         </p:nvSpPr>
         <p:spPr>
           <a:xfrm>
-            <a:off x="548640" y="4736592"/>
+            <a:off x="548640" y="4700016"/>
             <a:ext cx="10881360" cy="1234440"/>
           </a:xfrm>
           <a:prstGeom prst="roundRect">
@@ -8008,7 +8542,7 @@
         </p:nvSpPr>
         <p:spPr>
           <a:xfrm>
-            <a:off x="868680" y="4873752"/>
+            <a:off x="868680" y="4837176"/>
             <a:ext cx="2743200" cy="274320"/>
           </a:xfrm>
           <a:prstGeom prst="rect">
@@ -8047,7 +8581,7 @@
         </p:nvSpPr>
         <p:spPr>
           <a:xfrm>
-            <a:off x="868680" y="5120640"/>
+            <a:off x="868680" y="5084064"/>
             <a:ext cx="10241280" cy="777240"/>
           </a:xfrm>
           <a:prstGeom prst="rect">
@@ -8894,7 +9428,7 @@
         </p:nvSpPr>
         <p:spPr>
           <a:xfrm>
-            <a:off x="548640" y="2820924"/>
+            <a:off x="548640" y="2839212"/>
             <a:ext cx="10881360" cy="868680"/>
           </a:xfrm>
           <a:prstGeom prst="rect">
@@ -8964,7 +9498,7 @@
         </p:nvSpPr>
         <p:spPr>
           <a:xfrm>
-            <a:off x="548640" y="3945636"/>
+            <a:off x="548640" y="3927348"/>
             <a:ext cx="10881360" cy="1143000"/>
           </a:xfrm>
           <a:prstGeom prst="roundRect">
@@ -8986,7 +9520,7 @@
         </p:nvSpPr>
         <p:spPr>
           <a:xfrm>
-            <a:off x="868680" y="4082796"/>
+            <a:off x="868680" y="4064508"/>
             <a:ext cx="1828800" cy="274320"/>
           </a:xfrm>
           <a:prstGeom prst="rect">
@@ -9025,7 +9559,7 @@
         </p:nvSpPr>
         <p:spPr>
           <a:xfrm>
-            <a:off x="868680" y="4329684"/>
+            <a:off x="868680" y="4311396"/>
             <a:ext cx="10241280" cy="685800"/>
           </a:xfrm>
           <a:prstGeom prst="rect">
@@ -10158,7 +10692,7 @@
         </p:nvSpPr>
         <p:spPr>
           <a:xfrm>
-            <a:off x="548640" y="2820924"/>
+            <a:off x="548640" y="2839212"/>
             <a:ext cx="10881360" cy="868680"/>
           </a:xfrm>
           <a:prstGeom prst="rect">
@@ -10228,7 +10762,7 @@
         </p:nvSpPr>
         <p:spPr>
           <a:xfrm>
-            <a:off x="548640" y="3945636"/>
+            <a:off x="548640" y="3927348"/>
             <a:ext cx="10881360" cy="1143000"/>
           </a:xfrm>
           <a:prstGeom prst="roundRect">
@@ -10250,7 +10784,7 @@
         </p:nvSpPr>
         <p:spPr>
           <a:xfrm>
-            <a:off x="868680" y="4082796"/>
+            <a:off x="868680" y="4064508"/>
             <a:ext cx="1828800" cy="274320"/>
           </a:xfrm>
           <a:prstGeom prst="rect">
@@ -10289,7 +10823,7 @@
         </p:nvSpPr>
         <p:spPr>
           <a:xfrm>
-            <a:off x="868680" y="4329684"/>
+            <a:off x="868680" y="4311396"/>
             <a:ext cx="10241280" cy="685800"/>
           </a:xfrm>
           <a:prstGeom prst="rect">
@@ -10563,7 +11097,7 @@
         </p:nvSpPr>
         <p:spPr>
           <a:xfrm>
-            <a:off x="548640" y="2820924"/>
+            <a:off x="548640" y="2839212"/>
             <a:ext cx="10881360" cy="868680"/>
           </a:xfrm>
           <a:prstGeom prst="rect">
@@ -10633,7 +11167,7 @@
         </p:nvSpPr>
         <p:spPr>
           <a:xfrm>
-            <a:off x="548640" y="3945636"/>
+            <a:off x="548640" y="3927348"/>
             <a:ext cx="10881360" cy="1143000"/>
           </a:xfrm>
           <a:prstGeom prst="roundRect">
@@ -10655,7 +11189,7 @@
         </p:nvSpPr>
         <p:spPr>
           <a:xfrm>
-            <a:off x="868680" y="4082796"/>
+            <a:off x="868680" y="4064508"/>
             <a:ext cx="1828800" cy="274320"/>
           </a:xfrm>
           <a:prstGeom prst="rect">
@@ -10694,7 +11228,7 @@
         </p:nvSpPr>
         <p:spPr>
           <a:xfrm>
-            <a:off x="868680" y="4329684"/>
+            <a:off x="868680" y="4311396"/>
             <a:ext cx="10241280" cy="685800"/>
           </a:xfrm>
           <a:prstGeom prst="rect">
@@ -11200,7 +11734,7 @@
         </p:nvSpPr>
         <p:spPr>
           <a:xfrm>
-            <a:off x="548640" y="2235708"/>
+            <a:off x="548640" y="2272284"/>
             <a:ext cx="10881360" cy="868680"/>
           </a:xfrm>
           <a:prstGeom prst="rect">
@@ -11373,7 +11907,7 @@
         </p:nvSpPr>
         <p:spPr>
           <a:xfrm>
-            <a:off x="548640" y="4759452"/>
+            <a:off x="548640" y="4722876"/>
             <a:ext cx="10881360" cy="914400"/>
           </a:xfrm>
           <a:prstGeom prst="roundRect">
@@ -11395,7 +11929,7 @@
         </p:nvSpPr>
         <p:spPr>
           <a:xfrm>
-            <a:off x="868680" y="4896612"/>
+            <a:off x="868680" y="4860036"/>
             <a:ext cx="2743200" cy="274320"/>
           </a:xfrm>
           <a:prstGeom prst="rect">
@@ -11434,7 +11968,7 @@
         </p:nvSpPr>
         <p:spPr>
           <a:xfrm>
-            <a:off x="868680" y="5143500"/>
+            <a:off x="868680" y="5106924"/>
             <a:ext cx="10241280" cy="457200"/>
           </a:xfrm>
           <a:prstGeom prst="rect">
@@ -11708,7 +12242,7 @@
         </p:nvSpPr>
         <p:spPr>
           <a:xfrm>
-            <a:off x="548640" y="2235708"/>
+            <a:off x="548640" y="2272284"/>
             <a:ext cx="10881360" cy="868680"/>
           </a:xfrm>
           <a:prstGeom prst="rect">
@@ -11881,7 +12415,7 @@
         </p:nvSpPr>
         <p:spPr>
           <a:xfrm>
-            <a:off x="548640" y="4759452"/>
+            <a:off x="548640" y="4722876"/>
             <a:ext cx="10881360" cy="914400"/>
           </a:xfrm>
           <a:prstGeom prst="roundRect">
@@ -11903,7 +12437,7 @@
         </p:nvSpPr>
         <p:spPr>
           <a:xfrm>
-            <a:off x="868680" y="4896612"/>
+            <a:off x="868680" y="4860036"/>
             <a:ext cx="2743200" cy="274320"/>
           </a:xfrm>
           <a:prstGeom prst="rect">
@@ -11942,7 +12476,7 @@
         </p:nvSpPr>
         <p:spPr>
           <a:xfrm>
-            <a:off x="868680" y="5143500"/>
+            <a:off x="868680" y="5106924"/>
             <a:ext cx="10241280" cy="457200"/>
           </a:xfrm>
           <a:prstGeom prst="rect">
@@ -12852,7 +13386,7 @@
         </p:nvSpPr>
         <p:spPr>
           <a:xfrm>
-            <a:off x="548640" y="2546604"/>
+            <a:off x="548640" y="2564892"/>
             <a:ext cx="10881360" cy="1417320"/>
           </a:xfrm>
           <a:prstGeom prst="rect">
@@ -12946,7 +13480,7 @@
         </p:nvSpPr>
         <p:spPr>
           <a:xfrm>
-            <a:off x="548640" y="4219956"/>
+            <a:off x="548640" y="4201668"/>
             <a:ext cx="10881360" cy="1143000"/>
           </a:xfrm>
           <a:prstGeom prst="roundRect">
@@ -12968,7 +13502,7 @@
         </p:nvSpPr>
         <p:spPr>
           <a:xfrm>
-            <a:off x="868680" y="4357116"/>
+            <a:off x="868680" y="4338828"/>
             <a:ext cx="1828800" cy="274320"/>
           </a:xfrm>
           <a:prstGeom prst="rect">
@@ -13007,7 +13541,7 @@
         </p:nvSpPr>
         <p:spPr>
           <a:xfrm>
-            <a:off x="868680" y="4604004"/>
+            <a:off x="868680" y="4585716"/>
             <a:ext cx="10241280" cy="685800"/>
           </a:xfrm>
           <a:prstGeom prst="rect">
@@ -13320,7 +13854,7 @@
         </p:nvSpPr>
         <p:spPr>
           <a:xfrm>
-            <a:off x="548640" y="2820924"/>
+            <a:off x="548640" y="2839212"/>
             <a:ext cx="10881360" cy="868680"/>
           </a:xfrm>
           <a:prstGeom prst="rect">
@@ -13390,7 +13924,7 @@
         </p:nvSpPr>
         <p:spPr>
           <a:xfrm>
-            <a:off x="548640" y="3945636"/>
+            <a:off x="548640" y="3927348"/>
             <a:ext cx="10881360" cy="1143000"/>
           </a:xfrm>
           <a:prstGeom prst="roundRect">
@@ -13412,7 +13946,7 @@
         </p:nvSpPr>
         <p:spPr>
           <a:xfrm>
-            <a:off x="868680" y="4082796"/>
+            <a:off x="868680" y="4064508"/>
             <a:ext cx="1828800" cy="274320"/>
           </a:xfrm>
           <a:prstGeom prst="rect">
@@ -13451,7 +13985,7 @@
         </p:nvSpPr>
         <p:spPr>
           <a:xfrm>
-            <a:off x="868680" y="4329684"/>
+            <a:off x="868680" y="4311396"/>
             <a:ext cx="10241280" cy="685800"/>
           </a:xfrm>
           <a:prstGeom prst="rect">
@@ -14903,7 +15437,7 @@
         </p:nvSpPr>
         <p:spPr>
           <a:xfrm>
-            <a:off x="548640" y="2958084"/>
+            <a:off x="548640" y="2976372"/>
             <a:ext cx="10881360" cy="868680"/>
           </a:xfrm>
           <a:prstGeom prst="rect">
@@ -14973,7 +15507,7 @@
         </p:nvSpPr>
         <p:spPr>
           <a:xfrm>
-            <a:off x="548640" y="4082796"/>
+            <a:off x="548640" y="4064508"/>
             <a:ext cx="10881360" cy="868680"/>
           </a:xfrm>
           <a:prstGeom prst="roundRect">
@@ -14995,7 +15529,7 @@
         </p:nvSpPr>
         <p:spPr>
           <a:xfrm>
-            <a:off x="868680" y="4219956"/>
+            <a:off x="868680" y="4201668"/>
             <a:ext cx="1828800" cy="274320"/>
           </a:xfrm>
           <a:prstGeom prst="rect">
@@ -15034,7 +15568,7 @@
         </p:nvSpPr>
         <p:spPr>
           <a:xfrm>
-            <a:off x="868680" y="4466844"/>
+            <a:off x="868680" y="4448556"/>
             <a:ext cx="10241280" cy="411480"/>
           </a:xfrm>
           <a:prstGeom prst="rect">
@@ -15347,7 +15881,7 @@
         </p:nvSpPr>
         <p:spPr>
           <a:xfrm>
-            <a:off x="548640" y="2683764"/>
+            <a:off x="548640" y="2702052"/>
             <a:ext cx="10881360" cy="1417320"/>
           </a:xfrm>
           <a:prstGeom prst="rect">
@@ -15441,7 +15975,7 @@
         </p:nvSpPr>
         <p:spPr>
           <a:xfrm>
-            <a:off x="548640" y="4357116"/>
+            <a:off x="548640" y="4338828"/>
             <a:ext cx="10881360" cy="868680"/>
           </a:xfrm>
           <a:prstGeom prst="roundRect">
@@ -15463,7 +15997,7 @@
         </p:nvSpPr>
         <p:spPr>
           <a:xfrm>
-            <a:off x="868680" y="4494276"/>
+            <a:off x="868680" y="4475988"/>
             <a:ext cx="1828800" cy="274320"/>
           </a:xfrm>
           <a:prstGeom prst="rect">
@@ -15502,7 +16036,7 @@
         </p:nvSpPr>
         <p:spPr>
           <a:xfrm>
-            <a:off x="868680" y="4741164"/>
+            <a:off x="868680" y="4722876"/>
             <a:ext cx="10241280" cy="411480"/>
           </a:xfrm>
           <a:prstGeom prst="rect">
@@ -18575,7 +19109,7 @@
         <p:spPr>
           <a:xfrm>
             <a:off x="548640" y="502920"/>
-            <a:ext cx="566928" cy="566928"/>
+            <a:ext cx="502920" cy="502920"/>
           </a:xfrm>
           <a:prstGeom prst="ellipse">
             <a:avLst/>
@@ -18602,8 +19136,8 @@
         </p:blipFill>
         <p:spPr>
           <a:xfrm>
-            <a:off x="616671" y="570951"/>
-            <a:ext cx="430865" cy="430865"/>
+            <a:off x="608990" y="563270"/>
+            <a:ext cx="382219" cy="382219"/>
           </a:xfrm>
           <a:prstGeom prst="rect">
             <a:avLst/>
@@ -18618,8 +19152,8 @@
         </p:nvSpPr>
         <p:spPr>
           <a:xfrm>
-            <a:off x="1234440" y="475488"/>
-            <a:ext cx="9601200" cy="640080"/>
+            <a:off x="1170432" y="457200"/>
+            <a:ext cx="8229600" cy="274320"/>
           </a:xfrm>
           <a:prstGeom prst="rect">
             <a:avLst/>
@@ -18635,7 +19169,46 @@
               <a:buNone/>
             </a:pPr>
             <a:r>
-              <a:rPr lang="en-US" sz="2800" b="1" dirty="0">
+              <a:rPr lang="en-US" sz="1100" spc="150" kern="0" dirty="0">
+                <a:solidFill>
+                  <a:srgbClr val="B5813F"/>
+                </a:solidFill>
+                <a:latin typeface="Calibri" pitchFamily="34" charset="0"/>
+                <a:ea typeface="Calibri" pitchFamily="34" charset="-122"/>
+                <a:cs typeface="Calibri" pitchFamily="34" charset="-120"/>
+              </a:rPr>
+              <a:t>TRAEFIK EN DÉTAIL</a:t>
+            </a:r>
+            <a:endParaRPr lang="en-US" sz="1100" dirty="0"/>
+          </a:p>
+        </p:txBody>
+      </p:sp>
+      <p:sp>
+        <p:nvSpPr>
+          <p:cNvPr id="5" name="Text 2"/>
+          <p:cNvSpPr txBox="1"/>
+          <p:nvPr/>
+        </p:nvSpPr>
+        <p:spPr>
+          <a:xfrm>
+            <a:off x="1152144" y="713232"/>
+            <a:ext cx="9692640" cy="594360"/>
+          </a:xfrm>
+          <a:prstGeom prst="rect">
+            <a:avLst/>
+          </a:prstGeom>
+          <a:noFill/>
+          <a:ln/>
+        </p:spPr>
+        <p:txBody>
+          <a:bodyPr wrap="square" lIns="0" tIns="0" rIns="0" bIns="0" rtlCol="0" anchor="ctr"/>
+          <a:lstStyle/>
+          <a:p>
+            <a:pPr indent="0" marL="0">
+              <a:buNone/>
+            </a:pPr>
+            <a:r>
+              <a:rPr lang="en-US" sz="2400" b="1" dirty="0">
                 <a:solidFill>
                   <a:srgbClr val="2C1A0E"/>
                 </a:solidFill>
@@ -18643,927 +19216,109 @@
                 <a:ea typeface="Cambria" pitchFamily="34" charset="-122"/>
                 <a:cs typeface="Cambria" pitchFamily="34" charset="-120"/>
               </a:rPr>
-              <a:t>Initialisation &amp; démarrage</a:t>
-            </a:r>
-            <a:endParaRPr lang="en-US" sz="2800" dirty="0"/>
-          </a:p>
-        </p:txBody>
-      </p:sp>
-      <p:sp>
-        <p:nvSpPr>
-          <p:cNvPr id="5" name="Text 2"/>
-          <p:cNvSpPr txBox="1"/>
-          <p:nvPr/>
-        </p:nvSpPr>
-        <p:spPr>
-          <a:xfrm>
-            <a:off x="1280160" y="1188720"/>
-            <a:ext cx="9966960" cy="548640"/>
-          </a:xfrm>
-          <a:prstGeom prst="rect">
-            <a:avLst/>
-          </a:prstGeom>
-          <a:noFill/>
-          <a:ln/>
-        </p:spPr>
-        <p:txBody>
-          <a:bodyPr wrap="square" lIns="0" tIns="0" rIns="0" bIns="0" rtlCol="0" anchor="ctr"/>
-          <a:lstStyle/>
-          <a:p>
-            <a:pPr indent="0" marL="0">
+              <a:t>Rôle général</a:t>
+            </a:r>
+            <a:endParaRPr lang="en-US" sz="2400" dirty="0"/>
+          </a:p>
+        </p:txBody>
+      </p:sp>
+      <p:sp>
+        <p:nvSpPr>
+          <p:cNvPr id="6" name="Text 3"/>
+          <p:cNvSpPr txBox="1"/>
+          <p:nvPr/>
+        </p:nvSpPr>
+        <p:spPr>
+          <a:xfrm>
+            <a:off x="548640" y="3246120"/>
+            <a:ext cx="10881360" cy="1417320"/>
+          </a:xfrm>
+          <a:prstGeom prst="rect">
+            <a:avLst/>
+          </a:prstGeom>
+          <a:noFill/>
+          <a:ln/>
+        </p:spPr>
+        <p:txBody>
+          <a:bodyPr wrap="square" lIns="0" tIns="0" rIns="0" bIns="0" rtlCol="0" anchor="ctr"/>
+          <a:lstStyle/>
+          <a:p>
+            <a:pPr marL="342900" indent="-342900">
               <a:lnSpc>
                 <a:spcPct val="115000"/>
               </a:lnSpc>
-              <a:buNone/>
-            </a:pPr>
-            <a:r>
-              <a:rPr lang="en-US" sz="1300" dirty="0">
-                <a:solidFill>
-                  <a:srgbClr val="7C6552"/>
-                </a:solidFill>
-                <a:latin typeface="Calibri" pitchFamily="34" charset="0"/>
-                <a:ea typeface="Calibri" pitchFamily="34" charset="-122"/>
-                <a:cs typeface="Calibri" pitchFamily="34" charset="-120"/>
-              </a:rPr>
-              <a:t>docker compose up -d respecte un ordre de dépendance strict — "app" attend que TOUS les autres services répondent sains avant de démarrer.</a:t>
-            </a:r>
-            <a:endParaRPr lang="en-US" sz="1300" dirty="0"/>
-          </a:p>
-        </p:txBody>
-      </p:sp>
-      <p:sp>
-        <p:nvSpPr>
-          <p:cNvPr id="6" name="Shape 3"/>
-          <p:cNvSpPr/>
-          <p:nvPr/>
-        </p:nvSpPr>
-        <p:spPr>
-          <a:xfrm>
-            <a:off x="548640" y="2788920"/>
-            <a:ext cx="1745742" cy="1965960"/>
-          </a:xfrm>
-          <a:prstGeom prst="roundRect">
-            <a:avLst>
-              <a:gd name="adj" fmla="val 4190"/>
-            </a:avLst>
-          </a:prstGeom>
-          <a:solidFill>
-            <a:srgbClr val="F3E9DA"/>
-          </a:solidFill>
-          <a:ln/>
-        </p:spPr>
+              <a:spcAft>
+                <a:spcPts val="800"/>
+              </a:spcAft>
+              <a:buSzPct val="100000"/>
+              <a:buChar char="•"/>
+            </a:pPr>
+            <a:r>
+              <a:rPr lang="en-US" sz="1450" dirty="0">
+                <a:solidFill>
+                  <a:srgbClr val="2C1A0E"/>
+                </a:solidFill>
+                <a:latin typeface="Calibri" pitchFamily="34" charset="0"/>
+                <a:ea typeface="Calibri" pitchFamily="34" charset="-122"/>
+                <a:cs typeface="Calibri" pitchFamily="34" charset="-120"/>
+              </a:rPr>
+              <a:t>Reverse proxy et répartiteur de charge HTTP(S) — le SEUL conteneur exposé sur les ports 80/443.</a:t>
+            </a:r>
+            <a:endParaRPr lang="en-US" sz="1450" dirty="0"/>
+          </a:p>
+          <a:p>
+            <a:pPr marL="342900" indent="-342900">
+              <a:lnSpc>
+                <a:spcPct val="115000"/>
+              </a:lnSpc>
+              <a:spcAft>
+                <a:spcPts val="800"/>
+              </a:spcAft>
+              <a:buSzPct val="100000"/>
+              <a:buChar char="•"/>
+            </a:pPr>
+            <a:r>
+              <a:rPr lang="en-US" sz="1450" dirty="0">
+                <a:solidFill>
+                  <a:srgbClr val="2C1A0E"/>
+                </a:solidFill>
+                <a:latin typeface="Calibri" pitchFamily="34" charset="0"/>
+                <a:ea typeface="Calibri" pitchFamily="34" charset="-122"/>
+                <a:cs typeface="Calibri" pitchFamily="34" charset="-120"/>
+              </a:rPr>
+              <a:t>Tout le trafic public passe par lui, qui décide vers quel service interne router chaque requête.</a:t>
+            </a:r>
+            <a:endParaRPr lang="en-US" sz="1450" dirty="0"/>
+          </a:p>
+          <a:p>
+            <a:pPr marL="342900" indent="-342900">
+              <a:lnSpc>
+                <a:spcPct val="115000"/>
+              </a:lnSpc>
+              <a:spcAft>
+                <a:spcPts val="800"/>
+              </a:spcAft>
+              <a:buSzPct val="100000"/>
+              <a:buChar char="•"/>
+            </a:pPr>
+            <a:r>
+              <a:rPr lang="en-US" sz="1450" dirty="0">
+                <a:solidFill>
+                  <a:srgbClr val="2C1A0E"/>
+                </a:solidFill>
+                <a:latin typeface="Calibri" pitchFamily="34" charset="0"/>
+                <a:ea typeface="Calibri" pitchFamily="34" charset="-122"/>
+                <a:cs typeface="Calibri" pitchFamily="34" charset="-120"/>
+              </a:rPr>
+              <a:t>Termine aussi le TLS — les autres conteneurs ne se parlent qu'en clair sur le réseau Docker interne.</a:t>
+            </a:r>
+            <a:endParaRPr lang="en-US" sz="1450" dirty="0"/>
+          </a:p>
+        </p:txBody>
       </p:sp>
       <p:sp>
         <p:nvSpPr>
           <p:cNvPr id="7" name="Text 4"/>
-          <p:cNvSpPr txBox="1"/>
-          <p:nvPr/>
-        </p:nvSpPr>
-        <p:spPr>
-          <a:xfrm>
-            <a:off x="685800" y="2898648"/>
-            <a:ext cx="548640" cy="365760"/>
-          </a:xfrm>
-          <a:prstGeom prst="rect">
-            <a:avLst/>
-          </a:prstGeom>
-          <a:noFill/>
-          <a:ln/>
-        </p:spPr>
-        <p:txBody>
-          <a:bodyPr wrap="square" lIns="0" tIns="0" rIns="0" bIns="0" rtlCol="0" anchor="ctr"/>
-          <a:lstStyle/>
-          <a:p>
-            <a:pPr indent="0" marL="0">
-              <a:buNone/>
-            </a:pPr>
-            <a:r>
-              <a:rPr lang="en-US" sz="2000" b="1" dirty="0">
-                <a:solidFill>
-                  <a:srgbClr val="B5813F"/>
-                </a:solidFill>
-                <a:latin typeface="Cambria" pitchFamily="34" charset="0"/>
-                <a:ea typeface="Cambria" pitchFamily="34" charset="-122"/>
-                <a:cs typeface="Cambria" pitchFamily="34" charset="-120"/>
-              </a:rPr>
-              <a:t>1</a:t>
-            </a:r>
-            <a:endParaRPr lang="en-US" sz="2000" dirty="0"/>
-          </a:p>
-        </p:txBody>
-      </p:sp>
-      <p:sp>
-        <p:nvSpPr>
-          <p:cNvPr id="8" name="Text 5"/>
-          <p:cNvSpPr txBox="1"/>
-          <p:nvPr/>
-        </p:nvSpPr>
-        <p:spPr>
-          <a:xfrm>
-            <a:off x="685800" y="3355848"/>
-            <a:ext cx="1471422" cy="777240"/>
-          </a:xfrm>
-          <a:prstGeom prst="rect">
-            <a:avLst/>
-          </a:prstGeom>
-          <a:noFill/>
-          <a:ln/>
-        </p:spPr>
-        <p:txBody>
-          <a:bodyPr wrap="square" lIns="0" tIns="0" rIns="0" bIns="0" rtlCol="0" anchor="ctr"/>
-          <a:lstStyle/>
-          <a:p>
-            <a:pPr indent="0" marL="0">
-              <a:lnSpc>
-                <a:spcPct val="105000"/>
-              </a:lnSpc>
-              <a:buNone/>
-            </a:pPr>
-            <a:r>
-              <a:rPr lang="en-US" sz="1150" b="1" dirty="0">
-                <a:solidFill>
-                  <a:srgbClr val="2C1A0E"/>
-                </a:solidFill>
-                <a:latin typeface="Calibri" pitchFamily="34" charset="0"/>
-                <a:ea typeface="Calibri" pitchFamily="34" charset="-122"/>
-                <a:cs typeface="Calibri" pitchFamily="34" charset="-120"/>
-              </a:rPr>
-              <a:t>Services sans état</a:t>
-            </a:r>
-            <a:endParaRPr lang="en-US" sz="1150" dirty="0"/>
-          </a:p>
-        </p:txBody>
-      </p:sp>
-      <p:sp>
-        <p:nvSpPr>
-          <p:cNvPr id="9" name="Text 6"/>
-          <p:cNvSpPr txBox="1"/>
-          <p:nvPr/>
-        </p:nvSpPr>
-        <p:spPr>
-          <a:xfrm>
-            <a:off x="685800" y="4069080"/>
-            <a:ext cx="1471422" cy="621792"/>
-          </a:xfrm>
-          <a:prstGeom prst="rect">
-            <a:avLst/>
-          </a:prstGeom>
-          <a:noFill/>
-          <a:ln/>
-        </p:spPr>
-        <p:txBody>
-          <a:bodyPr wrap="square" lIns="0" tIns="0" rIns="0" bIns="0" rtlCol="0" anchor="ctr"/>
-          <a:lstStyle/>
-          <a:p>
-            <a:pPr indent="0" marL="0">
-              <a:lnSpc>
-                <a:spcPct val="105000"/>
-              </a:lnSpc>
-              <a:buNone/>
-            </a:pPr>
-            <a:r>
-              <a:rPr lang="en-US" sz="880" dirty="0">
-                <a:solidFill>
-                  <a:srgbClr val="7C6552"/>
-                </a:solidFill>
-                <a:latin typeface="Calibri" pitchFamily="34" charset="0"/>
-                <a:ea typeface="Calibri" pitchFamily="34" charset="-122"/>
-                <a:cs typeface="Calibri" pitchFamily="34" charset="-120"/>
-              </a:rPr>
-              <a:t>postgres, minio, meilisearch, redis, gotenberg — prêts dès leur healthcheck</a:t>
-            </a:r>
-            <a:endParaRPr lang="en-US" sz="880" dirty="0"/>
-          </a:p>
-        </p:txBody>
-      </p:sp>
-      <p:sp>
-        <p:nvSpPr>
-          <p:cNvPr id="10" name="Shape 7"/>
-          <p:cNvSpPr/>
-          <p:nvPr/>
-        </p:nvSpPr>
-        <p:spPr>
-          <a:xfrm>
-            <a:off x="2417826" y="2788920"/>
-            <a:ext cx="1745742" cy="1965960"/>
-          </a:xfrm>
-          <a:prstGeom prst="roundRect">
-            <a:avLst>
-              <a:gd name="adj" fmla="val 4190"/>
-            </a:avLst>
-          </a:prstGeom>
-          <a:solidFill>
-            <a:srgbClr val="F3E9DA"/>
-          </a:solidFill>
-          <a:ln/>
-        </p:spPr>
-      </p:sp>
-      <p:sp>
-        <p:nvSpPr>
-          <p:cNvPr id="11" name="Text 8"/>
-          <p:cNvSpPr txBox="1"/>
-          <p:nvPr/>
-        </p:nvSpPr>
-        <p:spPr>
-          <a:xfrm>
-            <a:off x="2554986" y="2898648"/>
-            <a:ext cx="548640" cy="365760"/>
-          </a:xfrm>
-          <a:prstGeom prst="rect">
-            <a:avLst/>
-          </a:prstGeom>
-          <a:noFill/>
-          <a:ln/>
-        </p:spPr>
-        <p:txBody>
-          <a:bodyPr wrap="square" lIns="0" tIns="0" rIns="0" bIns="0" rtlCol="0" anchor="ctr"/>
-          <a:lstStyle/>
-          <a:p>
-            <a:pPr indent="0" marL="0">
-              <a:buNone/>
-            </a:pPr>
-            <a:r>
-              <a:rPr lang="en-US" sz="2000" b="1" dirty="0">
-                <a:solidFill>
-                  <a:srgbClr val="B5813F"/>
-                </a:solidFill>
-                <a:latin typeface="Cambria" pitchFamily="34" charset="0"/>
-                <a:ea typeface="Cambria" pitchFamily="34" charset="-122"/>
-                <a:cs typeface="Cambria" pitchFamily="34" charset="-120"/>
-              </a:rPr>
-              <a:t>2</a:t>
-            </a:r>
-            <a:endParaRPr lang="en-US" sz="2000" dirty="0"/>
-          </a:p>
-        </p:txBody>
-      </p:sp>
-      <p:sp>
-        <p:nvSpPr>
-          <p:cNvPr id="12" name="Text 9"/>
-          <p:cNvSpPr txBox="1"/>
-          <p:nvPr/>
-        </p:nvSpPr>
-        <p:spPr>
-          <a:xfrm>
-            <a:off x="2554986" y="3355848"/>
-            <a:ext cx="1471422" cy="777240"/>
-          </a:xfrm>
-          <a:prstGeom prst="rect">
-            <a:avLst/>
-          </a:prstGeom>
-          <a:noFill/>
-          <a:ln/>
-        </p:spPr>
-        <p:txBody>
-          <a:bodyPr wrap="square" lIns="0" tIns="0" rIns="0" bIns="0" rtlCol="0" anchor="ctr"/>
-          <a:lstStyle/>
-          <a:p>
-            <a:pPr indent="0" marL="0">
-              <a:lnSpc>
-                <a:spcPct val="105000"/>
-              </a:lnSpc>
-              <a:buNone/>
-            </a:pPr>
-            <a:r>
-              <a:rPr lang="en-US" sz="1150" b="1" dirty="0">
-                <a:solidFill>
-                  <a:srgbClr val="2C1A0E"/>
-                </a:solidFill>
-                <a:latin typeface="Calibri" pitchFamily="34" charset="0"/>
-                <a:ea typeface="Calibri" pitchFamily="34" charset="-122"/>
-                <a:cs typeface="Calibri" pitchFamily="34" charset="-120"/>
-              </a:rPr>
-              <a:t>Ollama</a:t>
-            </a:r>
-            <a:endParaRPr lang="en-US" sz="1150" dirty="0"/>
-          </a:p>
-        </p:txBody>
-      </p:sp>
-      <p:sp>
-        <p:nvSpPr>
-          <p:cNvPr id="13" name="Text 10"/>
-          <p:cNvSpPr txBox="1"/>
-          <p:nvPr/>
-        </p:nvSpPr>
-        <p:spPr>
-          <a:xfrm>
-            <a:off x="2554986" y="4069080"/>
-            <a:ext cx="1471422" cy="621792"/>
-          </a:xfrm>
-          <a:prstGeom prst="rect">
-            <a:avLst/>
-          </a:prstGeom>
-          <a:noFill/>
-          <a:ln/>
-        </p:spPr>
-        <p:txBody>
-          <a:bodyPr wrap="square" lIns="0" tIns="0" rIns="0" bIns="0" rtlCol="0" anchor="ctr"/>
-          <a:lstStyle/>
-          <a:p>
-            <a:pPr indent="0" marL="0">
-              <a:lnSpc>
-                <a:spcPct val="105000"/>
-              </a:lnSpc>
-              <a:buNone/>
-            </a:pPr>
-            <a:r>
-              <a:rPr lang="en-US" sz="880" dirty="0">
-                <a:solidFill>
-                  <a:srgbClr val="7C6552"/>
-                </a:solidFill>
-                <a:latin typeface="Calibri" pitchFamily="34" charset="0"/>
-                <a:ea typeface="Calibri" pitchFamily="34" charset="-122"/>
-                <a:cs typeface="Calibri" pitchFamily="34" charset="-120"/>
-              </a:rPr>
-              <a:t>télécharge qwen2.5-coder:7b s'il n'est pas déjà dans le volume nommé</a:t>
-            </a:r>
-            <a:endParaRPr lang="en-US" sz="880" dirty="0"/>
-          </a:p>
-        </p:txBody>
-      </p:sp>
-      <p:sp>
-        <p:nvSpPr>
-          <p:cNvPr id="14" name="Shape 11"/>
-          <p:cNvSpPr/>
-          <p:nvPr/>
-        </p:nvSpPr>
-        <p:spPr>
-          <a:xfrm>
-            <a:off x="4287012" y="2788920"/>
-            <a:ext cx="1745742" cy="1965960"/>
-          </a:xfrm>
-          <a:prstGeom prst="roundRect">
-            <a:avLst>
-              <a:gd name="adj" fmla="val 4190"/>
-            </a:avLst>
-          </a:prstGeom>
-          <a:solidFill>
-            <a:srgbClr val="F3E9DA"/>
-          </a:solidFill>
-          <a:ln/>
-        </p:spPr>
-      </p:sp>
-      <p:sp>
-        <p:nvSpPr>
-          <p:cNvPr id="15" name="Text 12"/>
-          <p:cNvSpPr txBox="1"/>
-          <p:nvPr/>
-        </p:nvSpPr>
-        <p:spPr>
-          <a:xfrm>
-            <a:off x="4424172" y="2898648"/>
-            <a:ext cx="548640" cy="365760"/>
-          </a:xfrm>
-          <a:prstGeom prst="rect">
-            <a:avLst/>
-          </a:prstGeom>
-          <a:noFill/>
-          <a:ln/>
-        </p:spPr>
-        <p:txBody>
-          <a:bodyPr wrap="square" lIns="0" tIns="0" rIns="0" bIns="0" rtlCol="0" anchor="ctr"/>
-          <a:lstStyle/>
-          <a:p>
-            <a:pPr indent="0" marL="0">
-              <a:buNone/>
-            </a:pPr>
-            <a:r>
-              <a:rPr lang="en-US" sz="2000" b="1" dirty="0">
-                <a:solidFill>
-                  <a:srgbClr val="B5813F"/>
-                </a:solidFill>
-                <a:latin typeface="Cambria" pitchFamily="34" charset="0"/>
-                <a:ea typeface="Cambria" pitchFamily="34" charset="-122"/>
-                <a:cs typeface="Cambria" pitchFamily="34" charset="-120"/>
-              </a:rPr>
-              <a:t>3</a:t>
-            </a:r>
-            <a:endParaRPr lang="en-US" sz="2000" dirty="0"/>
-          </a:p>
-        </p:txBody>
-      </p:sp>
-      <p:sp>
-        <p:nvSpPr>
-          <p:cNvPr id="16" name="Text 13"/>
-          <p:cNvSpPr txBox="1"/>
-          <p:nvPr/>
-        </p:nvSpPr>
-        <p:spPr>
-          <a:xfrm>
-            <a:off x="4424172" y="3355848"/>
-            <a:ext cx="1471422" cy="777240"/>
-          </a:xfrm>
-          <a:prstGeom prst="rect">
-            <a:avLst/>
-          </a:prstGeom>
-          <a:noFill/>
-          <a:ln/>
-        </p:spPr>
-        <p:txBody>
-          <a:bodyPr wrap="square" lIns="0" tIns="0" rIns="0" bIns="0" rtlCol="0" anchor="ctr"/>
-          <a:lstStyle/>
-          <a:p>
-            <a:pPr indent="0" marL="0">
-              <a:lnSpc>
-                <a:spcPct val="105000"/>
-              </a:lnSpc>
-              <a:buNone/>
-            </a:pPr>
-            <a:r>
-              <a:rPr lang="en-US" sz="1150" b="1" dirty="0">
-                <a:solidFill>
-                  <a:srgbClr val="2C1A0E"/>
-                </a:solidFill>
-                <a:latin typeface="Calibri" pitchFamily="34" charset="0"/>
-                <a:ea typeface="Calibri" pitchFamily="34" charset="-122"/>
-                <a:cs typeface="Calibri" pitchFamily="34" charset="-120"/>
-              </a:rPr>
-              <a:t>Traefik</a:t>
-            </a:r>
-            <a:endParaRPr lang="en-US" sz="1150" dirty="0"/>
-          </a:p>
-        </p:txBody>
-      </p:sp>
-      <p:sp>
-        <p:nvSpPr>
-          <p:cNvPr id="17" name="Text 14"/>
-          <p:cNvSpPr txBox="1"/>
-          <p:nvPr/>
-        </p:nvSpPr>
-        <p:spPr>
-          <a:xfrm>
-            <a:off x="4424172" y="4069080"/>
-            <a:ext cx="1471422" cy="621792"/>
-          </a:xfrm>
-          <a:prstGeom prst="rect">
-            <a:avLst/>
-          </a:prstGeom>
-          <a:noFill/>
-          <a:ln/>
-        </p:spPr>
-        <p:txBody>
-          <a:bodyPr wrap="square" lIns="0" tIns="0" rIns="0" bIns="0" rtlCol="0" anchor="ctr"/>
-          <a:lstStyle/>
-          <a:p>
-            <a:pPr indent="0" marL="0">
-              <a:lnSpc>
-                <a:spcPct val="105000"/>
-              </a:lnSpc>
-              <a:buNone/>
-            </a:pPr>
-            <a:r>
-              <a:rPr lang="en-US" sz="880" dirty="0">
-                <a:solidFill>
-                  <a:srgbClr val="7C6552"/>
-                </a:solidFill>
-                <a:latin typeface="Calibri" pitchFamily="34" charset="0"/>
-                <a:ea typeface="Calibri" pitchFamily="34" charset="-122"/>
-                <a:cs typeface="Calibri" pitchFamily="34" charset="-120"/>
-              </a:rPr>
-              <a:t>régénère dynamic.yml depuis le gabarit, jamais versionné</a:t>
-            </a:r>
-            <a:endParaRPr lang="en-US" sz="880" dirty="0"/>
-          </a:p>
-        </p:txBody>
-      </p:sp>
-      <p:sp>
-        <p:nvSpPr>
-          <p:cNvPr id="18" name="Shape 15"/>
-          <p:cNvSpPr/>
-          <p:nvPr/>
-        </p:nvSpPr>
-        <p:spPr>
-          <a:xfrm>
-            <a:off x="6156198" y="2788920"/>
-            <a:ext cx="1745742" cy="1965960"/>
-          </a:xfrm>
-          <a:prstGeom prst="roundRect">
-            <a:avLst>
-              <a:gd name="adj" fmla="val 4190"/>
-            </a:avLst>
-          </a:prstGeom>
-          <a:solidFill>
-            <a:srgbClr val="F3E9DA"/>
-          </a:solidFill>
-          <a:ln/>
-        </p:spPr>
-      </p:sp>
-      <p:sp>
-        <p:nvSpPr>
-          <p:cNvPr id="19" name="Text 16"/>
-          <p:cNvSpPr txBox="1"/>
-          <p:nvPr/>
-        </p:nvSpPr>
-        <p:spPr>
-          <a:xfrm>
-            <a:off x="6293358" y="2898648"/>
-            <a:ext cx="548640" cy="365760"/>
-          </a:xfrm>
-          <a:prstGeom prst="rect">
-            <a:avLst/>
-          </a:prstGeom>
-          <a:noFill/>
-          <a:ln/>
-        </p:spPr>
-        <p:txBody>
-          <a:bodyPr wrap="square" lIns="0" tIns="0" rIns="0" bIns="0" rtlCol="0" anchor="ctr"/>
-          <a:lstStyle/>
-          <a:p>
-            <a:pPr indent="0" marL="0">
-              <a:buNone/>
-            </a:pPr>
-            <a:r>
-              <a:rPr lang="en-US" sz="2000" b="1" dirty="0">
-                <a:solidFill>
-                  <a:srgbClr val="B5813F"/>
-                </a:solidFill>
-                <a:latin typeface="Cambria" pitchFamily="34" charset="0"/>
-                <a:ea typeface="Cambria" pitchFamily="34" charset="-122"/>
-                <a:cs typeface="Cambria" pitchFamily="34" charset="-120"/>
-              </a:rPr>
-              <a:t>4</a:t>
-            </a:r>
-            <a:endParaRPr lang="en-US" sz="2000" dirty="0"/>
-          </a:p>
-        </p:txBody>
-      </p:sp>
-      <p:sp>
-        <p:nvSpPr>
-          <p:cNvPr id="20" name="Text 17"/>
-          <p:cNvSpPr txBox="1"/>
-          <p:nvPr/>
-        </p:nvSpPr>
-        <p:spPr>
-          <a:xfrm>
-            <a:off x="6293358" y="3355848"/>
-            <a:ext cx="1471422" cy="777240"/>
-          </a:xfrm>
-          <a:prstGeom prst="rect">
-            <a:avLst/>
-          </a:prstGeom>
-          <a:noFill/>
-          <a:ln/>
-        </p:spPr>
-        <p:txBody>
-          <a:bodyPr wrap="square" lIns="0" tIns="0" rIns="0" bIns="0" rtlCol="0" anchor="ctr"/>
-          <a:lstStyle/>
-          <a:p>
-            <a:pPr indent="0" marL="0">
-              <a:lnSpc>
-                <a:spcPct val="105000"/>
-              </a:lnSpc>
-              <a:buNone/>
-            </a:pPr>
-            <a:r>
-              <a:rPr lang="en-US" sz="1150" b="1" dirty="0">
-                <a:solidFill>
-                  <a:srgbClr val="2C1A0E"/>
-                </a:solidFill>
-                <a:latin typeface="Calibri" pitchFamily="34" charset="0"/>
-                <a:ea typeface="Calibri" pitchFamily="34" charset="-122"/>
-                <a:cs typeface="Calibri" pitchFamily="34" charset="-120"/>
-              </a:rPr>
-              <a:t>app démarre</a:t>
-            </a:r>
-            <a:endParaRPr lang="en-US" sz="1150" dirty="0"/>
-          </a:p>
-        </p:txBody>
-      </p:sp>
-      <p:sp>
-        <p:nvSpPr>
-          <p:cNvPr id="21" name="Text 18"/>
-          <p:cNvSpPr txBox="1"/>
-          <p:nvPr/>
-        </p:nvSpPr>
-        <p:spPr>
-          <a:xfrm>
-            <a:off x="6293358" y="4069080"/>
-            <a:ext cx="1471422" cy="621792"/>
-          </a:xfrm>
-          <a:prstGeom prst="rect">
-            <a:avLst/>
-          </a:prstGeom>
-          <a:noFill/>
-          <a:ln/>
-        </p:spPr>
-        <p:txBody>
-          <a:bodyPr wrap="square" lIns="0" tIns="0" rIns="0" bIns="0" rtlCol="0" anchor="ctr"/>
-          <a:lstStyle/>
-          <a:p>
-            <a:pPr indent="0" marL="0">
-              <a:lnSpc>
-                <a:spcPct val="105000"/>
-              </a:lnSpc>
-              <a:buNone/>
-            </a:pPr>
-            <a:r>
-              <a:rPr lang="en-US" sz="880" dirty="0">
-                <a:solidFill>
-                  <a:srgbClr val="7C6552"/>
-                </a:solidFill>
-                <a:latin typeface="Calibri" pitchFamily="34" charset="0"/>
-                <a:ea typeface="Calibri" pitchFamily="34" charset="-122"/>
-                <a:cs typeface="Calibri" pitchFamily="34" charset="-120"/>
-              </a:rPr>
-              <a:t>une fois tous les services ci-dessus sains</a:t>
-            </a:r>
-            <a:endParaRPr lang="en-US" sz="880" dirty="0"/>
-          </a:p>
-        </p:txBody>
-      </p:sp>
-      <p:sp>
-        <p:nvSpPr>
-          <p:cNvPr id="22" name="Shape 19"/>
-          <p:cNvSpPr/>
-          <p:nvPr/>
-        </p:nvSpPr>
-        <p:spPr>
-          <a:xfrm>
-            <a:off x="8025384" y="2788920"/>
-            <a:ext cx="1745742" cy="1965960"/>
-          </a:xfrm>
-          <a:prstGeom prst="roundRect">
-            <a:avLst>
-              <a:gd name="adj" fmla="val 4190"/>
-            </a:avLst>
-          </a:prstGeom>
-          <a:solidFill>
-            <a:srgbClr val="F3E9DA"/>
-          </a:solidFill>
-          <a:ln/>
-        </p:spPr>
-      </p:sp>
-      <p:sp>
-        <p:nvSpPr>
-          <p:cNvPr id="23" name="Text 20"/>
-          <p:cNvSpPr txBox="1"/>
-          <p:nvPr/>
-        </p:nvSpPr>
-        <p:spPr>
-          <a:xfrm>
-            <a:off x="8162544" y="2898648"/>
-            <a:ext cx="548640" cy="365760"/>
-          </a:xfrm>
-          <a:prstGeom prst="rect">
-            <a:avLst/>
-          </a:prstGeom>
-          <a:noFill/>
-          <a:ln/>
-        </p:spPr>
-        <p:txBody>
-          <a:bodyPr wrap="square" lIns="0" tIns="0" rIns="0" bIns="0" rtlCol="0" anchor="ctr"/>
-          <a:lstStyle/>
-          <a:p>
-            <a:pPr indent="0" marL="0">
-              <a:buNone/>
-            </a:pPr>
-            <a:r>
-              <a:rPr lang="en-US" sz="2000" b="1" dirty="0">
-                <a:solidFill>
-                  <a:srgbClr val="B5813F"/>
-                </a:solidFill>
-                <a:latin typeface="Cambria" pitchFamily="34" charset="0"/>
-                <a:ea typeface="Cambria" pitchFamily="34" charset="-122"/>
-                <a:cs typeface="Cambria" pitchFamily="34" charset="-120"/>
-              </a:rPr>
-              <a:t>5</a:t>
-            </a:r>
-            <a:endParaRPr lang="en-US" sz="2000" dirty="0"/>
-          </a:p>
-        </p:txBody>
-      </p:sp>
-      <p:sp>
-        <p:nvSpPr>
-          <p:cNvPr id="24" name="Text 21"/>
-          <p:cNvSpPr txBox="1"/>
-          <p:nvPr/>
-        </p:nvSpPr>
-        <p:spPr>
-          <a:xfrm>
-            <a:off x="8162544" y="3355848"/>
-            <a:ext cx="1471422" cy="777240"/>
-          </a:xfrm>
-          <a:prstGeom prst="rect">
-            <a:avLst/>
-          </a:prstGeom>
-          <a:noFill/>
-          <a:ln/>
-        </p:spPr>
-        <p:txBody>
-          <a:bodyPr wrap="square" lIns="0" tIns="0" rIns="0" bIns="0" rtlCol="0" anchor="ctr"/>
-          <a:lstStyle/>
-          <a:p>
-            <a:pPr indent="0" marL="0">
-              <a:lnSpc>
-                <a:spcPct val="105000"/>
-              </a:lnSpc>
-              <a:buNone/>
-            </a:pPr>
-            <a:r>
-              <a:rPr lang="en-US" sz="1150" b="1" dirty="0">
-                <a:solidFill>
-                  <a:srgbClr val="2C1A0E"/>
-                </a:solidFill>
-                <a:latin typeface="Calibri" pitchFamily="34" charset="0"/>
-                <a:ea typeface="Calibri" pitchFamily="34" charset="-122"/>
-                <a:cs typeface="Calibri" pitchFamily="34" charset="-120"/>
-              </a:rPr>
-              <a:t>Migrations Flyway</a:t>
-            </a:r>
-            <a:endParaRPr lang="en-US" sz="1150" dirty="0"/>
-          </a:p>
-        </p:txBody>
-      </p:sp>
-      <p:sp>
-        <p:nvSpPr>
-          <p:cNvPr id="25" name="Text 22"/>
-          <p:cNvSpPr txBox="1"/>
-          <p:nvPr/>
-        </p:nvSpPr>
-        <p:spPr>
-          <a:xfrm>
-            <a:off x="8162544" y="4069080"/>
-            <a:ext cx="1471422" cy="621792"/>
-          </a:xfrm>
-          <a:prstGeom prst="rect">
-            <a:avLst/>
-          </a:prstGeom>
-          <a:noFill/>
-          <a:ln/>
-        </p:spPr>
-        <p:txBody>
-          <a:bodyPr wrap="square" lIns="0" tIns="0" rIns="0" bIns="0" rtlCol="0" anchor="ctr"/>
-          <a:lstStyle/>
-          <a:p>
-            <a:pPr indent="0" marL="0">
-              <a:lnSpc>
-                <a:spcPct val="105000"/>
-              </a:lnSpc>
-              <a:buNone/>
-            </a:pPr>
-            <a:r>
-              <a:rPr lang="en-US" sz="880" dirty="0">
-                <a:solidFill>
-                  <a:srgbClr val="7C6552"/>
-                </a:solidFill>
-                <a:latin typeface="Calibri" pitchFamily="34" charset="0"/>
-                <a:ea typeface="Calibri" pitchFamily="34" charset="-122"/>
-                <a:cs typeface="Calibri" pitchFamily="34" charset="-120"/>
-              </a:rPr>
-              <a:t>schéma appliqué automatiquement</a:t>
-            </a:r>
-            <a:endParaRPr lang="en-US" sz="880" dirty="0"/>
-          </a:p>
-        </p:txBody>
-      </p:sp>
-      <p:sp>
-        <p:nvSpPr>
-          <p:cNvPr id="26" name="Shape 23"/>
-          <p:cNvSpPr/>
-          <p:nvPr/>
-        </p:nvSpPr>
-        <p:spPr>
-          <a:xfrm>
-            <a:off x="9894570" y="2788920"/>
-            <a:ext cx="1745742" cy="1965960"/>
-          </a:xfrm>
-          <a:prstGeom prst="roundRect">
-            <a:avLst>
-              <a:gd name="adj" fmla="val 4190"/>
-            </a:avLst>
-          </a:prstGeom>
-          <a:solidFill>
-            <a:srgbClr val="B5813F"/>
-          </a:solidFill>
-          <a:ln/>
-        </p:spPr>
-      </p:sp>
-      <p:sp>
-        <p:nvSpPr>
-          <p:cNvPr id="27" name="Text 24"/>
-          <p:cNvSpPr txBox="1"/>
-          <p:nvPr/>
-        </p:nvSpPr>
-        <p:spPr>
-          <a:xfrm>
-            <a:off x="10031730" y="2898648"/>
-            <a:ext cx="548640" cy="365760"/>
-          </a:xfrm>
-          <a:prstGeom prst="rect">
-            <a:avLst/>
-          </a:prstGeom>
-          <a:noFill/>
-          <a:ln/>
-        </p:spPr>
-        <p:txBody>
-          <a:bodyPr wrap="square" lIns="0" tIns="0" rIns="0" bIns="0" rtlCol="0" anchor="ctr"/>
-          <a:lstStyle/>
-          <a:p>
-            <a:pPr indent="0" marL="0">
-              <a:buNone/>
-            </a:pPr>
-            <a:r>
-              <a:rPr lang="en-US" sz="2000" b="1" dirty="0">
-                <a:solidFill>
-                  <a:srgbClr val="FFFFFF"/>
-                </a:solidFill>
-                <a:latin typeface="Cambria" pitchFamily="34" charset="0"/>
-                <a:ea typeface="Cambria" pitchFamily="34" charset="-122"/>
-                <a:cs typeface="Cambria" pitchFamily="34" charset="-120"/>
-              </a:rPr>
-              <a:t>6</a:t>
-            </a:r>
-            <a:endParaRPr lang="en-US" sz="2000" dirty="0"/>
-          </a:p>
-        </p:txBody>
-      </p:sp>
-      <p:sp>
-        <p:nvSpPr>
-          <p:cNvPr id="28" name="Text 25"/>
-          <p:cNvSpPr txBox="1"/>
-          <p:nvPr/>
-        </p:nvSpPr>
-        <p:spPr>
-          <a:xfrm>
-            <a:off x="10031730" y="3355848"/>
-            <a:ext cx="1471422" cy="777240"/>
-          </a:xfrm>
-          <a:prstGeom prst="rect">
-            <a:avLst/>
-          </a:prstGeom>
-          <a:noFill/>
-          <a:ln/>
-        </p:spPr>
-        <p:txBody>
-          <a:bodyPr wrap="square" lIns="0" tIns="0" rIns="0" bIns="0" rtlCol="0" anchor="ctr"/>
-          <a:lstStyle/>
-          <a:p>
-            <a:pPr indent="0" marL="0">
-              <a:lnSpc>
-                <a:spcPct val="105000"/>
-              </a:lnSpc>
-              <a:buNone/>
-            </a:pPr>
-            <a:r>
-              <a:rPr lang="en-US" sz="1150" b="1" dirty="0">
-                <a:solidFill>
-                  <a:srgbClr val="FFFFFF"/>
-                </a:solidFill>
-                <a:latin typeface="Calibri" pitchFamily="34" charset="0"/>
-                <a:ea typeface="Calibri" pitchFamily="34" charset="-122"/>
-                <a:cs typeface="Calibri" pitchFamily="34" charset="-120"/>
-              </a:rPr>
-              <a:t>Rôles + admin</a:t>
-            </a:r>
-            <a:endParaRPr lang="en-US" sz="1150" dirty="0"/>
-          </a:p>
-        </p:txBody>
-      </p:sp>
-      <p:sp>
-        <p:nvSpPr>
-          <p:cNvPr id="29" name="Text 26"/>
-          <p:cNvSpPr txBox="1"/>
-          <p:nvPr/>
-        </p:nvSpPr>
-        <p:spPr>
-          <a:xfrm>
-            <a:off x="10031730" y="4069080"/>
-            <a:ext cx="1471422" cy="621792"/>
-          </a:xfrm>
-          <a:prstGeom prst="rect">
-            <a:avLst/>
-          </a:prstGeom>
-          <a:noFill/>
-          <a:ln/>
-        </p:spPr>
-        <p:txBody>
-          <a:bodyPr wrap="square" lIns="0" tIns="0" rIns="0" bIns="0" rtlCol="0" anchor="ctr"/>
-          <a:lstStyle/>
-          <a:p>
-            <a:pPr indent="0" marL="0">
-              <a:lnSpc>
-                <a:spcPct val="105000"/>
-              </a:lnSpc>
-              <a:buNone/>
-            </a:pPr>
-            <a:r>
-              <a:rPr lang="en-US" sz="880" dirty="0">
-                <a:solidFill>
-                  <a:srgbClr val="F3E9DA"/>
-                </a:solidFill>
-                <a:latin typeface="Calibri" pitchFamily="34" charset="0"/>
-                <a:ea typeface="Calibri" pitchFamily="34" charset="-122"/>
-                <a:cs typeface="Calibri" pitchFamily="34" charset="-120"/>
-              </a:rPr>
-              <a:t>4 rôles créés, admin initial si configuré</a:t>
-            </a:r>
-            <a:endParaRPr lang="en-US" sz="880" dirty="0"/>
-          </a:p>
-        </p:txBody>
-      </p:sp>
-      <p:sp>
-        <p:nvSpPr>
-          <p:cNvPr id="30" name="Text 27"/>
           <p:cNvSpPr txBox="1"/>
           <p:nvPr/>
         </p:nvSpPr>
@@ -19602,7 +19357,7 @@
       </p:sp>
       <p:sp>
         <p:nvSpPr>
-          <p:cNvPr id="31" name="Text 28"/>
+          <p:cNvPr id="8" name="Text 5"/>
           <p:cNvSpPr txBox="1"/>
           <p:nvPr/>
         </p:nvSpPr>
@@ -21027,7 +20782,7 @@
                 <a:ea typeface="Calibri" pitchFamily="34" charset="-122"/>
                 <a:cs typeface="Calibri" pitchFamily="34" charset="-120"/>
               </a:rPr>
-              <a:t>INITIALISATION</a:t>
+              <a:t>TRAEFIK EN DÉTAIL</a:t>
             </a:r>
             <a:endParaRPr lang="en-US" sz="1100" dirty="0"/>
           </a:p>
@@ -21066,7 +20821,7 @@
                 <a:ea typeface="Cambria" pitchFamily="34" charset="-122"/>
                 <a:cs typeface="Cambria" pitchFamily="34" charset="-120"/>
               </a:rPr>
-              <a:t>Ollama : téléchargement du modèle au premier démarrage</a:t>
+              <a:t>Initialisation — image maison</a:t>
             </a:r>
             <a:endParaRPr lang="en-US" sz="2400" dirty="0"/>
           </a:p>
@@ -21080,7 +20835,7 @@
         </p:nvSpPr>
         <p:spPr>
           <a:xfrm>
-            <a:off x="548640" y="2958084"/>
+            <a:off x="548640" y="2839212"/>
             <a:ext cx="10881360" cy="868680"/>
           </a:xfrm>
           <a:prstGeom prst="rect">
@@ -21112,7 +20867,7 @@
                 <a:ea typeface="Calibri" pitchFamily="34" charset="-122"/>
                 <a:cs typeface="Calibri" pitchFamily="34" charset="-120"/>
               </a:rPr>
-              <a:t>Point d'entrée particulier : le serveur démarre, attend 10 secondes, puis télécharge le modèle s'il n'est pas déjà présent.</a:t>
+              <a:t>Un point d'entrée personnalisé régénère dynamic.yml depuis un gabarit à CHAQUE démarrage, en substituant ${APP_DOMAIN}.</a:t>
             </a:r>
             <a:endParaRPr lang="en-US" sz="1450" dirty="0"/>
           </a:p>
@@ -21136,7 +20891,7 @@
                 <a:ea typeface="Calibri" pitchFamily="34" charset="-122"/>
                 <a:cs typeface="Calibri" pitchFamily="34" charset="-120"/>
               </a:rPr>
-              <a:t>Le modèle reste ensuite en cache dans le volume nommé ollama_data, qui survit à un docker compose down (sans -v).</a:t>
+              <a:t>Le fichier réellement lu par Traefik n'est jamais versionné — reconstruit à chaque redémarrage du conteneur.</a:t>
             </a:r>
             <a:endParaRPr lang="en-US" sz="1450" dirty="0"/>
           </a:p>
@@ -21150,12 +20905,12 @@
         </p:nvSpPr>
         <p:spPr>
           <a:xfrm>
-            <a:off x="548640" y="4082796"/>
-            <a:ext cx="10881360" cy="868680"/>
+            <a:off x="548640" y="3927348"/>
+            <a:ext cx="10881360" cy="1143000"/>
           </a:xfrm>
           <a:prstGeom prst="roundRect">
             <a:avLst>
-              <a:gd name="adj" fmla="val 8421"/>
+              <a:gd name="adj" fmla="val 6400"/>
             </a:avLst>
           </a:prstGeom>
           <a:solidFill>
@@ -21172,7 +20927,7 @@
         </p:nvSpPr>
         <p:spPr>
           <a:xfrm>
-            <a:off x="868680" y="4219956"/>
+            <a:off x="868680" y="4064508"/>
             <a:ext cx="1828800" cy="274320"/>
           </a:xfrm>
           <a:prstGeom prst="rect">
@@ -21211,8 +20966,8 @@
         </p:nvSpPr>
         <p:spPr>
           <a:xfrm>
-            <a:off x="868680" y="4466844"/>
-            <a:ext cx="10241280" cy="411480"/>
+            <a:off x="868680" y="4311396"/>
+            <a:ext cx="10241280" cy="685800"/>
           </a:xfrm>
           <a:prstGeom prst="rect">
             <a:avLst/>
@@ -21239,7 +20994,7 @@
                 <a:ea typeface="Calibri" pitchFamily="34" charset="-122"/>
                 <a:cs typeface="Calibri" pitchFamily="34" charset="-120"/>
               </a:rPr>
-              <a:t>Le tout premier démarrage peut prendre plusieurs minutes (téléchargement de quelques Go) — les démarrages suivants sont quasi instantanés.</a:t>
+              <a:t>Avant, le domaine était écrit en dur ici ET séparément dans .env (CORS, QR codes) — deux copies manuelles, une coquille dans l'une cassait la connexion sans rapport apparent avec la cause. Avec ce gabarit, .env est la seule source.</a:t>
             </a:r>
             <a:endParaRPr lang="en-US" sz="1250" dirty="0"/>
           </a:p>
@@ -21432,7 +21187,7 @@
                 <a:ea typeface="Calibri" pitchFamily="34" charset="-122"/>
                 <a:cs typeface="Calibri" pitchFamily="34" charset="-120"/>
               </a:rPr>
-              <a:t>INITIALISATION</a:t>
+              <a:t>TRAEFIK EN DÉTAIL</a:t>
             </a:r>
             <a:endParaRPr lang="en-US" sz="1100" dirty="0"/>
           </a:p>
@@ -21471,7 +21226,7 @@
                 <a:ea typeface="Cambria" pitchFamily="34" charset="-122"/>
                 <a:cs typeface="Cambria" pitchFamily="34" charset="-120"/>
               </a:rPr>
-              <a:t>Rôles, administrateur initial &amp; migrations</a:t>
+              <a:t>Fournisseur "file", pas "docker"</a:t>
             </a:r>
             <a:endParaRPr lang="en-US" sz="2400" dirty="0"/>
           </a:p>
@@ -21485,8 +21240,8 @@
         </p:nvSpPr>
         <p:spPr>
           <a:xfrm>
-            <a:off x="548640" y="2820924"/>
-            <a:ext cx="10881360" cy="868680"/>
+            <a:off x="548640" y="2976372"/>
+            <a:ext cx="10881360" cy="502920"/>
           </a:xfrm>
           <a:prstGeom prst="rect">
             <a:avLst/>
@@ -21517,31 +21272,7 @@
                 <a:ea typeface="Calibri" pitchFamily="34" charset="-122"/>
                 <a:cs typeface="Calibri" pitchFamily="34" charset="-120"/>
               </a:rPr>
-              <a:t>PostgreSQL attend seulement d'être joignable — c'est "app", à SON PROPRE démarrage, qui applique le schéma (Flyway).</a:t>
-            </a:r>
-            <a:endParaRPr lang="en-US" sz="1450" dirty="0"/>
-          </a:p>
-          <a:p>
-            <a:pPr marL="342900" indent="-342900">
-              <a:lnSpc>
-                <a:spcPct val="115000"/>
-              </a:lnSpc>
-              <a:spcAft>
-                <a:spcPts val="800"/>
-              </a:spcAft>
-              <a:buSzPct val="100000"/>
-              <a:buChar char="•"/>
-            </a:pPr>
-            <a:r>
-              <a:rPr lang="en-US" sz="1450" dirty="0">
-                <a:solidFill>
-                  <a:srgbClr val="2C1A0E"/>
-                </a:solidFill>
-                <a:latin typeface="Calibri" pitchFamily="34" charset="0"/>
-                <a:ea typeface="Calibri" pitchFamily="34" charset="-122"/>
-                <a:cs typeface="Calibri" pitchFamily="34" charset="-120"/>
-              </a:rPr>
-              <a:t>Les 4 rôles sont créés s'ils manquent, puis l'admin initial SI configuré via .env (INITIAL_ADMIN_EMAIL/PASSWORD).</a:t>
+              <a:t>Traefik peut découvrir automatiquement les conteneurs (fournisseur "docker"), ou lire une config statique (fournisseur "file", celui utilisé ici).</a:t>
             </a:r>
             <a:endParaRPr lang="en-US" sz="1450" dirty="0"/>
           </a:p>
@@ -21555,16 +21286,16 @@
         </p:nvSpPr>
         <p:spPr>
           <a:xfrm>
-            <a:off x="548640" y="3945636"/>
-            <a:ext cx="10881360" cy="1143000"/>
+            <a:off x="548640" y="3698748"/>
+            <a:ext cx="10881360" cy="1234440"/>
           </a:xfrm>
           <a:prstGeom prst="roundRect">
             <a:avLst>
-              <a:gd name="adj" fmla="val 6400"/>
+              <a:gd name="adj" fmla="val 5926"/>
             </a:avLst>
           </a:prstGeom>
           <a:solidFill>
-            <a:srgbClr val="F3E9DA"/>
+            <a:srgbClr val="FBE6D6"/>
           </a:solidFill>
           <a:ln/>
         </p:spPr>
@@ -21577,47 +21308,47 @@
         </p:nvSpPr>
         <p:spPr>
           <a:xfrm>
+            <a:off x="868680" y="3835908"/>
+            <a:ext cx="2743200" cy="274320"/>
+          </a:xfrm>
+          <a:prstGeom prst="rect">
+            <a:avLst/>
+          </a:prstGeom>
+          <a:noFill/>
+          <a:ln/>
+        </p:spPr>
+        <p:txBody>
+          <a:bodyPr wrap="square" lIns="0" tIns="0" rIns="0" bIns="0" rtlCol="0" anchor="ctr"/>
+          <a:lstStyle/>
+          <a:p>
+            <a:pPr indent="0" marL="0">
+              <a:buNone/>
+            </a:pPr>
+            <a:r>
+              <a:rPr lang="en-US" sz="1000" b="1" spc="100" kern="0" dirty="0">
+                <a:solidFill>
+                  <a:srgbClr val="A34E12"/>
+                </a:solidFill>
+                <a:latin typeface="Calibri" pitchFamily="34" charset="0"/>
+                <a:ea typeface="Calibri" pitchFamily="34" charset="-122"/>
+                <a:cs typeface="Calibri" pitchFamily="34" charset="-120"/>
+              </a:rPr>
+              <a:t>LIMITE CONNUE</a:t>
+            </a:r>
+            <a:endParaRPr lang="en-US" sz="1000" dirty="0"/>
+          </a:p>
+        </p:txBody>
+      </p:sp>
+      <p:sp>
+        <p:nvSpPr>
+          <p:cNvPr id="9" name="Text 6"/>
+          <p:cNvSpPr txBox="1"/>
+          <p:nvPr/>
+        </p:nvSpPr>
+        <p:spPr>
+          <a:xfrm>
             <a:off x="868680" y="4082796"/>
-            <a:ext cx="1828800" cy="274320"/>
-          </a:xfrm>
-          <a:prstGeom prst="rect">
-            <a:avLst/>
-          </a:prstGeom>
-          <a:noFill/>
-          <a:ln/>
-        </p:spPr>
-        <p:txBody>
-          <a:bodyPr wrap="square" lIns="0" tIns="0" rIns="0" bIns="0" rtlCol="0" anchor="ctr"/>
-          <a:lstStyle/>
-          <a:p>
-            <a:pPr indent="0" marL="0">
-              <a:buNone/>
-            </a:pPr>
-            <a:r>
-              <a:rPr lang="en-US" sz="1000" b="1" spc="100" kern="0" dirty="0">
-                <a:solidFill>
-                  <a:srgbClr val="B5813F"/>
-                </a:solidFill>
-                <a:latin typeface="Calibri" pitchFamily="34" charset="0"/>
-                <a:ea typeface="Calibri" pitchFamily="34" charset="-122"/>
-                <a:cs typeface="Calibri" pitchFamily="34" charset="-120"/>
-              </a:rPr>
-              <a:t>POURQUOI</a:t>
-            </a:r>
-            <a:endParaRPr lang="en-US" sz="1000" dirty="0"/>
-          </a:p>
-        </p:txBody>
-      </p:sp>
-      <p:sp>
-        <p:nvSpPr>
-          <p:cNvPr id="9" name="Text 6"/>
-          <p:cNvSpPr txBox="1"/>
-          <p:nvPr/>
-        </p:nvSpPr>
-        <p:spPr>
-          <a:xfrm>
-            <a:off x="868680" y="4329684"/>
-            <a:ext cx="10241280" cy="685800"/>
+            <a:ext cx="10241280" cy="777240"/>
           </a:xfrm>
           <a:prstGeom prst="rect">
             <a:avLst/>
@@ -21644,7 +21375,7 @@
                 <a:ea typeface="Calibri" pitchFamily="34" charset="-122"/>
                 <a:cs typeface="Calibri" pitchFamily="34" charset="-120"/>
               </a:rPr>
-              <a:t>Sans ces variables, l'application démarre volontairement sans administrateur — un assistant public temporaire (/api/public/setup) prend le relais au premier accès, et se referme définitivement dès qu'un admin existe.</a:t>
+              <a:t>Le fournisseur "docker" a été essayé et abandonné : incompatible avec Docker Desktop en développement (400 Bad Request) — jamais retesté sur un vrai hôte Linux de production. Le fournisseur "file" actuel fonctionne mais sa configuration est STATIQUE : éditer et recharger le gabarit à la main pour tout changement de topologie.</a:t>
             </a:r>
             <a:endParaRPr lang="en-US" sz="1250" dirty="0"/>
           </a:p>
@@ -21837,7 +21568,7 @@
                 <a:ea typeface="Calibri" pitchFamily="34" charset="-122"/>
                 <a:cs typeface="Calibri" pitchFamily="34" charset="-120"/>
               </a:rPr>
-              <a:t>INITIALISATION</a:t>
+              <a:t>TRAEFIK EN DÉTAIL</a:t>
             </a:r>
             <a:endParaRPr lang="en-US" sz="1100" dirty="0"/>
           </a:p>
@@ -21876,7 +21607,7 @@
                 <a:ea typeface="Cambria" pitchFamily="34" charset="-122"/>
                 <a:cs typeface="Cambria" pitchFamily="34" charset="-120"/>
               </a:rPr>
-              <a:t>MinIO et Meilisearch : pas d'étape d'initialisation séparée</a:t>
+              <a:t>Règles de routage actuelles</a:t>
             </a:r>
             <a:endParaRPr lang="en-US" sz="2400" dirty="0"/>
           </a:p>
@@ -21890,8 +21621,8 @@
         </p:nvSpPr>
         <p:spPr>
           <a:xfrm>
-            <a:off x="548640" y="3520440"/>
-            <a:ext cx="10881360" cy="868680"/>
+            <a:off x="548640" y="3246120"/>
+            <a:ext cx="10881360" cy="1417320"/>
           </a:xfrm>
           <a:prstGeom prst="rect">
             <a:avLst/>
@@ -21922,7 +21653,7 @@
                 <a:ea typeface="Calibri" pitchFamily="34" charset="-122"/>
                 <a:cs typeface="Calibri" pitchFamily="34" charset="-120"/>
               </a:rPr>
-              <a:t>Le bucket MinIO est vérifié — et créé s'il manque — à chaque appel du client, pas une fois au démarrage.</a:t>
+              <a:t>Un seul domaine public, routage par chemin : /api/* → app (priorité 10), tout le reste → frontend (priorité 1).</a:t>
             </a:r>
             <a:endParaRPr lang="en-US" sz="1450" dirty="0"/>
           </a:p>
@@ -21946,7 +21677,31 @@
                 <a:ea typeface="Calibri" pitchFamily="34" charset="-122"/>
                 <a:cs typeface="Calibri" pitchFamily="34" charset="-120"/>
               </a:rPr>
-              <a:t>L'index Meilisearch se remplit au fil des archivages, ou par une resynchronisation manuelle (ADMIN) s'il doit être reconstruit.</a:t>
+              <a:t>Deux routeurs de secours (règle !Host(...)) pour accéder depuis un autre appareil du réseau local sans DNS.</a:t>
+            </a:r>
+            <a:endParaRPr lang="en-US" sz="1450" dirty="0"/>
+          </a:p>
+          <a:p>
+            <a:pPr marL="342900" indent="-342900">
+              <a:lnSpc>
+                <a:spcPct val="115000"/>
+              </a:lnSpc>
+              <a:spcAft>
+                <a:spcPts val="800"/>
+              </a:spcAft>
+              <a:buSzPct val="100000"/>
+              <a:buChar char="•"/>
+            </a:pPr>
+            <a:r>
+              <a:rPr lang="en-US" sz="1450" dirty="0">
+                <a:solidFill>
+                  <a:srgbClr val="2C1A0E"/>
+                </a:solidFill>
+                <a:latin typeface="Calibri" pitchFamily="34" charset="0"/>
+                <a:ea typeface="Calibri" pitchFamily="34" charset="-122"/>
+                <a:cs typeface="Calibri" pitchFamily="34" charset="-120"/>
+              </a:rPr>
+              <a:t>Certificat : mkcert en développement, Let's Encrypt dès qu'un vrai domaine public est configuré — même fichier.</a:t>
             </a:r>
             <a:endParaRPr lang="en-US" sz="1450" dirty="0"/>
           </a:p>
@@ -22139,7 +21894,7 @@
                 <a:ea typeface="Calibri" pitchFamily="34" charset="-122"/>
                 <a:cs typeface="Calibri" pitchFamily="34" charset="-120"/>
               </a:rPr>
-              <a:t>MISE À L'ÉCHELLE</a:t>
+              <a:t>TRAEFIK EN DÉTAIL</a:t>
             </a:r>
             <a:endParaRPr lang="en-US" sz="1100" dirty="0"/>
           </a:p>
@@ -22178,7 +21933,7 @@
                 <a:ea typeface="Cambria" pitchFamily="34" charset="-122"/>
                 <a:cs typeface="Cambria" pitchFamily="34" charset="-120"/>
               </a:rPr>
-              <a:t>Plusieurs instances de l'API (app)</a:t>
+              <a:t>Concrètement : plusieurs instances de "app"</a:t>
             </a:r>
             <a:endParaRPr lang="en-US" sz="2400" dirty="0"/>
           </a:p>
@@ -22192,8 +21947,8 @@
         </p:nvSpPr>
         <p:spPr>
           <a:xfrm>
-            <a:off x="548640" y="2775204"/>
-            <a:ext cx="10881360" cy="868680"/>
+            <a:off x="548640" y="1961388"/>
+            <a:ext cx="10881360" cy="502920"/>
           </a:xfrm>
           <a:prstGeom prst="rect">
             <a:avLst/>
@@ -22224,31 +21979,7 @@
                 <a:ea typeface="Calibri" pitchFamily="34" charset="-122"/>
                 <a:cs typeface="Calibri" pitchFamily="34" charset="-120"/>
               </a:rPr>
-              <a:t>Déjà centralisé et prêt : PostgreSQL, MinIO, Meilisearch, Redis, le volume HSM — une 2e instance y accède exactement comme la première.</a:t>
-            </a:r>
-            <a:endParaRPr lang="en-US" sz="1450" dirty="0"/>
-          </a:p>
-          <a:p>
-            <a:pPr marL="342900" indent="-342900">
-              <a:lnSpc>
-                <a:spcPct val="115000"/>
-              </a:lnSpc>
-              <a:spcAft>
-                <a:spcPts val="800"/>
-              </a:spcAft>
-              <a:buSzPct val="100000"/>
-              <a:buChar char="•"/>
-            </a:pPr>
-            <a:r>
-              <a:rPr lang="en-US" sz="1450" dirty="0">
-                <a:solidFill>
-                  <a:srgbClr val="2C1A0E"/>
-                </a:solidFill>
-                <a:latin typeface="Calibri" pitchFamily="34" charset="0"/>
-                <a:ea typeface="Calibri" pitchFamily="34" charset="-122"/>
-                <a:cs typeface="Calibri" pitchFamily="34" charset="-120"/>
-              </a:rPr>
-              <a:t>Le cache d'authentification est déjà dans Redis, pas en mémoire locale — un utilisateur peut changer d'instance sans se reconnecter.</a:t>
+              <a:t>La liste des serveurs derrière "app" ne contient qu'une adresse aujourd'hui — ajouter des réplicas revient à en lister plusieurs :</a:t>
             </a:r>
             <a:endParaRPr lang="en-US" sz="1450" dirty="0"/>
           </a:p>
@@ -22262,7 +21993,171 @@
         </p:nvSpPr>
         <p:spPr>
           <a:xfrm>
-            <a:off x="548640" y="3899916"/>
+            <a:off x="548640" y="2683764"/>
+            <a:ext cx="10881360" cy="1810512"/>
+          </a:xfrm>
+          <a:prstGeom prst="roundRect">
+            <a:avLst>
+              <a:gd name="adj" fmla="val 4040"/>
+            </a:avLst>
+          </a:prstGeom>
+          <a:solidFill>
+            <a:srgbClr val="2C1A0E"/>
+          </a:solidFill>
+          <a:ln/>
+        </p:spPr>
+      </p:sp>
+      <p:sp>
+        <p:nvSpPr>
+          <p:cNvPr id="8" name="Text 5"/>
+          <p:cNvSpPr txBox="1"/>
+          <p:nvPr/>
+        </p:nvSpPr>
+        <p:spPr>
+          <a:xfrm>
+            <a:off x="777240" y="2820924"/>
+            <a:ext cx="10424160" cy="1536192"/>
+          </a:xfrm>
+          <a:prstGeom prst="rect">
+            <a:avLst/>
+          </a:prstGeom>
+          <a:noFill/>
+          <a:ln/>
+        </p:spPr>
+        <p:txBody>
+          <a:bodyPr wrap="square" lIns="0" tIns="0" rIns="0" bIns="0" rtlCol="0" anchor="ctr"/>
+          <a:lstStyle/>
+          <a:p>
+            <a:pPr indent="0" marL="0">
+              <a:lnSpc>
+                <a:spcPct val="110000"/>
+              </a:lnSpc>
+              <a:buNone/>
+            </a:pPr>
+            <a:r>
+              <a:rPr lang="en-US" sz="1150" dirty="0">
+                <a:solidFill>
+                  <a:srgbClr val="D9AE6C"/>
+                </a:solidFill>
+                <a:latin typeface="Courier New" pitchFamily="34" charset="0"/>
+                <a:ea typeface="Courier New" pitchFamily="34" charset="-122"/>
+                <a:cs typeface="Courier New" pitchFamily="34" charset="-120"/>
+              </a:rPr>
+              <a:t>services:</a:t>
+            </a:r>
+            <a:endParaRPr lang="en-US" sz="1150" dirty="0"/>
+          </a:p>
+          <a:p>
+            <a:pPr indent="0" marL="0">
+              <a:lnSpc>
+                <a:spcPct val="110000"/>
+              </a:lnSpc>
+              <a:buNone/>
+            </a:pPr>
+            <a:r>
+              <a:rPr lang="en-US" sz="1150" dirty="0">
+                <a:solidFill>
+                  <a:srgbClr val="F3E9DA"/>
+                </a:solidFill>
+                <a:latin typeface="Courier New" pitchFamily="34" charset="0"/>
+                <a:ea typeface="Courier New" pitchFamily="34" charset="-122"/>
+                <a:cs typeface="Courier New" pitchFamily="34" charset="-120"/>
+              </a:rPr>
+              <a:t>  app:</a:t>
+            </a:r>
+            <a:endParaRPr lang="en-US" sz="1150" dirty="0"/>
+          </a:p>
+          <a:p>
+            <a:pPr indent="0" marL="0">
+              <a:lnSpc>
+                <a:spcPct val="110000"/>
+              </a:lnSpc>
+              <a:buNone/>
+            </a:pPr>
+            <a:r>
+              <a:rPr lang="en-US" sz="1150" dirty="0">
+                <a:solidFill>
+                  <a:srgbClr val="F3E9DA"/>
+                </a:solidFill>
+                <a:latin typeface="Courier New" pitchFamily="34" charset="0"/>
+                <a:ea typeface="Courier New" pitchFamily="34" charset="-122"/>
+                <a:cs typeface="Courier New" pitchFamily="34" charset="-120"/>
+              </a:rPr>
+              <a:t>    loadBalancer:</a:t>
+            </a:r>
+            <a:endParaRPr lang="en-US" sz="1150" dirty="0"/>
+          </a:p>
+          <a:p>
+            <a:pPr indent="0" marL="0">
+              <a:lnSpc>
+                <a:spcPct val="110000"/>
+              </a:lnSpc>
+              <a:buNone/>
+            </a:pPr>
+            <a:r>
+              <a:rPr lang="en-US" sz="1150" dirty="0">
+                <a:solidFill>
+                  <a:srgbClr val="F3E9DA"/>
+                </a:solidFill>
+                <a:latin typeface="Courier New" pitchFamily="34" charset="0"/>
+                <a:ea typeface="Courier New" pitchFamily="34" charset="-122"/>
+                <a:cs typeface="Courier New" pitchFamily="34" charset="-120"/>
+              </a:rPr>
+              <a:t>      servers:</a:t>
+            </a:r>
+            <a:endParaRPr lang="en-US" sz="1150" dirty="0"/>
+          </a:p>
+          <a:p>
+            <a:pPr indent="0" marL="0">
+              <a:lnSpc>
+                <a:spcPct val="110000"/>
+              </a:lnSpc>
+              <a:buNone/>
+            </a:pPr>
+            <a:r>
+              <a:rPr lang="en-US" sz="1150" dirty="0">
+                <a:solidFill>
+                  <a:srgbClr val="F3E9DA"/>
+                </a:solidFill>
+                <a:latin typeface="Courier New" pitchFamily="34" charset="0"/>
+                <a:ea typeface="Courier New" pitchFamily="34" charset="-122"/>
+                <a:cs typeface="Courier New" pitchFamily="34" charset="-120"/>
+              </a:rPr>
+              <a:t>        - url: "http://app:8080"</a:t>
+            </a:r>
+            <a:endParaRPr lang="en-US" sz="1150" dirty="0"/>
+          </a:p>
+          <a:p>
+            <a:pPr indent="0" marL="0">
+              <a:lnSpc>
+                <a:spcPct val="110000"/>
+              </a:lnSpc>
+              <a:buNone/>
+            </a:pPr>
+            <a:r>
+              <a:rPr lang="en-US" sz="1150" dirty="0">
+                <a:solidFill>
+                  <a:srgbClr val="F3E9DA"/>
+                </a:solidFill>
+                <a:latin typeface="Courier New" pitchFamily="34" charset="0"/>
+                <a:ea typeface="Courier New" pitchFamily="34" charset="-122"/>
+                <a:cs typeface="Courier New" pitchFamily="34" charset="-120"/>
+              </a:rPr>
+              <a:t>        - url: "http://app-2:8080"</a:t>
+            </a:r>
+            <a:endParaRPr lang="en-US" sz="1150" dirty="0"/>
+          </a:p>
+        </p:txBody>
+      </p:sp>
+      <p:sp>
+        <p:nvSpPr>
+          <p:cNvPr id="9" name="Shape 6"/>
+          <p:cNvSpPr/>
+          <p:nvPr/>
+        </p:nvSpPr>
+        <p:spPr>
+          <a:xfrm>
+            <a:off x="548640" y="4713732"/>
             <a:ext cx="10881360" cy="1234440"/>
           </a:xfrm>
           <a:prstGeom prst="roundRect">
@@ -22278,13 +22173,13 @@
       </p:sp>
       <p:sp>
         <p:nvSpPr>
-          <p:cNvPr id="8" name="Text 5"/>
-          <p:cNvSpPr txBox="1"/>
-          <p:nvPr/>
-        </p:nvSpPr>
-        <p:spPr>
-          <a:xfrm>
-            <a:off x="868680" y="4037076"/>
+          <p:cNvPr id="10" name="Text 7"/>
+          <p:cNvSpPr txBox="1"/>
+          <p:nvPr/>
+        </p:nvSpPr>
+        <p:spPr>
+          <a:xfrm>
+            <a:off x="868680" y="4850892"/>
             <a:ext cx="2743200" cy="274320"/>
           </a:xfrm>
           <a:prstGeom prst="rect">
@@ -22317,13 +22212,13 @@
       </p:sp>
       <p:sp>
         <p:nvSpPr>
-          <p:cNvPr id="9" name="Text 6"/>
-          <p:cNvSpPr txBox="1"/>
-          <p:nvPr/>
-        </p:nvSpPr>
-        <p:spPr>
-          <a:xfrm>
-            <a:off x="868680" y="4283964"/>
+          <p:cNvPr id="11" name="Text 8"/>
+          <p:cNvSpPr txBox="1"/>
+          <p:nvPr/>
+        </p:nvSpPr>
+        <p:spPr>
+          <a:xfrm>
+            <a:off x="868680" y="5097780"/>
             <a:ext cx="10241280" cy="777240"/>
           </a:xfrm>
           <a:prstGeom prst="rect">
@@ -22351,7 +22246,7 @@
                 <a:ea typeface="Calibri" pitchFamily="34" charset="-122"/>
                 <a:cs typeface="Calibri" pitchFamily="34" charset="-120"/>
               </a:rPr>
-              <a:t>OcrSessionCache (sessions Phase 1 → Phase 2) vit en mémoire du process Java, propre à CHAQUE instance. Si la Phase 2 atterrit sur une autre instance que la Phase 1, l'archivage échoue avec "session introuvable" — à migrer vers Redis avant toute mise à l'échelle, pas hypothétique.</a:t>
+              <a:t>Liste STATIQUE — chaque URL doit résoudre vers un conteneur réellement joignable (un bloc de service distinct par réplica, ou un fournisseur Docker natif pour une vraie découverte automatique). Ajouter/retirer une instance veut dire éditer ce gabarit et relancer Traefik.</a:t>
             </a:r>
             <a:endParaRPr lang="en-US" sz="1250" dirty="0"/>
           </a:p>
@@ -22359,7 +22254,7 @@
       </p:sp>
       <p:sp>
         <p:nvSpPr>
-          <p:cNvPr id="10" name="Text 7"/>
+          <p:cNvPr id="12" name="Text 9"/>
           <p:cNvSpPr txBox="1"/>
           <p:nvPr/>
         </p:nvSpPr>
@@ -22398,7 +22293,7 @@
       </p:sp>
       <p:sp>
         <p:nvSpPr>
-          <p:cNvPr id="11" name="Text 8"/>
+          <p:cNvPr id="13" name="Text 10"/>
           <p:cNvSpPr txBox="1"/>
           <p:nvPr/>
         </p:nvSpPr>
@@ -22544,7 +22439,7 @@
                 <a:ea typeface="Calibri" pitchFamily="34" charset="-122"/>
                 <a:cs typeface="Calibri" pitchFamily="34" charset="-120"/>
               </a:rPr>
-              <a:t>MISE À L'ÉCHELLE</a:t>
+              <a:t>TRAEFIK EN DÉTAIL</a:t>
             </a:r>
             <a:endParaRPr lang="en-US" sz="1100" dirty="0"/>
           </a:p>
@@ -22583,7 +22478,7 @@
                 <a:ea typeface="Cambria" pitchFamily="34" charset="-122"/>
                 <a:cs typeface="Cambria" pitchFamily="34" charset="-120"/>
               </a:rPr>
-              <a:t>Plusieurs instances de app — côté déploiement</a:t>
+              <a:t>Concrètement : plusieurs instances d'Ollama (Qwen)</a:t>
             </a:r>
             <a:endParaRPr lang="en-US" sz="2400" dirty="0"/>
           </a:p>
@@ -22597,8 +22492,8 @@
         </p:nvSpPr>
         <p:spPr>
           <a:xfrm>
-            <a:off x="548640" y="3246120"/>
-            <a:ext cx="10881360" cy="1417320"/>
+            <a:off x="548640" y="2007108"/>
+            <a:ext cx="10881360" cy="502920"/>
           </a:xfrm>
           <a:prstGeom prst="rect">
             <a:avLst/>
@@ -22629,23 +22524,266 @@
                 <a:ea typeface="Calibri" pitchFamily="34" charset="-122"/>
                 <a:cs typeface="Calibri" pitchFamily="34" charset="-120"/>
               </a:rPr>
-              <a:t>container_name fixe sur "app" empêche nativement docker compose --scale — à retirer en premier.</a:t>
+              <a:t>Même mécanisme, pour un service INTERNE (jamais exposé publiquement) — puis OLLAMA_BASE_URL pointe vers ce point d'entrée unique :</a:t>
             </a:r>
             <a:endParaRPr lang="en-US" sz="1450" dirty="0"/>
           </a:p>
-          <a:p>
-            <a:pPr marL="342900" indent="-342900">
+        </p:txBody>
+      </p:sp>
+      <p:sp>
+        <p:nvSpPr>
+          <p:cNvPr id="7" name="Shape 4"/>
+          <p:cNvSpPr/>
+          <p:nvPr/>
+        </p:nvSpPr>
+        <p:spPr>
+          <a:xfrm>
+            <a:off x="548640" y="2729484"/>
+            <a:ext cx="10881360" cy="1810512"/>
+          </a:xfrm>
+          <a:prstGeom prst="roundRect">
+            <a:avLst>
+              <a:gd name="adj" fmla="val 4040"/>
+            </a:avLst>
+          </a:prstGeom>
+          <a:solidFill>
+            <a:srgbClr val="2C1A0E"/>
+          </a:solidFill>
+          <a:ln/>
+        </p:spPr>
+      </p:sp>
+      <p:sp>
+        <p:nvSpPr>
+          <p:cNvPr id="8" name="Text 5"/>
+          <p:cNvSpPr txBox="1"/>
+          <p:nvPr/>
+        </p:nvSpPr>
+        <p:spPr>
+          <a:xfrm>
+            <a:off x="777240" y="2866644"/>
+            <a:ext cx="10424160" cy="1536192"/>
+          </a:xfrm>
+          <a:prstGeom prst="rect">
+            <a:avLst/>
+          </a:prstGeom>
+          <a:noFill/>
+          <a:ln/>
+        </p:spPr>
+        <p:txBody>
+          <a:bodyPr wrap="square" lIns="0" tIns="0" rIns="0" bIns="0" rtlCol="0" anchor="ctr"/>
+          <a:lstStyle/>
+          <a:p>
+            <a:pPr indent="0" marL="0">
               <a:lnSpc>
-                <a:spcPct val="115000"/>
+                <a:spcPct val="110000"/>
               </a:lnSpc>
-              <a:spcAft>
-                <a:spcPts val="800"/>
-              </a:spcAft>
-              <a:buSzPct val="100000"/>
-              <a:buChar char="•"/>
-            </a:pPr>
-            <a:r>
-              <a:rPr lang="en-US" sz="1450" dirty="0">
+              <a:buNone/>
+            </a:pPr>
+            <a:r>
+              <a:rPr lang="en-US" sz="1150" dirty="0">
+                <a:solidFill>
+                  <a:srgbClr val="D9AE6C"/>
+                </a:solidFill>
+                <a:latin typeface="Courier New" pitchFamily="34" charset="0"/>
+                <a:ea typeface="Courier New" pitchFamily="34" charset="-122"/>
+                <a:cs typeface="Courier New" pitchFamily="34" charset="-120"/>
+              </a:rPr>
+              <a:t>services:</a:t>
+            </a:r>
+            <a:endParaRPr lang="en-US" sz="1150" dirty="0"/>
+          </a:p>
+          <a:p>
+            <a:pPr indent="0" marL="0">
+              <a:lnSpc>
+                <a:spcPct val="110000"/>
+              </a:lnSpc>
+              <a:buNone/>
+            </a:pPr>
+            <a:r>
+              <a:rPr lang="en-US" sz="1150" dirty="0">
+                <a:solidFill>
+                  <a:srgbClr val="F3E9DA"/>
+                </a:solidFill>
+                <a:latin typeface="Courier New" pitchFamily="34" charset="0"/>
+                <a:ea typeface="Courier New" pitchFamily="34" charset="-122"/>
+                <a:cs typeface="Courier New" pitchFamily="34" charset="-120"/>
+              </a:rPr>
+              <a:t>  ollama:</a:t>
+            </a:r>
+            <a:endParaRPr lang="en-US" sz="1150" dirty="0"/>
+          </a:p>
+          <a:p>
+            <a:pPr indent="0" marL="0">
+              <a:lnSpc>
+                <a:spcPct val="110000"/>
+              </a:lnSpc>
+              <a:buNone/>
+            </a:pPr>
+            <a:r>
+              <a:rPr lang="en-US" sz="1150" dirty="0">
+                <a:solidFill>
+                  <a:srgbClr val="F3E9DA"/>
+                </a:solidFill>
+                <a:latin typeface="Courier New" pitchFamily="34" charset="0"/>
+                <a:ea typeface="Courier New" pitchFamily="34" charset="-122"/>
+                <a:cs typeface="Courier New" pitchFamily="34" charset="-120"/>
+              </a:rPr>
+              <a:t>    loadBalancer:</a:t>
+            </a:r>
+            <a:endParaRPr lang="en-US" sz="1150" dirty="0"/>
+          </a:p>
+          <a:p>
+            <a:pPr indent="0" marL="0">
+              <a:lnSpc>
+                <a:spcPct val="110000"/>
+              </a:lnSpc>
+              <a:buNone/>
+            </a:pPr>
+            <a:r>
+              <a:rPr lang="en-US" sz="1150" dirty="0">
+                <a:solidFill>
+                  <a:srgbClr val="F3E9DA"/>
+                </a:solidFill>
+                <a:latin typeface="Courier New" pitchFamily="34" charset="0"/>
+                <a:ea typeface="Courier New" pitchFamily="34" charset="-122"/>
+                <a:cs typeface="Courier New" pitchFamily="34" charset="-120"/>
+              </a:rPr>
+              <a:t>      servers:</a:t>
+            </a:r>
+            <a:endParaRPr lang="en-US" sz="1150" dirty="0"/>
+          </a:p>
+          <a:p>
+            <a:pPr indent="0" marL="0">
+              <a:lnSpc>
+                <a:spcPct val="110000"/>
+              </a:lnSpc>
+              <a:buNone/>
+            </a:pPr>
+            <a:r>
+              <a:rPr lang="en-US" sz="1150" dirty="0">
+                <a:solidFill>
+                  <a:srgbClr val="F3E9DA"/>
+                </a:solidFill>
+                <a:latin typeface="Courier New" pitchFamily="34" charset="0"/>
+                <a:ea typeface="Courier New" pitchFamily="34" charset="-122"/>
+                <a:cs typeface="Courier New" pitchFamily="34" charset="-120"/>
+              </a:rPr>
+              <a:t>        - url: "http://ollama:11434"</a:t>
+            </a:r>
+            <a:endParaRPr lang="en-US" sz="1150" dirty="0"/>
+          </a:p>
+          <a:p>
+            <a:pPr indent="0" marL="0">
+              <a:lnSpc>
+                <a:spcPct val="110000"/>
+              </a:lnSpc>
+              <a:buNone/>
+            </a:pPr>
+            <a:r>
+              <a:rPr lang="en-US" sz="1150" dirty="0">
+                <a:solidFill>
+                  <a:srgbClr val="F3E9DA"/>
+                </a:solidFill>
+                <a:latin typeface="Courier New" pitchFamily="34" charset="0"/>
+                <a:ea typeface="Courier New" pitchFamily="34" charset="-122"/>
+                <a:cs typeface="Courier New" pitchFamily="34" charset="-120"/>
+              </a:rPr>
+              <a:t>        - url: "http://ollama-2:11434"</a:t>
+            </a:r>
+            <a:endParaRPr lang="en-US" sz="1150" dirty="0"/>
+          </a:p>
+        </p:txBody>
+      </p:sp>
+      <p:sp>
+        <p:nvSpPr>
+          <p:cNvPr id="9" name="Shape 6"/>
+          <p:cNvSpPr/>
+          <p:nvPr/>
+        </p:nvSpPr>
+        <p:spPr>
+          <a:xfrm>
+            <a:off x="548640" y="4759452"/>
+            <a:ext cx="10881360" cy="1143000"/>
+          </a:xfrm>
+          <a:prstGeom prst="roundRect">
+            <a:avLst>
+              <a:gd name="adj" fmla="val 6400"/>
+            </a:avLst>
+          </a:prstGeom>
+          <a:solidFill>
+            <a:srgbClr val="F3E9DA"/>
+          </a:solidFill>
+          <a:ln/>
+        </p:spPr>
+      </p:sp>
+      <p:sp>
+        <p:nvSpPr>
+          <p:cNvPr id="10" name="Text 7"/>
+          <p:cNvSpPr txBox="1"/>
+          <p:nvPr/>
+        </p:nvSpPr>
+        <p:spPr>
+          <a:xfrm>
+            <a:off x="868680" y="4896612"/>
+            <a:ext cx="1828800" cy="274320"/>
+          </a:xfrm>
+          <a:prstGeom prst="rect">
+            <a:avLst/>
+          </a:prstGeom>
+          <a:noFill/>
+          <a:ln/>
+        </p:spPr>
+        <p:txBody>
+          <a:bodyPr wrap="square" lIns="0" tIns="0" rIns="0" bIns="0" rtlCol="0" anchor="ctr"/>
+          <a:lstStyle/>
+          <a:p>
+            <a:pPr indent="0" marL="0">
+              <a:buNone/>
+            </a:pPr>
+            <a:r>
+              <a:rPr lang="en-US" sz="1000" b="1" spc="100" kern="0" dirty="0">
+                <a:solidFill>
+                  <a:srgbClr val="B5813F"/>
+                </a:solidFill>
+                <a:latin typeface="Calibri" pitchFamily="34" charset="0"/>
+                <a:ea typeface="Calibri" pitchFamily="34" charset="-122"/>
+                <a:cs typeface="Calibri" pitchFamily="34" charset="-120"/>
+              </a:rPr>
+              <a:t>POURQUOI</a:t>
+            </a:r>
+            <a:endParaRPr lang="en-US" sz="1000" dirty="0"/>
+          </a:p>
+        </p:txBody>
+      </p:sp>
+      <p:sp>
+        <p:nvSpPr>
+          <p:cNvPr id="11" name="Text 8"/>
+          <p:cNvSpPr txBox="1"/>
+          <p:nvPr/>
+        </p:nvSpPr>
+        <p:spPr>
+          <a:xfrm>
+            <a:off x="868680" y="5143500"/>
+            <a:ext cx="10241280" cy="685800"/>
+          </a:xfrm>
+          <a:prstGeom prst="rect">
+            <a:avLst/>
+          </a:prstGeom>
+          <a:noFill/>
+          <a:ln/>
+        </p:spPr>
+        <p:txBody>
+          <a:bodyPr wrap="square" lIns="0" tIns="0" rIns="0" bIns="0" rtlCol="0" anchor="ctr"/>
+          <a:lstStyle/>
+          <a:p>
+            <a:pPr indent="0" marL="0">
+              <a:lnSpc>
+                <a:spcPct val="110000"/>
+              </a:lnSpc>
+              <a:buNone/>
+            </a:pPr>
+            <a:r>
+              <a:rPr lang="en-US" sz="1250" dirty="0">
                 <a:solidFill>
                   <a:srgbClr val="2C1A0E"/>
                 </a:solidFill>
@@ -22653,39 +22791,15 @@
                 <a:ea typeface="Calibri" pitchFamily="34" charset="-122"/>
                 <a:cs typeface="Calibri" pitchFamily="34" charset="-120"/>
               </a:rPr>
-              <a:t>Traefik doit ensuite connaître les réplicas : plusieurs adresses dans dynamic.yml.template, ou son fournisseur Docker natif.</a:t>
-            </a:r>
-            <a:endParaRPr lang="en-US" sz="1450" dirty="0"/>
-          </a:p>
-          <a:p>
-            <a:pPr marL="342900" indent="-342900">
-              <a:lnSpc>
-                <a:spcPct val="115000"/>
-              </a:lnSpc>
-              <a:spcAft>
-                <a:spcPts val="800"/>
-              </a:spcAft>
-              <a:buSzPct val="100000"/>
-              <a:buChar char="•"/>
-            </a:pPr>
-            <a:r>
-              <a:rPr lang="en-US" sz="1450" dirty="0">
-                <a:solidFill>
-                  <a:srgbClr val="2C1A0E"/>
-                </a:solidFill>
-                <a:latin typeface="Calibri" pitchFamily="34" charset="0"/>
-                <a:ea typeface="Calibri" pitchFamily="34" charset="-122"/>
-                <a:cs typeface="Calibri" pitchFamily="34" charset="-120"/>
-              </a:rPr>
-              <a:t>Le fournisseur Docker natif a déjà été essayé et abandonné (incompatible avec Docker Desktop en dev) — jamais retesté sur un vrai hôte Linux de production.</a:t>
-            </a:r>
-            <a:endParaRPr lang="en-US" sz="1450" dirty="0"/>
-          </a:p>
-        </p:txBody>
-      </p:sp>
-      <p:sp>
-        <p:nvSpPr>
-          <p:cNvPr id="7" name="Text 4"/>
+              <a:t>Probablement pas nécessaire : ce modèle n'est appelé qu'une fois PAR TYPE de document. OLLAMA_NUM_PARALLEL absorbe généralement plusieurs requêtes de front avant qu'il soit utile de dupliquer le conteneur. Aucun changement de code Java dans les deux cas.</a:t>
+            </a:r>
+            <a:endParaRPr lang="en-US" sz="1250" dirty="0"/>
+          </a:p>
+        </p:txBody>
+      </p:sp>
+      <p:sp>
+        <p:nvSpPr>
+          <p:cNvPr id="12" name="Text 9"/>
           <p:cNvSpPr txBox="1"/>
           <p:nvPr/>
         </p:nvSpPr>
@@ -22724,7 +22838,7 @@
       </p:sp>
       <p:sp>
         <p:nvSpPr>
-          <p:cNvPr id="8" name="Text 5"/>
+          <p:cNvPr id="13" name="Text 10"/>
           <p:cNvSpPr txBox="1"/>
           <p:nvPr/>
         </p:nvSpPr>
@@ -22802,7 +22916,7 @@
         <p:spPr>
           <a:xfrm>
             <a:off x="548640" y="502920"/>
-            <a:ext cx="502920" cy="502920"/>
+            <a:ext cx="566928" cy="566928"/>
           </a:xfrm>
           <a:prstGeom prst="ellipse">
             <a:avLst/>
@@ -22829,8 +22943,8 @@
         </p:blipFill>
         <p:spPr>
           <a:xfrm>
-            <a:off x="608990" y="563270"/>
-            <a:ext cx="382219" cy="382219"/>
+            <a:off x="616671" y="570951"/>
+            <a:ext cx="430865" cy="430865"/>
           </a:xfrm>
           <a:prstGeom prst="rect">
             <a:avLst/>
@@ -22845,8 +22959,8 @@
         </p:nvSpPr>
         <p:spPr>
           <a:xfrm>
-            <a:off x="1170432" y="457200"/>
-            <a:ext cx="8229600" cy="274320"/>
+            <a:off x="1234440" y="475488"/>
+            <a:ext cx="9601200" cy="640080"/>
           </a:xfrm>
           <a:prstGeom prst="rect">
             <a:avLst/>
@@ -22862,46 +22976,7 @@
               <a:buNone/>
             </a:pPr>
             <a:r>
-              <a:rPr lang="en-US" sz="1100" spc="150" kern="0" dirty="0">
-                <a:solidFill>
-                  <a:srgbClr val="B5813F"/>
-                </a:solidFill>
-                <a:latin typeface="Calibri" pitchFamily="34" charset="0"/>
-                <a:ea typeface="Calibri" pitchFamily="34" charset="-122"/>
-                <a:cs typeface="Calibri" pitchFamily="34" charset="-120"/>
-              </a:rPr>
-              <a:t>MISE À L'ÉCHELLE</a:t>
-            </a:r>
-            <a:endParaRPr lang="en-US" sz="1100" dirty="0"/>
-          </a:p>
-        </p:txBody>
-      </p:sp>
-      <p:sp>
-        <p:nvSpPr>
-          <p:cNvPr id="5" name="Text 2"/>
-          <p:cNvSpPr txBox="1"/>
-          <p:nvPr/>
-        </p:nvSpPr>
-        <p:spPr>
-          <a:xfrm>
-            <a:off x="1152144" y="713232"/>
-            <a:ext cx="9692640" cy="594360"/>
-          </a:xfrm>
-          <a:prstGeom prst="rect">
-            <a:avLst/>
-          </a:prstGeom>
-          <a:noFill/>
-          <a:ln/>
-        </p:spPr>
-        <p:txBody>
-          <a:bodyPr wrap="square" lIns="0" tIns="0" rIns="0" bIns="0" rtlCol="0" anchor="ctr"/>
-          <a:lstStyle/>
-          <a:p>
-            <a:pPr indent="0" marL="0">
-              <a:buNone/>
-            </a:pPr>
-            <a:r>
-              <a:rPr lang="en-US" sz="2400" b="1" dirty="0">
+              <a:rPr lang="en-US" sz="2800" b="1" dirty="0">
                 <a:solidFill>
                   <a:srgbClr val="2C1A0E"/>
                 </a:solidFill>
@@ -22909,72 +22984,68 @@
                 <a:ea typeface="Cambria" pitchFamily="34" charset="-122"/>
                 <a:cs typeface="Cambria" pitchFamily="34" charset="-120"/>
               </a:rPr>
-              <a:t>Plusieurs instances d'Ollama (Qwen)</a:t>
-            </a:r>
-            <a:endParaRPr lang="en-US" sz="2400" dirty="0"/>
-          </a:p>
-        </p:txBody>
-      </p:sp>
-      <p:sp>
-        <p:nvSpPr>
-          <p:cNvPr id="6" name="Text 3"/>
-          <p:cNvSpPr txBox="1"/>
-          <p:nvPr/>
-        </p:nvSpPr>
-        <p:spPr>
-          <a:xfrm>
-            <a:off x="548640" y="3003804"/>
-            <a:ext cx="10881360" cy="502920"/>
-          </a:xfrm>
-          <a:prstGeom prst="rect">
-            <a:avLst/>
-          </a:prstGeom>
-          <a:noFill/>
-          <a:ln/>
-        </p:spPr>
-        <p:txBody>
-          <a:bodyPr wrap="square" lIns="0" tIns="0" rIns="0" bIns="0" rtlCol="0" anchor="ctr"/>
-          <a:lstStyle/>
-          <a:p>
-            <a:pPr marL="342900" indent="-342900">
+              <a:t>Initialisation &amp; démarrage</a:t>
+            </a:r>
+            <a:endParaRPr lang="en-US" sz="2800" dirty="0"/>
+          </a:p>
+        </p:txBody>
+      </p:sp>
+      <p:sp>
+        <p:nvSpPr>
+          <p:cNvPr id="5" name="Text 2"/>
+          <p:cNvSpPr txBox="1"/>
+          <p:nvPr/>
+        </p:nvSpPr>
+        <p:spPr>
+          <a:xfrm>
+            <a:off x="1280160" y="1188720"/>
+            <a:ext cx="9966960" cy="548640"/>
+          </a:xfrm>
+          <a:prstGeom prst="rect">
+            <a:avLst/>
+          </a:prstGeom>
+          <a:noFill/>
+          <a:ln/>
+        </p:spPr>
+        <p:txBody>
+          <a:bodyPr wrap="square" lIns="0" tIns="0" rIns="0" bIns="0" rtlCol="0" anchor="ctr"/>
+          <a:lstStyle/>
+          <a:p>
+            <a:pPr indent="0" marL="0">
               <a:lnSpc>
                 <a:spcPct val="115000"/>
               </a:lnSpc>
-              <a:spcAft>
-                <a:spcPts val="800"/>
-              </a:spcAft>
-              <a:buSzPct val="100000"/>
-              <a:buChar char="•"/>
-            </a:pPr>
-            <a:r>
-              <a:rPr lang="en-US" sz="1450" dirty="0">
-                <a:solidFill>
-                  <a:srgbClr val="2C1A0E"/>
-                </a:solidFill>
-                <a:latin typeface="Calibri" pitchFamily="34" charset="0"/>
-                <a:ea typeface="Calibri" pitchFamily="34" charset="-122"/>
-                <a:cs typeface="Calibri" pitchFamily="34" charset="-120"/>
-              </a:rPr>
-              <a:t>Une seule adresse Ollama connue de l'app (OLLAMA_BASE_URL) — pas de répartition entre plusieurs instances intégrée au code.</a:t>
-            </a:r>
-            <a:endParaRPr lang="en-US" sz="1450" dirty="0"/>
-          </a:p>
-        </p:txBody>
-      </p:sp>
-      <p:sp>
-        <p:nvSpPr>
-          <p:cNvPr id="7" name="Shape 4"/>
+              <a:buNone/>
+            </a:pPr>
+            <a:r>
+              <a:rPr lang="en-US" sz="1300" dirty="0">
+                <a:solidFill>
+                  <a:srgbClr val="7C6552"/>
+                </a:solidFill>
+                <a:latin typeface="Calibri" pitchFamily="34" charset="0"/>
+                <a:ea typeface="Calibri" pitchFamily="34" charset="-122"/>
+                <a:cs typeface="Calibri" pitchFamily="34" charset="-120"/>
+              </a:rPr>
+              <a:t>docker compose up -d respecte un ordre de dépendance strict — "app" attend que TOUS les autres services répondent sains avant de démarrer.</a:t>
+            </a:r>
+            <a:endParaRPr lang="en-US" sz="1300" dirty="0"/>
+          </a:p>
+        </p:txBody>
+      </p:sp>
+      <p:sp>
+        <p:nvSpPr>
+          <p:cNvPr id="6" name="Shape 3"/>
           <p:cNvSpPr/>
           <p:nvPr/>
         </p:nvSpPr>
         <p:spPr>
           <a:xfrm>
-            <a:off x="548640" y="3762756"/>
-            <a:ext cx="10881360" cy="1143000"/>
+            <a:off x="548640" y="2788920"/>
+            <a:ext cx="1745742" cy="1965960"/>
           </a:xfrm>
           <a:prstGeom prst="roundRect">
             <a:avLst>
-              <a:gd name="adj" fmla="val 6400"/>
+              <a:gd name="adj" fmla="val 4190"/>
             </a:avLst>
           </a:prstGeom>
           <a:solidFill>
@@ -22985,53 +23056,53 @@
       </p:sp>
       <p:sp>
         <p:nvSpPr>
+          <p:cNvPr id="7" name="Text 4"/>
+          <p:cNvSpPr txBox="1"/>
+          <p:nvPr/>
+        </p:nvSpPr>
+        <p:spPr>
+          <a:xfrm>
+            <a:off x="685800" y="2898648"/>
+            <a:ext cx="548640" cy="365760"/>
+          </a:xfrm>
+          <a:prstGeom prst="rect">
+            <a:avLst/>
+          </a:prstGeom>
+          <a:noFill/>
+          <a:ln/>
+        </p:spPr>
+        <p:txBody>
+          <a:bodyPr wrap="square" lIns="0" tIns="0" rIns="0" bIns="0" rtlCol="0" anchor="ctr"/>
+          <a:lstStyle/>
+          <a:p>
+            <a:pPr indent="0" marL="0">
+              <a:buNone/>
+            </a:pPr>
+            <a:r>
+              <a:rPr lang="en-US" sz="2000" b="1" dirty="0">
+                <a:solidFill>
+                  <a:srgbClr val="B5813F"/>
+                </a:solidFill>
+                <a:latin typeface="Cambria" pitchFamily="34" charset="0"/>
+                <a:ea typeface="Cambria" pitchFamily="34" charset="-122"/>
+                <a:cs typeface="Cambria" pitchFamily="34" charset="-120"/>
+              </a:rPr>
+              <a:t>1</a:t>
+            </a:r>
+            <a:endParaRPr lang="en-US" sz="2000" dirty="0"/>
+          </a:p>
+        </p:txBody>
+      </p:sp>
+      <p:sp>
+        <p:nvSpPr>
           <p:cNvPr id="8" name="Text 5"/>
           <p:cNvSpPr txBox="1"/>
           <p:nvPr/>
         </p:nvSpPr>
         <p:spPr>
           <a:xfrm>
-            <a:off x="868680" y="3899916"/>
-            <a:ext cx="1828800" cy="274320"/>
-          </a:xfrm>
-          <a:prstGeom prst="rect">
-            <a:avLst/>
-          </a:prstGeom>
-          <a:noFill/>
-          <a:ln/>
-        </p:spPr>
-        <p:txBody>
-          <a:bodyPr wrap="square" lIns="0" tIns="0" rIns="0" bIns="0" rtlCol="0" anchor="ctr"/>
-          <a:lstStyle/>
-          <a:p>
-            <a:pPr indent="0" marL="0">
-              <a:buNone/>
-            </a:pPr>
-            <a:r>
-              <a:rPr lang="en-US" sz="1000" b="1" spc="100" kern="0" dirty="0">
-                <a:solidFill>
-                  <a:srgbClr val="B5813F"/>
-                </a:solidFill>
-                <a:latin typeface="Calibri" pitchFamily="34" charset="0"/>
-                <a:ea typeface="Calibri" pitchFamily="34" charset="-122"/>
-                <a:cs typeface="Calibri" pitchFamily="34" charset="-120"/>
-              </a:rPr>
-              <a:t>POURQUOI</a:t>
-            </a:r>
-            <a:endParaRPr lang="en-US" sz="1000" dirty="0"/>
-          </a:p>
-        </p:txBody>
-      </p:sp>
-      <p:sp>
-        <p:nvSpPr>
-          <p:cNvPr id="9" name="Text 6"/>
-          <p:cNvSpPr txBox="1"/>
-          <p:nvPr/>
-        </p:nvSpPr>
-        <p:spPr>
-          <a:xfrm>
-            <a:off x="868680" y="4146804"/>
-            <a:ext cx="10241280" cy="685800"/>
+            <a:off x="685800" y="3355848"/>
+            <a:ext cx="1471422" cy="777240"/>
           </a:xfrm>
           <a:prstGeom prst="rect">
             <a:avLst/>
@@ -23045,12 +23116,12 @@
           <a:p>
             <a:pPr indent="0" marL="0">
               <a:lnSpc>
-                <a:spcPct val="110000"/>
+                <a:spcPct val="105000"/>
               </a:lnSpc>
               <a:buNone/>
             </a:pPr>
             <a:r>
-              <a:rPr lang="en-US" sz="1250" dirty="0">
+              <a:rPr lang="en-US" sz="1150" b="1" dirty="0">
                 <a:solidFill>
                   <a:srgbClr val="2C1A0E"/>
                 </a:solidFill>
@@ -23058,15 +23129,782 @@
                 <a:ea typeface="Calibri" pitchFamily="34" charset="-122"/>
                 <a:cs typeface="Calibri" pitchFamily="34" charset="-120"/>
               </a:rPr>
-              <a:t>Ce modèle n'est appelé qu'une fois PAR TYPE de document, jamais par document — le débit réel est probablement déjà faible ; OLLAMA_NUM_PARALLEL permet à une seule instance d'absorber plusieurs requêtes de front avant d'envisager plusieurs conteneurs. Si le besoin apparaît vraiment : même mécanisme que pour app/frontend (plusieurs adresses dans dynamic.yml.template) — aucun changement de code Java.</a:t>
-            </a:r>
-            <a:endParaRPr lang="en-US" sz="1250" dirty="0"/>
-          </a:p>
-        </p:txBody>
-      </p:sp>
-      <p:sp>
-        <p:nvSpPr>
-          <p:cNvPr id="10" name="Text 7"/>
+              <a:t>Services sans état</a:t>
+            </a:r>
+            <a:endParaRPr lang="en-US" sz="1150" dirty="0"/>
+          </a:p>
+        </p:txBody>
+      </p:sp>
+      <p:sp>
+        <p:nvSpPr>
+          <p:cNvPr id="9" name="Text 6"/>
+          <p:cNvSpPr txBox="1"/>
+          <p:nvPr/>
+        </p:nvSpPr>
+        <p:spPr>
+          <a:xfrm>
+            <a:off x="685800" y="4069080"/>
+            <a:ext cx="1471422" cy="621792"/>
+          </a:xfrm>
+          <a:prstGeom prst="rect">
+            <a:avLst/>
+          </a:prstGeom>
+          <a:noFill/>
+          <a:ln/>
+        </p:spPr>
+        <p:txBody>
+          <a:bodyPr wrap="square" lIns="0" tIns="0" rIns="0" bIns="0" rtlCol="0" anchor="ctr"/>
+          <a:lstStyle/>
+          <a:p>
+            <a:pPr indent="0" marL="0">
+              <a:lnSpc>
+                <a:spcPct val="105000"/>
+              </a:lnSpc>
+              <a:buNone/>
+            </a:pPr>
+            <a:r>
+              <a:rPr lang="en-US" sz="880" dirty="0">
+                <a:solidFill>
+                  <a:srgbClr val="7C6552"/>
+                </a:solidFill>
+                <a:latin typeface="Calibri" pitchFamily="34" charset="0"/>
+                <a:ea typeface="Calibri" pitchFamily="34" charset="-122"/>
+                <a:cs typeface="Calibri" pitchFamily="34" charset="-120"/>
+              </a:rPr>
+              <a:t>postgres, minio, meilisearch, redis, gotenberg — prêts dès leur healthcheck</a:t>
+            </a:r>
+            <a:endParaRPr lang="en-US" sz="880" dirty="0"/>
+          </a:p>
+        </p:txBody>
+      </p:sp>
+      <p:sp>
+        <p:nvSpPr>
+          <p:cNvPr id="10" name="Shape 7"/>
+          <p:cNvSpPr/>
+          <p:nvPr/>
+        </p:nvSpPr>
+        <p:spPr>
+          <a:xfrm>
+            <a:off x="2417826" y="2788920"/>
+            <a:ext cx="1745742" cy="1965960"/>
+          </a:xfrm>
+          <a:prstGeom prst="roundRect">
+            <a:avLst>
+              <a:gd name="adj" fmla="val 4190"/>
+            </a:avLst>
+          </a:prstGeom>
+          <a:solidFill>
+            <a:srgbClr val="F3E9DA"/>
+          </a:solidFill>
+          <a:ln/>
+        </p:spPr>
+      </p:sp>
+      <p:sp>
+        <p:nvSpPr>
+          <p:cNvPr id="11" name="Text 8"/>
+          <p:cNvSpPr txBox="1"/>
+          <p:nvPr/>
+        </p:nvSpPr>
+        <p:spPr>
+          <a:xfrm>
+            <a:off x="2554986" y="2898648"/>
+            <a:ext cx="548640" cy="365760"/>
+          </a:xfrm>
+          <a:prstGeom prst="rect">
+            <a:avLst/>
+          </a:prstGeom>
+          <a:noFill/>
+          <a:ln/>
+        </p:spPr>
+        <p:txBody>
+          <a:bodyPr wrap="square" lIns="0" tIns="0" rIns="0" bIns="0" rtlCol="0" anchor="ctr"/>
+          <a:lstStyle/>
+          <a:p>
+            <a:pPr indent="0" marL="0">
+              <a:buNone/>
+            </a:pPr>
+            <a:r>
+              <a:rPr lang="en-US" sz="2000" b="1" dirty="0">
+                <a:solidFill>
+                  <a:srgbClr val="B5813F"/>
+                </a:solidFill>
+                <a:latin typeface="Cambria" pitchFamily="34" charset="0"/>
+                <a:ea typeface="Cambria" pitchFamily="34" charset="-122"/>
+                <a:cs typeface="Cambria" pitchFamily="34" charset="-120"/>
+              </a:rPr>
+              <a:t>2</a:t>
+            </a:r>
+            <a:endParaRPr lang="en-US" sz="2000" dirty="0"/>
+          </a:p>
+        </p:txBody>
+      </p:sp>
+      <p:sp>
+        <p:nvSpPr>
+          <p:cNvPr id="12" name="Text 9"/>
+          <p:cNvSpPr txBox="1"/>
+          <p:nvPr/>
+        </p:nvSpPr>
+        <p:spPr>
+          <a:xfrm>
+            <a:off x="2554986" y="3355848"/>
+            <a:ext cx="1471422" cy="777240"/>
+          </a:xfrm>
+          <a:prstGeom prst="rect">
+            <a:avLst/>
+          </a:prstGeom>
+          <a:noFill/>
+          <a:ln/>
+        </p:spPr>
+        <p:txBody>
+          <a:bodyPr wrap="square" lIns="0" tIns="0" rIns="0" bIns="0" rtlCol="0" anchor="ctr"/>
+          <a:lstStyle/>
+          <a:p>
+            <a:pPr indent="0" marL="0">
+              <a:lnSpc>
+                <a:spcPct val="105000"/>
+              </a:lnSpc>
+              <a:buNone/>
+            </a:pPr>
+            <a:r>
+              <a:rPr lang="en-US" sz="1150" b="1" dirty="0">
+                <a:solidFill>
+                  <a:srgbClr val="2C1A0E"/>
+                </a:solidFill>
+                <a:latin typeface="Calibri" pitchFamily="34" charset="0"/>
+                <a:ea typeface="Calibri" pitchFamily="34" charset="-122"/>
+                <a:cs typeface="Calibri" pitchFamily="34" charset="-120"/>
+              </a:rPr>
+              <a:t>Ollama</a:t>
+            </a:r>
+            <a:endParaRPr lang="en-US" sz="1150" dirty="0"/>
+          </a:p>
+        </p:txBody>
+      </p:sp>
+      <p:sp>
+        <p:nvSpPr>
+          <p:cNvPr id="13" name="Text 10"/>
+          <p:cNvSpPr txBox="1"/>
+          <p:nvPr/>
+        </p:nvSpPr>
+        <p:spPr>
+          <a:xfrm>
+            <a:off x="2554986" y="4069080"/>
+            <a:ext cx="1471422" cy="621792"/>
+          </a:xfrm>
+          <a:prstGeom prst="rect">
+            <a:avLst/>
+          </a:prstGeom>
+          <a:noFill/>
+          <a:ln/>
+        </p:spPr>
+        <p:txBody>
+          <a:bodyPr wrap="square" lIns="0" tIns="0" rIns="0" bIns="0" rtlCol="0" anchor="ctr"/>
+          <a:lstStyle/>
+          <a:p>
+            <a:pPr indent="0" marL="0">
+              <a:lnSpc>
+                <a:spcPct val="105000"/>
+              </a:lnSpc>
+              <a:buNone/>
+            </a:pPr>
+            <a:r>
+              <a:rPr lang="en-US" sz="880" dirty="0">
+                <a:solidFill>
+                  <a:srgbClr val="7C6552"/>
+                </a:solidFill>
+                <a:latin typeface="Calibri" pitchFamily="34" charset="0"/>
+                <a:ea typeface="Calibri" pitchFamily="34" charset="-122"/>
+                <a:cs typeface="Calibri" pitchFamily="34" charset="-120"/>
+              </a:rPr>
+              <a:t>télécharge qwen2.5-coder:7b s'il n'est pas déjà dans le volume nommé</a:t>
+            </a:r>
+            <a:endParaRPr lang="en-US" sz="880" dirty="0"/>
+          </a:p>
+        </p:txBody>
+      </p:sp>
+      <p:sp>
+        <p:nvSpPr>
+          <p:cNvPr id="14" name="Shape 11"/>
+          <p:cNvSpPr/>
+          <p:nvPr/>
+        </p:nvSpPr>
+        <p:spPr>
+          <a:xfrm>
+            <a:off x="4287012" y="2788920"/>
+            <a:ext cx="1745742" cy="1965960"/>
+          </a:xfrm>
+          <a:prstGeom prst="roundRect">
+            <a:avLst>
+              <a:gd name="adj" fmla="val 4190"/>
+            </a:avLst>
+          </a:prstGeom>
+          <a:solidFill>
+            <a:srgbClr val="F3E9DA"/>
+          </a:solidFill>
+          <a:ln/>
+        </p:spPr>
+      </p:sp>
+      <p:sp>
+        <p:nvSpPr>
+          <p:cNvPr id="15" name="Text 12"/>
+          <p:cNvSpPr txBox="1"/>
+          <p:nvPr/>
+        </p:nvSpPr>
+        <p:spPr>
+          <a:xfrm>
+            <a:off x="4424172" y="2898648"/>
+            <a:ext cx="548640" cy="365760"/>
+          </a:xfrm>
+          <a:prstGeom prst="rect">
+            <a:avLst/>
+          </a:prstGeom>
+          <a:noFill/>
+          <a:ln/>
+        </p:spPr>
+        <p:txBody>
+          <a:bodyPr wrap="square" lIns="0" tIns="0" rIns="0" bIns="0" rtlCol="0" anchor="ctr"/>
+          <a:lstStyle/>
+          <a:p>
+            <a:pPr indent="0" marL="0">
+              <a:buNone/>
+            </a:pPr>
+            <a:r>
+              <a:rPr lang="en-US" sz="2000" b="1" dirty="0">
+                <a:solidFill>
+                  <a:srgbClr val="B5813F"/>
+                </a:solidFill>
+                <a:latin typeface="Cambria" pitchFamily="34" charset="0"/>
+                <a:ea typeface="Cambria" pitchFamily="34" charset="-122"/>
+                <a:cs typeface="Cambria" pitchFamily="34" charset="-120"/>
+              </a:rPr>
+              <a:t>3</a:t>
+            </a:r>
+            <a:endParaRPr lang="en-US" sz="2000" dirty="0"/>
+          </a:p>
+        </p:txBody>
+      </p:sp>
+      <p:sp>
+        <p:nvSpPr>
+          <p:cNvPr id="16" name="Text 13"/>
+          <p:cNvSpPr txBox="1"/>
+          <p:nvPr/>
+        </p:nvSpPr>
+        <p:spPr>
+          <a:xfrm>
+            <a:off x="4424172" y="3355848"/>
+            <a:ext cx="1471422" cy="777240"/>
+          </a:xfrm>
+          <a:prstGeom prst="rect">
+            <a:avLst/>
+          </a:prstGeom>
+          <a:noFill/>
+          <a:ln/>
+        </p:spPr>
+        <p:txBody>
+          <a:bodyPr wrap="square" lIns="0" tIns="0" rIns="0" bIns="0" rtlCol="0" anchor="ctr"/>
+          <a:lstStyle/>
+          <a:p>
+            <a:pPr indent="0" marL="0">
+              <a:lnSpc>
+                <a:spcPct val="105000"/>
+              </a:lnSpc>
+              <a:buNone/>
+            </a:pPr>
+            <a:r>
+              <a:rPr lang="en-US" sz="1150" b="1" dirty="0">
+                <a:solidFill>
+                  <a:srgbClr val="2C1A0E"/>
+                </a:solidFill>
+                <a:latin typeface="Calibri" pitchFamily="34" charset="0"/>
+                <a:ea typeface="Calibri" pitchFamily="34" charset="-122"/>
+                <a:cs typeface="Calibri" pitchFamily="34" charset="-120"/>
+              </a:rPr>
+              <a:t>Traefik</a:t>
+            </a:r>
+            <a:endParaRPr lang="en-US" sz="1150" dirty="0"/>
+          </a:p>
+        </p:txBody>
+      </p:sp>
+      <p:sp>
+        <p:nvSpPr>
+          <p:cNvPr id="17" name="Text 14"/>
+          <p:cNvSpPr txBox="1"/>
+          <p:nvPr/>
+        </p:nvSpPr>
+        <p:spPr>
+          <a:xfrm>
+            <a:off x="4424172" y="4069080"/>
+            <a:ext cx="1471422" cy="621792"/>
+          </a:xfrm>
+          <a:prstGeom prst="rect">
+            <a:avLst/>
+          </a:prstGeom>
+          <a:noFill/>
+          <a:ln/>
+        </p:spPr>
+        <p:txBody>
+          <a:bodyPr wrap="square" lIns="0" tIns="0" rIns="0" bIns="0" rtlCol="0" anchor="ctr"/>
+          <a:lstStyle/>
+          <a:p>
+            <a:pPr indent="0" marL="0">
+              <a:lnSpc>
+                <a:spcPct val="105000"/>
+              </a:lnSpc>
+              <a:buNone/>
+            </a:pPr>
+            <a:r>
+              <a:rPr lang="en-US" sz="880" dirty="0">
+                <a:solidFill>
+                  <a:srgbClr val="7C6552"/>
+                </a:solidFill>
+                <a:latin typeface="Calibri" pitchFamily="34" charset="0"/>
+                <a:ea typeface="Calibri" pitchFamily="34" charset="-122"/>
+                <a:cs typeface="Calibri" pitchFamily="34" charset="-120"/>
+              </a:rPr>
+              <a:t>régénère dynamic.yml depuis le gabarit, jamais versionné</a:t>
+            </a:r>
+            <a:endParaRPr lang="en-US" sz="880" dirty="0"/>
+          </a:p>
+        </p:txBody>
+      </p:sp>
+      <p:sp>
+        <p:nvSpPr>
+          <p:cNvPr id="18" name="Shape 15"/>
+          <p:cNvSpPr/>
+          <p:nvPr/>
+        </p:nvSpPr>
+        <p:spPr>
+          <a:xfrm>
+            <a:off x="6156198" y="2788920"/>
+            <a:ext cx="1745742" cy="1965960"/>
+          </a:xfrm>
+          <a:prstGeom prst="roundRect">
+            <a:avLst>
+              <a:gd name="adj" fmla="val 4190"/>
+            </a:avLst>
+          </a:prstGeom>
+          <a:solidFill>
+            <a:srgbClr val="F3E9DA"/>
+          </a:solidFill>
+          <a:ln/>
+        </p:spPr>
+      </p:sp>
+      <p:sp>
+        <p:nvSpPr>
+          <p:cNvPr id="19" name="Text 16"/>
+          <p:cNvSpPr txBox="1"/>
+          <p:nvPr/>
+        </p:nvSpPr>
+        <p:spPr>
+          <a:xfrm>
+            <a:off x="6293358" y="2898648"/>
+            <a:ext cx="548640" cy="365760"/>
+          </a:xfrm>
+          <a:prstGeom prst="rect">
+            <a:avLst/>
+          </a:prstGeom>
+          <a:noFill/>
+          <a:ln/>
+        </p:spPr>
+        <p:txBody>
+          <a:bodyPr wrap="square" lIns="0" tIns="0" rIns="0" bIns="0" rtlCol="0" anchor="ctr"/>
+          <a:lstStyle/>
+          <a:p>
+            <a:pPr indent="0" marL="0">
+              <a:buNone/>
+            </a:pPr>
+            <a:r>
+              <a:rPr lang="en-US" sz="2000" b="1" dirty="0">
+                <a:solidFill>
+                  <a:srgbClr val="B5813F"/>
+                </a:solidFill>
+                <a:latin typeface="Cambria" pitchFamily="34" charset="0"/>
+                <a:ea typeface="Cambria" pitchFamily="34" charset="-122"/>
+                <a:cs typeface="Cambria" pitchFamily="34" charset="-120"/>
+              </a:rPr>
+              <a:t>4</a:t>
+            </a:r>
+            <a:endParaRPr lang="en-US" sz="2000" dirty="0"/>
+          </a:p>
+        </p:txBody>
+      </p:sp>
+      <p:sp>
+        <p:nvSpPr>
+          <p:cNvPr id="20" name="Text 17"/>
+          <p:cNvSpPr txBox="1"/>
+          <p:nvPr/>
+        </p:nvSpPr>
+        <p:spPr>
+          <a:xfrm>
+            <a:off x="6293358" y="3355848"/>
+            <a:ext cx="1471422" cy="777240"/>
+          </a:xfrm>
+          <a:prstGeom prst="rect">
+            <a:avLst/>
+          </a:prstGeom>
+          <a:noFill/>
+          <a:ln/>
+        </p:spPr>
+        <p:txBody>
+          <a:bodyPr wrap="square" lIns="0" tIns="0" rIns="0" bIns="0" rtlCol="0" anchor="ctr"/>
+          <a:lstStyle/>
+          <a:p>
+            <a:pPr indent="0" marL="0">
+              <a:lnSpc>
+                <a:spcPct val="105000"/>
+              </a:lnSpc>
+              <a:buNone/>
+            </a:pPr>
+            <a:r>
+              <a:rPr lang="en-US" sz="1150" b="1" dirty="0">
+                <a:solidFill>
+                  <a:srgbClr val="2C1A0E"/>
+                </a:solidFill>
+                <a:latin typeface="Calibri" pitchFamily="34" charset="0"/>
+                <a:ea typeface="Calibri" pitchFamily="34" charset="-122"/>
+                <a:cs typeface="Calibri" pitchFamily="34" charset="-120"/>
+              </a:rPr>
+              <a:t>app démarre</a:t>
+            </a:r>
+            <a:endParaRPr lang="en-US" sz="1150" dirty="0"/>
+          </a:p>
+        </p:txBody>
+      </p:sp>
+      <p:sp>
+        <p:nvSpPr>
+          <p:cNvPr id="21" name="Text 18"/>
+          <p:cNvSpPr txBox="1"/>
+          <p:nvPr/>
+        </p:nvSpPr>
+        <p:spPr>
+          <a:xfrm>
+            <a:off x="6293358" y="4069080"/>
+            <a:ext cx="1471422" cy="621792"/>
+          </a:xfrm>
+          <a:prstGeom prst="rect">
+            <a:avLst/>
+          </a:prstGeom>
+          <a:noFill/>
+          <a:ln/>
+        </p:spPr>
+        <p:txBody>
+          <a:bodyPr wrap="square" lIns="0" tIns="0" rIns="0" bIns="0" rtlCol="0" anchor="ctr"/>
+          <a:lstStyle/>
+          <a:p>
+            <a:pPr indent="0" marL="0">
+              <a:lnSpc>
+                <a:spcPct val="105000"/>
+              </a:lnSpc>
+              <a:buNone/>
+            </a:pPr>
+            <a:r>
+              <a:rPr lang="en-US" sz="880" dirty="0">
+                <a:solidFill>
+                  <a:srgbClr val="7C6552"/>
+                </a:solidFill>
+                <a:latin typeface="Calibri" pitchFamily="34" charset="0"/>
+                <a:ea typeface="Calibri" pitchFamily="34" charset="-122"/>
+                <a:cs typeface="Calibri" pitchFamily="34" charset="-120"/>
+              </a:rPr>
+              <a:t>une fois tous les services ci-dessus sains</a:t>
+            </a:r>
+            <a:endParaRPr lang="en-US" sz="880" dirty="0"/>
+          </a:p>
+        </p:txBody>
+      </p:sp>
+      <p:sp>
+        <p:nvSpPr>
+          <p:cNvPr id="22" name="Shape 19"/>
+          <p:cNvSpPr/>
+          <p:nvPr/>
+        </p:nvSpPr>
+        <p:spPr>
+          <a:xfrm>
+            <a:off x="8025384" y="2788920"/>
+            <a:ext cx="1745742" cy="1965960"/>
+          </a:xfrm>
+          <a:prstGeom prst="roundRect">
+            <a:avLst>
+              <a:gd name="adj" fmla="val 4190"/>
+            </a:avLst>
+          </a:prstGeom>
+          <a:solidFill>
+            <a:srgbClr val="F3E9DA"/>
+          </a:solidFill>
+          <a:ln/>
+        </p:spPr>
+      </p:sp>
+      <p:sp>
+        <p:nvSpPr>
+          <p:cNvPr id="23" name="Text 20"/>
+          <p:cNvSpPr txBox="1"/>
+          <p:nvPr/>
+        </p:nvSpPr>
+        <p:spPr>
+          <a:xfrm>
+            <a:off x="8162544" y="2898648"/>
+            <a:ext cx="548640" cy="365760"/>
+          </a:xfrm>
+          <a:prstGeom prst="rect">
+            <a:avLst/>
+          </a:prstGeom>
+          <a:noFill/>
+          <a:ln/>
+        </p:spPr>
+        <p:txBody>
+          <a:bodyPr wrap="square" lIns="0" tIns="0" rIns="0" bIns="0" rtlCol="0" anchor="ctr"/>
+          <a:lstStyle/>
+          <a:p>
+            <a:pPr indent="0" marL="0">
+              <a:buNone/>
+            </a:pPr>
+            <a:r>
+              <a:rPr lang="en-US" sz="2000" b="1" dirty="0">
+                <a:solidFill>
+                  <a:srgbClr val="B5813F"/>
+                </a:solidFill>
+                <a:latin typeface="Cambria" pitchFamily="34" charset="0"/>
+                <a:ea typeface="Cambria" pitchFamily="34" charset="-122"/>
+                <a:cs typeface="Cambria" pitchFamily="34" charset="-120"/>
+              </a:rPr>
+              <a:t>5</a:t>
+            </a:r>
+            <a:endParaRPr lang="en-US" sz="2000" dirty="0"/>
+          </a:p>
+        </p:txBody>
+      </p:sp>
+      <p:sp>
+        <p:nvSpPr>
+          <p:cNvPr id="24" name="Text 21"/>
+          <p:cNvSpPr txBox="1"/>
+          <p:nvPr/>
+        </p:nvSpPr>
+        <p:spPr>
+          <a:xfrm>
+            <a:off x="8162544" y="3355848"/>
+            <a:ext cx="1471422" cy="777240"/>
+          </a:xfrm>
+          <a:prstGeom prst="rect">
+            <a:avLst/>
+          </a:prstGeom>
+          <a:noFill/>
+          <a:ln/>
+        </p:spPr>
+        <p:txBody>
+          <a:bodyPr wrap="square" lIns="0" tIns="0" rIns="0" bIns="0" rtlCol="0" anchor="ctr"/>
+          <a:lstStyle/>
+          <a:p>
+            <a:pPr indent="0" marL="0">
+              <a:lnSpc>
+                <a:spcPct val="105000"/>
+              </a:lnSpc>
+              <a:buNone/>
+            </a:pPr>
+            <a:r>
+              <a:rPr lang="en-US" sz="1150" b="1" dirty="0">
+                <a:solidFill>
+                  <a:srgbClr val="2C1A0E"/>
+                </a:solidFill>
+                <a:latin typeface="Calibri" pitchFamily="34" charset="0"/>
+                <a:ea typeface="Calibri" pitchFamily="34" charset="-122"/>
+                <a:cs typeface="Calibri" pitchFamily="34" charset="-120"/>
+              </a:rPr>
+              <a:t>Migrations Flyway</a:t>
+            </a:r>
+            <a:endParaRPr lang="en-US" sz="1150" dirty="0"/>
+          </a:p>
+        </p:txBody>
+      </p:sp>
+      <p:sp>
+        <p:nvSpPr>
+          <p:cNvPr id="25" name="Text 22"/>
+          <p:cNvSpPr txBox="1"/>
+          <p:nvPr/>
+        </p:nvSpPr>
+        <p:spPr>
+          <a:xfrm>
+            <a:off x="8162544" y="4069080"/>
+            <a:ext cx="1471422" cy="621792"/>
+          </a:xfrm>
+          <a:prstGeom prst="rect">
+            <a:avLst/>
+          </a:prstGeom>
+          <a:noFill/>
+          <a:ln/>
+        </p:spPr>
+        <p:txBody>
+          <a:bodyPr wrap="square" lIns="0" tIns="0" rIns="0" bIns="0" rtlCol="0" anchor="ctr"/>
+          <a:lstStyle/>
+          <a:p>
+            <a:pPr indent="0" marL="0">
+              <a:lnSpc>
+                <a:spcPct val="105000"/>
+              </a:lnSpc>
+              <a:buNone/>
+            </a:pPr>
+            <a:r>
+              <a:rPr lang="en-US" sz="880" dirty="0">
+                <a:solidFill>
+                  <a:srgbClr val="7C6552"/>
+                </a:solidFill>
+                <a:latin typeface="Calibri" pitchFamily="34" charset="0"/>
+                <a:ea typeface="Calibri" pitchFamily="34" charset="-122"/>
+                <a:cs typeface="Calibri" pitchFamily="34" charset="-120"/>
+              </a:rPr>
+              <a:t>schéma appliqué automatiquement</a:t>
+            </a:r>
+            <a:endParaRPr lang="en-US" sz="880" dirty="0"/>
+          </a:p>
+        </p:txBody>
+      </p:sp>
+      <p:sp>
+        <p:nvSpPr>
+          <p:cNvPr id="26" name="Shape 23"/>
+          <p:cNvSpPr/>
+          <p:nvPr/>
+        </p:nvSpPr>
+        <p:spPr>
+          <a:xfrm>
+            <a:off x="9894570" y="2788920"/>
+            <a:ext cx="1745742" cy="1965960"/>
+          </a:xfrm>
+          <a:prstGeom prst="roundRect">
+            <a:avLst>
+              <a:gd name="adj" fmla="val 4190"/>
+            </a:avLst>
+          </a:prstGeom>
+          <a:solidFill>
+            <a:srgbClr val="B5813F"/>
+          </a:solidFill>
+          <a:ln/>
+        </p:spPr>
+      </p:sp>
+      <p:sp>
+        <p:nvSpPr>
+          <p:cNvPr id="27" name="Text 24"/>
+          <p:cNvSpPr txBox="1"/>
+          <p:nvPr/>
+        </p:nvSpPr>
+        <p:spPr>
+          <a:xfrm>
+            <a:off x="10031730" y="2898648"/>
+            <a:ext cx="548640" cy="365760"/>
+          </a:xfrm>
+          <a:prstGeom prst="rect">
+            <a:avLst/>
+          </a:prstGeom>
+          <a:noFill/>
+          <a:ln/>
+        </p:spPr>
+        <p:txBody>
+          <a:bodyPr wrap="square" lIns="0" tIns="0" rIns="0" bIns="0" rtlCol="0" anchor="ctr"/>
+          <a:lstStyle/>
+          <a:p>
+            <a:pPr indent="0" marL="0">
+              <a:buNone/>
+            </a:pPr>
+            <a:r>
+              <a:rPr lang="en-US" sz="2000" b="1" dirty="0">
+                <a:solidFill>
+                  <a:srgbClr val="FFFFFF"/>
+                </a:solidFill>
+                <a:latin typeface="Cambria" pitchFamily="34" charset="0"/>
+                <a:ea typeface="Cambria" pitchFamily="34" charset="-122"/>
+                <a:cs typeface="Cambria" pitchFamily="34" charset="-120"/>
+              </a:rPr>
+              <a:t>6</a:t>
+            </a:r>
+            <a:endParaRPr lang="en-US" sz="2000" dirty="0"/>
+          </a:p>
+        </p:txBody>
+      </p:sp>
+      <p:sp>
+        <p:nvSpPr>
+          <p:cNvPr id="28" name="Text 25"/>
+          <p:cNvSpPr txBox="1"/>
+          <p:nvPr/>
+        </p:nvSpPr>
+        <p:spPr>
+          <a:xfrm>
+            <a:off x="10031730" y="3355848"/>
+            <a:ext cx="1471422" cy="777240"/>
+          </a:xfrm>
+          <a:prstGeom prst="rect">
+            <a:avLst/>
+          </a:prstGeom>
+          <a:noFill/>
+          <a:ln/>
+        </p:spPr>
+        <p:txBody>
+          <a:bodyPr wrap="square" lIns="0" tIns="0" rIns="0" bIns="0" rtlCol="0" anchor="ctr"/>
+          <a:lstStyle/>
+          <a:p>
+            <a:pPr indent="0" marL="0">
+              <a:lnSpc>
+                <a:spcPct val="105000"/>
+              </a:lnSpc>
+              <a:buNone/>
+            </a:pPr>
+            <a:r>
+              <a:rPr lang="en-US" sz="1150" b="1" dirty="0">
+                <a:solidFill>
+                  <a:srgbClr val="FFFFFF"/>
+                </a:solidFill>
+                <a:latin typeface="Calibri" pitchFamily="34" charset="0"/>
+                <a:ea typeface="Calibri" pitchFamily="34" charset="-122"/>
+                <a:cs typeface="Calibri" pitchFamily="34" charset="-120"/>
+              </a:rPr>
+              <a:t>Rôles + admin</a:t>
+            </a:r>
+            <a:endParaRPr lang="en-US" sz="1150" dirty="0"/>
+          </a:p>
+        </p:txBody>
+      </p:sp>
+      <p:sp>
+        <p:nvSpPr>
+          <p:cNvPr id="29" name="Text 26"/>
+          <p:cNvSpPr txBox="1"/>
+          <p:nvPr/>
+        </p:nvSpPr>
+        <p:spPr>
+          <a:xfrm>
+            <a:off x="10031730" y="4069080"/>
+            <a:ext cx="1471422" cy="621792"/>
+          </a:xfrm>
+          <a:prstGeom prst="rect">
+            <a:avLst/>
+          </a:prstGeom>
+          <a:noFill/>
+          <a:ln/>
+        </p:spPr>
+        <p:txBody>
+          <a:bodyPr wrap="square" lIns="0" tIns="0" rIns="0" bIns="0" rtlCol="0" anchor="ctr"/>
+          <a:lstStyle/>
+          <a:p>
+            <a:pPr indent="0" marL="0">
+              <a:lnSpc>
+                <a:spcPct val="105000"/>
+              </a:lnSpc>
+              <a:buNone/>
+            </a:pPr>
+            <a:r>
+              <a:rPr lang="en-US" sz="880" dirty="0">
+                <a:solidFill>
+                  <a:srgbClr val="F3E9DA"/>
+                </a:solidFill>
+                <a:latin typeface="Calibri" pitchFamily="34" charset="0"/>
+                <a:ea typeface="Calibri" pitchFamily="34" charset="-122"/>
+                <a:cs typeface="Calibri" pitchFamily="34" charset="-120"/>
+              </a:rPr>
+              <a:t>4 rôles créés, admin initial si configuré</a:t>
+            </a:r>
+            <a:endParaRPr lang="en-US" sz="880" dirty="0"/>
+          </a:p>
+        </p:txBody>
+      </p:sp>
+      <p:sp>
+        <p:nvSpPr>
+          <p:cNvPr id="30" name="Text 27"/>
           <p:cNvSpPr txBox="1"/>
           <p:nvPr/>
         </p:nvSpPr>
@@ -23105,7 +23943,7 @@
       </p:sp>
       <p:sp>
         <p:nvSpPr>
-          <p:cNvPr id="11" name="Text 8"/>
+          <p:cNvPr id="31" name="Text 28"/>
           <p:cNvSpPr txBox="1"/>
           <p:nvPr/>
         </p:nvSpPr>
@@ -23156,7 +23994,7 @@
     <p:bg>
       <p:bgPr>
         <a:solidFill>
-          <a:srgbClr val="2C1A0E"/>
+          <a:srgbClr val="FFFFFF"/>
         </a:solidFill>
       </p:bgPr>
     </p:bg>
@@ -23182,8 +24020,8 @@
         </p:nvSpPr>
         <p:spPr>
           <a:xfrm>
-            <a:off x="640080" y="2331720"/>
-            <a:ext cx="914400" cy="914400"/>
+            <a:off x="548640" y="502920"/>
+            <a:ext cx="502920" cy="502920"/>
           </a:xfrm>
           <a:prstGeom prst="ellipse">
             <a:avLst/>
@@ -23210,8 +24048,8 @@
         </p:blipFill>
         <p:spPr>
           <a:xfrm>
-            <a:off x="749808" y="2441448"/>
-            <a:ext cx="694944" cy="694944"/>
+            <a:off x="608990" y="563270"/>
+            <a:ext cx="382219" cy="382219"/>
           </a:xfrm>
           <a:prstGeom prst="rect">
             <a:avLst/>
@@ -23226,8 +24064,8 @@
         </p:nvSpPr>
         <p:spPr>
           <a:xfrm>
-            <a:off x="1737360" y="2395728"/>
-            <a:ext cx="8229600" cy="365760"/>
+            <a:off x="1170432" y="457200"/>
+            <a:ext cx="8229600" cy="274320"/>
           </a:xfrm>
           <a:prstGeom prst="rect">
             <a:avLst/>
@@ -23243,17 +24081,17 @@
               <a:buNone/>
             </a:pPr>
             <a:r>
-              <a:rPr lang="en-US" sz="1200" spc="200" kern="0" dirty="0">
-                <a:solidFill>
-                  <a:srgbClr val="D9AE6C"/>
-                </a:solidFill>
-                <a:latin typeface="Calibri" pitchFamily="34" charset="0"/>
-                <a:ea typeface="Calibri" pitchFamily="34" charset="-122"/>
-                <a:cs typeface="Calibri" pitchFamily="34" charset="-120"/>
-              </a:rPr>
-              <a:t>BILAN</a:t>
-            </a:r>
-            <a:endParaRPr lang="en-US" sz="1200" dirty="0"/>
+              <a:rPr lang="en-US" sz="1100" spc="150" kern="0" dirty="0">
+                <a:solidFill>
+                  <a:srgbClr val="B5813F"/>
+                </a:solidFill>
+                <a:latin typeface="Calibri" pitchFamily="34" charset="0"/>
+                <a:ea typeface="Calibri" pitchFamily="34" charset="-122"/>
+                <a:cs typeface="Calibri" pitchFamily="34" charset="-120"/>
+              </a:rPr>
+              <a:t>INITIALISATION</a:t>
+            </a:r>
+            <a:endParaRPr lang="en-US" sz="1100" dirty="0"/>
           </a:p>
         </p:txBody>
       </p:sp>
@@ -23265,8 +24103,8 @@
         </p:nvSpPr>
         <p:spPr>
           <a:xfrm>
-            <a:off x="1719072" y="2743200"/>
-            <a:ext cx="9601200" cy="1005840"/>
+            <a:off x="1152144" y="713232"/>
+            <a:ext cx="9692640" cy="594360"/>
           </a:xfrm>
           <a:prstGeom prst="rect">
             <a:avLst/>
@@ -23282,23 +24120,196 @@
               <a:buNone/>
             </a:pPr>
             <a:r>
-              <a:rPr lang="en-US" sz="3800" b="1" dirty="0">
-                <a:solidFill>
-                  <a:srgbClr val="FFFFFF"/>
+              <a:rPr lang="en-US" sz="2400" b="1" dirty="0">
+                <a:solidFill>
+                  <a:srgbClr val="2C1A0E"/>
                 </a:solidFill>
                 <a:latin typeface="Cambria" pitchFamily="34" charset="0"/>
                 <a:ea typeface="Cambria" pitchFamily="34" charset="-122"/>
                 <a:cs typeface="Cambria" pitchFamily="34" charset="-120"/>
               </a:rPr>
-              <a:t>Tableau récapitulatif</a:t>
-            </a:r>
-            <a:endParaRPr lang="en-US" sz="3800" dirty="0"/>
+              <a:t>Ollama : téléchargement du modèle au premier démarrage</a:t>
+            </a:r>
+            <a:endParaRPr lang="en-US" sz="2400" dirty="0"/>
           </a:p>
         </p:txBody>
       </p:sp>
       <p:sp>
         <p:nvSpPr>
           <p:cNvPr id="6" name="Text 3"/>
+          <p:cNvSpPr txBox="1"/>
+          <p:nvPr/>
+        </p:nvSpPr>
+        <p:spPr>
+          <a:xfrm>
+            <a:off x="548640" y="2976372"/>
+            <a:ext cx="10881360" cy="868680"/>
+          </a:xfrm>
+          <a:prstGeom prst="rect">
+            <a:avLst/>
+          </a:prstGeom>
+          <a:noFill/>
+          <a:ln/>
+        </p:spPr>
+        <p:txBody>
+          <a:bodyPr wrap="square" lIns="0" tIns="0" rIns="0" bIns="0" rtlCol="0" anchor="ctr"/>
+          <a:lstStyle/>
+          <a:p>
+            <a:pPr marL="342900" indent="-342900">
+              <a:lnSpc>
+                <a:spcPct val="115000"/>
+              </a:lnSpc>
+              <a:spcAft>
+                <a:spcPts val="800"/>
+              </a:spcAft>
+              <a:buSzPct val="100000"/>
+              <a:buChar char="•"/>
+            </a:pPr>
+            <a:r>
+              <a:rPr lang="en-US" sz="1450" dirty="0">
+                <a:solidFill>
+                  <a:srgbClr val="2C1A0E"/>
+                </a:solidFill>
+                <a:latin typeface="Calibri" pitchFamily="34" charset="0"/>
+                <a:ea typeface="Calibri" pitchFamily="34" charset="-122"/>
+                <a:cs typeface="Calibri" pitchFamily="34" charset="-120"/>
+              </a:rPr>
+              <a:t>Point d'entrée particulier : le serveur démarre, attend 10 secondes, puis télécharge le modèle s'il n'est pas déjà présent.</a:t>
+            </a:r>
+            <a:endParaRPr lang="en-US" sz="1450" dirty="0"/>
+          </a:p>
+          <a:p>
+            <a:pPr marL="342900" indent="-342900">
+              <a:lnSpc>
+                <a:spcPct val="115000"/>
+              </a:lnSpc>
+              <a:spcAft>
+                <a:spcPts val="800"/>
+              </a:spcAft>
+              <a:buSzPct val="100000"/>
+              <a:buChar char="•"/>
+            </a:pPr>
+            <a:r>
+              <a:rPr lang="en-US" sz="1450" dirty="0">
+                <a:solidFill>
+                  <a:srgbClr val="2C1A0E"/>
+                </a:solidFill>
+                <a:latin typeface="Calibri" pitchFamily="34" charset="0"/>
+                <a:ea typeface="Calibri" pitchFamily="34" charset="-122"/>
+                <a:cs typeface="Calibri" pitchFamily="34" charset="-120"/>
+              </a:rPr>
+              <a:t>Le modèle reste ensuite en cache dans le volume nommé ollama_data, qui survit à un docker compose down (sans -v).</a:t>
+            </a:r>
+            <a:endParaRPr lang="en-US" sz="1450" dirty="0"/>
+          </a:p>
+        </p:txBody>
+      </p:sp>
+      <p:sp>
+        <p:nvSpPr>
+          <p:cNvPr id="7" name="Shape 4"/>
+          <p:cNvSpPr/>
+          <p:nvPr/>
+        </p:nvSpPr>
+        <p:spPr>
+          <a:xfrm>
+            <a:off x="548640" y="4064508"/>
+            <a:ext cx="10881360" cy="868680"/>
+          </a:xfrm>
+          <a:prstGeom prst="roundRect">
+            <a:avLst>
+              <a:gd name="adj" fmla="val 8421"/>
+            </a:avLst>
+          </a:prstGeom>
+          <a:solidFill>
+            <a:srgbClr val="F3E9DA"/>
+          </a:solidFill>
+          <a:ln/>
+        </p:spPr>
+      </p:sp>
+      <p:sp>
+        <p:nvSpPr>
+          <p:cNvPr id="8" name="Text 5"/>
+          <p:cNvSpPr txBox="1"/>
+          <p:nvPr/>
+        </p:nvSpPr>
+        <p:spPr>
+          <a:xfrm>
+            <a:off x="868680" y="4201668"/>
+            <a:ext cx="1828800" cy="274320"/>
+          </a:xfrm>
+          <a:prstGeom prst="rect">
+            <a:avLst/>
+          </a:prstGeom>
+          <a:noFill/>
+          <a:ln/>
+        </p:spPr>
+        <p:txBody>
+          <a:bodyPr wrap="square" lIns="0" tIns="0" rIns="0" bIns="0" rtlCol="0" anchor="ctr"/>
+          <a:lstStyle/>
+          <a:p>
+            <a:pPr indent="0" marL="0">
+              <a:buNone/>
+            </a:pPr>
+            <a:r>
+              <a:rPr lang="en-US" sz="1000" b="1" spc="100" kern="0" dirty="0">
+                <a:solidFill>
+                  <a:srgbClr val="B5813F"/>
+                </a:solidFill>
+                <a:latin typeface="Calibri" pitchFamily="34" charset="0"/>
+                <a:ea typeface="Calibri" pitchFamily="34" charset="-122"/>
+                <a:cs typeface="Calibri" pitchFamily="34" charset="-120"/>
+              </a:rPr>
+              <a:t>POURQUOI</a:t>
+            </a:r>
+            <a:endParaRPr lang="en-US" sz="1000" dirty="0"/>
+          </a:p>
+        </p:txBody>
+      </p:sp>
+      <p:sp>
+        <p:nvSpPr>
+          <p:cNvPr id="9" name="Text 6"/>
+          <p:cNvSpPr txBox="1"/>
+          <p:nvPr/>
+        </p:nvSpPr>
+        <p:spPr>
+          <a:xfrm>
+            <a:off x="868680" y="4448556"/>
+            <a:ext cx="10241280" cy="411480"/>
+          </a:xfrm>
+          <a:prstGeom prst="rect">
+            <a:avLst/>
+          </a:prstGeom>
+          <a:noFill/>
+          <a:ln/>
+        </p:spPr>
+        <p:txBody>
+          <a:bodyPr wrap="square" lIns="0" tIns="0" rIns="0" bIns="0" rtlCol="0" anchor="ctr"/>
+          <a:lstStyle/>
+          <a:p>
+            <a:pPr indent="0" marL="0">
+              <a:lnSpc>
+                <a:spcPct val="110000"/>
+              </a:lnSpc>
+              <a:buNone/>
+            </a:pPr>
+            <a:r>
+              <a:rPr lang="en-US" sz="1250" dirty="0">
+                <a:solidFill>
+                  <a:srgbClr val="2C1A0E"/>
+                </a:solidFill>
+                <a:latin typeface="Calibri" pitchFamily="34" charset="0"/>
+                <a:ea typeface="Calibri" pitchFamily="34" charset="-122"/>
+                <a:cs typeface="Calibri" pitchFamily="34" charset="-120"/>
+              </a:rPr>
+              <a:t>Le tout premier démarrage peut prendre plusieurs minutes (téléchargement de quelques Go) — les démarrages suivants sont quasi instantanés.</a:t>
+            </a:r>
+            <a:endParaRPr lang="en-US" sz="1250" dirty="0"/>
+          </a:p>
+        </p:txBody>
+      </p:sp>
+      <p:sp>
+        <p:nvSpPr>
+          <p:cNvPr id="10" name="Text 7"/>
           <p:cNvSpPr txBox="1"/>
           <p:nvPr/>
         </p:nvSpPr>
@@ -23337,7 +24348,7 @@
       </p:sp>
       <p:sp>
         <p:nvSpPr>
-          <p:cNvPr id="7" name="Text 4"/>
+          <p:cNvPr id="11" name="Text 8"/>
           <p:cNvSpPr txBox="1"/>
           <p:nvPr/>
         </p:nvSpPr>
@@ -23414,7 +24425,7 @@
         </p:nvSpPr>
         <p:spPr>
           <a:xfrm>
-            <a:off x="548640" y="411480"/>
+            <a:off x="548640" y="502920"/>
             <a:ext cx="502920" cy="502920"/>
           </a:xfrm>
           <a:prstGeom prst="ellipse">
@@ -23442,7 +24453,7 @@
         </p:blipFill>
         <p:spPr>
           <a:xfrm>
-            <a:off x="608990" y="471830"/>
+            <a:off x="608990" y="563270"/>
             <a:ext cx="382219" cy="382219"/>
           </a:xfrm>
           <a:prstGeom prst="rect">
@@ -23458,8 +24469,8 @@
         </p:nvSpPr>
         <p:spPr>
           <a:xfrm>
-            <a:off x="1170432" y="365760"/>
-            <a:ext cx="8229600" cy="502920"/>
+            <a:off x="1170432" y="457200"/>
+            <a:ext cx="8229600" cy="274320"/>
           </a:xfrm>
           <a:prstGeom prst="rect">
             <a:avLst/>
@@ -23475,7 +24486,46 @@
               <a:buNone/>
             </a:pPr>
             <a:r>
-              <a:rPr lang="en-US" sz="2600" b="1" dirty="0">
+              <a:rPr lang="en-US" sz="1100" spc="150" kern="0" dirty="0">
+                <a:solidFill>
+                  <a:srgbClr val="B5813F"/>
+                </a:solidFill>
+                <a:latin typeface="Calibri" pitchFamily="34" charset="0"/>
+                <a:ea typeface="Calibri" pitchFamily="34" charset="-122"/>
+                <a:cs typeface="Calibri" pitchFamily="34" charset="-120"/>
+              </a:rPr>
+              <a:t>INITIALISATION</a:t>
+            </a:r>
+            <a:endParaRPr lang="en-US" sz="1100" dirty="0"/>
+          </a:p>
+        </p:txBody>
+      </p:sp>
+      <p:sp>
+        <p:nvSpPr>
+          <p:cNvPr id="5" name="Text 2"/>
+          <p:cNvSpPr txBox="1"/>
+          <p:nvPr/>
+        </p:nvSpPr>
+        <p:spPr>
+          <a:xfrm>
+            <a:off x="1152144" y="713232"/>
+            <a:ext cx="9692640" cy="594360"/>
+          </a:xfrm>
+          <a:prstGeom prst="rect">
+            <a:avLst/>
+          </a:prstGeom>
+          <a:noFill/>
+          <a:ln/>
+        </p:spPr>
+        <p:txBody>
+          <a:bodyPr wrap="square" lIns="0" tIns="0" rIns="0" bIns="0" rtlCol="0" anchor="ctr"/>
+          <a:lstStyle/>
+          <a:p>
+            <a:pPr indent="0" marL="0">
+              <a:buNone/>
+            </a:pPr>
+            <a:r>
+              <a:rPr lang="en-US" sz="2400" b="1" dirty="0">
                 <a:solidFill>
                   <a:srgbClr val="2C1A0E"/>
                 </a:solidFill>
@@ -23483,6 +24533,2250 @@
                 <a:ea typeface="Cambria" pitchFamily="34" charset="-122"/>
                 <a:cs typeface="Cambria" pitchFamily="34" charset="-120"/>
               </a:rPr>
+              <a:t>Rôles, administrateur initial &amp; migrations</a:t>
+            </a:r>
+            <a:endParaRPr lang="en-US" sz="2400" dirty="0"/>
+          </a:p>
+        </p:txBody>
+      </p:sp>
+      <p:sp>
+        <p:nvSpPr>
+          <p:cNvPr id="6" name="Text 3"/>
+          <p:cNvSpPr txBox="1"/>
+          <p:nvPr/>
+        </p:nvSpPr>
+        <p:spPr>
+          <a:xfrm>
+            <a:off x="548640" y="2839212"/>
+            <a:ext cx="10881360" cy="868680"/>
+          </a:xfrm>
+          <a:prstGeom prst="rect">
+            <a:avLst/>
+          </a:prstGeom>
+          <a:noFill/>
+          <a:ln/>
+        </p:spPr>
+        <p:txBody>
+          <a:bodyPr wrap="square" lIns="0" tIns="0" rIns="0" bIns="0" rtlCol="0" anchor="ctr"/>
+          <a:lstStyle/>
+          <a:p>
+            <a:pPr marL="342900" indent="-342900">
+              <a:lnSpc>
+                <a:spcPct val="115000"/>
+              </a:lnSpc>
+              <a:spcAft>
+                <a:spcPts val="800"/>
+              </a:spcAft>
+              <a:buSzPct val="100000"/>
+              <a:buChar char="•"/>
+            </a:pPr>
+            <a:r>
+              <a:rPr lang="en-US" sz="1450" dirty="0">
+                <a:solidFill>
+                  <a:srgbClr val="2C1A0E"/>
+                </a:solidFill>
+                <a:latin typeface="Calibri" pitchFamily="34" charset="0"/>
+                <a:ea typeface="Calibri" pitchFamily="34" charset="-122"/>
+                <a:cs typeface="Calibri" pitchFamily="34" charset="-120"/>
+              </a:rPr>
+              <a:t>PostgreSQL attend seulement d'être joignable — c'est "app", à SON PROPRE démarrage, qui applique le schéma (Flyway).</a:t>
+            </a:r>
+            <a:endParaRPr lang="en-US" sz="1450" dirty="0"/>
+          </a:p>
+          <a:p>
+            <a:pPr marL="342900" indent="-342900">
+              <a:lnSpc>
+                <a:spcPct val="115000"/>
+              </a:lnSpc>
+              <a:spcAft>
+                <a:spcPts val="800"/>
+              </a:spcAft>
+              <a:buSzPct val="100000"/>
+              <a:buChar char="•"/>
+            </a:pPr>
+            <a:r>
+              <a:rPr lang="en-US" sz="1450" dirty="0">
+                <a:solidFill>
+                  <a:srgbClr val="2C1A0E"/>
+                </a:solidFill>
+                <a:latin typeface="Calibri" pitchFamily="34" charset="0"/>
+                <a:ea typeface="Calibri" pitchFamily="34" charset="-122"/>
+                <a:cs typeface="Calibri" pitchFamily="34" charset="-120"/>
+              </a:rPr>
+              <a:t>Les 4 rôles sont créés s'ils manquent, puis l'admin initial SI configuré via .env (INITIAL_ADMIN_EMAIL/PASSWORD).</a:t>
+            </a:r>
+            <a:endParaRPr lang="en-US" sz="1450" dirty="0"/>
+          </a:p>
+        </p:txBody>
+      </p:sp>
+      <p:sp>
+        <p:nvSpPr>
+          <p:cNvPr id="7" name="Shape 4"/>
+          <p:cNvSpPr/>
+          <p:nvPr/>
+        </p:nvSpPr>
+        <p:spPr>
+          <a:xfrm>
+            <a:off x="548640" y="3927348"/>
+            <a:ext cx="10881360" cy="1143000"/>
+          </a:xfrm>
+          <a:prstGeom prst="roundRect">
+            <a:avLst>
+              <a:gd name="adj" fmla="val 6400"/>
+            </a:avLst>
+          </a:prstGeom>
+          <a:solidFill>
+            <a:srgbClr val="F3E9DA"/>
+          </a:solidFill>
+          <a:ln/>
+        </p:spPr>
+      </p:sp>
+      <p:sp>
+        <p:nvSpPr>
+          <p:cNvPr id="8" name="Text 5"/>
+          <p:cNvSpPr txBox="1"/>
+          <p:nvPr/>
+        </p:nvSpPr>
+        <p:spPr>
+          <a:xfrm>
+            <a:off x="868680" y="4064508"/>
+            <a:ext cx="1828800" cy="274320"/>
+          </a:xfrm>
+          <a:prstGeom prst="rect">
+            <a:avLst/>
+          </a:prstGeom>
+          <a:noFill/>
+          <a:ln/>
+        </p:spPr>
+        <p:txBody>
+          <a:bodyPr wrap="square" lIns="0" tIns="0" rIns="0" bIns="0" rtlCol="0" anchor="ctr"/>
+          <a:lstStyle/>
+          <a:p>
+            <a:pPr indent="0" marL="0">
+              <a:buNone/>
+            </a:pPr>
+            <a:r>
+              <a:rPr lang="en-US" sz="1000" b="1" spc="100" kern="0" dirty="0">
+                <a:solidFill>
+                  <a:srgbClr val="B5813F"/>
+                </a:solidFill>
+                <a:latin typeface="Calibri" pitchFamily="34" charset="0"/>
+                <a:ea typeface="Calibri" pitchFamily="34" charset="-122"/>
+                <a:cs typeface="Calibri" pitchFamily="34" charset="-120"/>
+              </a:rPr>
+              <a:t>POURQUOI</a:t>
+            </a:r>
+            <a:endParaRPr lang="en-US" sz="1000" dirty="0"/>
+          </a:p>
+        </p:txBody>
+      </p:sp>
+      <p:sp>
+        <p:nvSpPr>
+          <p:cNvPr id="9" name="Text 6"/>
+          <p:cNvSpPr txBox="1"/>
+          <p:nvPr/>
+        </p:nvSpPr>
+        <p:spPr>
+          <a:xfrm>
+            <a:off x="868680" y="4311396"/>
+            <a:ext cx="10241280" cy="685800"/>
+          </a:xfrm>
+          <a:prstGeom prst="rect">
+            <a:avLst/>
+          </a:prstGeom>
+          <a:noFill/>
+          <a:ln/>
+        </p:spPr>
+        <p:txBody>
+          <a:bodyPr wrap="square" lIns="0" tIns="0" rIns="0" bIns="0" rtlCol="0" anchor="ctr"/>
+          <a:lstStyle/>
+          <a:p>
+            <a:pPr indent="0" marL="0">
+              <a:lnSpc>
+                <a:spcPct val="110000"/>
+              </a:lnSpc>
+              <a:buNone/>
+            </a:pPr>
+            <a:r>
+              <a:rPr lang="en-US" sz="1250" dirty="0">
+                <a:solidFill>
+                  <a:srgbClr val="2C1A0E"/>
+                </a:solidFill>
+                <a:latin typeface="Calibri" pitchFamily="34" charset="0"/>
+                <a:ea typeface="Calibri" pitchFamily="34" charset="-122"/>
+                <a:cs typeface="Calibri" pitchFamily="34" charset="-120"/>
+              </a:rPr>
+              <a:t>Sans ces variables, l'application démarre volontairement sans administrateur — un assistant public temporaire (/api/public/setup) prend le relais au premier accès, et se referme définitivement dès qu'un admin existe.</a:t>
+            </a:r>
+            <a:endParaRPr lang="en-US" sz="1250" dirty="0"/>
+          </a:p>
+        </p:txBody>
+      </p:sp>
+      <p:sp>
+        <p:nvSpPr>
+          <p:cNvPr id="10" name="Text 7"/>
+          <p:cNvSpPr txBox="1"/>
+          <p:nvPr/>
+        </p:nvSpPr>
+        <p:spPr>
+          <a:xfrm>
+            <a:off x="457200" y="6510528"/>
+            <a:ext cx="7315200" cy="274320"/>
+          </a:xfrm>
+          <a:prstGeom prst="rect">
+            <a:avLst/>
+          </a:prstGeom>
+          <a:noFill/>
+          <a:ln/>
+        </p:spPr>
+        <p:txBody>
+          <a:bodyPr wrap="square" lIns="0" tIns="0" rIns="0" bIns="0" rtlCol="0" anchor="ctr"/>
+          <a:lstStyle/>
+          <a:p>
+            <a:pPr indent="0" marL="0">
+              <a:buNone/>
+            </a:pPr>
+            <a:r>
+              <a:rPr lang="en-US" sz="900" dirty="0">
+                <a:solidFill>
+                  <a:srgbClr val="7C6552"/>
+                </a:solidFill>
+                <a:latin typeface="Calibri" pitchFamily="34" charset="0"/>
+                <a:ea typeface="Calibri" pitchFamily="34" charset="-122"/>
+                <a:cs typeface="Calibri" pitchFamily="34" charset="-120"/>
+              </a:rPr>
+              <a:t>MadeArchive — Documentation technique</a:t>
+            </a:r>
+            <a:endParaRPr lang="en-US" sz="900" dirty="0"/>
+          </a:p>
+        </p:txBody>
+      </p:sp>
+      <p:sp>
+        <p:nvSpPr>
+          <p:cNvPr id="11" name="Text 8"/>
+          <p:cNvSpPr txBox="1"/>
+          <p:nvPr/>
+        </p:nvSpPr>
+        <p:spPr>
+          <a:xfrm>
+            <a:off x="11338560" y="6510528"/>
+            <a:ext cx="457200" cy="274320"/>
+          </a:xfrm>
+          <a:prstGeom prst="rect">
+            <a:avLst/>
+          </a:prstGeom>
+          <a:noFill/>
+          <a:ln/>
+        </p:spPr>
+        <p:txBody>
+          <a:bodyPr wrap="square" lIns="0" tIns="0" rIns="0" bIns="0" rtlCol="0" anchor="ctr"/>
+          <a:lstStyle/>
+          <a:p>
+            <a:pPr algn="r" indent="0" marL="0">
+              <a:buNone/>
+            </a:pPr>
+            <a:r>
+              <a:rPr lang="en-US" sz="900" dirty="0">
+                <a:solidFill>
+                  <a:srgbClr val="7C6552"/>
+                </a:solidFill>
+                <a:latin typeface="Calibri" pitchFamily="34" charset="0"/>
+                <a:ea typeface="Calibri" pitchFamily="34" charset="-122"/>
+                <a:cs typeface="Calibri" pitchFamily="34" charset="-120"/>
+              </a:rPr>
+              <a:t>47</a:t>
+            </a:r>
+            <a:endParaRPr lang="en-US" sz="900" dirty="0"/>
+          </a:p>
+        </p:txBody>
+      </p:sp>
+    </p:spTree>
+  </p:cSld>
+  <p:clrMapOvr>
+    <a:masterClrMapping/>
+  </p:clrMapOvr>
+</p:sld>
+</file>
+
+<file path=ppt/slides/slide48.xml><?xml version="1.0" encoding="utf-8"?>
+<p:sld xmlns:a="http://schemas.openxmlformats.org/drawingml/2006/main" xmlns:r="http://schemas.openxmlformats.org/officeDocument/2006/relationships" xmlns:p="http://schemas.openxmlformats.org/presentationml/2006/main">
+  <p:cSld name="Slide 48">
+    <p:bg>
+      <p:bgPr>
+        <a:solidFill>
+          <a:srgbClr val="FFFFFF"/>
+        </a:solidFill>
+      </p:bgPr>
+    </p:bg>
+    <p:spTree>
+      <p:nvGrpSpPr>
+        <p:cNvPr id="1" name=""/>
+        <p:cNvGrpSpPr/>
+        <p:nvPr/>
+      </p:nvGrpSpPr>
+      <p:grpSpPr>
+        <a:xfrm>
+          <a:off x="0" y="0"/>
+          <a:ext cx="0" cy="0"/>
+          <a:chOff x="0" y="0"/>
+          <a:chExt cx="0" cy="0"/>
+        </a:xfrm>
+      </p:grpSpPr>
+      <p:sp>
+        <p:nvSpPr>
+          <p:cNvPr id="2" name="Shape 0"/>
+          <p:cNvSpPr/>
+          <p:nvPr/>
+        </p:nvSpPr>
+        <p:spPr>
+          <a:xfrm>
+            <a:off x="548640" y="502920"/>
+            <a:ext cx="502920" cy="502920"/>
+          </a:xfrm>
+          <a:prstGeom prst="ellipse">
+            <a:avLst/>
+          </a:prstGeom>
+          <a:solidFill>
+            <a:srgbClr val="B5813F"/>
+          </a:solidFill>
+          <a:ln/>
+        </p:spPr>
+      </p:sp>
+      <p:pic>
+        <p:nvPicPr>
+          <p:cNvPr id="3" name="Image 0" descr="preencoded.png">    </p:cNvPr>
+          <p:cNvPicPr>
+            <a:picLocks noChangeAspect="1"/>
+          </p:cNvPicPr>
+          <p:nvPr/>
+        </p:nvPicPr>
+        <p:blipFill>
+          <a:blip r:embed="rId1"/>
+          <a:stretch>
+            <a:fillRect/>
+          </a:stretch>
+        </p:blipFill>
+        <p:spPr>
+          <a:xfrm>
+            <a:off x="608990" y="563270"/>
+            <a:ext cx="382219" cy="382219"/>
+          </a:xfrm>
+          <a:prstGeom prst="rect">
+            <a:avLst/>
+          </a:prstGeom>
+        </p:spPr>
+      </p:pic>
+      <p:sp>
+        <p:nvSpPr>
+          <p:cNvPr id="4" name="Text 1"/>
+          <p:cNvSpPr txBox="1"/>
+          <p:nvPr/>
+        </p:nvSpPr>
+        <p:spPr>
+          <a:xfrm>
+            <a:off x="1170432" y="457200"/>
+            <a:ext cx="8229600" cy="274320"/>
+          </a:xfrm>
+          <a:prstGeom prst="rect">
+            <a:avLst/>
+          </a:prstGeom>
+          <a:noFill/>
+          <a:ln/>
+        </p:spPr>
+        <p:txBody>
+          <a:bodyPr wrap="square" lIns="0" tIns="0" rIns="0" bIns="0" rtlCol="0" anchor="ctr"/>
+          <a:lstStyle/>
+          <a:p>
+            <a:pPr indent="0" marL="0">
+              <a:buNone/>
+            </a:pPr>
+            <a:r>
+              <a:rPr lang="en-US" sz="1100" spc="150" kern="0" dirty="0">
+                <a:solidFill>
+                  <a:srgbClr val="B5813F"/>
+                </a:solidFill>
+                <a:latin typeface="Calibri" pitchFamily="34" charset="0"/>
+                <a:ea typeface="Calibri" pitchFamily="34" charset="-122"/>
+                <a:cs typeface="Calibri" pitchFamily="34" charset="-120"/>
+              </a:rPr>
+              <a:t>INITIALISATION</a:t>
+            </a:r>
+            <a:endParaRPr lang="en-US" sz="1100" dirty="0"/>
+          </a:p>
+        </p:txBody>
+      </p:sp>
+      <p:sp>
+        <p:nvSpPr>
+          <p:cNvPr id="5" name="Text 2"/>
+          <p:cNvSpPr txBox="1"/>
+          <p:nvPr/>
+        </p:nvSpPr>
+        <p:spPr>
+          <a:xfrm>
+            <a:off x="1152144" y="713232"/>
+            <a:ext cx="9692640" cy="594360"/>
+          </a:xfrm>
+          <a:prstGeom prst="rect">
+            <a:avLst/>
+          </a:prstGeom>
+          <a:noFill/>
+          <a:ln/>
+        </p:spPr>
+        <p:txBody>
+          <a:bodyPr wrap="square" lIns="0" tIns="0" rIns="0" bIns="0" rtlCol="0" anchor="ctr"/>
+          <a:lstStyle/>
+          <a:p>
+            <a:pPr indent="0" marL="0">
+              <a:buNone/>
+            </a:pPr>
+            <a:r>
+              <a:rPr lang="en-US" sz="2400" b="1" dirty="0">
+                <a:solidFill>
+                  <a:srgbClr val="2C1A0E"/>
+                </a:solidFill>
+                <a:latin typeface="Cambria" pitchFamily="34" charset="0"/>
+                <a:ea typeface="Cambria" pitchFamily="34" charset="-122"/>
+                <a:cs typeface="Cambria" pitchFamily="34" charset="-120"/>
+              </a:rPr>
+              <a:t>MinIO et Meilisearch : pas d'étape d'initialisation séparée</a:t>
+            </a:r>
+            <a:endParaRPr lang="en-US" sz="2400" dirty="0"/>
+          </a:p>
+        </p:txBody>
+      </p:sp>
+      <p:sp>
+        <p:nvSpPr>
+          <p:cNvPr id="6" name="Text 3"/>
+          <p:cNvSpPr txBox="1"/>
+          <p:nvPr/>
+        </p:nvSpPr>
+        <p:spPr>
+          <a:xfrm>
+            <a:off x="548640" y="3520440"/>
+            <a:ext cx="10881360" cy="868680"/>
+          </a:xfrm>
+          <a:prstGeom prst="rect">
+            <a:avLst/>
+          </a:prstGeom>
+          <a:noFill/>
+          <a:ln/>
+        </p:spPr>
+        <p:txBody>
+          <a:bodyPr wrap="square" lIns="0" tIns="0" rIns="0" bIns="0" rtlCol="0" anchor="ctr"/>
+          <a:lstStyle/>
+          <a:p>
+            <a:pPr marL="342900" indent="-342900">
+              <a:lnSpc>
+                <a:spcPct val="115000"/>
+              </a:lnSpc>
+              <a:spcAft>
+                <a:spcPts val="800"/>
+              </a:spcAft>
+              <a:buSzPct val="100000"/>
+              <a:buChar char="•"/>
+            </a:pPr>
+            <a:r>
+              <a:rPr lang="en-US" sz="1450" dirty="0">
+                <a:solidFill>
+                  <a:srgbClr val="2C1A0E"/>
+                </a:solidFill>
+                <a:latin typeface="Calibri" pitchFamily="34" charset="0"/>
+                <a:ea typeface="Calibri" pitchFamily="34" charset="-122"/>
+                <a:cs typeface="Calibri" pitchFamily="34" charset="-120"/>
+              </a:rPr>
+              <a:t>Le bucket MinIO est vérifié — et créé s'il manque — à chaque appel du client, pas une fois au démarrage.</a:t>
+            </a:r>
+            <a:endParaRPr lang="en-US" sz="1450" dirty="0"/>
+          </a:p>
+          <a:p>
+            <a:pPr marL="342900" indent="-342900">
+              <a:lnSpc>
+                <a:spcPct val="115000"/>
+              </a:lnSpc>
+              <a:spcAft>
+                <a:spcPts val="800"/>
+              </a:spcAft>
+              <a:buSzPct val="100000"/>
+              <a:buChar char="•"/>
+            </a:pPr>
+            <a:r>
+              <a:rPr lang="en-US" sz="1450" dirty="0">
+                <a:solidFill>
+                  <a:srgbClr val="2C1A0E"/>
+                </a:solidFill>
+                <a:latin typeface="Calibri" pitchFamily="34" charset="0"/>
+                <a:ea typeface="Calibri" pitchFamily="34" charset="-122"/>
+                <a:cs typeface="Calibri" pitchFamily="34" charset="-120"/>
+              </a:rPr>
+              <a:t>L'index Meilisearch se remplit au fil des archivages, ou par une resynchronisation manuelle (ADMIN) s'il doit être reconstruit.</a:t>
+            </a:r>
+            <a:endParaRPr lang="en-US" sz="1450" dirty="0"/>
+          </a:p>
+        </p:txBody>
+      </p:sp>
+      <p:sp>
+        <p:nvSpPr>
+          <p:cNvPr id="7" name="Text 4"/>
+          <p:cNvSpPr txBox="1"/>
+          <p:nvPr/>
+        </p:nvSpPr>
+        <p:spPr>
+          <a:xfrm>
+            <a:off x="457200" y="6510528"/>
+            <a:ext cx="7315200" cy="274320"/>
+          </a:xfrm>
+          <a:prstGeom prst="rect">
+            <a:avLst/>
+          </a:prstGeom>
+          <a:noFill/>
+          <a:ln/>
+        </p:spPr>
+        <p:txBody>
+          <a:bodyPr wrap="square" lIns="0" tIns="0" rIns="0" bIns="0" rtlCol="0" anchor="ctr"/>
+          <a:lstStyle/>
+          <a:p>
+            <a:pPr indent="0" marL="0">
+              <a:buNone/>
+            </a:pPr>
+            <a:r>
+              <a:rPr lang="en-US" sz="900" dirty="0">
+                <a:solidFill>
+                  <a:srgbClr val="7C6552"/>
+                </a:solidFill>
+                <a:latin typeface="Calibri" pitchFamily="34" charset="0"/>
+                <a:ea typeface="Calibri" pitchFamily="34" charset="-122"/>
+                <a:cs typeface="Calibri" pitchFamily="34" charset="-120"/>
+              </a:rPr>
+              <a:t>MadeArchive — Documentation technique</a:t>
+            </a:r>
+            <a:endParaRPr lang="en-US" sz="900" dirty="0"/>
+          </a:p>
+        </p:txBody>
+      </p:sp>
+      <p:sp>
+        <p:nvSpPr>
+          <p:cNvPr id="8" name="Text 5"/>
+          <p:cNvSpPr txBox="1"/>
+          <p:nvPr/>
+        </p:nvSpPr>
+        <p:spPr>
+          <a:xfrm>
+            <a:off x="11338560" y="6510528"/>
+            <a:ext cx="457200" cy="274320"/>
+          </a:xfrm>
+          <a:prstGeom prst="rect">
+            <a:avLst/>
+          </a:prstGeom>
+          <a:noFill/>
+          <a:ln/>
+        </p:spPr>
+        <p:txBody>
+          <a:bodyPr wrap="square" lIns="0" tIns="0" rIns="0" bIns="0" rtlCol="0" anchor="ctr"/>
+          <a:lstStyle/>
+          <a:p>
+            <a:pPr algn="r" indent="0" marL="0">
+              <a:buNone/>
+            </a:pPr>
+            <a:r>
+              <a:rPr lang="en-US" sz="900" dirty="0">
+                <a:solidFill>
+                  <a:srgbClr val="7C6552"/>
+                </a:solidFill>
+                <a:latin typeface="Calibri" pitchFamily="34" charset="0"/>
+                <a:ea typeface="Calibri" pitchFamily="34" charset="-122"/>
+                <a:cs typeface="Calibri" pitchFamily="34" charset="-120"/>
+              </a:rPr>
+              <a:t>48</a:t>
+            </a:r>
+            <a:endParaRPr lang="en-US" sz="900" dirty="0"/>
+          </a:p>
+        </p:txBody>
+      </p:sp>
+    </p:spTree>
+  </p:cSld>
+  <p:clrMapOvr>
+    <a:masterClrMapping/>
+  </p:clrMapOvr>
+</p:sld>
+</file>
+
+<file path=ppt/slides/slide49.xml><?xml version="1.0" encoding="utf-8"?>
+<p:sld xmlns:a="http://schemas.openxmlformats.org/drawingml/2006/main" xmlns:r="http://schemas.openxmlformats.org/officeDocument/2006/relationships" xmlns:p="http://schemas.openxmlformats.org/presentationml/2006/main">
+  <p:cSld name="Slide 49">
+    <p:bg>
+      <p:bgPr>
+        <a:solidFill>
+          <a:srgbClr val="FFFFFF"/>
+        </a:solidFill>
+      </p:bgPr>
+    </p:bg>
+    <p:spTree>
+      <p:nvGrpSpPr>
+        <p:cNvPr id="1" name=""/>
+        <p:cNvGrpSpPr/>
+        <p:nvPr/>
+      </p:nvGrpSpPr>
+      <p:grpSpPr>
+        <a:xfrm>
+          <a:off x="0" y="0"/>
+          <a:ext cx="0" cy="0"/>
+          <a:chOff x="0" y="0"/>
+          <a:chExt cx="0" cy="0"/>
+        </a:xfrm>
+      </p:grpSpPr>
+      <p:sp>
+        <p:nvSpPr>
+          <p:cNvPr id="2" name="Shape 0"/>
+          <p:cNvSpPr/>
+          <p:nvPr/>
+        </p:nvSpPr>
+        <p:spPr>
+          <a:xfrm>
+            <a:off x="548640" y="502920"/>
+            <a:ext cx="502920" cy="502920"/>
+          </a:xfrm>
+          <a:prstGeom prst="ellipse">
+            <a:avLst/>
+          </a:prstGeom>
+          <a:solidFill>
+            <a:srgbClr val="B5813F"/>
+          </a:solidFill>
+          <a:ln/>
+        </p:spPr>
+      </p:sp>
+      <p:pic>
+        <p:nvPicPr>
+          <p:cNvPr id="3" name="Image 0" descr="preencoded.png">    </p:cNvPr>
+          <p:cNvPicPr>
+            <a:picLocks noChangeAspect="1"/>
+          </p:cNvPicPr>
+          <p:nvPr/>
+        </p:nvPicPr>
+        <p:blipFill>
+          <a:blip r:embed="rId1"/>
+          <a:stretch>
+            <a:fillRect/>
+          </a:stretch>
+        </p:blipFill>
+        <p:spPr>
+          <a:xfrm>
+            <a:off x="608990" y="563270"/>
+            <a:ext cx="382219" cy="382219"/>
+          </a:xfrm>
+          <a:prstGeom prst="rect">
+            <a:avLst/>
+          </a:prstGeom>
+        </p:spPr>
+      </p:pic>
+      <p:sp>
+        <p:nvSpPr>
+          <p:cNvPr id="4" name="Text 1"/>
+          <p:cNvSpPr txBox="1"/>
+          <p:nvPr/>
+        </p:nvSpPr>
+        <p:spPr>
+          <a:xfrm>
+            <a:off x="1170432" y="457200"/>
+            <a:ext cx="8229600" cy="274320"/>
+          </a:xfrm>
+          <a:prstGeom prst="rect">
+            <a:avLst/>
+          </a:prstGeom>
+          <a:noFill/>
+          <a:ln/>
+        </p:spPr>
+        <p:txBody>
+          <a:bodyPr wrap="square" lIns="0" tIns="0" rIns="0" bIns="0" rtlCol="0" anchor="ctr"/>
+          <a:lstStyle/>
+          <a:p>
+            <a:pPr indent="0" marL="0">
+              <a:buNone/>
+            </a:pPr>
+            <a:r>
+              <a:rPr lang="en-US" sz="1100" spc="150" kern="0" dirty="0">
+                <a:solidFill>
+                  <a:srgbClr val="B5813F"/>
+                </a:solidFill>
+                <a:latin typeface="Calibri" pitchFamily="34" charset="0"/>
+                <a:ea typeface="Calibri" pitchFamily="34" charset="-122"/>
+                <a:cs typeface="Calibri" pitchFamily="34" charset="-120"/>
+              </a:rPr>
+              <a:t>MISE À L'ÉCHELLE</a:t>
+            </a:r>
+            <a:endParaRPr lang="en-US" sz="1100" dirty="0"/>
+          </a:p>
+        </p:txBody>
+      </p:sp>
+      <p:sp>
+        <p:nvSpPr>
+          <p:cNvPr id="5" name="Text 2"/>
+          <p:cNvSpPr txBox="1"/>
+          <p:nvPr/>
+        </p:nvSpPr>
+        <p:spPr>
+          <a:xfrm>
+            <a:off x="1152144" y="713232"/>
+            <a:ext cx="9692640" cy="594360"/>
+          </a:xfrm>
+          <a:prstGeom prst="rect">
+            <a:avLst/>
+          </a:prstGeom>
+          <a:noFill/>
+          <a:ln/>
+        </p:spPr>
+        <p:txBody>
+          <a:bodyPr wrap="square" lIns="0" tIns="0" rIns="0" bIns="0" rtlCol="0" anchor="ctr"/>
+          <a:lstStyle/>
+          <a:p>
+            <a:pPr indent="0" marL="0">
+              <a:buNone/>
+            </a:pPr>
+            <a:r>
+              <a:rPr lang="en-US" sz="2400" b="1" dirty="0">
+                <a:solidFill>
+                  <a:srgbClr val="2C1A0E"/>
+                </a:solidFill>
+                <a:latin typeface="Cambria" pitchFamily="34" charset="0"/>
+                <a:ea typeface="Cambria" pitchFamily="34" charset="-122"/>
+                <a:cs typeface="Cambria" pitchFamily="34" charset="-120"/>
+              </a:rPr>
+              <a:t>Plusieurs instances de l'API (app)</a:t>
+            </a:r>
+            <a:endParaRPr lang="en-US" sz="2400" dirty="0"/>
+          </a:p>
+        </p:txBody>
+      </p:sp>
+      <p:sp>
+        <p:nvSpPr>
+          <p:cNvPr id="6" name="Text 3"/>
+          <p:cNvSpPr txBox="1"/>
+          <p:nvPr/>
+        </p:nvSpPr>
+        <p:spPr>
+          <a:xfrm>
+            <a:off x="548640" y="2793492"/>
+            <a:ext cx="10881360" cy="868680"/>
+          </a:xfrm>
+          <a:prstGeom prst="rect">
+            <a:avLst/>
+          </a:prstGeom>
+          <a:noFill/>
+          <a:ln/>
+        </p:spPr>
+        <p:txBody>
+          <a:bodyPr wrap="square" lIns="0" tIns="0" rIns="0" bIns="0" rtlCol="0" anchor="ctr"/>
+          <a:lstStyle/>
+          <a:p>
+            <a:pPr marL="342900" indent="-342900">
+              <a:lnSpc>
+                <a:spcPct val="115000"/>
+              </a:lnSpc>
+              <a:spcAft>
+                <a:spcPts val="800"/>
+              </a:spcAft>
+              <a:buSzPct val="100000"/>
+              <a:buChar char="•"/>
+            </a:pPr>
+            <a:r>
+              <a:rPr lang="en-US" sz="1450" dirty="0">
+                <a:solidFill>
+                  <a:srgbClr val="2C1A0E"/>
+                </a:solidFill>
+                <a:latin typeface="Calibri" pitchFamily="34" charset="0"/>
+                <a:ea typeface="Calibri" pitchFamily="34" charset="-122"/>
+                <a:cs typeface="Calibri" pitchFamily="34" charset="-120"/>
+              </a:rPr>
+              <a:t>Déjà centralisé et prêt : PostgreSQL, MinIO, Meilisearch, Redis, le volume HSM — une 2e instance y accède exactement comme la première.</a:t>
+            </a:r>
+            <a:endParaRPr lang="en-US" sz="1450" dirty="0"/>
+          </a:p>
+          <a:p>
+            <a:pPr marL="342900" indent="-342900">
+              <a:lnSpc>
+                <a:spcPct val="115000"/>
+              </a:lnSpc>
+              <a:spcAft>
+                <a:spcPts val="800"/>
+              </a:spcAft>
+              <a:buSzPct val="100000"/>
+              <a:buChar char="•"/>
+            </a:pPr>
+            <a:r>
+              <a:rPr lang="en-US" sz="1450" dirty="0">
+                <a:solidFill>
+                  <a:srgbClr val="2C1A0E"/>
+                </a:solidFill>
+                <a:latin typeface="Calibri" pitchFamily="34" charset="0"/>
+                <a:ea typeface="Calibri" pitchFamily="34" charset="-122"/>
+                <a:cs typeface="Calibri" pitchFamily="34" charset="-120"/>
+              </a:rPr>
+              <a:t>Le cache d'authentification est déjà dans Redis, pas en mémoire locale — un utilisateur peut changer d'instance sans se reconnecter.</a:t>
+            </a:r>
+            <a:endParaRPr lang="en-US" sz="1450" dirty="0"/>
+          </a:p>
+        </p:txBody>
+      </p:sp>
+      <p:sp>
+        <p:nvSpPr>
+          <p:cNvPr id="7" name="Shape 4"/>
+          <p:cNvSpPr/>
+          <p:nvPr/>
+        </p:nvSpPr>
+        <p:spPr>
+          <a:xfrm>
+            <a:off x="548640" y="3881628"/>
+            <a:ext cx="10881360" cy="1234440"/>
+          </a:xfrm>
+          <a:prstGeom prst="roundRect">
+            <a:avLst>
+              <a:gd name="adj" fmla="val 5926"/>
+            </a:avLst>
+          </a:prstGeom>
+          <a:solidFill>
+            <a:srgbClr val="FBE6D6"/>
+          </a:solidFill>
+          <a:ln/>
+        </p:spPr>
+      </p:sp>
+      <p:sp>
+        <p:nvSpPr>
+          <p:cNvPr id="8" name="Text 5"/>
+          <p:cNvSpPr txBox="1"/>
+          <p:nvPr/>
+        </p:nvSpPr>
+        <p:spPr>
+          <a:xfrm>
+            <a:off x="868680" y="4018788"/>
+            <a:ext cx="2743200" cy="274320"/>
+          </a:xfrm>
+          <a:prstGeom prst="rect">
+            <a:avLst/>
+          </a:prstGeom>
+          <a:noFill/>
+          <a:ln/>
+        </p:spPr>
+        <p:txBody>
+          <a:bodyPr wrap="square" lIns="0" tIns="0" rIns="0" bIns="0" rtlCol="0" anchor="ctr"/>
+          <a:lstStyle/>
+          <a:p>
+            <a:pPr indent="0" marL="0">
+              <a:buNone/>
+            </a:pPr>
+            <a:r>
+              <a:rPr lang="en-US" sz="1000" b="1" spc="100" kern="0" dirty="0">
+                <a:solidFill>
+                  <a:srgbClr val="A34E12"/>
+                </a:solidFill>
+                <a:latin typeface="Calibri" pitchFamily="34" charset="0"/>
+                <a:ea typeface="Calibri" pitchFamily="34" charset="-122"/>
+                <a:cs typeface="Calibri" pitchFamily="34" charset="-120"/>
+              </a:rPr>
+              <a:t>LIMITE CONNUE</a:t>
+            </a:r>
+            <a:endParaRPr lang="en-US" sz="1000" dirty="0"/>
+          </a:p>
+        </p:txBody>
+      </p:sp>
+      <p:sp>
+        <p:nvSpPr>
+          <p:cNvPr id="9" name="Text 6"/>
+          <p:cNvSpPr txBox="1"/>
+          <p:nvPr/>
+        </p:nvSpPr>
+        <p:spPr>
+          <a:xfrm>
+            <a:off x="868680" y="4265676"/>
+            <a:ext cx="10241280" cy="777240"/>
+          </a:xfrm>
+          <a:prstGeom prst="rect">
+            <a:avLst/>
+          </a:prstGeom>
+          <a:noFill/>
+          <a:ln/>
+        </p:spPr>
+        <p:txBody>
+          <a:bodyPr wrap="square" lIns="0" tIns="0" rIns="0" bIns="0" rtlCol="0" anchor="ctr"/>
+          <a:lstStyle/>
+          <a:p>
+            <a:pPr indent="0" marL="0">
+              <a:lnSpc>
+                <a:spcPct val="110000"/>
+              </a:lnSpc>
+              <a:buNone/>
+            </a:pPr>
+            <a:r>
+              <a:rPr lang="en-US" sz="1250" dirty="0">
+                <a:solidFill>
+                  <a:srgbClr val="2C1A0E"/>
+                </a:solidFill>
+                <a:latin typeface="Calibri" pitchFamily="34" charset="0"/>
+                <a:ea typeface="Calibri" pitchFamily="34" charset="-122"/>
+                <a:cs typeface="Calibri" pitchFamily="34" charset="-120"/>
+              </a:rPr>
+              <a:t>OcrSessionCache (sessions Phase 1 → Phase 2) vit en mémoire du process Java, propre à CHAQUE instance. Si la Phase 2 atterrit sur une autre instance que la Phase 1, l'archivage échoue avec "session introuvable" — à migrer vers Redis avant toute mise à l'échelle, pas hypothétique.</a:t>
+            </a:r>
+            <a:endParaRPr lang="en-US" sz="1250" dirty="0"/>
+          </a:p>
+        </p:txBody>
+      </p:sp>
+      <p:sp>
+        <p:nvSpPr>
+          <p:cNvPr id="10" name="Text 7"/>
+          <p:cNvSpPr txBox="1"/>
+          <p:nvPr/>
+        </p:nvSpPr>
+        <p:spPr>
+          <a:xfrm>
+            <a:off x="457200" y="6510528"/>
+            <a:ext cx="7315200" cy="274320"/>
+          </a:xfrm>
+          <a:prstGeom prst="rect">
+            <a:avLst/>
+          </a:prstGeom>
+          <a:noFill/>
+          <a:ln/>
+        </p:spPr>
+        <p:txBody>
+          <a:bodyPr wrap="square" lIns="0" tIns="0" rIns="0" bIns="0" rtlCol="0" anchor="ctr"/>
+          <a:lstStyle/>
+          <a:p>
+            <a:pPr indent="0" marL="0">
+              <a:buNone/>
+            </a:pPr>
+            <a:r>
+              <a:rPr lang="en-US" sz="900" dirty="0">
+                <a:solidFill>
+                  <a:srgbClr val="7C6552"/>
+                </a:solidFill>
+                <a:latin typeface="Calibri" pitchFamily="34" charset="0"/>
+                <a:ea typeface="Calibri" pitchFamily="34" charset="-122"/>
+                <a:cs typeface="Calibri" pitchFamily="34" charset="-120"/>
+              </a:rPr>
+              <a:t>MadeArchive — Documentation technique</a:t>
+            </a:r>
+            <a:endParaRPr lang="en-US" sz="900" dirty="0"/>
+          </a:p>
+        </p:txBody>
+      </p:sp>
+      <p:sp>
+        <p:nvSpPr>
+          <p:cNvPr id="11" name="Text 8"/>
+          <p:cNvSpPr txBox="1"/>
+          <p:nvPr/>
+        </p:nvSpPr>
+        <p:spPr>
+          <a:xfrm>
+            <a:off x="11338560" y="6510528"/>
+            <a:ext cx="457200" cy="274320"/>
+          </a:xfrm>
+          <a:prstGeom prst="rect">
+            <a:avLst/>
+          </a:prstGeom>
+          <a:noFill/>
+          <a:ln/>
+        </p:spPr>
+        <p:txBody>
+          <a:bodyPr wrap="square" lIns="0" tIns="0" rIns="0" bIns="0" rtlCol="0" anchor="ctr"/>
+          <a:lstStyle/>
+          <a:p>
+            <a:pPr algn="r" indent="0" marL="0">
+              <a:buNone/>
+            </a:pPr>
+            <a:r>
+              <a:rPr lang="en-US" sz="900" dirty="0">
+                <a:solidFill>
+                  <a:srgbClr val="7C6552"/>
+                </a:solidFill>
+                <a:latin typeface="Calibri" pitchFamily="34" charset="0"/>
+                <a:ea typeface="Calibri" pitchFamily="34" charset="-122"/>
+                <a:cs typeface="Calibri" pitchFamily="34" charset="-120"/>
+              </a:rPr>
+              <a:t>49</a:t>
+            </a:r>
+            <a:endParaRPr lang="en-US" sz="900" dirty="0"/>
+          </a:p>
+        </p:txBody>
+      </p:sp>
+    </p:spTree>
+  </p:cSld>
+  <p:clrMapOvr>
+    <a:masterClrMapping/>
+  </p:clrMapOvr>
+</p:sld>
+</file>
+
+<file path=ppt/slides/slide5.xml><?xml version="1.0" encoding="utf-8"?>
+<p:sld xmlns:a="http://schemas.openxmlformats.org/drawingml/2006/main" xmlns:r="http://schemas.openxmlformats.org/officeDocument/2006/relationships" xmlns:p="http://schemas.openxmlformats.org/presentationml/2006/main">
+  <p:cSld name="Slide 5">
+    <p:bg>
+      <p:bgPr>
+        <a:solidFill>
+          <a:srgbClr val="2C1A0E"/>
+        </a:solidFill>
+      </p:bgPr>
+    </p:bg>
+    <p:spTree>
+      <p:nvGrpSpPr>
+        <p:cNvPr id="1" name=""/>
+        <p:cNvGrpSpPr/>
+        <p:nvPr/>
+      </p:nvGrpSpPr>
+      <p:grpSpPr>
+        <a:xfrm>
+          <a:off x="0" y="0"/>
+          <a:ext cx="0" cy="0"/>
+          <a:chOff x="0" y="0"/>
+          <a:chExt cx="0" cy="0"/>
+        </a:xfrm>
+      </p:grpSpPr>
+      <p:sp>
+        <p:nvSpPr>
+          <p:cNvPr id="2" name="Shape 0"/>
+          <p:cNvSpPr/>
+          <p:nvPr/>
+        </p:nvSpPr>
+        <p:spPr>
+          <a:xfrm>
+            <a:off x="640080" y="2331720"/>
+            <a:ext cx="914400" cy="914400"/>
+          </a:xfrm>
+          <a:prstGeom prst="ellipse">
+            <a:avLst/>
+          </a:prstGeom>
+          <a:solidFill>
+            <a:srgbClr val="B5813F"/>
+          </a:solidFill>
+          <a:ln/>
+        </p:spPr>
+      </p:sp>
+      <p:pic>
+        <p:nvPicPr>
+          <p:cNvPr id="3" name="Image 0" descr="preencoded.png">    </p:cNvPr>
+          <p:cNvPicPr>
+            <a:picLocks noChangeAspect="1"/>
+          </p:cNvPicPr>
+          <p:nvPr/>
+        </p:nvPicPr>
+        <p:blipFill>
+          <a:blip r:embed="rId1"/>
+          <a:stretch>
+            <a:fillRect/>
+          </a:stretch>
+        </p:blipFill>
+        <p:spPr>
+          <a:xfrm>
+            <a:off x="749808" y="2441448"/>
+            <a:ext cx="694944" cy="694944"/>
+          </a:xfrm>
+          <a:prstGeom prst="rect">
+            <a:avLst/>
+          </a:prstGeom>
+        </p:spPr>
+      </p:pic>
+      <p:sp>
+        <p:nvSpPr>
+          <p:cNvPr id="4" name="Text 1"/>
+          <p:cNvSpPr txBox="1"/>
+          <p:nvPr/>
+        </p:nvSpPr>
+        <p:spPr>
+          <a:xfrm>
+            <a:off x="1737360" y="2395728"/>
+            <a:ext cx="8229600" cy="365760"/>
+          </a:xfrm>
+          <a:prstGeom prst="rect">
+            <a:avLst/>
+          </a:prstGeom>
+          <a:noFill/>
+          <a:ln/>
+        </p:spPr>
+        <p:txBody>
+          <a:bodyPr wrap="square" lIns="0" tIns="0" rIns="0" bIns="0" rtlCol="0" anchor="ctr"/>
+          <a:lstStyle/>
+          <a:p>
+            <a:pPr indent="0" marL="0">
+              <a:buNone/>
+            </a:pPr>
+            <a:r>
+              <a:rPr lang="en-US" sz="1200" spc="200" kern="0" dirty="0">
+                <a:solidFill>
+                  <a:srgbClr val="D9AE6C"/>
+                </a:solidFill>
+                <a:latin typeface="Calibri" pitchFamily="34" charset="0"/>
+                <a:ea typeface="Calibri" pitchFamily="34" charset="-122"/>
+                <a:cs typeface="Calibri" pitchFamily="34" charset="-120"/>
+              </a:rPr>
+              <a:t>PARTIE 1</a:t>
+            </a:r>
+            <a:endParaRPr lang="en-US" sz="1200" dirty="0"/>
+          </a:p>
+        </p:txBody>
+      </p:sp>
+      <p:sp>
+        <p:nvSpPr>
+          <p:cNvPr id="5" name="Text 2"/>
+          <p:cNvSpPr txBox="1"/>
+          <p:nvPr/>
+        </p:nvSpPr>
+        <p:spPr>
+          <a:xfrm>
+            <a:off x="1719072" y="2743200"/>
+            <a:ext cx="9601200" cy="1005840"/>
+          </a:xfrm>
+          <a:prstGeom prst="rect">
+            <a:avLst/>
+          </a:prstGeom>
+          <a:noFill/>
+          <a:ln/>
+        </p:spPr>
+        <p:txBody>
+          <a:bodyPr wrap="square" lIns="0" tIns="0" rIns="0" bIns="0" rtlCol="0" anchor="ctr"/>
+          <a:lstStyle/>
+          <a:p>
+            <a:pPr indent="0" marL="0">
+              <a:buNone/>
+            </a:pPr>
+            <a:r>
+              <a:rPr lang="en-US" sz="3800" b="1" dirty="0">
+                <a:solidFill>
+                  <a:srgbClr val="FFFFFF"/>
+                </a:solidFill>
+                <a:latin typeface="Cambria" pitchFamily="34" charset="0"/>
+                <a:ea typeface="Cambria" pitchFamily="34" charset="-122"/>
+                <a:cs typeface="Cambria" pitchFamily="34" charset="-120"/>
+              </a:rPr>
+              <a:t>Identité &amp; organisation</a:t>
+            </a:r>
+            <a:endParaRPr lang="en-US" sz="3800" dirty="0"/>
+          </a:p>
+        </p:txBody>
+      </p:sp>
+      <p:sp>
+        <p:nvSpPr>
+          <p:cNvPr id="6" name="Text 3"/>
+          <p:cNvSpPr txBox="1"/>
+          <p:nvPr/>
+        </p:nvSpPr>
+        <p:spPr>
+          <a:xfrm>
+            <a:off x="457200" y="6510528"/>
+            <a:ext cx="7315200" cy="274320"/>
+          </a:xfrm>
+          <a:prstGeom prst="rect">
+            <a:avLst/>
+          </a:prstGeom>
+          <a:noFill/>
+          <a:ln/>
+        </p:spPr>
+        <p:txBody>
+          <a:bodyPr wrap="square" lIns="0" tIns="0" rIns="0" bIns="0" rtlCol="0" anchor="ctr"/>
+          <a:lstStyle/>
+          <a:p>
+            <a:pPr indent="0" marL="0">
+              <a:buNone/>
+            </a:pPr>
+            <a:r>
+              <a:rPr lang="en-US" sz="900" dirty="0">
+                <a:solidFill>
+                  <a:srgbClr val="7C6552"/>
+                </a:solidFill>
+                <a:latin typeface="Calibri" pitchFamily="34" charset="0"/>
+                <a:ea typeface="Calibri" pitchFamily="34" charset="-122"/>
+                <a:cs typeface="Calibri" pitchFamily="34" charset="-120"/>
+              </a:rPr>
+              <a:t>MadeArchive — Documentation technique</a:t>
+            </a:r>
+            <a:endParaRPr lang="en-US" sz="900" dirty="0"/>
+          </a:p>
+        </p:txBody>
+      </p:sp>
+      <p:sp>
+        <p:nvSpPr>
+          <p:cNvPr id="7" name="Text 4"/>
+          <p:cNvSpPr txBox="1"/>
+          <p:nvPr/>
+        </p:nvSpPr>
+        <p:spPr>
+          <a:xfrm>
+            <a:off x="11338560" y="6510528"/>
+            <a:ext cx="457200" cy="274320"/>
+          </a:xfrm>
+          <a:prstGeom prst="rect">
+            <a:avLst/>
+          </a:prstGeom>
+          <a:noFill/>
+          <a:ln/>
+        </p:spPr>
+        <p:txBody>
+          <a:bodyPr wrap="square" lIns="0" tIns="0" rIns="0" bIns="0" rtlCol="0" anchor="ctr"/>
+          <a:lstStyle/>
+          <a:p>
+            <a:pPr algn="r" indent="0" marL="0">
+              <a:buNone/>
+            </a:pPr>
+            <a:r>
+              <a:rPr lang="en-US" sz="900" dirty="0">
+                <a:solidFill>
+                  <a:srgbClr val="7C6552"/>
+                </a:solidFill>
+                <a:latin typeface="Calibri" pitchFamily="34" charset="0"/>
+                <a:ea typeface="Calibri" pitchFamily="34" charset="-122"/>
+                <a:cs typeface="Calibri" pitchFamily="34" charset="-120"/>
+              </a:rPr>
+              <a:t>5</a:t>
+            </a:r>
+            <a:endParaRPr lang="en-US" sz="900" dirty="0"/>
+          </a:p>
+        </p:txBody>
+      </p:sp>
+    </p:spTree>
+  </p:cSld>
+  <p:clrMapOvr>
+    <a:masterClrMapping/>
+  </p:clrMapOvr>
+</p:sld>
+</file>
+
+<file path=ppt/slides/slide50.xml><?xml version="1.0" encoding="utf-8"?>
+<p:sld xmlns:a="http://schemas.openxmlformats.org/drawingml/2006/main" xmlns:r="http://schemas.openxmlformats.org/officeDocument/2006/relationships" xmlns:p="http://schemas.openxmlformats.org/presentationml/2006/main">
+  <p:cSld name="Slide 50">
+    <p:bg>
+      <p:bgPr>
+        <a:solidFill>
+          <a:srgbClr val="FFFFFF"/>
+        </a:solidFill>
+      </p:bgPr>
+    </p:bg>
+    <p:spTree>
+      <p:nvGrpSpPr>
+        <p:cNvPr id="1" name=""/>
+        <p:cNvGrpSpPr/>
+        <p:nvPr/>
+      </p:nvGrpSpPr>
+      <p:grpSpPr>
+        <a:xfrm>
+          <a:off x="0" y="0"/>
+          <a:ext cx="0" cy="0"/>
+          <a:chOff x="0" y="0"/>
+          <a:chExt cx="0" cy="0"/>
+        </a:xfrm>
+      </p:grpSpPr>
+      <p:sp>
+        <p:nvSpPr>
+          <p:cNvPr id="2" name="Shape 0"/>
+          <p:cNvSpPr/>
+          <p:nvPr/>
+        </p:nvSpPr>
+        <p:spPr>
+          <a:xfrm>
+            <a:off x="548640" y="502920"/>
+            <a:ext cx="502920" cy="502920"/>
+          </a:xfrm>
+          <a:prstGeom prst="ellipse">
+            <a:avLst/>
+          </a:prstGeom>
+          <a:solidFill>
+            <a:srgbClr val="B5813F"/>
+          </a:solidFill>
+          <a:ln/>
+        </p:spPr>
+      </p:sp>
+      <p:pic>
+        <p:nvPicPr>
+          <p:cNvPr id="3" name="Image 0" descr="preencoded.png">    </p:cNvPr>
+          <p:cNvPicPr>
+            <a:picLocks noChangeAspect="1"/>
+          </p:cNvPicPr>
+          <p:nvPr/>
+        </p:nvPicPr>
+        <p:blipFill>
+          <a:blip r:embed="rId1"/>
+          <a:stretch>
+            <a:fillRect/>
+          </a:stretch>
+        </p:blipFill>
+        <p:spPr>
+          <a:xfrm>
+            <a:off x="608990" y="563270"/>
+            <a:ext cx="382219" cy="382219"/>
+          </a:xfrm>
+          <a:prstGeom prst="rect">
+            <a:avLst/>
+          </a:prstGeom>
+        </p:spPr>
+      </p:pic>
+      <p:sp>
+        <p:nvSpPr>
+          <p:cNvPr id="4" name="Text 1"/>
+          <p:cNvSpPr txBox="1"/>
+          <p:nvPr/>
+        </p:nvSpPr>
+        <p:spPr>
+          <a:xfrm>
+            <a:off x="1170432" y="457200"/>
+            <a:ext cx="8229600" cy="274320"/>
+          </a:xfrm>
+          <a:prstGeom prst="rect">
+            <a:avLst/>
+          </a:prstGeom>
+          <a:noFill/>
+          <a:ln/>
+        </p:spPr>
+        <p:txBody>
+          <a:bodyPr wrap="square" lIns="0" tIns="0" rIns="0" bIns="0" rtlCol="0" anchor="ctr"/>
+          <a:lstStyle/>
+          <a:p>
+            <a:pPr indent="0" marL="0">
+              <a:buNone/>
+            </a:pPr>
+            <a:r>
+              <a:rPr lang="en-US" sz="1100" spc="150" kern="0" dirty="0">
+                <a:solidFill>
+                  <a:srgbClr val="B5813F"/>
+                </a:solidFill>
+                <a:latin typeface="Calibri" pitchFamily="34" charset="0"/>
+                <a:ea typeface="Calibri" pitchFamily="34" charset="-122"/>
+                <a:cs typeface="Calibri" pitchFamily="34" charset="-120"/>
+              </a:rPr>
+              <a:t>MISE À L'ÉCHELLE</a:t>
+            </a:r>
+            <a:endParaRPr lang="en-US" sz="1100" dirty="0"/>
+          </a:p>
+        </p:txBody>
+      </p:sp>
+      <p:sp>
+        <p:nvSpPr>
+          <p:cNvPr id="5" name="Text 2"/>
+          <p:cNvSpPr txBox="1"/>
+          <p:nvPr/>
+        </p:nvSpPr>
+        <p:spPr>
+          <a:xfrm>
+            <a:off x="1152144" y="713232"/>
+            <a:ext cx="9692640" cy="594360"/>
+          </a:xfrm>
+          <a:prstGeom prst="rect">
+            <a:avLst/>
+          </a:prstGeom>
+          <a:noFill/>
+          <a:ln/>
+        </p:spPr>
+        <p:txBody>
+          <a:bodyPr wrap="square" lIns="0" tIns="0" rIns="0" bIns="0" rtlCol="0" anchor="ctr"/>
+          <a:lstStyle/>
+          <a:p>
+            <a:pPr indent="0" marL="0">
+              <a:buNone/>
+            </a:pPr>
+            <a:r>
+              <a:rPr lang="en-US" sz="2400" b="1" dirty="0">
+                <a:solidFill>
+                  <a:srgbClr val="2C1A0E"/>
+                </a:solidFill>
+                <a:latin typeface="Cambria" pitchFamily="34" charset="0"/>
+                <a:ea typeface="Cambria" pitchFamily="34" charset="-122"/>
+                <a:cs typeface="Cambria" pitchFamily="34" charset="-120"/>
+              </a:rPr>
+              <a:t>Plusieurs instances de app — côté déploiement</a:t>
+            </a:r>
+            <a:endParaRPr lang="en-US" sz="2400" dirty="0"/>
+          </a:p>
+        </p:txBody>
+      </p:sp>
+      <p:sp>
+        <p:nvSpPr>
+          <p:cNvPr id="6" name="Text 3"/>
+          <p:cNvSpPr txBox="1"/>
+          <p:nvPr/>
+        </p:nvSpPr>
+        <p:spPr>
+          <a:xfrm>
+            <a:off x="548640" y="3246120"/>
+            <a:ext cx="10881360" cy="1417320"/>
+          </a:xfrm>
+          <a:prstGeom prst="rect">
+            <a:avLst/>
+          </a:prstGeom>
+          <a:noFill/>
+          <a:ln/>
+        </p:spPr>
+        <p:txBody>
+          <a:bodyPr wrap="square" lIns="0" tIns="0" rIns="0" bIns="0" rtlCol="0" anchor="ctr"/>
+          <a:lstStyle/>
+          <a:p>
+            <a:pPr marL="342900" indent="-342900">
+              <a:lnSpc>
+                <a:spcPct val="115000"/>
+              </a:lnSpc>
+              <a:spcAft>
+                <a:spcPts val="800"/>
+              </a:spcAft>
+              <a:buSzPct val="100000"/>
+              <a:buChar char="•"/>
+            </a:pPr>
+            <a:r>
+              <a:rPr lang="en-US" sz="1450" dirty="0">
+                <a:solidFill>
+                  <a:srgbClr val="2C1A0E"/>
+                </a:solidFill>
+                <a:latin typeface="Calibri" pitchFamily="34" charset="0"/>
+                <a:ea typeface="Calibri" pitchFamily="34" charset="-122"/>
+                <a:cs typeface="Calibri" pitchFamily="34" charset="-120"/>
+              </a:rPr>
+              <a:t>container_name fixe sur "app" empêche nativement docker compose --scale — à retirer en premier.</a:t>
+            </a:r>
+            <a:endParaRPr lang="en-US" sz="1450" dirty="0"/>
+          </a:p>
+          <a:p>
+            <a:pPr marL="342900" indent="-342900">
+              <a:lnSpc>
+                <a:spcPct val="115000"/>
+              </a:lnSpc>
+              <a:spcAft>
+                <a:spcPts val="800"/>
+              </a:spcAft>
+              <a:buSzPct val="100000"/>
+              <a:buChar char="•"/>
+            </a:pPr>
+            <a:r>
+              <a:rPr lang="en-US" sz="1450" dirty="0">
+                <a:solidFill>
+                  <a:srgbClr val="2C1A0E"/>
+                </a:solidFill>
+                <a:latin typeface="Calibri" pitchFamily="34" charset="0"/>
+                <a:ea typeface="Calibri" pitchFamily="34" charset="-122"/>
+                <a:cs typeface="Calibri" pitchFamily="34" charset="-120"/>
+              </a:rPr>
+              <a:t>Traefik doit ensuite connaître les réplicas : plusieurs adresses dans dynamic.yml.template, ou son fournisseur Docker natif.</a:t>
+            </a:r>
+            <a:endParaRPr lang="en-US" sz="1450" dirty="0"/>
+          </a:p>
+          <a:p>
+            <a:pPr marL="342900" indent="-342900">
+              <a:lnSpc>
+                <a:spcPct val="115000"/>
+              </a:lnSpc>
+              <a:spcAft>
+                <a:spcPts val="800"/>
+              </a:spcAft>
+              <a:buSzPct val="100000"/>
+              <a:buChar char="•"/>
+            </a:pPr>
+            <a:r>
+              <a:rPr lang="en-US" sz="1450" dirty="0">
+                <a:solidFill>
+                  <a:srgbClr val="2C1A0E"/>
+                </a:solidFill>
+                <a:latin typeface="Calibri" pitchFamily="34" charset="0"/>
+                <a:ea typeface="Calibri" pitchFamily="34" charset="-122"/>
+                <a:cs typeface="Calibri" pitchFamily="34" charset="-120"/>
+              </a:rPr>
+              <a:t>Le fournisseur Docker natif a déjà été essayé et abandonné (incompatible avec Docker Desktop en dev) — jamais retesté sur un vrai hôte Linux de production.</a:t>
+            </a:r>
+            <a:endParaRPr lang="en-US" sz="1450" dirty="0"/>
+          </a:p>
+        </p:txBody>
+      </p:sp>
+      <p:sp>
+        <p:nvSpPr>
+          <p:cNvPr id="7" name="Text 4"/>
+          <p:cNvSpPr txBox="1"/>
+          <p:nvPr/>
+        </p:nvSpPr>
+        <p:spPr>
+          <a:xfrm>
+            <a:off x="457200" y="6510528"/>
+            <a:ext cx="7315200" cy="274320"/>
+          </a:xfrm>
+          <a:prstGeom prst="rect">
+            <a:avLst/>
+          </a:prstGeom>
+          <a:noFill/>
+          <a:ln/>
+        </p:spPr>
+        <p:txBody>
+          <a:bodyPr wrap="square" lIns="0" tIns="0" rIns="0" bIns="0" rtlCol="0" anchor="ctr"/>
+          <a:lstStyle/>
+          <a:p>
+            <a:pPr indent="0" marL="0">
+              <a:buNone/>
+            </a:pPr>
+            <a:r>
+              <a:rPr lang="en-US" sz="900" dirty="0">
+                <a:solidFill>
+                  <a:srgbClr val="7C6552"/>
+                </a:solidFill>
+                <a:latin typeface="Calibri" pitchFamily="34" charset="0"/>
+                <a:ea typeface="Calibri" pitchFamily="34" charset="-122"/>
+                <a:cs typeface="Calibri" pitchFamily="34" charset="-120"/>
+              </a:rPr>
+              <a:t>MadeArchive — Documentation technique</a:t>
+            </a:r>
+            <a:endParaRPr lang="en-US" sz="900" dirty="0"/>
+          </a:p>
+        </p:txBody>
+      </p:sp>
+      <p:sp>
+        <p:nvSpPr>
+          <p:cNvPr id="8" name="Text 5"/>
+          <p:cNvSpPr txBox="1"/>
+          <p:nvPr/>
+        </p:nvSpPr>
+        <p:spPr>
+          <a:xfrm>
+            <a:off x="11338560" y="6510528"/>
+            <a:ext cx="457200" cy="274320"/>
+          </a:xfrm>
+          <a:prstGeom prst="rect">
+            <a:avLst/>
+          </a:prstGeom>
+          <a:noFill/>
+          <a:ln/>
+        </p:spPr>
+        <p:txBody>
+          <a:bodyPr wrap="square" lIns="0" tIns="0" rIns="0" bIns="0" rtlCol="0" anchor="ctr"/>
+          <a:lstStyle/>
+          <a:p>
+            <a:pPr algn="r" indent="0" marL="0">
+              <a:buNone/>
+            </a:pPr>
+            <a:r>
+              <a:rPr lang="en-US" sz="900" dirty="0">
+                <a:solidFill>
+                  <a:srgbClr val="7C6552"/>
+                </a:solidFill>
+                <a:latin typeface="Calibri" pitchFamily="34" charset="0"/>
+                <a:ea typeface="Calibri" pitchFamily="34" charset="-122"/>
+                <a:cs typeface="Calibri" pitchFamily="34" charset="-120"/>
+              </a:rPr>
+              <a:t>50</a:t>
+            </a:r>
+            <a:endParaRPr lang="en-US" sz="900" dirty="0"/>
+          </a:p>
+        </p:txBody>
+      </p:sp>
+    </p:spTree>
+  </p:cSld>
+  <p:clrMapOvr>
+    <a:masterClrMapping/>
+  </p:clrMapOvr>
+</p:sld>
+</file>
+
+<file path=ppt/slides/slide51.xml><?xml version="1.0" encoding="utf-8"?>
+<p:sld xmlns:a="http://schemas.openxmlformats.org/drawingml/2006/main" xmlns:r="http://schemas.openxmlformats.org/officeDocument/2006/relationships" xmlns:p="http://schemas.openxmlformats.org/presentationml/2006/main">
+  <p:cSld name="Slide 51">
+    <p:bg>
+      <p:bgPr>
+        <a:solidFill>
+          <a:srgbClr val="FFFFFF"/>
+        </a:solidFill>
+      </p:bgPr>
+    </p:bg>
+    <p:spTree>
+      <p:nvGrpSpPr>
+        <p:cNvPr id="1" name=""/>
+        <p:cNvGrpSpPr/>
+        <p:nvPr/>
+      </p:nvGrpSpPr>
+      <p:grpSpPr>
+        <a:xfrm>
+          <a:off x="0" y="0"/>
+          <a:ext cx="0" cy="0"/>
+          <a:chOff x="0" y="0"/>
+          <a:chExt cx="0" cy="0"/>
+        </a:xfrm>
+      </p:grpSpPr>
+      <p:sp>
+        <p:nvSpPr>
+          <p:cNvPr id="2" name="Shape 0"/>
+          <p:cNvSpPr/>
+          <p:nvPr/>
+        </p:nvSpPr>
+        <p:spPr>
+          <a:xfrm>
+            <a:off x="548640" y="502920"/>
+            <a:ext cx="502920" cy="502920"/>
+          </a:xfrm>
+          <a:prstGeom prst="ellipse">
+            <a:avLst/>
+          </a:prstGeom>
+          <a:solidFill>
+            <a:srgbClr val="B5813F"/>
+          </a:solidFill>
+          <a:ln/>
+        </p:spPr>
+      </p:sp>
+      <p:pic>
+        <p:nvPicPr>
+          <p:cNvPr id="3" name="Image 0" descr="preencoded.png">    </p:cNvPr>
+          <p:cNvPicPr>
+            <a:picLocks noChangeAspect="1"/>
+          </p:cNvPicPr>
+          <p:nvPr/>
+        </p:nvPicPr>
+        <p:blipFill>
+          <a:blip r:embed="rId1"/>
+          <a:stretch>
+            <a:fillRect/>
+          </a:stretch>
+        </p:blipFill>
+        <p:spPr>
+          <a:xfrm>
+            <a:off x="608990" y="563270"/>
+            <a:ext cx="382219" cy="382219"/>
+          </a:xfrm>
+          <a:prstGeom prst="rect">
+            <a:avLst/>
+          </a:prstGeom>
+        </p:spPr>
+      </p:pic>
+      <p:sp>
+        <p:nvSpPr>
+          <p:cNvPr id="4" name="Text 1"/>
+          <p:cNvSpPr txBox="1"/>
+          <p:nvPr/>
+        </p:nvSpPr>
+        <p:spPr>
+          <a:xfrm>
+            <a:off x="1170432" y="457200"/>
+            <a:ext cx="8229600" cy="274320"/>
+          </a:xfrm>
+          <a:prstGeom prst="rect">
+            <a:avLst/>
+          </a:prstGeom>
+          <a:noFill/>
+          <a:ln/>
+        </p:spPr>
+        <p:txBody>
+          <a:bodyPr wrap="square" lIns="0" tIns="0" rIns="0" bIns="0" rtlCol="0" anchor="ctr"/>
+          <a:lstStyle/>
+          <a:p>
+            <a:pPr indent="0" marL="0">
+              <a:buNone/>
+            </a:pPr>
+            <a:r>
+              <a:rPr lang="en-US" sz="1100" spc="150" kern="0" dirty="0">
+                <a:solidFill>
+                  <a:srgbClr val="B5813F"/>
+                </a:solidFill>
+                <a:latin typeface="Calibri" pitchFamily="34" charset="0"/>
+                <a:ea typeface="Calibri" pitchFamily="34" charset="-122"/>
+                <a:cs typeface="Calibri" pitchFamily="34" charset="-120"/>
+              </a:rPr>
+              <a:t>MISE À L'ÉCHELLE</a:t>
+            </a:r>
+            <a:endParaRPr lang="en-US" sz="1100" dirty="0"/>
+          </a:p>
+        </p:txBody>
+      </p:sp>
+      <p:sp>
+        <p:nvSpPr>
+          <p:cNvPr id="5" name="Text 2"/>
+          <p:cNvSpPr txBox="1"/>
+          <p:nvPr/>
+        </p:nvSpPr>
+        <p:spPr>
+          <a:xfrm>
+            <a:off x="1152144" y="713232"/>
+            <a:ext cx="9692640" cy="594360"/>
+          </a:xfrm>
+          <a:prstGeom prst="rect">
+            <a:avLst/>
+          </a:prstGeom>
+          <a:noFill/>
+          <a:ln/>
+        </p:spPr>
+        <p:txBody>
+          <a:bodyPr wrap="square" lIns="0" tIns="0" rIns="0" bIns="0" rtlCol="0" anchor="ctr"/>
+          <a:lstStyle/>
+          <a:p>
+            <a:pPr indent="0" marL="0">
+              <a:buNone/>
+            </a:pPr>
+            <a:r>
+              <a:rPr lang="en-US" sz="2400" b="1" dirty="0">
+                <a:solidFill>
+                  <a:srgbClr val="2C1A0E"/>
+                </a:solidFill>
+                <a:latin typeface="Cambria" pitchFamily="34" charset="0"/>
+                <a:ea typeface="Cambria" pitchFamily="34" charset="-122"/>
+                <a:cs typeface="Cambria" pitchFamily="34" charset="-120"/>
+              </a:rPr>
+              <a:t>Plusieurs instances d'Ollama (Qwen)</a:t>
+            </a:r>
+            <a:endParaRPr lang="en-US" sz="2400" dirty="0"/>
+          </a:p>
+        </p:txBody>
+      </p:sp>
+      <p:sp>
+        <p:nvSpPr>
+          <p:cNvPr id="6" name="Text 3"/>
+          <p:cNvSpPr txBox="1"/>
+          <p:nvPr/>
+        </p:nvSpPr>
+        <p:spPr>
+          <a:xfrm>
+            <a:off x="548640" y="3022092"/>
+            <a:ext cx="10881360" cy="502920"/>
+          </a:xfrm>
+          <a:prstGeom prst="rect">
+            <a:avLst/>
+          </a:prstGeom>
+          <a:noFill/>
+          <a:ln/>
+        </p:spPr>
+        <p:txBody>
+          <a:bodyPr wrap="square" lIns="0" tIns="0" rIns="0" bIns="0" rtlCol="0" anchor="ctr"/>
+          <a:lstStyle/>
+          <a:p>
+            <a:pPr marL="342900" indent="-342900">
+              <a:lnSpc>
+                <a:spcPct val="115000"/>
+              </a:lnSpc>
+              <a:spcAft>
+                <a:spcPts val="800"/>
+              </a:spcAft>
+              <a:buSzPct val="100000"/>
+              <a:buChar char="•"/>
+            </a:pPr>
+            <a:r>
+              <a:rPr lang="en-US" sz="1450" dirty="0">
+                <a:solidFill>
+                  <a:srgbClr val="2C1A0E"/>
+                </a:solidFill>
+                <a:latin typeface="Calibri" pitchFamily="34" charset="0"/>
+                <a:ea typeface="Calibri" pitchFamily="34" charset="-122"/>
+                <a:cs typeface="Calibri" pitchFamily="34" charset="-120"/>
+              </a:rPr>
+              <a:t>Une seule adresse Ollama connue de l'app (OLLAMA_BASE_URL) — pas de répartition entre plusieurs instances intégrée au code.</a:t>
+            </a:r>
+            <a:endParaRPr lang="en-US" sz="1450" dirty="0"/>
+          </a:p>
+        </p:txBody>
+      </p:sp>
+      <p:sp>
+        <p:nvSpPr>
+          <p:cNvPr id="7" name="Shape 4"/>
+          <p:cNvSpPr/>
+          <p:nvPr/>
+        </p:nvSpPr>
+        <p:spPr>
+          <a:xfrm>
+            <a:off x="548640" y="3744468"/>
+            <a:ext cx="10881360" cy="1143000"/>
+          </a:xfrm>
+          <a:prstGeom prst="roundRect">
+            <a:avLst>
+              <a:gd name="adj" fmla="val 6400"/>
+            </a:avLst>
+          </a:prstGeom>
+          <a:solidFill>
+            <a:srgbClr val="F3E9DA"/>
+          </a:solidFill>
+          <a:ln/>
+        </p:spPr>
+      </p:sp>
+      <p:sp>
+        <p:nvSpPr>
+          <p:cNvPr id="8" name="Text 5"/>
+          <p:cNvSpPr txBox="1"/>
+          <p:nvPr/>
+        </p:nvSpPr>
+        <p:spPr>
+          <a:xfrm>
+            <a:off x="868680" y="3881628"/>
+            <a:ext cx="1828800" cy="274320"/>
+          </a:xfrm>
+          <a:prstGeom prst="rect">
+            <a:avLst/>
+          </a:prstGeom>
+          <a:noFill/>
+          <a:ln/>
+        </p:spPr>
+        <p:txBody>
+          <a:bodyPr wrap="square" lIns="0" tIns="0" rIns="0" bIns="0" rtlCol="0" anchor="ctr"/>
+          <a:lstStyle/>
+          <a:p>
+            <a:pPr indent="0" marL="0">
+              <a:buNone/>
+            </a:pPr>
+            <a:r>
+              <a:rPr lang="en-US" sz="1000" b="1" spc="100" kern="0" dirty="0">
+                <a:solidFill>
+                  <a:srgbClr val="B5813F"/>
+                </a:solidFill>
+                <a:latin typeface="Calibri" pitchFamily="34" charset="0"/>
+                <a:ea typeface="Calibri" pitchFamily="34" charset="-122"/>
+                <a:cs typeface="Calibri" pitchFamily="34" charset="-120"/>
+              </a:rPr>
+              <a:t>POURQUOI</a:t>
+            </a:r>
+            <a:endParaRPr lang="en-US" sz="1000" dirty="0"/>
+          </a:p>
+        </p:txBody>
+      </p:sp>
+      <p:sp>
+        <p:nvSpPr>
+          <p:cNvPr id="9" name="Text 6"/>
+          <p:cNvSpPr txBox="1"/>
+          <p:nvPr/>
+        </p:nvSpPr>
+        <p:spPr>
+          <a:xfrm>
+            <a:off x="868680" y="4128516"/>
+            <a:ext cx="10241280" cy="685800"/>
+          </a:xfrm>
+          <a:prstGeom prst="rect">
+            <a:avLst/>
+          </a:prstGeom>
+          <a:noFill/>
+          <a:ln/>
+        </p:spPr>
+        <p:txBody>
+          <a:bodyPr wrap="square" lIns="0" tIns="0" rIns="0" bIns="0" rtlCol="0" anchor="ctr"/>
+          <a:lstStyle/>
+          <a:p>
+            <a:pPr indent="0" marL="0">
+              <a:lnSpc>
+                <a:spcPct val="110000"/>
+              </a:lnSpc>
+              <a:buNone/>
+            </a:pPr>
+            <a:r>
+              <a:rPr lang="en-US" sz="1250" dirty="0">
+                <a:solidFill>
+                  <a:srgbClr val="2C1A0E"/>
+                </a:solidFill>
+                <a:latin typeface="Calibri" pitchFamily="34" charset="0"/>
+                <a:ea typeface="Calibri" pitchFamily="34" charset="-122"/>
+                <a:cs typeface="Calibri" pitchFamily="34" charset="-120"/>
+              </a:rPr>
+              <a:t>Ce modèle n'est appelé qu'une fois PAR TYPE de document, jamais par document — le débit réel est probablement déjà faible ; OLLAMA_NUM_PARALLEL permet à une seule instance d'absorber plusieurs requêtes de front avant d'envisager plusieurs conteneurs. Si le besoin apparaît vraiment : même mécanisme que pour app/frontend (plusieurs adresses dans dynamic.yml.template) — aucun changement de code Java.</a:t>
+            </a:r>
+            <a:endParaRPr lang="en-US" sz="1250" dirty="0"/>
+          </a:p>
+        </p:txBody>
+      </p:sp>
+      <p:sp>
+        <p:nvSpPr>
+          <p:cNvPr id="10" name="Text 7"/>
+          <p:cNvSpPr txBox="1"/>
+          <p:nvPr/>
+        </p:nvSpPr>
+        <p:spPr>
+          <a:xfrm>
+            <a:off x="457200" y="6510528"/>
+            <a:ext cx="7315200" cy="274320"/>
+          </a:xfrm>
+          <a:prstGeom prst="rect">
+            <a:avLst/>
+          </a:prstGeom>
+          <a:noFill/>
+          <a:ln/>
+        </p:spPr>
+        <p:txBody>
+          <a:bodyPr wrap="square" lIns="0" tIns="0" rIns="0" bIns="0" rtlCol="0" anchor="ctr"/>
+          <a:lstStyle/>
+          <a:p>
+            <a:pPr indent="0" marL="0">
+              <a:buNone/>
+            </a:pPr>
+            <a:r>
+              <a:rPr lang="en-US" sz="900" dirty="0">
+                <a:solidFill>
+                  <a:srgbClr val="7C6552"/>
+                </a:solidFill>
+                <a:latin typeface="Calibri" pitchFamily="34" charset="0"/>
+                <a:ea typeface="Calibri" pitchFamily="34" charset="-122"/>
+                <a:cs typeface="Calibri" pitchFamily="34" charset="-120"/>
+              </a:rPr>
+              <a:t>MadeArchive — Documentation technique</a:t>
+            </a:r>
+            <a:endParaRPr lang="en-US" sz="900" dirty="0"/>
+          </a:p>
+        </p:txBody>
+      </p:sp>
+      <p:sp>
+        <p:nvSpPr>
+          <p:cNvPr id="11" name="Text 8"/>
+          <p:cNvSpPr txBox="1"/>
+          <p:nvPr/>
+        </p:nvSpPr>
+        <p:spPr>
+          <a:xfrm>
+            <a:off x="11338560" y="6510528"/>
+            <a:ext cx="457200" cy="274320"/>
+          </a:xfrm>
+          <a:prstGeom prst="rect">
+            <a:avLst/>
+          </a:prstGeom>
+          <a:noFill/>
+          <a:ln/>
+        </p:spPr>
+        <p:txBody>
+          <a:bodyPr wrap="square" lIns="0" tIns="0" rIns="0" bIns="0" rtlCol="0" anchor="ctr"/>
+          <a:lstStyle/>
+          <a:p>
+            <a:pPr algn="r" indent="0" marL="0">
+              <a:buNone/>
+            </a:pPr>
+            <a:r>
+              <a:rPr lang="en-US" sz="900" dirty="0">
+                <a:solidFill>
+                  <a:srgbClr val="7C6552"/>
+                </a:solidFill>
+                <a:latin typeface="Calibri" pitchFamily="34" charset="0"/>
+                <a:ea typeface="Calibri" pitchFamily="34" charset="-122"/>
+                <a:cs typeface="Calibri" pitchFamily="34" charset="-120"/>
+              </a:rPr>
+              <a:t>51</a:t>
+            </a:r>
+            <a:endParaRPr lang="en-US" sz="900" dirty="0"/>
+          </a:p>
+        </p:txBody>
+      </p:sp>
+    </p:spTree>
+  </p:cSld>
+  <p:clrMapOvr>
+    <a:masterClrMapping/>
+  </p:clrMapOvr>
+</p:sld>
+</file>
+
+<file path=ppt/slides/slide52.xml><?xml version="1.0" encoding="utf-8"?>
+<p:sld xmlns:a="http://schemas.openxmlformats.org/drawingml/2006/main" xmlns:r="http://schemas.openxmlformats.org/officeDocument/2006/relationships" xmlns:p="http://schemas.openxmlformats.org/presentationml/2006/main">
+  <p:cSld name="Slide 52">
+    <p:bg>
+      <p:bgPr>
+        <a:solidFill>
+          <a:srgbClr val="2C1A0E"/>
+        </a:solidFill>
+      </p:bgPr>
+    </p:bg>
+    <p:spTree>
+      <p:nvGrpSpPr>
+        <p:cNvPr id="1" name=""/>
+        <p:cNvGrpSpPr/>
+        <p:nvPr/>
+      </p:nvGrpSpPr>
+      <p:grpSpPr>
+        <a:xfrm>
+          <a:off x="0" y="0"/>
+          <a:ext cx="0" cy="0"/>
+          <a:chOff x="0" y="0"/>
+          <a:chExt cx="0" cy="0"/>
+        </a:xfrm>
+      </p:grpSpPr>
+      <p:sp>
+        <p:nvSpPr>
+          <p:cNvPr id="2" name="Shape 0"/>
+          <p:cNvSpPr/>
+          <p:nvPr/>
+        </p:nvSpPr>
+        <p:spPr>
+          <a:xfrm>
+            <a:off x="640080" y="2331720"/>
+            <a:ext cx="914400" cy="914400"/>
+          </a:xfrm>
+          <a:prstGeom prst="ellipse">
+            <a:avLst/>
+          </a:prstGeom>
+          <a:solidFill>
+            <a:srgbClr val="B5813F"/>
+          </a:solidFill>
+          <a:ln/>
+        </p:spPr>
+      </p:sp>
+      <p:pic>
+        <p:nvPicPr>
+          <p:cNvPr id="3" name="Image 0" descr="preencoded.png">    </p:cNvPr>
+          <p:cNvPicPr>
+            <a:picLocks noChangeAspect="1"/>
+          </p:cNvPicPr>
+          <p:nvPr/>
+        </p:nvPicPr>
+        <p:blipFill>
+          <a:blip r:embed="rId1"/>
+          <a:stretch>
+            <a:fillRect/>
+          </a:stretch>
+        </p:blipFill>
+        <p:spPr>
+          <a:xfrm>
+            <a:off x="749808" y="2441448"/>
+            <a:ext cx="694944" cy="694944"/>
+          </a:xfrm>
+          <a:prstGeom prst="rect">
+            <a:avLst/>
+          </a:prstGeom>
+        </p:spPr>
+      </p:pic>
+      <p:sp>
+        <p:nvSpPr>
+          <p:cNvPr id="4" name="Text 1"/>
+          <p:cNvSpPr txBox="1"/>
+          <p:nvPr/>
+        </p:nvSpPr>
+        <p:spPr>
+          <a:xfrm>
+            <a:off x="1737360" y="2395728"/>
+            <a:ext cx="8229600" cy="365760"/>
+          </a:xfrm>
+          <a:prstGeom prst="rect">
+            <a:avLst/>
+          </a:prstGeom>
+          <a:noFill/>
+          <a:ln/>
+        </p:spPr>
+        <p:txBody>
+          <a:bodyPr wrap="square" lIns="0" tIns="0" rIns="0" bIns="0" rtlCol="0" anchor="ctr"/>
+          <a:lstStyle/>
+          <a:p>
+            <a:pPr indent="0" marL="0">
+              <a:buNone/>
+            </a:pPr>
+            <a:r>
+              <a:rPr lang="en-US" sz="1200" spc="200" kern="0" dirty="0">
+                <a:solidFill>
+                  <a:srgbClr val="D9AE6C"/>
+                </a:solidFill>
+                <a:latin typeface="Calibri" pitchFamily="34" charset="0"/>
+                <a:ea typeface="Calibri" pitchFamily="34" charset="-122"/>
+                <a:cs typeface="Calibri" pitchFamily="34" charset="-120"/>
+              </a:rPr>
+              <a:t>BILAN</a:t>
+            </a:r>
+            <a:endParaRPr lang="en-US" sz="1200" dirty="0"/>
+          </a:p>
+        </p:txBody>
+      </p:sp>
+      <p:sp>
+        <p:nvSpPr>
+          <p:cNvPr id="5" name="Text 2"/>
+          <p:cNvSpPr txBox="1"/>
+          <p:nvPr/>
+        </p:nvSpPr>
+        <p:spPr>
+          <a:xfrm>
+            <a:off x="1719072" y="2743200"/>
+            <a:ext cx="9601200" cy="1005840"/>
+          </a:xfrm>
+          <a:prstGeom prst="rect">
+            <a:avLst/>
+          </a:prstGeom>
+          <a:noFill/>
+          <a:ln/>
+        </p:spPr>
+        <p:txBody>
+          <a:bodyPr wrap="square" lIns="0" tIns="0" rIns="0" bIns="0" rtlCol="0" anchor="ctr"/>
+          <a:lstStyle/>
+          <a:p>
+            <a:pPr indent="0" marL="0">
+              <a:buNone/>
+            </a:pPr>
+            <a:r>
+              <a:rPr lang="en-US" sz="3800" b="1" dirty="0">
+                <a:solidFill>
+                  <a:srgbClr val="FFFFFF"/>
+                </a:solidFill>
+                <a:latin typeface="Cambria" pitchFamily="34" charset="0"/>
+                <a:ea typeface="Cambria" pitchFamily="34" charset="-122"/>
+                <a:cs typeface="Cambria" pitchFamily="34" charset="-120"/>
+              </a:rPr>
+              <a:t>Tableau récapitulatif</a:t>
+            </a:r>
+            <a:endParaRPr lang="en-US" sz="3800" dirty="0"/>
+          </a:p>
+        </p:txBody>
+      </p:sp>
+      <p:sp>
+        <p:nvSpPr>
+          <p:cNvPr id="6" name="Text 3"/>
+          <p:cNvSpPr txBox="1"/>
+          <p:nvPr/>
+        </p:nvSpPr>
+        <p:spPr>
+          <a:xfrm>
+            <a:off x="457200" y="6510528"/>
+            <a:ext cx="7315200" cy="274320"/>
+          </a:xfrm>
+          <a:prstGeom prst="rect">
+            <a:avLst/>
+          </a:prstGeom>
+          <a:noFill/>
+          <a:ln/>
+        </p:spPr>
+        <p:txBody>
+          <a:bodyPr wrap="square" lIns="0" tIns="0" rIns="0" bIns="0" rtlCol="0" anchor="ctr"/>
+          <a:lstStyle/>
+          <a:p>
+            <a:pPr indent="0" marL="0">
+              <a:buNone/>
+            </a:pPr>
+            <a:r>
+              <a:rPr lang="en-US" sz="900" dirty="0">
+                <a:solidFill>
+                  <a:srgbClr val="7C6552"/>
+                </a:solidFill>
+                <a:latin typeface="Calibri" pitchFamily="34" charset="0"/>
+                <a:ea typeface="Calibri" pitchFamily="34" charset="-122"/>
+                <a:cs typeface="Calibri" pitchFamily="34" charset="-120"/>
+              </a:rPr>
+              <a:t>MadeArchive — Documentation technique</a:t>
+            </a:r>
+            <a:endParaRPr lang="en-US" sz="900" dirty="0"/>
+          </a:p>
+        </p:txBody>
+      </p:sp>
+      <p:sp>
+        <p:nvSpPr>
+          <p:cNvPr id="7" name="Text 4"/>
+          <p:cNvSpPr txBox="1"/>
+          <p:nvPr/>
+        </p:nvSpPr>
+        <p:spPr>
+          <a:xfrm>
+            <a:off x="11338560" y="6510528"/>
+            <a:ext cx="457200" cy="274320"/>
+          </a:xfrm>
+          <a:prstGeom prst="rect">
+            <a:avLst/>
+          </a:prstGeom>
+          <a:noFill/>
+          <a:ln/>
+        </p:spPr>
+        <p:txBody>
+          <a:bodyPr wrap="square" lIns="0" tIns="0" rIns="0" bIns="0" rtlCol="0" anchor="ctr"/>
+          <a:lstStyle/>
+          <a:p>
+            <a:pPr algn="r" indent="0" marL="0">
+              <a:buNone/>
+            </a:pPr>
+            <a:r>
+              <a:rPr lang="en-US" sz="900" dirty="0">
+                <a:solidFill>
+                  <a:srgbClr val="7C6552"/>
+                </a:solidFill>
+                <a:latin typeface="Calibri" pitchFamily="34" charset="0"/>
+                <a:ea typeface="Calibri" pitchFamily="34" charset="-122"/>
+                <a:cs typeface="Calibri" pitchFamily="34" charset="-120"/>
+              </a:rPr>
+              <a:t>52</a:t>
+            </a:r>
+            <a:endParaRPr lang="en-US" sz="900" dirty="0"/>
+          </a:p>
+        </p:txBody>
+      </p:sp>
+    </p:spTree>
+  </p:cSld>
+  <p:clrMapOvr>
+    <a:masterClrMapping/>
+  </p:clrMapOvr>
+</p:sld>
+</file>
+
+<file path=ppt/slides/slide53.xml><?xml version="1.0" encoding="utf-8"?>
+<p:sld xmlns:a="http://schemas.openxmlformats.org/drawingml/2006/main" xmlns:r="http://schemas.openxmlformats.org/officeDocument/2006/relationships" xmlns:p="http://schemas.openxmlformats.org/presentationml/2006/main">
+  <p:cSld name="Slide 53">
+    <p:bg>
+      <p:bgPr>
+        <a:solidFill>
+          <a:srgbClr val="FFFFFF"/>
+        </a:solidFill>
+      </p:bgPr>
+    </p:bg>
+    <p:spTree>
+      <p:nvGrpSpPr>
+        <p:cNvPr id="1" name=""/>
+        <p:cNvGrpSpPr/>
+        <p:nvPr/>
+      </p:nvGrpSpPr>
+      <p:grpSpPr>
+        <a:xfrm>
+          <a:off x="0" y="0"/>
+          <a:ext cx="0" cy="0"/>
+          <a:chOff x="0" y="0"/>
+          <a:chExt cx="0" cy="0"/>
+        </a:xfrm>
+      </p:grpSpPr>
+      <p:sp>
+        <p:nvSpPr>
+          <p:cNvPr id="2" name="Shape 0"/>
+          <p:cNvSpPr/>
+          <p:nvPr/>
+        </p:nvSpPr>
+        <p:spPr>
+          <a:xfrm>
+            <a:off x="548640" y="411480"/>
+            <a:ext cx="502920" cy="502920"/>
+          </a:xfrm>
+          <a:prstGeom prst="ellipse">
+            <a:avLst/>
+          </a:prstGeom>
+          <a:solidFill>
+            <a:srgbClr val="B5813F"/>
+          </a:solidFill>
+          <a:ln/>
+        </p:spPr>
+      </p:sp>
+      <p:pic>
+        <p:nvPicPr>
+          <p:cNvPr id="3" name="Image 0" descr="preencoded.png">    </p:cNvPr>
+          <p:cNvPicPr>
+            <a:picLocks noChangeAspect="1"/>
+          </p:cNvPicPr>
+          <p:nvPr/>
+        </p:nvPicPr>
+        <p:blipFill>
+          <a:blip r:embed="rId1"/>
+          <a:stretch>
+            <a:fillRect/>
+          </a:stretch>
+        </p:blipFill>
+        <p:spPr>
+          <a:xfrm>
+            <a:off x="608990" y="471830"/>
+            <a:ext cx="382219" cy="382219"/>
+          </a:xfrm>
+          <a:prstGeom prst="rect">
+            <a:avLst/>
+          </a:prstGeom>
+        </p:spPr>
+      </p:pic>
+      <p:sp>
+        <p:nvSpPr>
+          <p:cNvPr id="4" name="Text 1"/>
+          <p:cNvSpPr txBox="1"/>
+          <p:nvPr/>
+        </p:nvSpPr>
+        <p:spPr>
+          <a:xfrm>
+            <a:off x="1170432" y="365760"/>
+            <a:ext cx="8229600" cy="502920"/>
+          </a:xfrm>
+          <a:prstGeom prst="rect">
+            <a:avLst/>
+          </a:prstGeom>
+          <a:noFill/>
+          <a:ln/>
+        </p:spPr>
+        <p:txBody>
+          <a:bodyPr wrap="square" lIns="0" tIns="0" rIns="0" bIns="0" rtlCol="0" anchor="ctr"/>
+          <a:lstStyle/>
+          <a:p>
+            <a:pPr indent="0" marL="0">
+              <a:buNone/>
+            </a:pPr>
+            <a:r>
+              <a:rPr lang="en-US" sz="2600" b="1" dirty="0">
+                <a:solidFill>
+                  <a:srgbClr val="2C1A0E"/>
+                </a:solidFill>
+                <a:latin typeface="Cambria" pitchFamily="34" charset="0"/>
+                <a:ea typeface="Cambria" pitchFamily="34" charset="-122"/>
+                <a:cs typeface="Cambria" pitchFamily="34" charset="-120"/>
+              </a:rPr>
               <a:t>Tableau récapitulatif</a:t>
             </a:r>
             <a:endParaRPr lang="en-US" sz="2600" dirty="0"/>
@@ -23530,7 +26824,7 @@
       </p:sp>
       <p:graphicFrame>
         <p:nvGraphicFramePr>
-          <p:cNvPr id="48" name="Table 0"/>
+          <p:cNvPr id="54" name="Table 0"/>
           <p:cNvGraphicFramePr>
             <a:graphicFrameLocks noGrp="1"/>
           </p:cNvGraphicFramePr>
@@ -25691,7 +28985,7 @@
                 <a:ea typeface="Calibri" pitchFamily="34" charset="-122"/>
                 <a:cs typeface="Calibri" pitchFamily="34" charset="-120"/>
               </a:rPr>
-              <a:t>47</a:t>
+              <a:t>53</a:t>
             </a:r>
             <a:endParaRPr lang="en-US" sz="900" dirty="0"/>
           </a:p>
@@ -25705,9 +28999,9 @@
 </p:sld>
 </file>
 
-<file path=ppt/slides/slide48.xml><?xml version="1.0" encoding="utf-8"?>
+<file path=ppt/slides/slide54.xml><?xml version="1.0" encoding="utf-8"?>
 <p:sld xmlns:a="http://schemas.openxmlformats.org/drawingml/2006/main" xmlns:r="http://schemas.openxmlformats.org/officeDocument/2006/relationships" xmlns:p="http://schemas.openxmlformats.org/presentationml/2006/main">
-  <p:cSld name="Slide 48">
+  <p:cSld name="Slide 54">
     <p:bg>
       <p:bgPr>
         <a:solidFill>
@@ -25853,7 +29147,7 @@
       </p:sp>
       <p:graphicFrame>
         <p:nvGraphicFramePr>
-          <p:cNvPr id="49" name="Table 0"/>
+          <p:cNvPr id="55" name="Table 0"/>
           <p:cNvGraphicFramePr>
             <a:graphicFrameLocks noGrp="1"/>
           </p:cNvGraphicFramePr>
@@ -28014,7 +31308,7 @@
                 <a:ea typeface="Calibri" pitchFamily="34" charset="-122"/>
                 <a:cs typeface="Calibri" pitchFamily="34" charset="-120"/>
               </a:rPr>
-              <a:t>48</a:t>
+              <a:t>54</a:t>
             </a:r>
             <a:endParaRPr lang="en-US" sz="900" dirty="0"/>
           </a:p>
@@ -28028,9 +31322,9 @@
 </p:sld>
 </file>
 
-<file path=ppt/slides/slide49.xml><?xml version="1.0" encoding="utf-8"?>
+<file path=ppt/slides/slide55.xml><?xml version="1.0" encoding="utf-8"?>
 <p:sld xmlns:a="http://schemas.openxmlformats.org/drawingml/2006/main" xmlns:r="http://schemas.openxmlformats.org/officeDocument/2006/relationships" xmlns:p="http://schemas.openxmlformats.org/presentationml/2006/main">
-  <p:cSld name="Slide 49">
+  <p:cSld name="Slide 55">
     <p:bg>
       <p:bgPr>
         <a:solidFill>
@@ -28176,7 +31470,7 @@
       </p:sp>
       <p:graphicFrame>
         <p:nvGraphicFramePr>
-          <p:cNvPr id="50" name="Table 0"/>
+          <p:cNvPr id="56" name="Table 0"/>
           <p:cNvGraphicFramePr>
             <a:graphicFrameLocks noGrp="1"/>
           </p:cNvGraphicFramePr>
@@ -29925,239 +33219,7 @@
                 <a:ea typeface="Calibri" pitchFamily="34" charset="-122"/>
                 <a:cs typeface="Calibri" pitchFamily="34" charset="-120"/>
               </a:rPr>
-              <a:t>49</a:t>
-            </a:r>
-            <a:endParaRPr lang="en-US" sz="900" dirty="0"/>
-          </a:p>
-        </p:txBody>
-      </p:sp>
-    </p:spTree>
-  </p:cSld>
-  <p:clrMapOvr>
-    <a:masterClrMapping/>
-  </p:clrMapOvr>
-</p:sld>
-</file>
-
-<file path=ppt/slides/slide5.xml><?xml version="1.0" encoding="utf-8"?>
-<p:sld xmlns:a="http://schemas.openxmlformats.org/drawingml/2006/main" xmlns:r="http://schemas.openxmlformats.org/officeDocument/2006/relationships" xmlns:p="http://schemas.openxmlformats.org/presentationml/2006/main">
-  <p:cSld name="Slide 5">
-    <p:bg>
-      <p:bgPr>
-        <a:solidFill>
-          <a:srgbClr val="2C1A0E"/>
-        </a:solidFill>
-      </p:bgPr>
-    </p:bg>
-    <p:spTree>
-      <p:nvGrpSpPr>
-        <p:cNvPr id="1" name=""/>
-        <p:cNvGrpSpPr/>
-        <p:nvPr/>
-      </p:nvGrpSpPr>
-      <p:grpSpPr>
-        <a:xfrm>
-          <a:off x="0" y="0"/>
-          <a:ext cx="0" cy="0"/>
-          <a:chOff x="0" y="0"/>
-          <a:chExt cx="0" cy="0"/>
-        </a:xfrm>
-      </p:grpSpPr>
-      <p:sp>
-        <p:nvSpPr>
-          <p:cNvPr id="2" name="Shape 0"/>
-          <p:cNvSpPr/>
-          <p:nvPr/>
-        </p:nvSpPr>
-        <p:spPr>
-          <a:xfrm>
-            <a:off x="640080" y="2331720"/>
-            <a:ext cx="914400" cy="914400"/>
-          </a:xfrm>
-          <a:prstGeom prst="ellipse">
-            <a:avLst/>
-          </a:prstGeom>
-          <a:solidFill>
-            <a:srgbClr val="B5813F"/>
-          </a:solidFill>
-          <a:ln/>
-        </p:spPr>
-      </p:sp>
-      <p:pic>
-        <p:nvPicPr>
-          <p:cNvPr id="3" name="Image 0" descr="preencoded.png">    </p:cNvPr>
-          <p:cNvPicPr>
-            <a:picLocks noChangeAspect="1"/>
-          </p:cNvPicPr>
-          <p:nvPr/>
-        </p:nvPicPr>
-        <p:blipFill>
-          <a:blip r:embed="rId1"/>
-          <a:stretch>
-            <a:fillRect/>
-          </a:stretch>
-        </p:blipFill>
-        <p:spPr>
-          <a:xfrm>
-            <a:off x="749808" y="2441448"/>
-            <a:ext cx="694944" cy="694944"/>
-          </a:xfrm>
-          <a:prstGeom prst="rect">
-            <a:avLst/>
-          </a:prstGeom>
-        </p:spPr>
-      </p:pic>
-      <p:sp>
-        <p:nvSpPr>
-          <p:cNvPr id="4" name="Text 1"/>
-          <p:cNvSpPr txBox="1"/>
-          <p:nvPr/>
-        </p:nvSpPr>
-        <p:spPr>
-          <a:xfrm>
-            <a:off x="1737360" y="2395728"/>
-            <a:ext cx="8229600" cy="365760"/>
-          </a:xfrm>
-          <a:prstGeom prst="rect">
-            <a:avLst/>
-          </a:prstGeom>
-          <a:noFill/>
-          <a:ln/>
-        </p:spPr>
-        <p:txBody>
-          <a:bodyPr wrap="square" lIns="0" tIns="0" rIns="0" bIns="0" rtlCol="0" anchor="ctr"/>
-          <a:lstStyle/>
-          <a:p>
-            <a:pPr indent="0" marL="0">
-              <a:buNone/>
-            </a:pPr>
-            <a:r>
-              <a:rPr lang="en-US" sz="1200" spc="200" kern="0" dirty="0">
-                <a:solidFill>
-                  <a:srgbClr val="D9AE6C"/>
-                </a:solidFill>
-                <a:latin typeface="Calibri" pitchFamily="34" charset="0"/>
-                <a:ea typeface="Calibri" pitchFamily="34" charset="-122"/>
-                <a:cs typeface="Calibri" pitchFamily="34" charset="-120"/>
-              </a:rPr>
-              <a:t>PARTIE 1</a:t>
-            </a:r>
-            <a:endParaRPr lang="en-US" sz="1200" dirty="0"/>
-          </a:p>
-        </p:txBody>
-      </p:sp>
-      <p:sp>
-        <p:nvSpPr>
-          <p:cNvPr id="5" name="Text 2"/>
-          <p:cNvSpPr txBox="1"/>
-          <p:nvPr/>
-        </p:nvSpPr>
-        <p:spPr>
-          <a:xfrm>
-            <a:off x="1719072" y="2743200"/>
-            <a:ext cx="9601200" cy="1005840"/>
-          </a:xfrm>
-          <a:prstGeom prst="rect">
-            <a:avLst/>
-          </a:prstGeom>
-          <a:noFill/>
-          <a:ln/>
-        </p:spPr>
-        <p:txBody>
-          <a:bodyPr wrap="square" lIns="0" tIns="0" rIns="0" bIns="0" rtlCol="0" anchor="ctr"/>
-          <a:lstStyle/>
-          <a:p>
-            <a:pPr indent="0" marL="0">
-              <a:buNone/>
-            </a:pPr>
-            <a:r>
-              <a:rPr lang="en-US" sz="3800" b="1" dirty="0">
-                <a:solidFill>
-                  <a:srgbClr val="FFFFFF"/>
-                </a:solidFill>
-                <a:latin typeface="Cambria" pitchFamily="34" charset="0"/>
-                <a:ea typeface="Cambria" pitchFamily="34" charset="-122"/>
-                <a:cs typeface="Cambria" pitchFamily="34" charset="-120"/>
-              </a:rPr>
-              <a:t>Identité &amp; organisation</a:t>
-            </a:r>
-            <a:endParaRPr lang="en-US" sz="3800" dirty="0"/>
-          </a:p>
-        </p:txBody>
-      </p:sp>
-      <p:sp>
-        <p:nvSpPr>
-          <p:cNvPr id="6" name="Text 3"/>
-          <p:cNvSpPr txBox="1"/>
-          <p:nvPr/>
-        </p:nvSpPr>
-        <p:spPr>
-          <a:xfrm>
-            <a:off x="457200" y="6510528"/>
-            <a:ext cx="7315200" cy="274320"/>
-          </a:xfrm>
-          <a:prstGeom prst="rect">
-            <a:avLst/>
-          </a:prstGeom>
-          <a:noFill/>
-          <a:ln/>
-        </p:spPr>
-        <p:txBody>
-          <a:bodyPr wrap="square" lIns="0" tIns="0" rIns="0" bIns="0" rtlCol="0" anchor="ctr"/>
-          <a:lstStyle/>
-          <a:p>
-            <a:pPr indent="0" marL="0">
-              <a:buNone/>
-            </a:pPr>
-            <a:r>
-              <a:rPr lang="en-US" sz="900" dirty="0">
-                <a:solidFill>
-                  <a:srgbClr val="7C6552"/>
-                </a:solidFill>
-                <a:latin typeface="Calibri" pitchFamily="34" charset="0"/>
-                <a:ea typeface="Calibri" pitchFamily="34" charset="-122"/>
-                <a:cs typeface="Calibri" pitchFamily="34" charset="-120"/>
-              </a:rPr>
-              <a:t>MadeArchive — Documentation technique</a:t>
-            </a:r>
-            <a:endParaRPr lang="en-US" sz="900" dirty="0"/>
-          </a:p>
-        </p:txBody>
-      </p:sp>
-      <p:sp>
-        <p:nvSpPr>
-          <p:cNvPr id="7" name="Text 4"/>
-          <p:cNvSpPr txBox="1"/>
-          <p:nvPr/>
-        </p:nvSpPr>
-        <p:spPr>
-          <a:xfrm>
-            <a:off x="11338560" y="6510528"/>
-            <a:ext cx="457200" cy="274320"/>
-          </a:xfrm>
-          <a:prstGeom prst="rect">
-            <a:avLst/>
-          </a:prstGeom>
-          <a:noFill/>
-          <a:ln/>
-        </p:spPr>
-        <p:txBody>
-          <a:bodyPr wrap="square" lIns="0" tIns="0" rIns="0" bIns="0" rtlCol="0" anchor="ctr"/>
-          <a:lstStyle/>
-          <a:p>
-            <a:pPr algn="r" indent="0" marL="0">
-              <a:buNone/>
-            </a:pPr>
-            <a:r>
-              <a:rPr lang="en-US" sz="900" dirty="0">
-                <a:solidFill>
-                  <a:srgbClr val="7C6552"/>
-                </a:solidFill>
-                <a:latin typeface="Calibri" pitchFamily="34" charset="0"/>
-                <a:ea typeface="Calibri" pitchFamily="34" charset="-122"/>
-                <a:cs typeface="Calibri" pitchFamily="34" charset="-120"/>
-              </a:rPr>
-              <a:t>5</a:t>
+              <a:t>55</a:t>
             </a:r>
             <a:endParaRPr lang="en-US" sz="900" dirty="0"/>
           </a:p>
@@ -30364,7 +33426,7 @@
         </p:nvSpPr>
         <p:spPr>
           <a:xfrm>
-            <a:off x="548640" y="2546604"/>
+            <a:off x="548640" y="2564892"/>
             <a:ext cx="10881360" cy="1417320"/>
           </a:xfrm>
           <a:prstGeom prst="rect">
@@ -30458,7 +33520,7 @@
         </p:nvSpPr>
         <p:spPr>
           <a:xfrm>
-            <a:off x="548640" y="4219956"/>
+            <a:off x="548640" y="4201668"/>
             <a:ext cx="10881360" cy="1143000"/>
           </a:xfrm>
           <a:prstGeom prst="roundRect">
@@ -30480,7 +33542,7 @@
         </p:nvSpPr>
         <p:spPr>
           <a:xfrm>
-            <a:off x="868680" y="4357116"/>
+            <a:off x="868680" y="4338828"/>
             <a:ext cx="1828800" cy="274320"/>
           </a:xfrm>
           <a:prstGeom prst="rect">
@@ -30519,7 +33581,7 @@
         </p:nvSpPr>
         <p:spPr>
           <a:xfrm>
-            <a:off x="868680" y="4604004"/>
+            <a:off x="868680" y="4585716"/>
             <a:ext cx="10241280" cy="685800"/>
           </a:xfrm>
           <a:prstGeom prst="rect">
@@ -30832,7 +33894,7 @@
         </p:nvSpPr>
         <p:spPr>
           <a:xfrm>
-            <a:off x="548640" y="2546604"/>
+            <a:off x="548640" y="2564892"/>
             <a:ext cx="10881360" cy="1417320"/>
           </a:xfrm>
           <a:prstGeom prst="rect">
@@ -30926,7 +33988,7 @@
         </p:nvSpPr>
         <p:spPr>
           <a:xfrm>
-            <a:off x="548640" y="4219956"/>
+            <a:off x="548640" y="4201668"/>
             <a:ext cx="10881360" cy="1143000"/>
           </a:xfrm>
           <a:prstGeom prst="roundRect">
@@ -30948,7 +34010,7 @@
         </p:nvSpPr>
         <p:spPr>
           <a:xfrm>
-            <a:off x="868680" y="4357116"/>
+            <a:off x="868680" y="4338828"/>
             <a:ext cx="1828800" cy="274320"/>
           </a:xfrm>
           <a:prstGeom prst="rect">
@@ -30987,7 +34049,7 @@
         </p:nvSpPr>
         <p:spPr>
           <a:xfrm>
-            <a:off x="868680" y="4604004"/>
+            <a:off x="868680" y="4585716"/>
             <a:ext cx="10241280" cy="685800"/>
           </a:xfrm>
           <a:prstGeom prst="rect">
@@ -31300,7 +34362,7 @@
         </p:nvSpPr>
         <p:spPr>
           <a:xfrm>
-            <a:off x="548640" y="2546604"/>
+            <a:off x="548640" y="2564892"/>
             <a:ext cx="10881360" cy="1417320"/>
           </a:xfrm>
           <a:prstGeom prst="rect">
@@ -31394,7 +34456,7 @@
         </p:nvSpPr>
         <p:spPr>
           <a:xfrm>
-            <a:off x="548640" y="4219956"/>
+            <a:off x="548640" y="4201668"/>
             <a:ext cx="10881360" cy="1143000"/>
           </a:xfrm>
           <a:prstGeom prst="roundRect">
@@ -31416,7 +34478,7 @@
         </p:nvSpPr>
         <p:spPr>
           <a:xfrm>
-            <a:off x="868680" y="4357116"/>
+            <a:off x="868680" y="4338828"/>
             <a:ext cx="1828800" cy="274320"/>
           </a:xfrm>
           <a:prstGeom prst="rect">
@@ -31455,7 +34517,7 @@
         </p:nvSpPr>
         <p:spPr>
           <a:xfrm>
-            <a:off x="868680" y="4604004"/>
+            <a:off x="868680" y="4585716"/>
             <a:ext cx="10241280" cy="685800"/>
           </a:xfrm>
           <a:prstGeom prst="rect">
@@ -31768,7 +34830,7 @@
         </p:nvSpPr>
         <p:spPr>
           <a:xfrm>
-            <a:off x="548640" y="2958084"/>
+            <a:off x="548640" y="2976372"/>
             <a:ext cx="10881360" cy="868680"/>
           </a:xfrm>
           <a:prstGeom prst="rect">
@@ -31838,7 +34900,7 @@
         </p:nvSpPr>
         <p:spPr>
           <a:xfrm>
-            <a:off x="548640" y="4082796"/>
+            <a:off x="548640" y="4064508"/>
             <a:ext cx="10881360" cy="868680"/>
           </a:xfrm>
           <a:prstGeom prst="roundRect">
@@ -31860,7 +34922,7 @@
         </p:nvSpPr>
         <p:spPr>
           <a:xfrm>
-            <a:off x="868680" y="4219956"/>
+            <a:off x="868680" y="4201668"/>
             <a:ext cx="1828800" cy="274320"/>
           </a:xfrm>
           <a:prstGeom prst="rect">
@@ -31899,7 +34961,7 @@
         </p:nvSpPr>
         <p:spPr>
           <a:xfrm>
-            <a:off x="868680" y="4466844"/>
+            <a:off x="868680" y="4448556"/>
             <a:ext cx="10241280" cy="411480"/>
           </a:xfrm>
           <a:prstGeom prst="rect">
